--- a/Bem-vindos ao PHP!.pptx
+++ b/Bem-vindos ao PHP!.pptx
@@ -1,35 +1,42 @@
 
 <file path=ppt/presentation.xml><?xml version="1.0" encoding="utf-8"?>
-<p:presentation xmlns:a="http://schemas.openxmlformats.org/drawingml/2006/main" xmlns:r="http://schemas.openxmlformats.org/officeDocument/2006/relationships" xmlns:mc="http://schemas.openxmlformats.org/markup-compatibility/2006" xmlns:mv="urn:schemas-microsoft-com:mac:vml" xmlns:p="http://schemas.openxmlformats.org/presentationml/2006/main" xmlns:c="http://schemas.openxmlformats.org/drawingml/2006/chart" xmlns:dgm="http://schemas.openxmlformats.org/drawingml/2006/diagram" xmlns:o="urn:schemas-microsoft-com:office:office" xmlns:v="urn:schemas-microsoft-com:vml" xmlns:pvml="urn:schemas-microsoft-com:office:powerpoint" xmlns:com="http://schemas.openxmlformats.org/drawingml/2006/compatibility" xmlns:p14="http://schemas.microsoft.com/office/powerpoint/2010/main" xmlns:p15="http://schemas.microsoft.com/office/powerpoint/2012/main" xmlns:ahyp="http://schemas.microsoft.com/office/drawing/2018/hyperlinkcolor" autoCompressPictures="0" embedTrueTypeFonts="1" strictFirstAndLastChars="0" saveSubsetFonts="1">
+<p:presentation xmlns:a="http://schemas.openxmlformats.org/drawingml/2006/main" xmlns:r="http://schemas.openxmlformats.org/officeDocument/2006/relationships" xmlns:p="http://schemas.openxmlformats.org/presentationml/2006/main" strictFirstAndLastChars="0" embedTrueTypeFonts="1" saveSubsetFonts="1" autoCompressPictures="0">
   <p:sldMasterIdLst>
-    <p:sldMasterId id="2147483659" r:id="rId4"/>
+    <p:sldMasterId id="2147483659" r:id="rId1"/>
   </p:sldMasterIdLst>
   <p:notesMasterIdLst>
-    <p:notesMasterId r:id="rId5"/>
+    <p:notesMasterId r:id="rId10"/>
   </p:notesMasterIdLst>
   <p:sldIdLst>
-    <p:sldId id="256" r:id="rId6"/>
-    <p:sldId id="257" r:id="rId7"/>
-    <p:sldId id="258" r:id="rId8"/>
-    <p:sldId id="259" r:id="rId9"/>
-    <p:sldId id="260" r:id="rId10"/>
-    <p:sldId id="261" r:id="rId11"/>
-    <p:sldId id="262" r:id="rId12"/>
-    <p:sldId id="263" r:id="rId13"/>
+    <p:sldId id="256" r:id="rId2"/>
+    <p:sldId id="257" r:id="rId3"/>
+    <p:sldId id="258" r:id="rId4"/>
+    <p:sldId id="259" r:id="rId5"/>
+    <p:sldId id="260" r:id="rId6"/>
+    <p:sldId id="261" r:id="rId7"/>
+    <p:sldId id="262" r:id="rId8"/>
+    <p:sldId id="263" r:id="rId9"/>
   </p:sldIdLst>
-  <p:sldSz cy="6858000" cx="12192000"/>
+  <p:sldSz cx="12192000" cy="6858000"/>
   <p:notesSz cx="6858000" cy="9144000"/>
   <p:embeddedFontLst>
     <p:embeddedFont>
-      <p:font typeface="Urbanist"/>
-      <p:regular r:id="rId14"/>
-      <p:bold r:id="rId15"/>
-      <p:italic r:id="rId16"/>
-      <p:boldItalic r:id="rId17"/>
+      <p:font typeface="Urbanist" panose="020B0604020202020204" charset="0"/>
+      <p:regular r:id="rId11"/>
+      <p:bold r:id="rId12"/>
+      <p:italic r:id="rId13"/>
+      <p:boldItalic r:id="rId14"/>
+    </p:embeddedFont>
+    <p:embeddedFont>
+      <p:font typeface="Calibri" panose="020F0502020204030204" pitchFamily="34" charset="0"/>
+      <p:regular r:id="rId15"/>
+      <p:bold r:id="rId16"/>
+      <p:italic r:id="rId17"/>
+      <p:boldItalic r:id="rId18"/>
     </p:embeddedFont>
   </p:embeddedFontLst>
   <p:defaultTextStyle>
-    <a:defPPr lvl="0" marR="0" rtl="0" algn="l">
+    <a:defPPr marR="0" lvl="0" algn="l" rtl="0">
       <a:lnSpc>
         <a:spcPct val="100000"/>
       </a:lnSpc>
@@ -40,7 +47,7 @@
         <a:spcPts val="0"/>
       </a:spcAft>
     </a:defPPr>
-    <a:lvl1pPr lvl="0" marR="0" rtl="0" algn="l">
+    <a:lvl1pPr marR="0" lvl="0" algn="l" rtl="0">
       <a:lnSpc>
         <a:spcPct val="100000"/>
       </a:lnSpc>
@@ -54,7 +61,7 @@
         <a:srgbClr val="000000"/>
       </a:buClr>
       <a:buFont typeface="Arial"/>
-      <a:defRPr b="0" i="0" sz="1400" u="none" cap="none" strike="noStrike">
+      <a:defRPr sz="1400" b="0" i="0" u="none" strike="noStrike" cap="none">
         <a:solidFill>
           <a:srgbClr val="000000"/>
         </a:solidFill>
@@ -64,7 +71,7 @@
         <a:sym typeface="Arial"/>
       </a:defRPr>
     </a:lvl1pPr>
-    <a:lvl2pPr lvl="1" marR="0" rtl="0" algn="l">
+    <a:lvl2pPr marR="0" lvl="1" algn="l" rtl="0">
       <a:lnSpc>
         <a:spcPct val="100000"/>
       </a:lnSpc>
@@ -78,7 +85,7 @@
         <a:srgbClr val="000000"/>
       </a:buClr>
       <a:buFont typeface="Arial"/>
-      <a:defRPr b="0" i="0" sz="1400" u="none" cap="none" strike="noStrike">
+      <a:defRPr sz="1400" b="0" i="0" u="none" strike="noStrike" cap="none">
         <a:solidFill>
           <a:srgbClr val="000000"/>
         </a:solidFill>
@@ -88,7 +95,7 @@
         <a:sym typeface="Arial"/>
       </a:defRPr>
     </a:lvl2pPr>
-    <a:lvl3pPr lvl="2" marR="0" rtl="0" algn="l">
+    <a:lvl3pPr marR="0" lvl="2" algn="l" rtl="0">
       <a:lnSpc>
         <a:spcPct val="100000"/>
       </a:lnSpc>
@@ -102,7 +109,7 @@
         <a:srgbClr val="000000"/>
       </a:buClr>
       <a:buFont typeface="Arial"/>
-      <a:defRPr b="0" i="0" sz="1400" u="none" cap="none" strike="noStrike">
+      <a:defRPr sz="1400" b="0" i="0" u="none" strike="noStrike" cap="none">
         <a:solidFill>
           <a:srgbClr val="000000"/>
         </a:solidFill>
@@ -112,7 +119,7 @@
         <a:sym typeface="Arial"/>
       </a:defRPr>
     </a:lvl3pPr>
-    <a:lvl4pPr lvl="3" marR="0" rtl="0" algn="l">
+    <a:lvl4pPr marR="0" lvl="3" algn="l" rtl="0">
       <a:lnSpc>
         <a:spcPct val="100000"/>
       </a:lnSpc>
@@ -126,7 +133,7 @@
         <a:srgbClr val="000000"/>
       </a:buClr>
       <a:buFont typeface="Arial"/>
-      <a:defRPr b="0" i="0" sz="1400" u="none" cap="none" strike="noStrike">
+      <a:defRPr sz="1400" b="0" i="0" u="none" strike="noStrike" cap="none">
         <a:solidFill>
           <a:srgbClr val="000000"/>
         </a:solidFill>
@@ -136,7 +143,7 @@
         <a:sym typeface="Arial"/>
       </a:defRPr>
     </a:lvl4pPr>
-    <a:lvl5pPr lvl="4" marR="0" rtl="0" algn="l">
+    <a:lvl5pPr marR="0" lvl="4" algn="l" rtl="0">
       <a:lnSpc>
         <a:spcPct val="100000"/>
       </a:lnSpc>
@@ -150,7 +157,7 @@
         <a:srgbClr val="000000"/>
       </a:buClr>
       <a:buFont typeface="Arial"/>
-      <a:defRPr b="0" i="0" sz="1400" u="none" cap="none" strike="noStrike">
+      <a:defRPr sz="1400" b="0" i="0" u="none" strike="noStrike" cap="none">
         <a:solidFill>
           <a:srgbClr val="000000"/>
         </a:solidFill>
@@ -160,7 +167,7 @@
         <a:sym typeface="Arial"/>
       </a:defRPr>
     </a:lvl5pPr>
-    <a:lvl6pPr lvl="5" marR="0" rtl="0" algn="l">
+    <a:lvl6pPr marR="0" lvl="5" algn="l" rtl="0">
       <a:lnSpc>
         <a:spcPct val="100000"/>
       </a:lnSpc>
@@ -174,7 +181,7 @@
         <a:srgbClr val="000000"/>
       </a:buClr>
       <a:buFont typeface="Arial"/>
-      <a:defRPr b="0" i="0" sz="1400" u="none" cap="none" strike="noStrike">
+      <a:defRPr sz="1400" b="0" i="0" u="none" strike="noStrike" cap="none">
         <a:solidFill>
           <a:srgbClr val="000000"/>
         </a:solidFill>
@@ -184,7 +191,7 @@
         <a:sym typeface="Arial"/>
       </a:defRPr>
     </a:lvl6pPr>
-    <a:lvl7pPr lvl="6" marR="0" rtl="0" algn="l">
+    <a:lvl7pPr marR="0" lvl="6" algn="l" rtl="0">
       <a:lnSpc>
         <a:spcPct val="100000"/>
       </a:lnSpc>
@@ -198,7 +205,7 @@
         <a:srgbClr val="000000"/>
       </a:buClr>
       <a:buFont typeface="Arial"/>
-      <a:defRPr b="0" i="0" sz="1400" u="none" cap="none" strike="noStrike">
+      <a:defRPr sz="1400" b="0" i="0" u="none" strike="noStrike" cap="none">
         <a:solidFill>
           <a:srgbClr val="000000"/>
         </a:solidFill>
@@ -208,7 +215,7 @@
         <a:sym typeface="Arial"/>
       </a:defRPr>
     </a:lvl7pPr>
-    <a:lvl8pPr lvl="7" marR="0" rtl="0" algn="l">
+    <a:lvl8pPr marR="0" lvl="7" algn="l" rtl="0">
       <a:lnSpc>
         <a:spcPct val="100000"/>
       </a:lnSpc>
@@ -222,7 +229,7 @@
         <a:srgbClr val="000000"/>
       </a:buClr>
       <a:buFont typeface="Arial"/>
-      <a:defRPr b="0" i="0" sz="1400" u="none" cap="none" strike="noStrike">
+      <a:defRPr sz="1400" b="0" i="0" u="none" strike="noStrike" cap="none">
         <a:solidFill>
           <a:srgbClr val="000000"/>
         </a:solidFill>
@@ -232,7 +239,7 @@
         <a:sym typeface="Arial"/>
       </a:defRPr>
     </a:lvl8pPr>
-    <a:lvl9pPr lvl="8" marR="0" rtl="0" algn="l">
+    <a:lvl9pPr marR="0" lvl="8" algn="l" rtl="0">
       <a:lnSpc>
         <a:spcPct val="100000"/>
       </a:lnSpc>
@@ -246,7 +253,7 @@
         <a:srgbClr val="000000"/>
       </a:buClr>
       <a:buFont typeface="Arial"/>
-      <a:defRPr b="0" i="0" sz="1400" u="none" cap="none" strike="noStrike">
+      <a:defRPr sz="1400" b="0" i="0" u="none" strike="noStrike" cap="none">
         <a:solidFill>
           <a:srgbClr val="000000"/>
         </a:solidFill>
@@ -259,7 +266,7 @@
   </p:defaultTextStyle>
   <p:extLst>
     <p:ext uri="{EFAFB233-063F-42B5-8137-9DF3F51BA10A}">
-      <p15:sldGuideLst>
+      <p15:sldGuideLst xmlns:p15="http://schemas.microsoft.com/office/powerpoint/2012/main">
         <p15:guide id="1" orient="horz" pos="2160">
           <p15:clr>
             <a:srgbClr val="000000"/>
@@ -277,11 +284,16 @@
 </file>
 
 <file path=ppt/notesMasters/notesMaster1.xml><?xml version="1.0" encoding="utf-8"?>
-<p:notesMaster xmlns:a="http://schemas.openxmlformats.org/drawingml/2006/main" xmlns:r="http://schemas.openxmlformats.org/officeDocument/2006/relationships" xmlns:mc="http://schemas.openxmlformats.org/markup-compatibility/2006" xmlns:mv="urn:schemas-microsoft-com:mac:vml" xmlns:p="http://schemas.openxmlformats.org/presentationml/2006/main" xmlns:c="http://schemas.openxmlformats.org/drawingml/2006/chart" xmlns:dgm="http://schemas.openxmlformats.org/drawingml/2006/diagram" xmlns:o="urn:schemas-microsoft-com:office:office" xmlns:v="urn:schemas-microsoft-com:vml" xmlns:pvml="urn:schemas-microsoft-com:office:powerpoint" xmlns:com="http://schemas.openxmlformats.org/drawingml/2006/compatibility" xmlns:p14="http://schemas.microsoft.com/office/powerpoint/2010/main" xmlns:p15="http://schemas.microsoft.com/office/powerpoint/2012/main" xmlns:ahyp="http://schemas.microsoft.com/office/drawing/2018/hyperlinkcolor">
+<p:notesMaster xmlns:a="http://schemas.openxmlformats.org/drawingml/2006/main" xmlns:r="http://schemas.openxmlformats.org/officeDocument/2006/relationships" xmlns:p="http://schemas.openxmlformats.org/presentationml/2006/main">
   <p:cSld>
+    <p:bg>
+      <p:bgRef idx="1001">
+        <a:schemeClr val="bg1"/>
+      </p:bgRef>
+    </p:bg>
     <p:spTree>
       <p:nvGrpSpPr>
-        <p:cNvPr id="2" name="Shape 2"/>
+        <p:cNvPr id="1" name="Shape 2"/>
         <p:cNvGrpSpPr/>
         <p:nvPr/>
       </p:nvGrpSpPr>
@@ -296,9 +308,11 @@
       <p:sp>
         <p:nvSpPr>
           <p:cNvPr id="3" name="Google Shape;3;n"/>
-          <p:cNvSpPr/>
+          <p:cNvSpPr>
+            <a:spLocks noGrp="1" noRot="1" noChangeAspect="1"/>
+          </p:cNvSpPr>
           <p:nvPr>
-            <p:ph idx="2" type="sldImg"/>
+            <p:ph type="sldImg" idx="2"/>
           </p:nvPr>
         </p:nvSpPr>
         <p:spPr>
@@ -307,9 +321,13 @@
             <a:ext cx="4572225" cy="3429000"/>
           </a:xfrm>
           <a:custGeom>
-            <a:rect b="b" l="l" r="r" t="t"/>
+            <a:avLst/>
+            <a:gdLst/>
+            <a:ahLst/>
+            <a:cxnLst/>
+            <a:rect l="l" t="t" r="r" b="b"/>
             <a:pathLst>
-              <a:path extrusionOk="0" h="120000" w="120000">
+              <a:path w="120000" h="120000" extrusionOk="0">
                 <a:moveTo>
                   <a:pt x="0" y="0"/>
                 </a:moveTo>
@@ -327,23 +345,25 @@
             </a:pathLst>
           </a:custGeom>
           <a:noFill/>
-          <a:ln cap="flat" cmpd="sng" w="9525">
+          <a:ln w="9525" cap="flat" cmpd="sng">
             <a:solidFill>
               <a:srgbClr val="000000"/>
             </a:solidFill>
             <a:prstDash val="solid"/>
             <a:round/>
-            <a:headEnd len="sm" w="sm" type="none"/>
-            <a:tailEnd len="sm" w="sm" type="none"/>
+            <a:headEnd type="none" w="sm" len="sm"/>
+            <a:tailEnd type="none" w="sm" len="sm"/>
           </a:ln>
         </p:spPr>
       </p:sp>
       <p:sp>
         <p:nvSpPr>
           <p:cNvPr id="4" name="Google Shape;4;n"/>
-          <p:cNvSpPr txBox="1"/>
+          <p:cNvSpPr txBox="1">
+            <a:spLocks noGrp="1"/>
+          </p:cNvSpPr>
           <p:nvPr>
-            <p:ph idx="1" type="body"/>
+            <p:ph type="body" idx="1"/>
           </p:nvPr>
         </p:nvSpPr>
         <p:spPr>
@@ -360,11 +380,11 @@
           </a:ln>
         </p:spPr>
         <p:txBody>
-          <a:bodyPr anchorCtr="0" anchor="t" bIns="91425" lIns="91425" spcFirstLastPara="1" rIns="91425" wrap="square" tIns="91425">
+          <a:bodyPr spcFirstLastPara="1" wrap="square" lIns="91425" tIns="91425" rIns="91425" bIns="91425" anchor="t" anchorCtr="0">
             <a:noAutofit/>
           </a:bodyPr>
           <a:lstStyle>
-            <a:lvl1pPr indent="-298450" lvl="0" marL="457200">
+            <a:lvl1pPr marL="457200" lvl="0" indent="-298450">
               <a:spcBef>
                 <a:spcPts val="0"/>
               </a:spcBef>
@@ -375,7 +395,7 @@
               <a:buChar char="●"/>
               <a:defRPr sz="1100"/>
             </a:lvl1pPr>
-            <a:lvl2pPr indent="-298450" lvl="1" marL="914400">
+            <a:lvl2pPr marL="914400" lvl="1" indent="-298450">
               <a:spcBef>
                 <a:spcPts val="0"/>
               </a:spcBef>
@@ -386,7 +406,7 @@
               <a:buChar char="○"/>
               <a:defRPr sz="1100"/>
             </a:lvl2pPr>
-            <a:lvl3pPr indent="-298450" lvl="2" marL="1371600">
+            <a:lvl3pPr marL="1371600" lvl="2" indent="-298450">
               <a:spcBef>
                 <a:spcPts val="0"/>
               </a:spcBef>
@@ -397,7 +417,7 @@
               <a:buChar char="■"/>
               <a:defRPr sz="1100"/>
             </a:lvl3pPr>
-            <a:lvl4pPr indent="-298450" lvl="3" marL="1828800">
+            <a:lvl4pPr marL="1828800" lvl="3" indent="-298450">
               <a:spcBef>
                 <a:spcPts val="0"/>
               </a:spcBef>
@@ -408,7 +428,7 @@
               <a:buChar char="●"/>
               <a:defRPr sz="1100"/>
             </a:lvl4pPr>
-            <a:lvl5pPr indent="-298450" lvl="4" marL="2286000">
+            <a:lvl5pPr marL="2286000" lvl="4" indent="-298450">
               <a:spcBef>
                 <a:spcPts val="0"/>
               </a:spcBef>
@@ -419,7 +439,7 @@
               <a:buChar char="○"/>
               <a:defRPr sz="1100"/>
             </a:lvl5pPr>
-            <a:lvl6pPr indent="-298450" lvl="5" marL="2743200">
+            <a:lvl6pPr marL="2743200" lvl="5" indent="-298450">
               <a:spcBef>
                 <a:spcPts val="0"/>
               </a:spcBef>
@@ -430,7 +450,7 @@
               <a:buChar char="■"/>
               <a:defRPr sz="1100"/>
             </a:lvl6pPr>
-            <a:lvl7pPr indent="-298450" lvl="6" marL="3200400">
+            <a:lvl7pPr marL="3200400" lvl="6" indent="-298450">
               <a:spcBef>
                 <a:spcPts val="0"/>
               </a:spcBef>
@@ -441,7 +461,7 @@
               <a:buChar char="●"/>
               <a:defRPr sz="1100"/>
             </a:lvl7pPr>
-            <a:lvl8pPr indent="-298450" lvl="7" marL="3657600">
+            <a:lvl8pPr marL="3657600" lvl="7" indent="-298450">
               <a:spcBef>
                 <a:spcPts val="0"/>
               </a:spcBef>
@@ -452,7 +472,7 @@
               <a:buChar char="○"/>
               <a:defRPr sz="1100"/>
             </a:lvl8pPr>
-            <a:lvl9pPr indent="-298450" lvl="8" marL="4114800">
+            <a:lvl9pPr marL="4114800" lvl="8" indent="-298450">
               <a:spcBef>
                 <a:spcPts val="0"/>
               </a:spcBef>
@@ -464,14 +484,16 @@
               <a:defRPr sz="1100"/>
             </a:lvl9pPr>
           </a:lstStyle>
-          <a:p/>
+          <a:p>
+            <a:endParaRPr/>
+          </a:p>
         </p:txBody>
       </p:sp>
     </p:spTree>
   </p:cSld>
-  <p:clrMap accent1="accent1" accent2="accent2" accent3="accent3" accent4="accent4" accent5="accent5" accent6="accent6" bg1="lt1" bg2="dk2" tx1="dk1" tx2="lt2" folHlink="folHlink" hlink="hlink"/>
+  <p:clrMap bg1="lt1" tx1="dk1" bg2="dk2" tx2="lt2" accent1="accent1" accent2="accent2" accent3="accent3" accent4="accent4" accent5="accent5" accent6="accent6" hlink="hlink" folHlink="folHlink"/>
   <p:notesStyle>
-    <a:defPPr lvl="0" marR="0" rtl="0" algn="l">
+    <a:defPPr marR="0" lvl="0" algn="l" rtl="0">
       <a:lnSpc>
         <a:spcPct val="100000"/>
       </a:lnSpc>
@@ -482,7 +504,7 @@
         <a:spcPts val="0"/>
       </a:spcAft>
     </a:defPPr>
-    <a:lvl1pPr lvl="0" marR="0" rtl="0" algn="l">
+    <a:lvl1pPr marR="0" lvl="0" algn="l" rtl="0">
       <a:lnSpc>
         <a:spcPct val="100000"/>
       </a:lnSpc>
@@ -496,7 +518,7 @@
         <a:srgbClr val="000000"/>
       </a:buClr>
       <a:buFont typeface="Arial"/>
-      <a:defRPr b="0" i="0" sz="1400" u="none" cap="none" strike="noStrike">
+      <a:defRPr sz="1400" b="0" i="0" u="none" strike="noStrike" cap="none">
         <a:solidFill>
           <a:srgbClr val="000000"/>
         </a:solidFill>
@@ -506,7 +528,7 @@
         <a:sym typeface="Arial"/>
       </a:defRPr>
     </a:lvl1pPr>
-    <a:lvl2pPr lvl="1" marR="0" rtl="0" algn="l">
+    <a:lvl2pPr marR="0" lvl="1" algn="l" rtl="0">
       <a:lnSpc>
         <a:spcPct val="100000"/>
       </a:lnSpc>
@@ -520,7 +542,7 @@
         <a:srgbClr val="000000"/>
       </a:buClr>
       <a:buFont typeface="Arial"/>
-      <a:defRPr b="0" i="0" sz="1400" u="none" cap="none" strike="noStrike">
+      <a:defRPr sz="1400" b="0" i="0" u="none" strike="noStrike" cap="none">
         <a:solidFill>
           <a:srgbClr val="000000"/>
         </a:solidFill>
@@ -530,7 +552,7 @@
         <a:sym typeface="Arial"/>
       </a:defRPr>
     </a:lvl2pPr>
-    <a:lvl3pPr lvl="2" marR="0" rtl="0" algn="l">
+    <a:lvl3pPr marR="0" lvl="2" algn="l" rtl="0">
       <a:lnSpc>
         <a:spcPct val="100000"/>
       </a:lnSpc>
@@ -544,7 +566,7 @@
         <a:srgbClr val="000000"/>
       </a:buClr>
       <a:buFont typeface="Arial"/>
-      <a:defRPr b="0" i="0" sz="1400" u="none" cap="none" strike="noStrike">
+      <a:defRPr sz="1400" b="0" i="0" u="none" strike="noStrike" cap="none">
         <a:solidFill>
           <a:srgbClr val="000000"/>
         </a:solidFill>
@@ -554,7 +576,7 @@
         <a:sym typeface="Arial"/>
       </a:defRPr>
     </a:lvl3pPr>
-    <a:lvl4pPr lvl="3" marR="0" rtl="0" algn="l">
+    <a:lvl4pPr marR="0" lvl="3" algn="l" rtl="0">
       <a:lnSpc>
         <a:spcPct val="100000"/>
       </a:lnSpc>
@@ -568,7 +590,7 @@
         <a:srgbClr val="000000"/>
       </a:buClr>
       <a:buFont typeface="Arial"/>
-      <a:defRPr b="0" i="0" sz="1400" u="none" cap="none" strike="noStrike">
+      <a:defRPr sz="1400" b="0" i="0" u="none" strike="noStrike" cap="none">
         <a:solidFill>
           <a:srgbClr val="000000"/>
         </a:solidFill>
@@ -578,7 +600,7 @@
         <a:sym typeface="Arial"/>
       </a:defRPr>
     </a:lvl4pPr>
-    <a:lvl5pPr lvl="4" marR="0" rtl="0" algn="l">
+    <a:lvl5pPr marR="0" lvl="4" algn="l" rtl="0">
       <a:lnSpc>
         <a:spcPct val="100000"/>
       </a:lnSpc>
@@ -592,7 +614,7 @@
         <a:srgbClr val="000000"/>
       </a:buClr>
       <a:buFont typeface="Arial"/>
-      <a:defRPr b="0" i="0" sz="1400" u="none" cap="none" strike="noStrike">
+      <a:defRPr sz="1400" b="0" i="0" u="none" strike="noStrike" cap="none">
         <a:solidFill>
           <a:srgbClr val="000000"/>
         </a:solidFill>
@@ -602,7 +624,7 @@
         <a:sym typeface="Arial"/>
       </a:defRPr>
     </a:lvl5pPr>
-    <a:lvl6pPr lvl="5" marR="0" rtl="0" algn="l">
+    <a:lvl6pPr marR="0" lvl="5" algn="l" rtl="0">
       <a:lnSpc>
         <a:spcPct val="100000"/>
       </a:lnSpc>
@@ -616,7 +638,7 @@
         <a:srgbClr val="000000"/>
       </a:buClr>
       <a:buFont typeface="Arial"/>
-      <a:defRPr b="0" i="0" sz="1400" u="none" cap="none" strike="noStrike">
+      <a:defRPr sz="1400" b="0" i="0" u="none" strike="noStrike" cap="none">
         <a:solidFill>
           <a:srgbClr val="000000"/>
         </a:solidFill>
@@ -626,7 +648,7 @@
         <a:sym typeface="Arial"/>
       </a:defRPr>
     </a:lvl6pPr>
-    <a:lvl7pPr lvl="6" marR="0" rtl="0" algn="l">
+    <a:lvl7pPr marR="0" lvl="6" algn="l" rtl="0">
       <a:lnSpc>
         <a:spcPct val="100000"/>
       </a:lnSpc>
@@ -640,7 +662,7 @@
         <a:srgbClr val="000000"/>
       </a:buClr>
       <a:buFont typeface="Arial"/>
-      <a:defRPr b="0" i="0" sz="1400" u="none" cap="none" strike="noStrike">
+      <a:defRPr sz="1400" b="0" i="0" u="none" strike="noStrike" cap="none">
         <a:solidFill>
           <a:srgbClr val="000000"/>
         </a:solidFill>
@@ -650,7 +672,7 @@
         <a:sym typeface="Arial"/>
       </a:defRPr>
     </a:lvl7pPr>
-    <a:lvl8pPr lvl="7" marR="0" rtl="0" algn="l">
+    <a:lvl8pPr marR="0" lvl="7" algn="l" rtl="0">
       <a:lnSpc>
         <a:spcPct val="100000"/>
       </a:lnSpc>
@@ -664,7 +686,7 @@
         <a:srgbClr val="000000"/>
       </a:buClr>
       <a:buFont typeface="Arial"/>
-      <a:defRPr b="0" i="0" sz="1400" u="none" cap="none" strike="noStrike">
+      <a:defRPr sz="1400" b="0" i="0" u="none" strike="noStrike" cap="none">
         <a:solidFill>
           <a:srgbClr val="000000"/>
         </a:solidFill>
@@ -674,7 +696,7 @@
         <a:sym typeface="Arial"/>
       </a:defRPr>
     </a:lvl8pPr>
-    <a:lvl9pPr lvl="8" marR="0" rtl="0" algn="l">
+    <a:lvl9pPr marR="0" lvl="8" algn="l" rtl="0">
       <a:lnSpc>
         <a:spcPct val="100000"/>
       </a:lnSpc>
@@ -688,7 +710,7 @@
         <a:srgbClr val="000000"/>
       </a:buClr>
       <a:buFont typeface="Arial"/>
-      <a:defRPr b="0" i="0" sz="1400" u="none" cap="none" strike="noStrike">
+      <a:defRPr sz="1400" b="0" i="0" u="none" strike="noStrike" cap="none">
         <a:solidFill>
           <a:srgbClr val="000000"/>
         </a:solidFill>
@@ -703,11 +725,11 @@
 </file>
 
 <file path=ppt/notesSlides/notesSlide1.xml><?xml version="1.0" encoding="utf-8"?>
-<p:notes xmlns:a="http://schemas.openxmlformats.org/drawingml/2006/main" xmlns:r="http://schemas.openxmlformats.org/officeDocument/2006/relationships" xmlns:mc="http://schemas.openxmlformats.org/markup-compatibility/2006" xmlns:mv="urn:schemas-microsoft-com:mac:vml" xmlns:p="http://schemas.openxmlformats.org/presentationml/2006/main" xmlns:c="http://schemas.openxmlformats.org/drawingml/2006/chart" xmlns:dgm="http://schemas.openxmlformats.org/drawingml/2006/diagram" xmlns:o="urn:schemas-microsoft-com:office:office" xmlns:v="urn:schemas-microsoft-com:vml" xmlns:pvml="urn:schemas-microsoft-com:office:powerpoint" xmlns:com="http://schemas.openxmlformats.org/drawingml/2006/compatibility" xmlns:p14="http://schemas.microsoft.com/office/powerpoint/2010/main" xmlns:p15="http://schemas.microsoft.com/office/powerpoint/2012/main" xmlns:ahyp="http://schemas.microsoft.com/office/drawing/2018/hyperlinkcolor" showMasterPhAnim="0" showMasterSp="0">
+<p:notes xmlns:a="http://schemas.openxmlformats.org/drawingml/2006/main" xmlns:r="http://schemas.openxmlformats.org/officeDocument/2006/relationships" xmlns:p="http://schemas.openxmlformats.org/presentationml/2006/main" showMasterSp="0" showMasterPhAnim="0">
   <p:cSld>
     <p:spTree>
       <p:nvGrpSpPr>
-        <p:cNvPr id="80" name="Shape 80"/>
+        <p:cNvPr id="1" name="Shape 80"/>
         <p:cNvGrpSpPr/>
         <p:nvPr/>
       </p:nvGrpSpPr>
@@ -722,9 +744,11 @@
       <p:sp>
         <p:nvSpPr>
           <p:cNvPr id="81" name="Google Shape;81;p1:notes"/>
-          <p:cNvSpPr txBox="1"/>
+          <p:cNvSpPr txBox="1">
+            <a:spLocks noGrp="1"/>
+          </p:cNvSpPr>
           <p:nvPr>
-            <p:ph idx="1" type="body"/>
+            <p:ph type="body" idx="1"/>
           </p:nvPr>
         </p:nvSpPr>
         <p:spPr>
@@ -737,12 +761,12 @@
           </a:prstGeom>
         </p:spPr>
         <p:txBody>
-          <a:bodyPr anchorCtr="0" anchor="t" bIns="91425" lIns="91425" spcFirstLastPara="1" rIns="91425" wrap="square" tIns="91425">
+          <a:bodyPr spcFirstLastPara="1" wrap="square" lIns="91425" tIns="91425" rIns="91425" bIns="91425" anchor="t" anchorCtr="0">
             <a:noAutofit/>
           </a:bodyPr>
           <a:lstStyle/>
           <a:p>
-            <a:pPr indent="0" lvl="0" marL="0" rtl="0" algn="l">
+            <a:pPr marL="0" lvl="0" indent="0" algn="l" rtl="0">
               <a:spcBef>
                 <a:spcPts val="0"/>
               </a:spcBef>
@@ -751,9 +775,6 @@
               </a:spcAft>
               <a:buNone/>
             </a:pPr>
-            <a:r>
-              <a:t/>
-            </a:r>
             <a:endParaRPr/>
           </a:p>
         </p:txBody>
@@ -761,20 +782,26 @@
       <p:sp>
         <p:nvSpPr>
           <p:cNvPr id="82" name="Google Shape;82;p1:notes"/>
-          <p:cNvSpPr/>
+          <p:cNvSpPr>
+            <a:spLocks noGrp="1" noRot="1" noChangeAspect="1"/>
+          </p:cNvSpPr>
           <p:nvPr>
-            <p:ph idx="2" type="sldImg"/>
+            <p:ph type="sldImg" idx="2"/>
           </p:nvPr>
         </p:nvSpPr>
         <p:spPr>
           <a:xfrm>
-            <a:off x="1143225" y="685800"/>
-            <a:ext cx="4572225" cy="3429000"/>
+            <a:off x="381000" y="685800"/>
+            <a:ext cx="6096000" cy="3429000"/>
           </a:xfrm>
           <a:custGeom>
-            <a:rect b="b" l="l" r="r" t="t"/>
+            <a:avLst/>
+            <a:gdLst/>
+            <a:ahLst/>
+            <a:cxnLst/>
+            <a:rect l="l" t="t" r="r" b="b"/>
             <a:pathLst>
-              <a:path extrusionOk="0" h="120000" w="120000">
+              <a:path w="120000" h="120000" extrusionOk="0">
                 <a:moveTo>
                   <a:pt x="0" y="0"/>
                 </a:moveTo>
@@ -802,11 +829,11 @@
 </file>
 
 <file path=ppt/notesSlides/notesSlide2.xml><?xml version="1.0" encoding="utf-8"?>
-<p:notes xmlns:a="http://schemas.openxmlformats.org/drawingml/2006/main" xmlns:r="http://schemas.openxmlformats.org/officeDocument/2006/relationships" xmlns:mc="http://schemas.openxmlformats.org/markup-compatibility/2006" xmlns:mv="urn:schemas-microsoft-com:mac:vml" xmlns:p="http://schemas.openxmlformats.org/presentationml/2006/main" xmlns:c="http://schemas.openxmlformats.org/drawingml/2006/chart" xmlns:dgm="http://schemas.openxmlformats.org/drawingml/2006/diagram" xmlns:o="urn:schemas-microsoft-com:office:office" xmlns:v="urn:schemas-microsoft-com:vml" xmlns:pvml="urn:schemas-microsoft-com:office:powerpoint" xmlns:com="http://schemas.openxmlformats.org/drawingml/2006/compatibility" xmlns:p14="http://schemas.microsoft.com/office/powerpoint/2010/main" xmlns:p15="http://schemas.microsoft.com/office/powerpoint/2012/main" xmlns:ahyp="http://schemas.microsoft.com/office/drawing/2018/hyperlinkcolor" showMasterPhAnim="0" showMasterSp="0">
+<p:notes xmlns:a="http://schemas.openxmlformats.org/drawingml/2006/main" xmlns:r="http://schemas.openxmlformats.org/officeDocument/2006/relationships" xmlns:p="http://schemas.openxmlformats.org/presentationml/2006/main" showMasterSp="0" showMasterPhAnim="0">
   <p:cSld>
     <p:spTree>
       <p:nvGrpSpPr>
-        <p:cNvPr id="90" name="Shape 90"/>
+        <p:cNvPr id="1" name="Shape 90"/>
         <p:cNvGrpSpPr/>
         <p:nvPr/>
       </p:nvGrpSpPr>
@@ -821,9 +848,11 @@
       <p:sp>
         <p:nvSpPr>
           <p:cNvPr id="91" name="Google Shape;91;p2:notes"/>
-          <p:cNvSpPr txBox="1"/>
+          <p:cNvSpPr txBox="1">
+            <a:spLocks noGrp="1"/>
+          </p:cNvSpPr>
           <p:nvPr>
-            <p:ph idx="1" type="body"/>
+            <p:ph type="body" idx="1"/>
           </p:nvPr>
         </p:nvSpPr>
         <p:spPr>
@@ -836,12 +865,12 @@
           </a:prstGeom>
         </p:spPr>
         <p:txBody>
-          <a:bodyPr anchorCtr="0" anchor="t" bIns="91425" lIns="91425" spcFirstLastPara="1" rIns="91425" wrap="square" tIns="91425">
+          <a:bodyPr spcFirstLastPara="1" wrap="square" lIns="91425" tIns="91425" rIns="91425" bIns="91425" anchor="t" anchorCtr="0">
             <a:noAutofit/>
           </a:bodyPr>
           <a:lstStyle/>
           <a:p>
-            <a:pPr indent="0" lvl="0" marL="0" rtl="0" algn="l">
+            <a:pPr marL="0" lvl="0" indent="0" algn="l" rtl="0">
               <a:spcBef>
                 <a:spcPts val="0"/>
               </a:spcBef>
@@ -850,9 +879,6 @@
               </a:spcAft>
               <a:buNone/>
             </a:pPr>
-            <a:r>
-              <a:t/>
-            </a:r>
             <a:endParaRPr/>
           </a:p>
         </p:txBody>
@@ -860,20 +886,26 @@
       <p:sp>
         <p:nvSpPr>
           <p:cNvPr id="92" name="Google Shape;92;p2:notes"/>
-          <p:cNvSpPr/>
+          <p:cNvSpPr>
+            <a:spLocks noGrp="1" noRot="1" noChangeAspect="1"/>
+          </p:cNvSpPr>
           <p:nvPr>
-            <p:ph idx="2" type="sldImg"/>
+            <p:ph type="sldImg" idx="2"/>
           </p:nvPr>
         </p:nvSpPr>
         <p:spPr>
           <a:xfrm>
-            <a:off x="1143225" y="685800"/>
-            <a:ext cx="4572225" cy="3429000"/>
+            <a:off x="381000" y="685800"/>
+            <a:ext cx="6096000" cy="3429000"/>
           </a:xfrm>
           <a:custGeom>
-            <a:rect b="b" l="l" r="r" t="t"/>
+            <a:avLst/>
+            <a:gdLst/>
+            <a:ahLst/>
+            <a:cxnLst/>
+            <a:rect l="l" t="t" r="r" b="b"/>
             <a:pathLst>
-              <a:path extrusionOk="0" h="120000" w="120000">
+              <a:path w="120000" h="120000" extrusionOk="0">
                 <a:moveTo>
                   <a:pt x="0" y="0"/>
                 </a:moveTo>
@@ -901,11 +933,11 @@
 </file>
 
 <file path=ppt/notesSlides/notesSlide3.xml><?xml version="1.0" encoding="utf-8"?>
-<p:notes xmlns:a="http://schemas.openxmlformats.org/drawingml/2006/main" xmlns:r="http://schemas.openxmlformats.org/officeDocument/2006/relationships" xmlns:mc="http://schemas.openxmlformats.org/markup-compatibility/2006" xmlns:mv="urn:schemas-microsoft-com:mac:vml" xmlns:p="http://schemas.openxmlformats.org/presentationml/2006/main" xmlns:c="http://schemas.openxmlformats.org/drawingml/2006/chart" xmlns:dgm="http://schemas.openxmlformats.org/drawingml/2006/diagram" xmlns:o="urn:schemas-microsoft-com:office:office" xmlns:v="urn:schemas-microsoft-com:vml" xmlns:pvml="urn:schemas-microsoft-com:office:powerpoint" xmlns:com="http://schemas.openxmlformats.org/drawingml/2006/compatibility" xmlns:p14="http://schemas.microsoft.com/office/powerpoint/2010/main" xmlns:p15="http://schemas.microsoft.com/office/powerpoint/2012/main" xmlns:ahyp="http://schemas.microsoft.com/office/drawing/2018/hyperlinkcolor" showMasterPhAnim="0" showMasterSp="0">
+<p:notes xmlns:a="http://schemas.openxmlformats.org/drawingml/2006/main" xmlns:r="http://schemas.openxmlformats.org/officeDocument/2006/relationships" xmlns:p="http://schemas.openxmlformats.org/presentationml/2006/main" showMasterSp="0" showMasterPhAnim="0">
   <p:cSld>
     <p:spTree>
       <p:nvGrpSpPr>
-        <p:cNvPr id="110" name="Shape 110"/>
+        <p:cNvPr id="1" name="Shape 110"/>
         <p:cNvGrpSpPr/>
         <p:nvPr/>
       </p:nvGrpSpPr>
@@ -920,9 +952,11 @@
       <p:sp>
         <p:nvSpPr>
           <p:cNvPr id="111" name="Google Shape;111;g395574b5770_0_4:notes"/>
-          <p:cNvSpPr txBox="1"/>
+          <p:cNvSpPr txBox="1">
+            <a:spLocks noGrp="1"/>
+          </p:cNvSpPr>
           <p:nvPr>
-            <p:ph idx="1" type="body"/>
+            <p:ph type="body" idx="1"/>
           </p:nvPr>
         </p:nvSpPr>
         <p:spPr>
@@ -935,12 +969,12 @@
           </a:prstGeom>
         </p:spPr>
         <p:txBody>
-          <a:bodyPr anchorCtr="0" anchor="t" bIns="91425" lIns="91425" spcFirstLastPara="1" rIns="91425" wrap="square" tIns="91425">
+          <a:bodyPr spcFirstLastPara="1" wrap="square" lIns="91425" tIns="91425" rIns="91425" bIns="91425" anchor="t" anchorCtr="0">
             <a:noAutofit/>
           </a:bodyPr>
           <a:lstStyle/>
           <a:p>
-            <a:pPr indent="0" lvl="0" marL="0" rtl="0" algn="l">
+            <a:pPr marL="0" lvl="0" indent="0" algn="l" rtl="0">
               <a:spcBef>
                 <a:spcPts val="0"/>
               </a:spcBef>
@@ -949,9 +983,6 @@
               </a:spcAft>
               <a:buNone/>
             </a:pPr>
-            <a:r>
-              <a:t/>
-            </a:r>
             <a:endParaRPr/>
           </a:p>
         </p:txBody>
@@ -959,20 +990,26 @@
       <p:sp>
         <p:nvSpPr>
           <p:cNvPr id="112" name="Google Shape;112;g395574b5770_0_4:notes"/>
-          <p:cNvSpPr/>
+          <p:cNvSpPr>
+            <a:spLocks noGrp="1" noRot="1" noChangeAspect="1"/>
+          </p:cNvSpPr>
           <p:nvPr>
-            <p:ph idx="2" type="sldImg"/>
+            <p:ph type="sldImg" idx="2"/>
           </p:nvPr>
         </p:nvSpPr>
         <p:spPr>
           <a:xfrm>
-            <a:off x="1143225" y="685800"/>
-            <a:ext cx="4572300" cy="3429000"/>
+            <a:off x="381000" y="685800"/>
+            <a:ext cx="6096000" cy="3429000"/>
           </a:xfrm>
           <a:custGeom>
-            <a:rect b="b" l="l" r="r" t="t"/>
+            <a:avLst/>
+            <a:gdLst/>
+            <a:ahLst/>
+            <a:cxnLst/>
+            <a:rect l="l" t="t" r="r" b="b"/>
             <a:pathLst>
-              <a:path extrusionOk="0" h="120000" w="120000">
+              <a:path w="120000" h="120000" extrusionOk="0">
                 <a:moveTo>
                   <a:pt x="0" y="0"/>
                 </a:moveTo>
@@ -1000,11 +1037,11 @@
 </file>
 
 <file path=ppt/notesSlides/notesSlide4.xml><?xml version="1.0" encoding="utf-8"?>
-<p:notes xmlns:a="http://schemas.openxmlformats.org/drawingml/2006/main" xmlns:r="http://schemas.openxmlformats.org/officeDocument/2006/relationships" xmlns:mc="http://schemas.openxmlformats.org/markup-compatibility/2006" xmlns:mv="urn:schemas-microsoft-com:mac:vml" xmlns:p="http://schemas.openxmlformats.org/presentationml/2006/main" xmlns:c="http://schemas.openxmlformats.org/drawingml/2006/chart" xmlns:dgm="http://schemas.openxmlformats.org/drawingml/2006/diagram" xmlns:o="urn:schemas-microsoft-com:office:office" xmlns:v="urn:schemas-microsoft-com:vml" xmlns:pvml="urn:schemas-microsoft-com:office:powerpoint" xmlns:com="http://schemas.openxmlformats.org/drawingml/2006/compatibility" xmlns:p14="http://schemas.microsoft.com/office/powerpoint/2010/main" xmlns:p15="http://schemas.microsoft.com/office/powerpoint/2012/main" xmlns:ahyp="http://schemas.microsoft.com/office/drawing/2018/hyperlinkcolor" showMasterPhAnim="0" showMasterSp="0">
+<p:notes xmlns:a="http://schemas.openxmlformats.org/drawingml/2006/main" xmlns:r="http://schemas.openxmlformats.org/officeDocument/2006/relationships" xmlns:p="http://schemas.openxmlformats.org/presentationml/2006/main" showMasterSp="0" showMasterPhAnim="0">
   <p:cSld>
     <p:spTree>
       <p:nvGrpSpPr>
-        <p:cNvPr id="127" name="Shape 127"/>
+        <p:cNvPr id="1" name="Shape 127"/>
         <p:cNvGrpSpPr/>
         <p:nvPr/>
       </p:nvGrpSpPr>
@@ -1019,9 +1056,11 @@
       <p:sp>
         <p:nvSpPr>
           <p:cNvPr id="128" name="Google Shape;128;p3:notes"/>
-          <p:cNvSpPr txBox="1"/>
+          <p:cNvSpPr txBox="1">
+            <a:spLocks noGrp="1"/>
+          </p:cNvSpPr>
           <p:nvPr>
-            <p:ph idx="1" type="body"/>
+            <p:ph type="body" idx="1"/>
           </p:nvPr>
         </p:nvSpPr>
         <p:spPr>
@@ -1034,12 +1073,12 @@
           </a:prstGeom>
         </p:spPr>
         <p:txBody>
-          <a:bodyPr anchorCtr="0" anchor="t" bIns="91425" lIns="91425" spcFirstLastPara="1" rIns="91425" wrap="square" tIns="91425">
+          <a:bodyPr spcFirstLastPara="1" wrap="square" lIns="91425" tIns="91425" rIns="91425" bIns="91425" anchor="t" anchorCtr="0">
             <a:noAutofit/>
           </a:bodyPr>
           <a:lstStyle/>
           <a:p>
-            <a:pPr indent="0" lvl="0" marL="0" rtl="0" algn="l">
+            <a:pPr marL="0" lvl="0" indent="0" algn="l" rtl="0">
               <a:spcBef>
                 <a:spcPts val="0"/>
               </a:spcBef>
@@ -1048,9 +1087,6 @@
               </a:spcAft>
               <a:buNone/>
             </a:pPr>
-            <a:r>
-              <a:t/>
-            </a:r>
             <a:endParaRPr/>
           </a:p>
         </p:txBody>
@@ -1058,20 +1094,26 @@
       <p:sp>
         <p:nvSpPr>
           <p:cNvPr id="129" name="Google Shape;129;p3:notes"/>
-          <p:cNvSpPr/>
+          <p:cNvSpPr>
+            <a:spLocks noGrp="1" noRot="1" noChangeAspect="1"/>
+          </p:cNvSpPr>
           <p:nvPr>
-            <p:ph idx="2" type="sldImg"/>
+            <p:ph type="sldImg" idx="2"/>
           </p:nvPr>
         </p:nvSpPr>
         <p:spPr>
           <a:xfrm>
-            <a:off x="1143225" y="685800"/>
-            <a:ext cx="4572225" cy="3429000"/>
+            <a:off x="381000" y="685800"/>
+            <a:ext cx="6096000" cy="3429000"/>
           </a:xfrm>
           <a:custGeom>
-            <a:rect b="b" l="l" r="r" t="t"/>
+            <a:avLst/>
+            <a:gdLst/>
+            <a:ahLst/>
+            <a:cxnLst/>
+            <a:rect l="l" t="t" r="r" b="b"/>
             <a:pathLst>
-              <a:path extrusionOk="0" h="120000" w="120000">
+              <a:path w="120000" h="120000" extrusionOk="0">
                 <a:moveTo>
                   <a:pt x="0" y="0"/>
                 </a:moveTo>
@@ -1099,11 +1141,11 @@
 </file>
 
 <file path=ppt/notesSlides/notesSlide5.xml><?xml version="1.0" encoding="utf-8"?>
-<p:notes xmlns:a="http://schemas.openxmlformats.org/drawingml/2006/main" xmlns:r="http://schemas.openxmlformats.org/officeDocument/2006/relationships" xmlns:mc="http://schemas.openxmlformats.org/markup-compatibility/2006" xmlns:mv="urn:schemas-microsoft-com:mac:vml" xmlns:p="http://schemas.openxmlformats.org/presentationml/2006/main" xmlns:c="http://schemas.openxmlformats.org/drawingml/2006/chart" xmlns:dgm="http://schemas.openxmlformats.org/drawingml/2006/diagram" xmlns:o="urn:schemas-microsoft-com:office:office" xmlns:v="urn:schemas-microsoft-com:vml" xmlns:pvml="urn:schemas-microsoft-com:office:powerpoint" xmlns:com="http://schemas.openxmlformats.org/drawingml/2006/compatibility" xmlns:p14="http://schemas.microsoft.com/office/powerpoint/2010/main" xmlns:p15="http://schemas.microsoft.com/office/powerpoint/2012/main" xmlns:ahyp="http://schemas.microsoft.com/office/drawing/2018/hyperlinkcolor" showMasterPhAnim="0" showMasterSp="0">
+<p:notes xmlns:a="http://schemas.openxmlformats.org/drawingml/2006/main" xmlns:r="http://schemas.openxmlformats.org/officeDocument/2006/relationships" xmlns:p="http://schemas.openxmlformats.org/presentationml/2006/main" showMasterSp="0" showMasterPhAnim="0">
   <p:cSld>
     <p:spTree>
       <p:nvGrpSpPr>
-        <p:cNvPr id="142" name="Shape 142"/>
+        <p:cNvPr id="1" name="Shape 142"/>
         <p:cNvGrpSpPr/>
         <p:nvPr/>
       </p:nvGrpSpPr>
@@ -1118,9 +1160,11 @@
       <p:sp>
         <p:nvSpPr>
           <p:cNvPr id="143" name="Google Shape;143;p4:notes"/>
-          <p:cNvSpPr txBox="1"/>
+          <p:cNvSpPr txBox="1">
+            <a:spLocks noGrp="1"/>
+          </p:cNvSpPr>
           <p:nvPr>
-            <p:ph idx="1" type="body"/>
+            <p:ph type="body" idx="1"/>
           </p:nvPr>
         </p:nvSpPr>
         <p:spPr>
@@ -1133,12 +1177,12 @@
           </a:prstGeom>
         </p:spPr>
         <p:txBody>
-          <a:bodyPr anchorCtr="0" anchor="t" bIns="91425" lIns="91425" spcFirstLastPara="1" rIns="91425" wrap="square" tIns="91425">
+          <a:bodyPr spcFirstLastPara="1" wrap="square" lIns="91425" tIns="91425" rIns="91425" bIns="91425" anchor="t" anchorCtr="0">
             <a:noAutofit/>
           </a:bodyPr>
           <a:lstStyle/>
           <a:p>
-            <a:pPr indent="0" lvl="0" marL="0" rtl="0" algn="l">
+            <a:pPr marL="0" lvl="0" indent="0" algn="l" rtl="0">
               <a:spcBef>
                 <a:spcPts val="0"/>
               </a:spcBef>
@@ -1147,9 +1191,6 @@
               </a:spcAft>
               <a:buNone/>
             </a:pPr>
-            <a:r>
-              <a:t/>
-            </a:r>
             <a:endParaRPr/>
           </a:p>
         </p:txBody>
@@ -1157,20 +1198,26 @@
       <p:sp>
         <p:nvSpPr>
           <p:cNvPr id="144" name="Google Shape;144;p4:notes"/>
-          <p:cNvSpPr/>
+          <p:cNvSpPr>
+            <a:spLocks noGrp="1" noRot="1" noChangeAspect="1"/>
+          </p:cNvSpPr>
           <p:nvPr>
-            <p:ph idx="2" type="sldImg"/>
+            <p:ph type="sldImg" idx="2"/>
           </p:nvPr>
         </p:nvSpPr>
         <p:spPr>
           <a:xfrm>
-            <a:off x="1143225" y="685800"/>
-            <a:ext cx="4572225" cy="3429000"/>
+            <a:off x="381000" y="685800"/>
+            <a:ext cx="6096000" cy="3429000"/>
           </a:xfrm>
           <a:custGeom>
-            <a:rect b="b" l="l" r="r" t="t"/>
+            <a:avLst/>
+            <a:gdLst/>
+            <a:ahLst/>
+            <a:cxnLst/>
+            <a:rect l="l" t="t" r="r" b="b"/>
             <a:pathLst>
-              <a:path extrusionOk="0" h="120000" w="120000">
+              <a:path w="120000" h="120000" extrusionOk="0">
                 <a:moveTo>
                   <a:pt x="0" y="0"/>
                 </a:moveTo>
@@ -1198,11 +1245,11 @@
 </file>
 
 <file path=ppt/notesSlides/notesSlide6.xml><?xml version="1.0" encoding="utf-8"?>
-<p:notes xmlns:a="http://schemas.openxmlformats.org/drawingml/2006/main" xmlns:r="http://schemas.openxmlformats.org/officeDocument/2006/relationships" xmlns:mc="http://schemas.openxmlformats.org/markup-compatibility/2006" xmlns:mv="urn:schemas-microsoft-com:mac:vml" xmlns:p="http://schemas.openxmlformats.org/presentationml/2006/main" xmlns:c="http://schemas.openxmlformats.org/drawingml/2006/chart" xmlns:dgm="http://schemas.openxmlformats.org/drawingml/2006/diagram" xmlns:o="urn:schemas-microsoft-com:office:office" xmlns:v="urn:schemas-microsoft-com:vml" xmlns:pvml="urn:schemas-microsoft-com:office:powerpoint" xmlns:com="http://schemas.openxmlformats.org/drawingml/2006/compatibility" xmlns:p14="http://schemas.microsoft.com/office/powerpoint/2010/main" xmlns:p15="http://schemas.microsoft.com/office/powerpoint/2012/main" xmlns:ahyp="http://schemas.microsoft.com/office/drawing/2018/hyperlinkcolor" showMasterPhAnim="0" showMasterSp="0">
+<p:notes xmlns:a="http://schemas.openxmlformats.org/drawingml/2006/main" xmlns:r="http://schemas.openxmlformats.org/officeDocument/2006/relationships" xmlns:p="http://schemas.openxmlformats.org/presentationml/2006/main" showMasterSp="0" showMasterPhAnim="0">
   <p:cSld>
     <p:spTree>
       <p:nvGrpSpPr>
-        <p:cNvPr id="153" name="Shape 153"/>
+        <p:cNvPr id="1" name="Shape 153"/>
         <p:cNvGrpSpPr/>
         <p:nvPr/>
       </p:nvGrpSpPr>
@@ -1217,9 +1264,11 @@
       <p:sp>
         <p:nvSpPr>
           <p:cNvPr id="154" name="Google Shape;154;p5:notes"/>
-          <p:cNvSpPr txBox="1"/>
+          <p:cNvSpPr txBox="1">
+            <a:spLocks noGrp="1"/>
+          </p:cNvSpPr>
           <p:nvPr>
-            <p:ph idx="1" type="body"/>
+            <p:ph type="body" idx="1"/>
           </p:nvPr>
         </p:nvSpPr>
         <p:spPr>
@@ -1232,12 +1281,12 @@
           </a:prstGeom>
         </p:spPr>
         <p:txBody>
-          <a:bodyPr anchorCtr="0" anchor="t" bIns="91425" lIns="91425" spcFirstLastPara="1" rIns="91425" wrap="square" tIns="91425">
+          <a:bodyPr spcFirstLastPara="1" wrap="square" lIns="91425" tIns="91425" rIns="91425" bIns="91425" anchor="t" anchorCtr="0">
             <a:noAutofit/>
           </a:bodyPr>
           <a:lstStyle/>
           <a:p>
-            <a:pPr indent="0" lvl="0" marL="0" rtl="0" algn="l">
+            <a:pPr marL="0" lvl="0" indent="0" algn="l" rtl="0">
               <a:spcBef>
                 <a:spcPts val="0"/>
               </a:spcBef>
@@ -1246,9 +1295,6 @@
               </a:spcAft>
               <a:buNone/>
             </a:pPr>
-            <a:r>
-              <a:t/>
-            </a:r>
             <a:endParaRPr/>
           </a:p>
         </p:txBody>
@@ -1256,20 +1302,26 @@
       <p:sp>
         <p:nvSpPr>
           <p:cNvPr id="155" name="Google Shape;155;p5:notes"/>
-          <p:cNvSpPr/>
+          <p:cNvSpPr>
+            <a:spLocks noGrp="1" noRot="1" noChangeAspect="1"/>
+          </p:cNvSpPr>
           <p:nvPr>
-            <p:ph idx="2" type="sldImg"/>
+            <p:ph type="sldImg" idx="2"/>
           </p:nvPr>
         </p:nvSpPr>
         <p:spPr>
           <a:xfrm>
-            <a:off x="1143225" y="685800"/>
-            <a:ext cx="4572225" cy="3429000"/>
+            <a:off x="381000" y="685800"/>
+            <a:ext cx="6096000" cy="3429000"/>
           </a:xfrm>
           <a:custGeom>
-            <a:rect b="b" l="l" r="r" t="t"/>
+            <a:avLst/>
+            <a:gdLst/>
+            <a:ahLst/>
+            <a:cxnLst/>
+            <a:rect l="l" t="t" r="r" b="b"/>
             <a:pathLst>
-              <a:path extrusionOk="0" h="120000" w="120000">
+              <a:path w="120000" h="120000" extrusionOk="0">
                 <a:moveTo>
                   <a:pt x="0" y="0"/>
                 </a:moveTo>
@@ -1297,11 +1349,11 @@
 </file>
 
 <file path=ppt/notesSlides/notesSlide7.xml><?xml version="1.0" encoding="utf-8"?>
-<p:notes xmlns:a="http://schemas.openxmlformats.org/drawingml/2006/main" xmlns:r="http://schemas.openxmlformats.org/officeDocument/2006/relationships" xmlns:mc="http://schemas.openxmlformats.org/markup-compatibility/2006" xmlns:mv="urn:schemas-microsoft-com:mac:vml" xmlns:p="http://schemas.openxmlformats.org/presentationml/2006/main" xmlns:c="http://schemas.openxmlformats.org/drawingml/2006/chart" xmlns:dgm="http://schemas.openxmlformats.org/drawingml/2006/diagram" xmlns:o="urn:schemas-microsoft-com:office:office" xmlns:v="urn:schemas-microsoft-com:vml" xmlns:pvml="urn:schemas-microsoft-com:office:powerpoint" xmlns:com="http://schemas.openxmlformats.org/drawingml/2006/compatibility" xmlns:p14="http://schemas.microsoft.com/office/powerpoint/2010/main" xmlns:p15="http://schemas.microsoft.com/office/powerpoint/2012/main" xmlns:ahyp="http://schemas.microsoft.com/office/drawing/2018/hyperlinkcolor" showMasterPhAnim="0" showMasterSp="0">
+<p:notes xmlns:a="http://schemas.openxmlformats.org/drawingml/2006/main" xmlns:r="http://schemas.openxmlformats.org/officeDocument/2006/relationships" xmlns:p="http://schemas.openxmlformats.org/presentationml/2006/main" showMasterSp="0" showMasterPhAnim="0">
   <p:cSld>
     <p:spTree>
       <p:nvGrpSpPr>
-        <p:cNvPr id="166" name="Shape 166"/>
+        <p:cNvPr id="1" name="Shape 166"/>
         <p:cNvGrpSpPr/>
         <p:nvPr/>
       </p:nvGrpSpPr>
@@ -1316,9 +1368,11 @@
       <p:sp>
         <p:nvSpPr>
           <p:cNvPr id="167" name="Google Shape;167;p6:notes"/>
-          <p:cNvSpPr txBox="1"/>
+          <p:cNvSpPr txBox="1">
+            <a:spLocks noGrp="1"/>
+          </p:cNvSpPr>
           <p:nvPr>
-            <p:ph idx="1" type="body"/>
+            <p:ph type="body" idx="1"/>
           </p:nvPr>
         </p:nvSpPr>
         <p:spPr>
@@ -1331,12 +1385,12 @@
           </a:prstGeom>
         </p:spPr>
         <p:txBody>
-          <a:bodyPr anchorCtr="0" anchor="t" bIns="91425" lIns="91425" spcFirstLastPara="1" rIns="91425" wrap="square" tIns="91425">
+          <a:bodyPr spcFirstLastPara="1" wrap="square" lIns="91425" tIns="91425" rIns="91425" bIns="91425" anchor="t" anchorCtr="0">
             <a:noAutofit/>
           </a:bodyPr>
           <a:lstStyle/>
           <a:p>
-            <a:pPr indent="0" lvl="0" marL="0" rtl="0" algn="l">
+            <a:pPr marL="0" lvl="0" indent="0" algn="l" rtl="0">
               <a:spcBef>
                 <a:spcPts val="0"/>
               </a:spcBef>
@@ -1345,9 +1399,6 @@
               </a:spcAft>
               <a:buNone/>
             </a:pPr>
-            <a:r>
-              <a:t/>
-            </a:r>
             <a:endParaRPr/>
           </a:p>
         </p:txBody>
@@ -1355,20 +1406,26 @@
       <p:sp>
         <p:nvSpPr>
           <p:cNvPr id="168" name="Google Shape;168;p6:notes"/>
-          <p:cNvSpPr/>
+          <p:cNvSpPr>
+            <a:spLocks noGrp="1" noRot="1" noChangeAspect="1"/>
+          </p:cNvSpPr>
           <p:nvPr>
-            <p:ph idx="2" type="sldImg"/>
+            <p:ph type="sldImg" idx="2"/>
           </p:nvPr>
         </p:nvSpPr>
         <p:spPr>
           <a:xfrm>
-            <a:off x="1143225" y="685800"/>
-            <a:ext cx="4572225" cy="3429000"/>
+            <a:off x="381000" y="685800"/>
+            <a:ext cx="6096000" cy="3429000"/>
           </a:xfrm>
           <a:custGeom>
-            <a:rect b="b" l="l" r="r" t="t"/>
+            <a:avLst/>
+            <a:gdLst/>
+            <a:ahLst/>
+            <a:cxnLst/>
+            <a:rect l="l" t="t" r="r" b="b"/>
             <a:pathLst>
-              <a:path extrusionOk="0" h="120000" w="120000">
+              <a:path w="120000" h="120000" extrusionOk="0">
                 <a:moveTo>
                   <a:pt x="0" y="0"/>
                 </a:moveTo>
@@ -1396,11 +1453,11 @@
 </file>
 
 <file path=ppt/notesSlides/notesSlide8.xml><?xml version="1.0" encoding="utf-8"?>
-<p:notes xmlns:a="http://schemas.openxmlformats.org/drawingml/2006/main" xmlns:r="http://schemas.openxmlformats.org/officeDocument/2006/relationships" xmlns:mc="http://schemas.openxmlformats.org/markup-compatibility/2006" xmlns:mv="urn:schemas-microsoft-com:mac:vml" xmlns:p="http://schemas.openxmlformats.org/presentationml/2006/main" xmlns:c="http://schemas.openxmlformats.org/drawingml/2006/chart" xmlns:dgm="http://schemas.openxmlformats.org/drawingml/2006/diagram" xmlns:o="urn:schemas-microsoft-com:office:office" xmlns:v="urn:schemas-microsoft-com:vml" xmlns:pvml="urn:schemas-microsoft-com:office:powerpoint" xmlns:com="http://schemas.openxmlformats.org/drawingml/2006/compatibility" xmlns:p14="http://schemas.microsoft.com/office/powerpoint/2010/main" xmlns:p15="http://schemas.microsoft.com/office/powerpoint/2012/main" xmlns:ahyp="http://schemas.microsoft.com/office/drawing/2018/hyperlinkcolor" showMasterPhAnim="0" showMasterSp="0">
+<p:notes xmlns:a="http://schemas.openxmlformats.org/drawingml/2006/main" xmlns:r="http://schemas.openxmlformats.org/officeDocument/2006/relationships" xmlns:p="http://schemas.openxmlformats.org/presentationml/2006/main" showMasterSp="0" showMasterPhAnim="0">
   <p:cSld>
     <p:spTree>
       <p:nvGrpSpPr>
-        <p:cNvPr id="186" name="Shape 186"/>
+        <p:cNvPr id="1" name="Shape 186"/>
         <p:cNvGrpSpPr/>
         <p:nvPr/>
       </p:nvGrpSpPr>
@@ -1415,9 +1472,11 @@
       <p:sp>
         <p:nvSpPr>
           <p:cNvPr id="187" name="Google Shape;187;p7:notes"/>
-          <p:cNvSpPr txBox="1"/>
+          <p:cNvSpPr txBox="1">
+            <a:spLocks noGrp="1"/>
+          </p:cNvSpPr>
           <p:nvPr>
-            <p:ph idx="1" type="body"/>
+            <p:ph type="body" idx="1"/>
           </p:nvPr>
         </p:nvSpPr>
         <p:spPr>
@@ -1430,12 +1489,12 @@
           </a:prstGeom>
         </p:spPr>
         <p:txBody>
-          <a:bodyPr anchorCtr="0" anchor="t" bIns="91425" lIns="91425" spcFirstLastPara="1" rIns="91425" wrap="square" tIns="91425">
+          <a:bodyPr spcFirstLastPara="1" wrap="square" lIns="91425" tIns="91425" rIns="91425" bIns="91425" anchor="t" anchorCtr="0">
             <a:noAutofit/>
           </a:bodyPr>
           <a:lstStyle/>
           <a:p>
-            <a:pPr indent="0" lvl="0" marL="0" rtl="0" algn="l">
+            <a:pPr marL="0" lvl="0" indent="0" algn="l" rtl="0">
               <a:spcBef>
                 <a:spcPts val="0"/>
               </a:spcBef>
@@ -1444,9 +1503,6 @@
               </a:spcAft>
               <a:buNone/>
             </a:pPr>
-            <a:r>
-              <a:t/>
-            </a:r>
             <a:endParaRPr/>
           </a:p>
         </p:txBody>
@@ -1454,20 +1510,26 @@
       <p:sp>
         <p:nvSpPr>
           <p:cNvPr id="188" name="Google Shape;188;p7:notes"/>
-          <p:cNvSpPr/>
+          <p:cNvSpPr>
+            <a:spLocks noGrp="1" noRot="1" noChangeAspect="1"/>
+          </p:cNvSpPr>
           <p:nvPr>
-            <p:ph idx="2" type="sldImg"/>
+            <p:ph type="sldImg" idx="2"/>
           </p:nvPr>
         </p:nvSpPr>
         <p:spPr>
           <a:xfrm>
-            <a:off x="1143225" y="685800"/>
-            <a:ext cx="4572225" cy="3429000"/>
+            <a:off x="381000" y="685800"/>
+            <a:ext cx="6096000" cy="3429000"/>
           </a:xfrm>
           <a:custGeom>
-            <a:rect b="b" l="l" r="r" t="t"/>
+            <a:avLst/>
+            <a:gdLst/>
+            <a:ahLst/>
+            <a:cxnLst/>
+            <a:rect l="l" t="t" r="r" b="b"/>
             <a:pathLst>
-              <a:path extrusionOk="0" h="120000" w="120000">
+              <a:path w="120000" h="120000" extrusionOk="0">
                 <a:moveTo>
                   <a:pt x="0" y="0"/>
                 </a:moveTo>
@@ -1495,11 +1557,11 @@
 </file>
 
 <file path=ppt/slideLayouts/slideLayout1.xml><?xml version="1.0" encoding="utf-8"?>
-<p:sldLayout xmlns:a="http://schemas.openxmlformats.org/drawingml/2006/main" xmlns:r="http://schemas.openxmlformats.org/officeDocument/2006/relationships" xmlns:mc="http://schemas.openxmlformats.org/markup-compatibility/2006" xmlns:mv="urn:schemas-microsoft-com:mac:vml" xmlns:p="http://schemas.openxmlformats.org/presentationml/2006/main" xmlns:c="http://schemas.openxmlformats.org/drawingml/2006/chart" xmlns:dgm="http://schemas.openxmlformats.org/drawingml/2006/diagram" xmlns:o="urn:schemas-microsoft-com:office:office" xmlns:v="urn:schemas-microsoft-com:vml" xmlns:pvml="urn:schemas-microsoft-com:office:powerpoint" xmlns:com="http://schemas.openxmlformats.org/drawingml/2006/compatibility" xmlns:p14="http://schemas.microsoft.com/office/powerpoint/2010/main" xmlns:p15="http://schemas.microsoft.com/office/powerpoint/2012/main" xmlns:ahyp="http://schemas.microsoft.com/office/drawing/2018/hyperlinkcolor" matchingName="Blank" type="blank">
+<p:sldLayout xmlns:a="http://schemas.openxmlformats.org/drawingml/2006/main" xmlns:r="http://schemas.openxmlformats.org/officeDocument/2006/relationships" xmlns:p="http://schemas.openxmlformats.org/presentationml/2006/main" matchingName="Blank" type="blank">
   <p:cSld name="BLANK">
     <p:spTree>
       <p:nvGrpSpPr>
-        <p:cNvPr id="11" name="Shape 11"/>
+        <p:cNvPr id="1" name="Shape 11"/>
         <p:cNvGrpSpPr/>
         <p:nvPr/>
       </p:nvGrpSpPr>
@@ -1514,9 +1576,11 @@
       <p:sp>
         <p:nvSpPr>
           <p:cNvPr id="12" name="Google Shape;12;p2"/>
-          <p:cNvSpPr txBox="1"/>
+          <p:cNvSpPr txBox="1">
+            <a:spLocks noGrp="1"/>
+          </p:cNvSpPr>
           <p:nvPr>
-            <p:ph idx="10" type="dt"/>
+            <p:ph type="dt" idx="10"/>
           </p:nvPr>
         </p:nvSpPr>
         <p:spPr>
@@ -1533,7 +1597,7 @@
           </a:ln>
         </p:spPr>
         <p:txBody>
-          <a:bodyPr anchorCtr="0" anchor="ctr" bIns="45700" lIns="91425" spcFirstLastPara="1" rIns="91425" wrap="square" tIns="45700">
+          <a:bodyPr spcFirstLastPara="1" wrap="square" lIns="91425" tIns="45700" rIns="91425" bIns="45700" anchor="ctr" anchorCtr="0">
             <a:noAutofit/>
           </a:bodyPr>
           <a:lstStyle>
@@ -1637,15 +1701,19 @@
               <a:defRPr/>
             </a:lvl9pPr>
           </a:lstStyle>
-          <a:p/>
+          <a:p>
+            <a:endParaRPr/>
+          </a:p>
         </p:txBody>
       </p:sp>
       <p:sp>
         <p:nvSpPr>
           <p:cNvPr id="13" name="Google Shape;13;p2"/>
-          <p:cNvSpPr txBox="1"/>
+          <p:cNvSpPr txBox="1">
+            <a:spLocks noGrp="1"/>
+          </p:cNvSpPr>
           <p:nvPr>
-            <p:ph idx="11" type="ftr"/>
+            <p:ph type="ftr" idx="11"/>
           </p:nvPr>
         </p:nvSpPr>
         <p:spPr>
@@ -1662,7 +1730,7 @@
           </a:ln>
         </p:spPr>
         <p:txBody>
-          <a:bodyPr anchorCtr="0" anchor="ctr" bIns="45700" lIns="91425" spcFirstLastPara="1" rIns="91425" wrap="square" tIns="45700">
+          <a:bodyPr spcFirstLastPara="1" wrap="square" lIns="91425" tIns="45700" rIns="91425" bIns="45700" anchor="ctr" anchorCtr="0">
             <a:noAutofit/>
           </a:bodyPr>
           <a:lstStyle>
@@ -1766,15 +1834,19 @@
               <a:defRPr/>
             </a:lvl9pPr>
           </a:lstStyle>
-          <a:p/>
+          <a:p>
+            <a:endParaRPr/>
+          </a:p>
         </p:txBody>
       </p:sp>
       <p:sp>
         <p:nvSpPr>
           <p:cNvPr id="14" name="Google Shape;14;p2"/>
-          <p:cNvSpPr txBox="1"/>
+          <p:cNvSpPr txBox="1">
+            <a:spLocks noGrp="1"/>
+          </p:cNvSpPr>
           <p:nvPr>
-            <p:ph idx="12" type="sldNum"/>
+            <p:ph type="sldNum" idx="12"/>
           </p:nvPr>
         </p:nvSpPr>
         <p:spPr>
@@ -1791,67 +1863,67 @@
           </a:ln>
         </p:spPr>
         <p:txBody>
-          <a:bodyPr anchorCtr="0" anchor="ctr" bIns="45700" lIns="91425" spcFirstLastPara="1" rIns="91425" wrap="square" tIns="45700">
+          <a:bodyPr spcFirstLastPara="1" wrap="square" lIns="91425" tIns="45700" rIns="91425" bIns="45700" anchor="ctr" anchorCtr="0">
             <a:noAutofit/>
           </a:bodyPr>
           <a:lstStyle>
-            <a:lvl1pPr indent="0" lvl="0" marL="0" algn="r">
+            <a:lvl1pPr marL="0" lvl="0" indent="0" algn="r">
               <a:spcBef>
                 <a:spcPts val="0"/>
               </a:spcBef>
               <a:buNone/>
               <a:defRPr/>
             </a:lvl1pPr>
-            <a:lvl2pPr indent="0" lvl="1" marL="0" algn="r">
+            <a:lvl2pPr marL="0" lvl="1" indent="0" algn="r">
               <a:spcBef>
                 <a:spcPts val="0"/>
               </a:spcBef>
               <a:buNone/>
               <a:defRPr/>
             </a:lvl2pPr>
-            <a:lvl3pPr indent="0" lvl="2" marL="0" algn="r">
+            <a:lvl3pPr marL="0" lvl="2" indent="0" algn="r">
               <a:spcBef>
                 <a:spcPts val="0"/>
               </a:spcBef>
               <a:buNone/>
               <a:defRPr/>
             </a:lvl3pPr>
-            <a:lvl4pPr indent="0" lvl="3" marL="0" algn="r">
+            <a:lvl4pPr marL="0" lvl="3" indent="0" algn="r">
               <a:spcBef>
                 <a:spcPts val="0"/>
               </a:spcBef>
               <a:buNone/>
               <a:defRPr/>
             </a:lvl4pPr>
-            <a:lvl5pPr indent="0" lvl="4" marL="0" algn="r">
+            <a:lvl5pPr marL="0" lvl="4" indent="0" algn="r">
               <a:spcBef>
                 <a:spcPts val="0"/>
               </a:spcBef>
               <a:buNone/>
               <a:defRPr/>
             </a:lvl5pPr>
-            <a:lvl6pPr indent="0" lvl="5" marL="0" algn="r">
+            <a:lvl6pPr marL="0" lvl="5" indent="0" algn="r">
               <a:spcBef>
                 <a:spcPts val="0"/>
               </a:spcBef>
               <a:buNone/>
               <a:defRPr/>
             </a:lvl6pPr>
-            <a:lvl7pPr indent="0" lvl="6" marL="0" algn="r">
+            <a:lvl7pPr marL="0" lvl="6" indent="0" algn="r">
               <a:spcBef>
                 <a:spcPts val="0"/>
               </a:spcBef>
               <a:buNone/>
               <a:defRPr/>
             </a:lvl7pPr>
-            <a:lvl8pPr indent="0" lvl="7" marL="0" algn="r">
+            <a:lvl8pPr marL="0" lvl="7" indent="0" algn="r">
               <a:spcBef>
                 <a:spcPts val="0"/>
               </a:spcBef>
               <a:buNone/>
               <a:defRPr/>
             </a:lvl8pPr>
-            <a:lvl9pPr indent="0" lvl="8" marL="0" algn="r">
+            <a:lvl9pPr marL="0" lvl="8" indent="0" algn="r">
               <a:spcBef>
                 <a:spcPts val="0"/>
               </a:spcBef>
@@ -1860,7 +1932,7 @@
             </a:lvl9pPr>
           </a:lstStyle>
           <a:p>
-            <a:pPr indent="0" lvl="0" marL="0" rtl="0" algn="r">
+            <a:pPr marL="0" lvl="0" indent="0" algn="r" rtl="0">
               <a:spcBef>
                 <a:spcPts val="0"/>
               </a:spcBef>
@@ -1871,7 +1943,7 @@
             </a:pPr>
             <a:fld id="{00000000-1234-1234-1234-123412341234}" type="slidenum">
               <a:rPr lang="en-US"/>
-              <a:t>‹#›</a:t>
+              <a:t>‹nº›</a:t>
             </a:fld>
             <a:endParaRPr/>
           </a:p>
@@ -1886,11 +1958,11 @@
 </file>
 
 <file path=ppt/slideLayouts/slideLayout10.xml><?xml version="1.0" encoding="utf-8"?>
-<p:sldLayout xmlns:a="http://schemas.openxmlformats.org/drawingml/2006/main" xmlns:r="http://schemas.openxmlformats.org/officeDocument/2006/relationships" xmlns:mc="http://schemas.openxmlformats.org/markup-compatibility/2006" xmlns:mv="urn:schemas-microsoft-com:mac:vml" xmlns:p="http://schemas.openxmlformats.org/presentationml/2006/main" xmlns:c="http://schemas.openxmlformats.org/drawingml/2006/chart" xmlns:dgm="http://schemas.openxmlformats.org/drawingml/2006/diagram" xmlns:o="urn:schemas-microsoft-com:office:office" xmlns:v="urn:schemas-microsoft-com:vml" xmlns:pvml="urn:schemas-microsoft-com:office:powerpoint" xmlns:com="http://schemas.openxmlformats.org/drawingml/2006/compatibility" xmlns:p14="http://schemas.microsoft.com/office/powerpoint/2010/main" xmlns:p15="http://schemas.microsoft.com/office/powerpoint/2012/main" xmlns:ahyp="http://schemas.microsoft.com/office/drawing/2018/hyperlinkcolor" matchingName="Title and Vertical Text" type="vertTx">
+<p:sldLayout xmlns:a="http://schemas.openxmlformats.org/drawingml/2006/main" xmlns:r="http://schemas.openxmlformats.org/officeDocument/2006/relationships" xmlns:p="http://schemas.openxmlformats.org/presentationml/2006/main" matchingName="Title and Vertical Text" type="vertTx">
   <p:cSld name="VERTICAL_TEXT">
     <p:spTree>
       <p:nvGrpSpPr>
-        <p:cNvPr id="68" name="Shape 68"/>
+        <p:cNvPr id="1" name="Shape 68"/>
         <p:cNvGrpSpPr/>
         <p:nvPr/>
       </p:nvGrpSpPr>
@@ -1905,7 +1977,9 @@
       <p:sp>
         <p:nvSpPr>
           <p:cNvPr id="69" name="Google Shape;69;p11"/>
-          <p:cNvSpPr txBox="1"/>
+          <p:cNvSpPr txBox="1">
+            <a:spLocks noGrp="1"/>
+          </p:cNvSpPr>
           <p:nvPr>
             <p:ph type="title"/>
           </p:nvPr>
@@ -1924,7 +1998,7 @@
           </a:ln>
         </p:spPr>
         <p:txBody>
-          <a:bodyPr anchorCtr="0" anchor="ctr" bIns="45700" lIns="91425" spcFirstLastPara="1" rIns="91425" wrap="square" tIns="45700">
+          <a:bodyPr spcFirstLastPara="1" wrap="square" lIns="91425" tIns="45700" rIns="91425" bIns="45700" anchor="ctr" anchorCtr="0">
             <a:normAutofit/>
           </a:bodyPr>
           <a:lstStyle>
@@ -2031,15 +2105,19 @@
               <a:defRPr/>
             </a:lvl9pPr>
           </a:lstStyle>
-          <a:p/>
+          <a:p>
+            <a:endParaRPr/>
+          </a:p>
         </p:txBody>
       </p:sp>
       <p:sp>
         <p:nvSpPr>
           <p:cNvPr id="70" name="Google Shape;70;p11"/>
-          <p:cNvSpPr txBox="1"/>
+          <p:cNvSpPr txBox="1">
+            <a:spLocks noGrp="1"/>
+          </p:cNvSpPr>
           <p:nvPr>
-            <p:ph idx="1" type="body"/>
+            <p:ph type="body" idx="1"/>
           </p:nvPr>
         </p:nvSpPr>
         <p:spPr>
@@ -2056,11 +2134,11 @@
           </a:ln>
         </p:spPr>
         <p:txBody>
-          <a:bodyPr anchorCtr="0" anchor="t" bIns="45700" lIns="91425" spcFirstLastPara="1" rIns="91425" wrap="square" tIns="45700">
+          <a:bodyPr spcFirstLastPara="1" wrap="square" lIns="91425" tIns="45700" rIns="91425" bIns="45700" anchor="t" anchorCtr="0">
             <a:normAutofit/>
           </a:bodyPr>
           <a:lstStyle>
-            <a:lvl1pPr indent="-342900" lvl="0" marL="457200" algn="l">
+            <a:lvl1pPr marL="457200" lvl="0" indent="-342900" algn="l">
               <a:spcBef>
                 <a:spcPts val="360"/>
               </a:spcBef>
@@ -2074,7 +2152,7 @@
               <a:buChar char="•"/>
               <a:defRPr/>
             </a:lvl1pPr>
-            <a:lvl2pPr indent="-342900" lvl="1" marL="914400" algn="l">
+            <a:lvl2pPr marL="914400" lvl="1" indent="-342900" algn="l">
               <a:spcBef>
                 <a:spcPts val="360"/>
               </a:spcBef>
@@ -2088,7 +2166,7 @@
               <a:buChar char="–"/>
               <a:defRPr/>
             </a:lvl2pPr>
-            <a:lvl3pPr indent="-342900" lvl="2" marL="1371600" algn="l">
+            <a:lvl3pPr marL="1371600" lvl="2" indent="-342900" algn="l">
               <a:spcBef>
                 <a:spcPts val="360"/>
               </a:spcBef>
@@ -2102,7 +2180,7 @@
               <a:buChar char="•"/>
               <a:defRPr/>
             </a:lvl3pPr>
-            <a:lvl4pPr indent="-342900" lvl="3" marL="1828800" algn="l">
+            <a:lvl4pPr marL="1828800" lvl="3" indent="-342900" algn="l">
               <a:spcBef>
                 <a:spcPts val="360"/>
               </a:spcBef>
@@ -2116,7 +2194,7 @@
               <a:buChar char="–"/>
               <a:defRPr/>
             </a:lvl4pPr>
-            <a:lvl5pPr indent="-342900" lvl="4" marL="2286000" algn="l">
+            <a:lvl5pPr marL="2286000" lvl="4" indent="-342900" algn="l">
               <a:spcBef>
                 <a:spcPts val="360"/>
               </a:spcBef>
@@ -2130,7 +2208,7 @@
               <a:buChar char="»"/>
               <a:defRPr/>
             </a:lvl5pPr>
-            <a:lvl6pPr indent="-342900" lvl="5" marL="2743200" algn="l">
+            <a:lvl6pPr marL="2743200" lvl="5" indent="-342900" algn="l">
               <a:spcBef>
                 <a:spcPts val="360"/>
               </a:spcBef>
@@ -2144,7 +2222,7 @@
               <a:buChar char="•"/>
               <a:defRPr/>
             </a:lvl6pPr>
-            <a:lvl7pPr indent="-342900" lvl="6" marL="3200400" algn="l">
+            <a:lvl7pPr marL="3200400" lvl="6" indent="-342900" algn="l">
               <a:spcBef>
                 <a:spcPts val="360"/>
               </a:spcBef>
@@ -2158,7 +2236,7 @@
               <a:buChar char="•"/>
               <a:defRPr/>
             </a:lvl7pPr>
-            <a:lvl8pPr indent="-342900" lvl="7" marL="3657600" algn="l">
+            <a:lvl8pPr marL="3657600" lvl="7" indent="-342900" algn="l">
               <a:spcBef>
                 <a:spcPts val="360"/>
               </a:spcBef>
@@ -2172,7 +2250,7 @@
               <a:buChar char="•"/>
               <a:defRPr/>
             </a:lvl8pPr>
-            <a:lvl9pPr indent="-342900" lvl="8" marL="4114800" algn="l">
+            <a:lvl9pPr marL="4114800" lvl="8" indent="-342900" algn="l">
               <a:spcBef>
                 <a:spcPts val="360"/>
               </a:spcBef>
@@ -2187,15 +2265,19 @@
               <a:defRPr/>
             </a:lvl9pPr>
           </a:lstStyle>
-          <a:p/>
+          <a:p>
+            <a:endParaRPr/>
+          </a:p>
         </p:txBody>
       </p:sp>
       <p:sp>
         <p:nvSpPr>
           <p:cNvPr id="71" name="Google Shape;71;p11"/>
-          <p:cNvSpPr txBox="1"/>
+          <p:cNvSpPr txBox="1">
+            <a:spLocks noGrp="1"/>
+          </p:cNvSpPr>
           <p:nvPr>
-            <p:ph idx="10" type="dt"/>
+            <p:ph type="dt" idx="10"/>
           </p:nvPr>
         </p:nvSpPr>
         <p:spPr>
@@ -2212,7 +2294,7 @@
           </a:ln>
         </p:spPr>
         <p:txBody>
-          <a:bodyPr anchorCtr="0" anchor="ctr" bIns="45700" lIns="91425" spcFirstLastPara="1" rIns="91425" wrap="square" tIns="45700">
+          <a:bodyPr spcFirstLastPara="1" wrap="square" lIns="91425" tIns="45700" rIns="91425" bIns="45700" anchor="ctr" anchorCtr="0">
             <a:noAutofit/>
           </a:bodyPr>
           <a:lstStyle>
@@ -2316,15 +2398,19 @@
               <a:defRPr/>
             </a:lvl9pPr>
           </a:lstStyle>
-          <a:p/>
+          <a:p>
+            <a:endParaRPr/>
+          </a:p>
         </p:txBody>
       </p:sp>
       <p:sp>
         <p:nvSpPr>
           <p:cNvPr id="72" name="Google Shape;72;p11"/>
-          <p:cNvSpPr txBox="1"/>
+          <p:cNvSpPr txBox="1">
+            <a:spLocks noGrp="1"/>
+          </p:cNvSpPr>
           <p:nvPr>
-            <p:ph idx="11" type="ftr"/>
+            <p:ph type="ftr" idx="11"/>
           </p:nvPr>
         </p:nvSpPr>
         <p:spPr>
@@ -2341,7 +2427,7 @@
           </a:ln>
         </p:spPr>
         <p:txBody>
-          <a:bodyPr anchorCtr="0" anchor="ctr" bIns="45700" lIns="91425" spcFirstLastPara="1" rIns="91425" wrap="square" tIns="45700">
+          <a:bodyPr spcFirstLastPara="1" wrap="square" lIns="91425" tIns="45700" rIns="91425" bIns="45700" anchor="ctr" anchorCtr="0">
             <a:noAutofit/>
           </a:bodyPr>
           <a:lstStyle>
@@ -2445,15 +2531,19 @@
               <a:defRPr/>
             </a:lvl9pPr>
           </a:lstStyle>
-          <a:p/>
+          <a:p>
+            <a:endParaRPr/>
+          </a:p>
         </p:txBody>
       </p:sp>
       <p:sp>
         <p:nvSpPr>
           <p:cNvPr id="73" name="Google Shape;73;p11"/>
-          <p:cNvSpPr txBox="1"/>
+          <p:cNvSpPr txBox="1">
+            <a:spLocks noGrp="1"/>
+          </p:cNvSpPr>
           <p:nvPr>
-            <p:ph idx="12" type="sldNum"/>
+            <p:ph type="sldNum" idx="12"/>
           </p:nvPr>
         </p:nvSpPr>
         <p:spPr>
@@ -2470,67 +2560,67 @@
           </a:ln>
         </p:spPr>
         <p:txBody>
-          <a:bodyPr anchorCtr="0" anchor="ctr" bIns="45700" lIns="91425" spcFirstLastPara="1" rIns="91425" wrap="square" tIns="45700">
+          <a:bodyPr spcFirstLastPara="1" wrap="square" lIns="91425" tIns="45700" rIns="91425" bIns="45700" anchor="ctr" anchorCtr="0">
             <a:noAutofit/>
           </a:bodyPr>
           <a:lstStyle>
-            <a:lvl1pPr indent="0" lvl="0" marL="0" algn="r">
+            <a:lvl1pPr marL="0" lvl="0" indent="0" algn="r">
               <a:spcBef>
                 <a:spcPts val="0"/>
               </a:spcBef>
               <a:buNone/>
               <a:defRPr/>
             </a:lvl1pPr>
-            <a:lvl2pPr indent="0" lvl="1" marL="0" algn="r">
+            <a:lvl2pPr marL="0" lvl="1" indent="0" algn="r">
               <a:spcBef>
                 <a:spcPts val="0"/>
               </a:spcBef>
               <a:buNone/>
               <a:defRPr/>
             </a:lvl2pPr>
-            <a:lvl3pPr indent="0" lvl="2" marL="0" algn="r">
+            <a:lvl3pPr marL="0" lvl="2" indent="0" algn="r">
               <a:spcBef>
                 <a:spcPts val="0"/>
               </a:spcBef>
               <a:buNone/>
               <a:defRPr/>
             </a:lvl3pPr>
-            <a:lvl4pPr indent="0" lvl="3" marL="0" algn="r">
+            <a:lvl4pPr marL="0" lvl="3" indent="0" algn="r">
               <a:spcBef>
                 <a:spcPts val="0"/>
               </a:spcBef>
               <a:buNone/>
               <a:defRPr/>
             </a:lvl4pPr>
-            <a:lvl5pPr indent="0" lvl="4" marL="0" algn="r">
+            <a:lvl5pPr marL="0" lvl="4" indent="0" algn="r">
               <a:spcBef>
                 <a:spcPts val="0"/>
               </a:spcBef>
               <a:buNone/>
               <a:defRPr/>
             </a:lvl5pPr>
-            <a:lvl6pPr indent="0" lvl="5" marL="0" algn="r">
+            <a:lvl6pPr marL="0" lvl="5" indent="0" algn="r">
               <a:spcBef>
                 <a:spcPts val="0"/>
               </a:spcBef>
               <a:buNone/>
               <a:defRPr/>
             </a:lvl6pPr>
-            <a:lvl7pPr indent="0" lvl="6" marL="0" algn="r">
+            <a:lvl7pPr marL="0" lvl="6" indent="0" algn="r">
               <a:spcBef>
                 <a:spcPts val="0"/>
               </a:spcBef>
               <a:buNone/>
               <a:defRPr/>
             </a:lvl7pPr>
-            <a:lvl8pPr indent="0" lvl="7" marL="0" algn="r">
+            <a:lvl8pPr marL="0" lvl="7" indent="0" algn="r">
               <a:spcBef>
                 <a:spcPts val="0"/>
               </a:spcBef>
               <a:buNone/>
               <a:defRPr/>
             </a:lvl8pPr>
-            <a:lvl9pPr indent="0" lvl="8" marL="0" algn="r">
+            <a:lvl9pPr marL="0" lvl="8" indent="0" algn="r">
               <a:spcBef>
                 <a:spcPts val="0"/>
               </a:spcBef>
@@ -2539,7 +2629,7 @@
             </a:lvl9pPr>
           </a:lstStyle>
           <a:p>
-            <a:pPr indent="0" lvl="0" marL="0" rtl="0" algn="r">
+            <a:pPr marL="0" lvl="0" indent="0" algn="r" rtl="0">
               <a:spcBef>
                 <a:spcPts val="0"/>
               </a:spcBef>
@@ -2550,7 +2640,7 @@
             </a:pPr>
             <a:fld id="{00000000-1234-1234-1234-123412341234}" type="slidenum">
               <a:rPr lang="en-US"/>
-              <a:t>‹#›</a:t>
+              <a:t>‹nº›</a:t>
             </a:fld>
             <a:endParaRPr/>
           </a:p>
@@ -2565,11 +2655,11 @@
 </file>
 
 <file path=ppt/slideLayouts/slideLayout11.xml><?xml version="1.0" encoding="utf-8"?>
-<p:sldLayout xmlns:a="http://schemas.openxmlformats.org/drawingml/2006/main" xmlns:r="http://schemas.openxmlformats.org/officeDocument/2006/relationships" xmlns:mc="http://schemas.openxmlformats.org/markup-compatibility/2006" xmlns:mv="urn:schemas-microsoft-com:mac:vml" xmlns:p="http://schemas.openxmlformats.org/presentationml/2006/main" xmlns:c="http://schemas.openxmlformats.org/drawingml/2006/chart" xmlns:dgm="http://schemas.openxmlformats.org/drawingml/2006/diagram" xmlns:o="urn:schemas-microsoft-com:office:office" xmlns:v="urn:schemas-microsoft-com:vml" xmlns:pvml="urn:schemas-microsoft-com:office:powerpoint" xmlns:com="http://schemas.openxmlformats.org/drawingml/2006/compatibility" xmlns:p14="http://schemas.microsoft.com/office/powerpoint/2010/main" xmlns:p15="http://schemas.microsoft.com/office/powerpoint/2012/main" xmlns:ahyp="http://schemas.microsoft.com/office/drawing/2018/hyperlinkcolor" matchingName="Vertical Title and Text" type="vertTitleAndTx">
+<p:sldLayout xmlns:a="http://schemas.openxmlformats.org/drawingml/2006/main" xmlns:r="http://schemas.openxmlformats.org/officeDocument/2006/relationships" xmlns:p="http://schemas.openxmlformats.org/presentationml/2006/main" matchingName="Vertical Title and Text" type="vertTitleAndTx">
   <p:cSld name="VERTICAL_TITLE_AND_VERTICAL_TEXT">
     <p:spTree>
       <p:nvGrpSpPr>
-        <p:cNvPr id="74" name="Shape 74"/>
+        <p:cNvPr id="1" name="Shape 74"/>
         <p:cNvGrpSpPr/>
         <p:nvPr/>
       </p:nvGrpSpPr>
@@ -2584,7 +2674,9 @@
       <p:sp>
         <p:nvSpPr>
           <p:cNvPr id="75" name="Google Shape;75;p12"/>
-          <p:cNvSpPr txBox="1"/>
+          <p:cNvSpPr txBox="1">
+            <a:spLocks noGrp="1"/>
+          </p:cNvSpPr>
           <p:nvPr>
             <p:ph type="title"/>
           </p:nvPr>
@@ -2603,7 +2695,7 @@
           </a:ln>
         </p:spPr>
         <p:txBody>
-          <a:bodyPr anchorCtr="0" anchor="ctr" bIns="45700" lIns="91425" spcFirstLastPara="1" rIns="91425" wrap="square" tIns="45700">
+          <a:bodyPr spcFirstLastPara="1" wrap="square" lIns="91425" tIns="45700" rIns="91425" bIns="45700" anchor="ctr" anchorCtr="0">
             <a:normAutofit/>
           </a:bodyPr>
           <a:lstStyle>
@@ -2710,15 +2802,19 @@
               <a:defRPr/>
             </a:lvl9pPr>
           </a:lstStyle>
-          <a:p/>
+          <a:p>
+            <a:endParaRPr/>
+          </a:p>
         </p:txBody>
       </p:sp>
       <p:sp>
         <p:nvSpPr>
           <p:cNvPr id="76" name="Google Shape;76;p12"/>
-          <p:cNvSpPr txBox="1"/>
+          <p:cNvSpPr txBox="1">
+            <a:spLocks noGrp="1"/>
+          </p:cNvSpPr>
           <p:nvPr>
-            <p:ph idx="1" type="body"/>
+            <p:ph type="body" idx="1"/>
           </p:nvPr>
         </p:nvSpPr>
         <p:spPr>
@@ -2735,11 +2831,11 @@
           </a:ln>
         </p:spPr>
         <p:txBody>
-          <a:bodyPr anchorCtr="0" anchor="t" bIns="45700" lIns="91425" spcFirstLastPara="1" rIns="91425" wrap="square" tIns="45700">
+          <a:bodyPr spcFirstLastPara="1" wrap="square" lIns="91425" tIns="45700" rIns="91425" bIns="45700" anchor="t" anchorCtr="0">
             <a:normAutofit/>
           </a:bodyPr>
           <a:lstStyle>
-            <a:lvl1pPr indent="-342900" lvl="0" marL="457200" algn="l">
+            <a:lvl1pPr marL="457200" lvl="0" indent="-342900" algn="l">
               <a:spcBef>
                 <a:spcPts val="360"/>
               </a:spcBef>
@@ -2753,7 +2849,7 @@
               <a:buChar char="•"/>
               <a:defRPr/>
             </a:lvl1pPr>
-            <a:lvl2pPr indent="-342900" lvl="1" marL="914400" algn="l">
+            <a:lvl2pPr marL="914400" lvl="1" indent="-342900" algn="l">
               <a:spcBef>
                 <a:spcPts val="360"/>
               </a:spcBef>
@@ -2767,7 +2863,7 @@
               <a:buChar char="–"/>
               <a:defRPr/>
             </a:lvl2pPr>
-            <a:lvl3pPr indent="-342900" lvl="2" marL="1371600" algn="l">
+            <a:lvl3pPr marL="1371600" lvl="2" indent="-342900" algn="l">
               <a:spcBef>
                 <a:spcPts val="360"/>
               </a:spcBef>
@@ -2781,7 +2877,7 @@
               <a:buChar char="•"/>
               <a:defRPr/>
             </a:lvl3pPr>
-            <a:lvl4pPr indent="-342900" lvl="3" marL="1828800" algn="l">
+            <a:lvl4pPr marL="1828800" lvl="3" indent="-342900" algn="l">
               <a:spcBef>
                 <a:spcPts val="360"/>
               </a:spcBef>
@@ -2795,7 +2891,7 @@
               <a:buChar char="–"/>
               <a:defRPr/>
             </a:lvl4pPr>
-            <a:lvl5pPr indent="-342900" lvl="4" marL="2286000" algn="l">
+            <a:lvl5pPr marL="2286000" lvl="4" indent="-342900" algn="l">
               <a:spcBef>
                 <a:spcPts val="360"/>
               </a:spcBef>
@@ -2809,7 +2905,7 @@
               <a:buChar char="»"/>
               <a:defRPr/>
             </a:lvl5pPr>
-            <a:lvl6pPr indent="-342900" lvl="5" marL="2743200" algn="l">
+            <a:lvl6pPr marL="2743200" lvl="5" indent="-342900" algn="l">
               <a:spcBef>
                 <a:spcPts val="360"/>
               </a:spcBef>
@@ -2823,7 +2919,7 @@
               <a:buChar char="•"/>
               <a:defRPr/>
             </a:lvl6pPr>
-            <a:lvl7pPr indent="-342900" lvl="6" marL="3200400" algn="l">
+            <a:lvl7pPr marL="3200400" lvl="6" indent="-342900" algn="l">
               <a:spcBef>
                 <a:spcPts val="360"/>
               </a:spcBef>
@@ -2837,7 +2933,7 @@
               <a:buChar char="•"/>
               <a:defRPr/>
             </a:lvl7pPr>
-            <a:lvl8pPr indent="-342900" lvl="7" marL="3657600" algn="l">
+            <a:lvl8pPr marL="3657600" lvl="7" indent="-342900" algn="l">
               <a:spcBef>
                 <a:spcPts val="360"/>
               </a:spcBef>
@@ -2851,7 +2947,7 @@
               <a:buChar char="•"/>
               <a:defRPr/>
             </a:lvl8pPr>
-            <a:lvl9pPr indent="-342900" lvl="8" marL="4114800" algn="l">
+            <a:lvl9pPr marL="4114800" lvl="8" indent="-342900" algn="l">
               <a:spcBef>
                 <a:spcPts val="360"/>
               </a:spcBef>
@@ -2866,15 +2962,19 @@
               <a:defRPr/>
             </a:lvl9pPr>
           </a:lstStyle>
-          <a:p/>
+          <a:p>
+            <a:endParaRPr/>
+          </a:p>
         </p:txBody>
       </p:sp>
       <p:sp>
         <p:nvSpPr>
           <p:cNvPr id="77" name="Google Shape;77;p12"/>
-          <p:cNvSpPr txBox="1"/>
+          <p:cNvSpPr txBox="1">
+            <a:spLocks noGrp="1"/>
+          </p:cNvSpPr>
           <p:nvPr>
-            <p:ph idx="10" type="dt"/>
+            <p:ph type="dt" idx="10"/>
           </p:nvPr>
         </p:nvSpPr>
         <p:spPr>
@@ -2891,7 +2991,7 @@
           </a:ln>
         </p:spPr>
         <p:txBody>
-          <a:bodyPr anchorCtr="0" anchor="ctr" bIns="45700" lIns="91425" spcFirstLastPara="1" rIns="91425" wrap="square" tIns="45700">
+          <a:bodyPr spcFirstLastPara="1" wrap="square" lIns="91425" tIns="45700" rIns="91425" bIns="45700" anchor="ctr" anchorCtr="0">
             <a:noAutofit/>
           </a:bodyPr>
           <a:lstStyle>
@@ -2995,15 +3095,19 @@
               <a:defRPr/>
             </a:lvl9pPr>
           </a:lstStyle>
-          <a:p/>
+          <a:p>
+            <a:endParaRPr/>
+          </a:p>
         </p:txBody>
       </p:sp>
       <p:sp>
         <p:nvSpPr>
           <p:cNvPr id="78" name="Google Shape;78;p12"/>
-          <p:cNvSpPr txBox="1"/>
+          <p:cNvSpPr txBox="1">
+            <a:spLocks noGrp="1"/>
+          </p:cNvSpPr>
           <p:nvPr>
-            <p:ph idx="11" type="ftr"/>
+            <p:ph type="ftr" idx="11"/>
           </p:nvPr>
         </p:nvSpPr>
         <p:spPr>
@@ -3020,7 +3124,7 @@
           </a:ln>
         </p:spPr>
         <p:txBody>
-          <a:bodyPr anchorCtr="0" anchor="ctr" bIns="45700" lIns="91425" spcFirstLastPara="1" rIns="91425" wrap="square" tIns="45700">
+          <a:bodyPr spcFirstLastPara="1" wrap="square" lIns="91425" tIns="45700" rIns="91425" bIns="45700" anchor="ctr" anchorCtr="0">
             <a:noAutofit/>
           </a:bodyPr>
           <a:lstStyle>
@@ -3124,15 +3228,19 @@
               <a:defRPr/>
             </a:lvl9pPr>
           </a:lstStyle>
-          <a:p/>
+          <a:p>
+            <a:endParaRPr/>
+          </a:p>
         </p:txBody>
       </p:sp>
       <p:sp>
         <p:nvSpPr>
           <p:cNvPr id="79" name="Google Shape;79;p12"/>
-          <p:cNvSpPr txBox="1"/>
+          <p:cNvSpPr txBox="1">
+            <a:spLocks noGrp="1"/>
+          </p:cNvSpPr>
           <p:nvPr>
-            <p:ph idx="12" type="sldNum"/>
+            <p:ph type="sldNum" idx="12"/>
           </p:nvPr>
         </p:nvSpPr>
         <p:spPr>
@@ -3149,67 +3257,67 @@
           </a:ln>
         </p:spPr>
         <p:txBody>
-          <a:bodyPr anchorCtr="0" anchor="ctr" bIns="45700" lIns="91425" spcFirstLastPara="1" rIns="91425" wrap="square" tIns="45700">
+          <a:bodyPr spcFirstLastPara="1" wrap="square" lIns="91425" tIns="45700" rIns="91425" bIns="45700" anchor="ctr" anchorCtr="0">
             <a:noAutofit/>
           </a:bodyPr>
           <a:lstStyle>
-            <a:lvl1pPr indent="0" lvl="0" marL="0" algn="r">
+            <a:lvl1pPr marL="0" lvl="0" indent="0" algn="r">
               <a:spcBef>
                 <a:spcPts val="0"/>
               </a:spcBef>
               <a:buNone/>
               <a:defRPr/>
             </a:lvl1pPr>
-            <a:lvl2pPr indent="0" lvl="1" marL="0" algn="r">
+            <a:lvl2pPr marL="0" lvl="1" indent="0" algn="r">
               <a:spcBef>
                 <a:spcPts val="0"/>
               </a:spcBef>
               <a:buNone/>
               <a:defRPr/>
             </a:lvl2pPr>
-            <a:lvl3pPr indent="0" lvl="2" marL="0" algn="r">
+            <a:lvl3pPr marL="0" lvl="2" indent="0" algn="r">
               <a:spcBef>
                 <a:spcPts val="0"/>
               </a:spcBef>
               <a:buNone/>
               <a:defRPr/>
             </a:lvl3pPr>
-            <a:lvl4pPr indent="0" lvl="3" marL="0" algn="r">
+            <a:lvl4pPr marL="0" lvl="3" indent="0" algn="r">
               <a:spcBef>
                 <a:spcPts val="0"/>
               </a:spcBef>
               <a:buNone/>
               <a:defRPr/>
             </a:lvl4pPr>
-            <a:lvl5pPr indent="0" lvl="4" marL="0" algn="r">
+            <a:lvl5pPr marL="0" lvl="4" indent="0" algn="r">
               <a:spcBef>
                 <a:spcPts val="0"/>
               </a:spcBef>
               <a:buNone/>
               <a:defRPr/>
             </a:lvl5pPr>
-            <a:lvl6pPr indent="0" lvl="5" marL="0" algn="r">
+            <a:lvl6pPr marL="0" lvl="5" indent="0" algn="r">
               <a:spcBef>
                 <a:spcPts val="0"/>
               </a:spcBef>
               <a:buNone/>
               <a:defRPr/>
             </a:lvl6pPr>
-            <a:lvl7pPr indent="0" lvl="6" marL="0" algn="r">
+            <a:lvl7pPr marL="0" lvl="6" indent="0" algn="r">
               <a:spcBef>
                 <a:spcPts val="0"/>
               </a:spcBef>
               <a:buNone/>
               <a:defRPr/>
             </a:lvl7pPr>
-            <a:lvl8pPr indent="0" lvl="7" marL="0" algn="r">
+            <a:lvl8pPr marL="0" lvl="7" indent="0" algn="r">
               <a:spcBef>
                 <a:spcPts val="0"/>
               </a:spcBef>
               <a:buNone/>
               <a:defRPr/>
             </a:lvl8pPr>
-            <a:lvl9pPr indent="0" lvl="8" marL="0" algn="r">
+            <a:lvl9pPr marL="0" lvl="8" indent="0" algn="r">
               <a:spcBef>
                 <a:spcPts val="0"/>
               </a:spcBef>
@@ -3218,7 +3326,7 @@
             </a:lvl9pPr>
           </a:lstStyle>
           <a:p>
-            <a:pPr indent="0" lvl="0" marL="0" rtl="0" algn="r">
+            <a:pPr marL="0" lvl="0" indent="0" algn="r" rtl="0">
               <a:spcBef>
                 <a:spcPts val="0"/>
               </a:spcBef>
@@ -3229,7 +3337,7 @@
             </a:pPr>
             <a:fld id="{00000000-1234-1234-1234-123412341234}" type="slidenum">
               <a:rPr lang="en-US"/>
-              <a:t>‹#›</a:t>
+              <a:t>‹nº›</a:t>
             </a:fld>
             <a:endParaRPr/>
           </a:p>
@@ -3244,11 +3352,11 @@
 </file>
 
 <file path=ppt/slideLayouts/slideLayout2.xml><?xml version="1.0" encoding="utf-8"?>
-<p:sldLayout xmlns:a="http://schemas.openxmlformats.org/drawingml/2006/main" xmlns:r="http://schemas.openxmlformats.org/officeDocument/2006/relationships" xmlns:mc="http://schemas.openxmlformats.org/markup-compatibility/2006" xmlns:mv="urn:schemas-microsoft-com:mac:vml" xmlns:p="http://schemas.openxmlformats.org/presentationml/2006/main" xmlns:c="http://schemas.openxmlformats.org/drawingml/2006/chart" xmlns:dgm="http://schemas.openxmlformats.org/drawingml/2006/diagram" xmlns:o="urn:schemas-microsoft-com:office:office" xmlns:v="urn:schemas-microsoft-com:vml" xmlns:pvml="urn:schemas-microsoft-com:office:powerpoint" xmlns:com="http://schemas.openxmlformats.org/drawingml/2006/compatibility" xmlns:p14="http://schemas.microsoft.com/office/powerpoint/2010/main" xmlns:p15="http://schemas.microsoft.com/office/powerpoint/2012/main" xmlns:ahyp="http://schemas.microsoft.com/office/drawing/2018/hyperlinkcolor" matchingName="Title Slide" type="title">
+<p:sldLayout xmlns:a="http://schemas.openxmlformats.org/drawingml/2006/main" xmlns:r="http://schemas.openxmlformats.org/officeDocument/2006/relationships" xmlns:p="http://schemas.openxmlformats.org/presentationml/2006/main" matchingName="Title Slide" type="title">
   <p:cSld name="TITLE">
     <p:spTree>
       <p:nvGrpSpPr>
-        <p:cNvPr id="15" name="Shape 15"/>
+        <p:cNvPr id="1" name="Shape 15"/>
         <p:cNvGrpSpPr/>
         <p:nvPr/>
       </p:nvGrpSpPr>
@@ -3263,7 +3371,9 @@
       <p:sp>
         <p:nvSpPr>
           <p:cNvPr id="16" name="Google Shape;16;p3"/>
-          <p:cNvSpPr txBox="1"/>
+          <p:cNvSpPr txBox="1">
+            <a:spLocks noGrp="1"/>
+          </p:cNvSpPr>
           <p:nvPr>
             <p:ph type="ctrTitle"/>
           </p:nvPr>
@@ -3282,7 +3392,7 @@
           </a:ln>
         </p:spPr>
         <p:txBody>
-          <a:bodyPr anchorCtr="0" anchor="ctr" bIns="45700" lIns="91425" spcFirstLastPara="1" rIns="91425" wrap="square" tIns="45700">
+          <a:bodyPr spcFirstLastPara="1" wrap="square" lIns="91425" tIns="45700" rIns="91425" bIns="45700" anchor="ctr" anchorCtr="0">
             <a:normAutofit/>
           </a:bodyPr>
           <a:lstStyle>
@@ -3389,15 +3499,19 @@
               <a:defRPr/>
             </a:lvl9pPr>
           </a:lstStyle>
-          <a:p/>
+          <a:p>
+            <a:endParaRPr/>
+          </a:p>
         </p:txBody>
       </p:sp>
       <p:sp>
         <p:nvSpPr>
           <p:cNvPr id="17" name="Google Shape;17;p3"/>
-          <p:cNvSpPr txBox="1"/>
+          <p:cNvSpPr txBox="1">
+            <a:spLocks noGrp="1"/>
+          </p:cNvSpPr>
           <p:nvPr>
-            <p:ph idx="1" type="subTitle"/>
+            <p:ph type="subTitle" idx="1"/>
           </p:nvPr>
         </p:nvSpPr>
         <p:spPr>
@@ -3414,7 +3528,7 @@
           </a:ln>
         </p:spPr>
         <p:txBody>
-          <a:bodyPr anchorCtr="0" anchor="t" bIns="45700" lIns="91425" spcFirstLastPara="1" rIns="91425" wrap="square" tIns="45700">
+          <a:bodyPr spcFirstLastPara="1" wrap="square" lIns="91425" tIns="45700" rIns="91425" bIns="45700" anchor="t" anchorCtr="0">
             <a:normAutofit/>
           </a:bodyPr>
           <a:lstStyle>
@@ -3581,15 +3695,19 @@
               </a:defRPr>
             </a:lvl9pPr>
           </a:lstStyle>
-          <a:p/>
+          <a:p>
+            <a:endParaRPr/>
+          </a:p>
         </p:txBody>
       </p:sp>
       <p:sp>
         <p:nvSpPr>
           <p:cNvPr id="18" name="Google Shape;18;p3"/>
-          <p:cNvSpPr txBox="1"/>
+          <p:cNvSpPr txBox="1">
+            <a:spLocks noGrp="1"/>
+          </p:cNvSpPr>
           <p:nvPr>
-            <p:ph idx="10" type="dt"/>
+            <p:ph type="dt" idx="10"/>
           </p:nvPr>
         </p:nvSpPr>
         <p:spPr>
@@ -3606,7 +3724,7 @@
           </a:ln>
         </p:spPr>
         <p:txBody>
-          <a:bodyPr anchorCtr="0" anchor="ctr" bIns="45700" lIns="91425" spcFirstLastPara="1" rIns="91425" wrap="square" tIns="45700">
+          <a:bodyPr spcFirstLastPara="1" wrap="square" lIns="91425" tIns="45700" rIns="91425" bIns="45700" anchor="ctr" anchorCtr="0">
             <a:noAutofit/>
           </a:bodyPr>
           <a:lstStyle>
@@ -3710,15 +3828,19 @@
               <a:defRPr/>
             </a:lvl9pPr>
           </a:lstStyle>
-          <a:p/>
+          <a:p>
+            <a:endParaRPr/>
+          </a:p>
         </p:txBody>
       </p:sp>
       <p:sp>
         <p:nvSpPr>
           <p:cNvPr id="19" name="Google Shape;19;p3"/>
-          <p:cNvSpPr txBox="1"/>
+          <p:cNvSpPr txBox="1">
+            <a:spLocks noGrp="1"/>
+          </p:cNvSpPr>
           <p:nvPr>
-            <p:ph idx="11" type="ftr"/>
+            <p:ph type="ftr" idx="11"/>
           </p:nvPr>
         </p:nvSpPr>
         <p:spPr>
@@ -3735,7 +3857,7 @@
           </a:ln>
         </p:spPr>
         <p:txBody>
-          <a:bodyPr anchorCtr="0" anchor="ctr" bIns="45700" lIns="91425" spcFirstLastPara="1" rIns="91425" wrap="square" tIns="45700">
+          <a:bodyPr spcFirstLastPara="1" wrap="square" lIns="91425" tIns="45700" rIns="91425" bIns="45700" anchor="ctr" anchorCtr="0">
             <a:noAutofit/>
           </a:bodyPr>
           <a:lstStyle>
@@ -3839,15 +3961,19 @@
               <a:defRPr/>
             </a:lvl9pPr>
           </a:lstStyle>
-          <a:p/>
+          <a:p>
+            <a:endParaRPr/>
+          </a:p>
         </p:txBody>
       </p:sp>
       <p:sp>
         <p:nvSpPr>
           <p:cNvPr id="20" name="Google Shape;20;p3"/>
-          <p:cNvSpPr txBox="1"/>
+          <p:cNvSpPr txBox="1">
+            <a:spLocks noGrp="1"/>
+          </p:cNvSpPr>
           <p:nvPr>
-            <p:ph idx="12" type="sldNum"/>
+            <p:ph type="sldNum" idx="12"/>
           </p:nvPr>
         </p:nvSpPr>
         <p:spPr>
@@ -3864,67 +3990,67 @@
           </a:ln>
         </p:spPr>
         <p:txBody>
-          <a:bodyPr anchorCtr="0" anchor="ctr" bIns="45700" lIns="91425" spcFirstLastPara="1" rIns="91425" wrap="square" tIns="45700">
+          <a:bodyPr spcFirstLastPara="1" wrap="square" lIns="91425" tIns="45700" rIns="91425" bIns="45700" anchor="ctr" anchorCtr="0">
             <a:noAutofit/>
           </a:bodyPr>
           <a:lstStyle>
-            <a:lvl1pPr indent="0" lvl="0" marL="0" algn="r">
+            <a:lvl1pPr marL="0" lvl="0" indent="0" algn="r">
               <a:spcBef>
                 <a:spcPts val="0"/>
               </a:spcBef>
               <a:buNone/>
               <a:defRPr/>
             </a:lvl1pPr>
-            <a:lvl2pPr indent="0" lvl="1" marL="0" algn="r">
+            <a:lvl2pPr marL="0" lvl="1" indent="0" algn="r">
               <a:spcBef>
                 <a:spcPts val="0"/>
               </a:spcBef>
               <a:buNone/>
               <a:defRPr/>
             </a:lvl2pPr>
-            <a:lvl3pPr indent="0" lvl="2" marL="0" algn="r">
+            <a:lvl3pPr marL="0" lvl="2" indent="0" algn="r">
               <a:spcBef>
                 <a:spcPts val="0"/>
               </a:spcBef>
               <a:buNone/>
               <a:defRPr/>
             </a:lvl3pPr>
-            <a:lvl4pPr indent="0" lvl="3" marL="0" algn="r">
+            <a:lvl4pPr marL="0" lvl="3" indent="0" algn="r">
               <a:spcBef>
                 <a:spcPts val="0"/>
               </a:spcBef>
               <a:buNone/>
               <a:defRPr/>
             </a:lvl4pPr>
-            <a:lvl5pPr indent="0" lvl="4" marL="0" algn="r">
+            <a:lvl5pPr marL="0" lvl="4" indent="0" algn="r">
               <a:spcBef>
                 <a:spcPts val="0"/>
               </a:spcBef>
               <a:buNone/>
               <a:defRPr/>
             </a:lvl5pPr>
-            <a:lvl6pPr indent="0" lvl="5" marL="0" algn="r">
+            <a:lvl6pPr marL="0" lvl="5" indent="0" algn="r">
               <a:spcBef>
                 <a:spcPts val="0"/>
               </a:spcBef>
               <a:buNone/>
               <a:defRPr/>
             </a:lvl6pPr>
-            <a:lvl7pPr indent="0" lvl="6" marL="0" algn="r">
+            <a:lvl7pPr marL="0" lvl="6" indent="0" algn="r">
               <a:spcBef>
                 <a:spcPts val="0"/>
               </a:spcBef>
               <a:buNone/>
               <a:defRPr/>
             </a:lvl7pPr>
-            <a:lvl8pPr indent="0" lvl="7" marL="0" algn="r">
+            <a:lvl8pPr marL="0" lvl="7" indent="0" algn="r">
               <a:spcBef>
                 <a:spcPts val="0"/>
               </a:spcBef>
               <a:buNone/>
               <a:defRPr/>
             </a:lvl8pPr>
-            <a:lvl9pPr indent="0" lvl="8" marL="0" algn="r">
+            <a:lvl9pPr marL="0" lvl="8" indent="0" algn="r">
               <a:spcBef>
                 <a:spcPts val="0"/>
               </a:spcBef>
@@ -3933,7 +4059,7 @@
             </a:lvl9pPr>
           </a:lstStyle>
           <a:p>
-            <a:pPr indent="0" lvl="0" marL="0" rtl="0" algn="r">
+            <a:pPr marL="0" lvl="0" indent="0" algn="r" rtl="0">
               <a:spcBef>
                 <a:spcPts val="0"/>
               </a:spcBef>
@@ -3944,7 +4070,7 @@
             </a:pPr>
             <a:fld id="{00000000-1234-1234-1234-123412341234}" type="slidenum">
               <a:rPr lang="en-US"/>
-              <a:t>‹#›</a:t>
+              <a:t>‹nº›</a:t>
             </a:fld>
             <a:endParaRPr/>
           </a:p>
@@ -3959,11 +4085,11 @@
 </file>
 
 <file path=ppt/slideLayouts/slideLayout3.xml><?xml version="1.0" encoding="utf-8"?>
-<p:sldLayout xmlns:a="http://schemas.openxmlformats.org/drawingml/2006/main" xmlns:r="http://schemas.openxmlformats.org/officeDocument/2006/relationships" xmlns:mc="http://schemas.openxmlformats.org/markup-compatibility/2006" xmlns:mv="urn:schemas-microsoft-com:mac:vml" xmlns:p="http://schemas.openxmlformats.org/presentationml/2006/main" xmlns:c="http://schemas.openxmlformats.org/drawingml/2006/chart" xmlns:dgm="http://schemas.openxmlformats.org/drawingml/2006/diagram" xmlns:o="urn:schemas-microsoft-com:office:office" xmlns:v="urn:schemas-microsoft-com:vml" xmlns:pvml="urn:schemas-microsoft-com:office:powerpoint" xmlns:com="http://schemas.openxmlformats.org/drawingml/2006/compatibility" xmlns:p14="http://schemas.microsoft.com/office/powerpoint/2010/main" xmlns:p15="http://schemas.microsoft.com/office/powerpoint/2012/main" xmlns:ahyp="http://schemas.microsoft.com/office/drawing/2018/hyperlinkcolor" matchingName="Title and Content" type="obj">
+<p:sldLayout xmlns:a="http://schemas.openxmlformats.org/drawingml/2006/main" xmlns:r="http://schemas.openxmlformats.org/officeDocument/2006/relationships" xmlns:p="http://schemas.openxmlformats.org/presentationml/2006/main" matchingName="Title and Content" type="obj">
   <p:cSld name="OBJECT">
     <p:spTree>
       <p:nvGrpSpPr>
-        <p:cNvPr id="21" name="Shape 21"/>
+        <p:cNvPr id="1" name="Shape 21"/>
         <p:cNvGrpSpPr/>
         <p:nvPr/>
       </p:nvGrpSpPr>
@@ -3978,7 +4104,9 @@
       <p:sp>
         <p:nvSpPr>
           <p:cNvPr id="22" name="Google Shape;22;p4"/>
-          <p:cNvSpPr txBox="1"/>
+          <p:cNvSpPr txBox="1">
+            <a:spLocks noGrp="1"/>
+          </p:cNvSpPr>
           <p:nvPr>
             <p:ph type="title"/>
           </p:nvPr>
@@ -3997,7 +4125,7 @@
           </a:ln>
         </p:spPr>
         <p:txBody>
-          <a:bodyPr anchorCtr="0" anchor="ctr" bIns="45700" lIns="91425" spcFirstLastPara="1" rIns="91425" wrap="square" tIns="45700">
+          <a:bodyPr spcFirstLastPara="1" wrap="square" lIns="91425" tIns="45700" rIns="91425" bIns="45700" anchor="ctr" anchorCtr="0">
             <a:normAutofit/>
           </a:bodyPr>
           <a:lstStyle>
@@ -4104,15 +4232,19 @@
               <a:defRPr/>
             </a:lvl9pPr>
           </a:lstStyle>
-          <a:p/>
+          <a:p>
+            <a:endParaRPr/>
+          </a:p>
         </p:txBody>
       </p:sp>
       <p:sp>
         <p:nvSpPr>
           <p:cNvPr id="23" name="Google Shape;23;p4"/>
-          <p:cNvSpPr txBox="1"/>
+          <p:cNvSpPr txBox="1">
+            <a:spLocks noGrp="1"/>
+          </p:cNvSpPr>
           <p:nvPr>
-            <p:ph idx="1" type="body"/>
+            <p:ph type="body" idx="1"/>
           </p:nvPr>
         </p:nvSpPr>
         <p:spPr>
@@ -4129,11 +4261,11 @@
           </a:ln>
         </p:spPr>
         <p:txBody>
-          <a:bodyPr anchorCtr="0" anchor="t" bIns="45700" lIns="91425" spcFirstLastPara="1" rIns="91425" wrap="square" tIns="45700">
+          <a:bodyPr spcFirstLastPara="1" wrap="square" lIns="91425" tIns="45700" rIns="91425" bIns="45700" anchor="t" anchorCtr="0">
             <a:normAutofit/>
           </a:bodyPr>
           <a:lstStyle>
-            <a:lvl1pPr indent="-342900" lvl="0" marL="457200" algn="l">
+            <a:lvl1pPr marL="457200" lvl="0" indent="-342900" algn="l">
               <a:spcBef>
                 <a:spcPts val="360"/>
               </a:spcBef>
@@ -4147,7 +4279,7 @@
               <a:buChar char="•"/>
               <a:defRPr/>
             </a:lvl1pPr>
-            <a:lvl2pPr indent="-342900" lvl="1" marL="914400" algn="l">
+            <a:lvl2pPr marL="914400" lvl="1" indent="-342900" algn="l">
               <a:spcBef>
                 <a:spcPts val="360"/>
               </a:spcBef>
@@ -4161,7 +4293,7 @@
               <a:buChar char="–"/>
               <a:defRPr/>
             </a:lvl2pPr>
-            <a:lvl3pPr indent="-342900" lvl="2" marL="1371600" algn="l">
+            <a:lvl3pPr marL="1371600" lvl="2" indent="-342900" algn="l">
               <a:spcBef>
                 <a:spcPts val="360"/>
               </a:spcBef>
@@ -4175,7 +4307,7 @@
               <a:buChar char="•"/>
               <a:defRPr/>
             </a:lvl3pPr>
-            <a:lvl4pPr indent="-342900" lvl="3" marL="1828800" algn="l">
+            <a:lvl4pPr marL="1828800" lvl="3" indent="-342900" algn="l">
               <a:spcBef>
                 <a:spcPts val="360"/>
               </a:spcBef>
@@ -4189,7 +4321,7 @@
               <a:buChar char="–"/>
               <a:defRPr/>
             </a:lvl4pPr>
-            <a:lvl5pPr indent="-342900" lvl="4" marL="2286000" algn="l">
+            <a:lvl5pPr marL="2286000" lvl="4" indent="-342900" algn="l">
               <a:spcBef>
                 <a:spcPts val="360"/>
               </a:spcBef>
@@ -4203,7 +4335,7 @@
               <a:buChar char="»"/>
               <a:defRPr/>
             </a:lvl5pPr>
-            <a:lvl6pPr indent="-342900" lvl="5" marL="2743200" algn="l">
+            <a:lvl6pPr marL="2743200" lvl="5" indent="-342900" algn="l">
               <a:spcBef>
                 <a:spcPts val="360"/>
               </a:spcBef>
@@ -4217,7 +4349,7 @@
               <a:buChar char="•"/>
               <a:defRPr/>
             </a:lvl6pPr>
-            <a:lvl7pPr indent="-342900" lvl="6" marL="3200400" algn="l">
+            <a:lvl7pPr marL="3200400" lvl="6" indent="-342900" algn="l">
               <a:spcBef>
                 <a:spcPts val="360"/>
               </a:spcBef>
@@ -4231,7 +4363,7 @@
               <a:buChar char="•"/>
               <a:defRPr/>
             </a:lvl7pPr>
-            <a:lvl8pPr indent="-342900" lvl="7" marL="3657600" algn="l">
+            <a:lvl8pPr marL="3657600" lvl="7" indent="-342900" algn="l">
               <a:spcBef>
                 <a:spcPts val="360"/>
               </a:spcBef>
@@ -4245,7 +4377,7 @@
               <a:buChar char="•"/>
               <a:defRPr/>
             </a:lvl8pPr>
-            <a:lvl9pPr indent="-342900" lvl="8" marL="4114800" algn="l">
+            <a:lvl9pPr marL="4114800" lvl="8" indent="-342900" algn="l">
               <a:spcBef>
                 <a:spcPts val="360"/>
               </a:spcBef>
@@ -4260,15 +4392,19 @@
               <a:defRPr/>
             </a:lvl9pPr>
           </a:lstStyle>
-          <a:p/>
+          <a:p>
+            <a:endParaRPr/>
+          </a:p>
         </p:txBody>
       </p:sp>
       <p:sp>
         <p:nvSpPr>
           <p:cNvPr id="24" name="Google Shape;24;p4"/>
-          <p:cNvSpPr txBox="1"/>
+          <p:cNvSpPr txBox="1">
+            <a:spLocks noGrp="1"/>
+          </p:cNvSpPr>
           <p:nvPr>
-            <p:ph idx="10" type="dt"/>
+            <p:ph type="dt" idx="10"/>
           </p:nvPr>
         </p:nvSpPr>
         <p:spPr>
@@ -4285,7 +4421,7 @@
           </a:ln>
         </p:spPr>
         <p:txBody>
-          <a:bodyPr anchorCtr="0" anchor="ctr" bIns="45700" lIns="91425" spcFirstLastPara="1" rIns="91425" wrap="square" tIns="45700">
+          <a:bodyPr spcFirstLastPara="1" wrap="square" lIns="91425" tIns="45700" rIns="91425" bIns="45700" anchor="ctr" anchorCtr="0">
             <a:noAutofit/>
           </a:bodyPr>
           <a:lstStyle>
@@ -4389,15 +4525,19 @@
               <a:defRPr/>
             </a:lvl9pPr>
           </a:lstStyle>
-          <a:p/>
+          <a:p>
+            <a:endParaRPr/>
+          </a:p>
         </p:txBody>
       </p:sp>
       <p:sp>
         <p:nvSpPr>
           <p:cNvPr id="25" name="Google Shape;25;p4"/>
-          <p:cNvSpPr txBox="1"/>
+          <p:cNvSpPr txBox="1">
+            <a:spLocks noGrp="1"/>
+          </p:cNvSpPr>
           <p:nvPr>
-            <p:ph idx="11" type="ftr"/>
+            <p:ph type="ftr" idx="11"/>
           </p:nvPr>
         </p:nvSpPr>
         <p:spPr>
@@ -4414,7 +4554,7 @@
           </a:ln>
         </p:spPr>
         <p:txBody>
-          <a:bodyPr anchorCtr="0" anchor="ctr" bIns="45700" lIns="91425" spcFirstLastPara="1" rIns="91425" wrap="square" tIns="45700">
+          <a:bodyPr spcFirstLastPara="1" wrap="square" lIns="91425" tIns="45700" rIns="91425" bIns="45700" anchor="ctr" anchorCtr="0">
             <a:noAutofit/>
           </a:bodyPr>
           <a:lstStyle>
@@ -4518,15 +4658,19 @@
               <a:defRPr/>
             </a:lvl9pPr>
           </a:lstStyle>
-          <a:p/>
+          <a:p>
+            <a:endParaRPr/>
+          </a:p>
         </p:txBody>
       </p:sp>
       <p:sp>
         <p:nvSpPr>
           <p:cNvPr id="26" name="Google Shape;26;p4"/>
-          <p:cNvSpPr txBox="1"/>
+          <p:cNvSpPr txBox="1">
+            <a:spLocks noGrp="1"/>
+          </p:cNvSpPr>
           <p:nvPr>
-            <p:ph idx="12" type="sldNum"/>
+            <p:ph type="sldNum" idx="12"/>
           </p:nvPr>
         </p:nvSpPr>
         <p:spPr>
@@ -4543,67 +4687,67 @@
           </a:ln>
         </p:spPr>
         <p:txBody>
-          <a:bodyPr anchorCtr="0" anchor="ctr" bIns="45700" lIns="91425" spcFirstLastPara="1" rIns="91425" wrap="square" tIns="45700">
+          <a:bodyPr spcFirstLastPara="1" wrap="square" lIns="91425" tIns="45700" rIns="91425" bIns="45700" anchor="ctr" anchorCtr="0">
             <a:noAutofit/>
           </a:bodyPr>
           <a:lstStyle>
-            <a:lvl1pPr indent="0" lvl="0" marL="0" algn="r">
+            <a:lvl1pPr marL="0" lvl="0" indent="0" algn="r">
               <a:spcBef>
                 <a:spcPts val="0"/>
               </a:spcBef>
               <a:buNone/>
               <a:defRPr/>
             </a:lvl1pPr>
-            <a:lvl2pPr indent="0" lvl="1" marL="0" algn="r">
+            <a:lvl2pPr marL="0" lvl="1" indent="0" algn="r">
               <a:spcBef>
                 <a:spcPts val="0"/>
               </a:spcBef>
               <a:buNone/>
               <a:defRPr/>
             </a:lvl2pPr>
-            <a:lvl3pPr indent="0" lvl="2" marL="0" algn="r">
+            <a:lvl3pPr marL="0" lvl="2" indent="0" algn="r">
               <a:spcBef>
                 <a:spcPts val="0"/>
               </a:spcBef>
               <a:buNone/>
               <a:defRPr/>
             </a:lvl3pPr>
-            <a:lvl4pPr indent="0" lvl="3" marL="0" algn="r">
+            <a:lvl4pPr marL="0" lvl="3" indent="0" algn="r">
               <a:spcBef>
                 <a:spcPts val="0"/>
               </a:spcBef>
               <a:buNone/>
               <a:defRPr/>
             </a:lvl4pPr>
-            <a:lvl5pPr indent="0" lvl="4" marL="0" algn="r">
+            <a:lvl5pPr marL="0" lvl="4" indent="0" algn="r">
               <a:spcBef>
                 <a:spcPts val="0"/>
               </a:spcBef>
               <a:buNone/>
               <a:defRPr/>
             </a:lvl5pPr>
-            <a:lvl6pPr indent="0" lvl="5" marL="0" algn="r">
+            <a:lvl6pPr marL="0" lvl="5" indent="0" algn="r">
               <a:spcBef>
                 <a:spcPts val="0"/>
               </a:spcBef>
               <a:buNone/>
               <a:defRPr/>
             </a:lvl6pPr>
-            <a:lvl7pPr indent="0" lvl="6" marL="0" algn="r">
+            <a:lvl7pPr marL="0" lvl="6" indent="0" algn="r">
               <a:spcBef>
                 <a:spcPts val="0"/>
               </a:spcBef>
               <a:buNone/>
               <a:defRPr/>
             </a:lvl7pPr>
-            <a:lvl8pPr indent="0" lvl="7" marL="0" algn="r">
+            <a:lvl8pPr marL="0" lvl="7" indent="0" algn="r">
               <a:spcBef>
                 <a:spcPts val="0"/>
               </a:spcBef>
               <a:buNone/>
               <a:defRPr/>
             </a:lvl8pPr>
-            <a:lvl9pPr indent="0" lvl="8" marL="0" algn="r">
+            <a:lvl9pPr marL="0" lvl="8" indent="0" algn="r">
               <a:spcBef>
                 <a:spcPts val="0"/>
               </a:spcBef>
@@ -4612,7 +4756,7 @@
             </a:lvl9pPr>
           </a:lstStyle>
           <a:p>
-            <a:pPr indent="0" lvl="0" marL="0" rtl="0" algn="r">
+            <a:pPr marL="0" lvl="0" indent="0" algn="r" rtl="0">
               <a:spcBef>
                 <a:spcPts val="0"/>
               </a:spcBef>
@@ -4623,7 +4767,7 @@
             </a:pPr>
             <a:fld id="{00000000-1234-1234-1234-123412341234}" type="slidenum">
               <a:rPr lang="en-US"/>
-              <a:t>‹#›</a:t>
+              <a:t>‹nº›</a:t>
             </a:fld>
             <a:endParaRPr/>
           </a:p>
@@ -4638,11 +4782,11 @@
 </file>
 
 <file path=ppt/slideLayouts/slideLayout4.xml><?xml version="1.0" encoding="utf-8"?>
-<p:sldLayout xmlns:a="http://schemas.openxmlformats.org/drawingml/2006/main" xmlns:r="http://schemas.openxmlformats.org/officeDocument/2006/relationships" xmlns:mc="http://schemas.openxmlformats.org/markup-compatibility/2006" xmlns:mv="urn:schemas-microsoft-com:mac:vml" xmlns:p="http://schemas.openxmlformats.org/presentationml/2006/main" xmlns:c="http://schemas.openxmlformats.org/drawingml/2006/chart" xmlns:dgm="http://schemas.openxmlformats.org/drawingml/2006/diagram" xmlns:o="urn:schemas-microsoft-com:office:office" xmlns:v="urn:schemas-microsoft-com:vml" xmlns:pvml="urn:schemas-microsoft-com:office:powerpoint" xmlns:com="http://schemas.openxmlformats.org/drawingml/2006/compatibility" xmlns:p14="http://schemas.microsoft.com/office/powerpoint/2010/main" xmlns:p15="http://schemas.microsoft.com/office/powerpoint/2012/main" xmlns:ahyp="http://schemas.microsoft.com/office/drawing/2018/hyperlinkcolor" matchingName="Section Header" type="secHead">
+<p:sldLayout xmlns:a="http://schemas.openxmlformats.org/drawingml/2006/main" xmlns:r="http://schemas.openxmlformats.org/officeDocument/2006/relationships" xmlns:p="http://schemas.openxmlformats.org/presentationml/2006/main" matchingName="Section Header" type="secHead">
   <p:cSld name="SECTION_HEADER">
     <p:spTree>
       <p:nvGrpSpPr>
-        <p:cNvPr id="27" name="Shape 27"/>
+        <p:cNvPr id="1" name="Shape 27"/>
         <p:cNvGrpSpPr/>
         <p:nvPr/>
       </p:nvGrpSpPr>
@@ -4657,7 +4801,9 @@
       <p:sp>
         <p:nvSpPr>
           <p:cNvPr id="28" name="Google Shape;28;p5"/>
-          <p:cNvSpPr txBox="1"/>
+          <p:cNvSpPr txBox="1">
+            <a:spLocks noGrp="1"/>
+          </p:cNvSpPr>
           <p:nvPr>
             <p:ph type="title"/>
           </p:nvPr>
@@ -4676,7 +4822,7 @@
           </a:ln>
         </p:spPr>
         <p:txBody>
-          <a:bodyPr anchorCtr="0" anchor="t" bIns="45700" lIns="91425" spcFirstLastPara="1" rIns="91425" wrap="square" tIns="45700">
+          <a:bodyPr spcFirstLastPara="1" wrap="square" lIns="91425" tIns="45700" rIns="91425" bIns="45700" anchor="t" anchorCtr="0">
             <a:normAutofit/>
           </a:bodyPr>
           <a:lstStyle>
@@ -4693,7 +4839,7 @@
               <a:buSzPts val="4000"/>
               <a:buFont typeface="Calibri"/>
               <a:buNone/>
-              <a:defRPr b="1" sz="4000" cap="none"/>
+              <a:defRPr sz="4000" b="1" cap="none"/>
             </a:lvl1pPr>
             <a:lvl2pPr lvl="1">
               <a:spcBef>
@@ -4784,15 +4930,19 @@
               <a:defRPr/>
             </a:lvl9pPr>
           </a:lstStyle>
-          <a:p/>
+          <a:p>
+            <a:endParaRPr/>
+          </a:p>
         </p:txBody>
       </p:sp>
       <p:sp>
         <p:nvSpPr>
           <p:cNvPr id="29" name="Google Shape;29;p5"/>
-          <p:cNvSpPr txBox="1"/>
+          <p:cNvSpPr txBox="1">
+            <a:spLocks noGrp="1"/>
+          </p:cNvSpPr>
           <p:nvPr>
-            <p:ph idx="1" type="body"/>
+            <p:ph type="body" idx="1"/>
           </p:nvPr>
         </p:nvSpPr>
         <p:spPr>
@@ -4809,11 +4959,11 @@
           </a:ln>
         </p:spPr>
         <p:txBody>
-          <a:bodyPr anchorCtr="0" anchor="b" bIns="45700" lIns="91425" spcFirstLastPara="1" rIns="91425" wrap="square" tIns="45700">
+          <a:bodyPr spcFirstLastPara="1" wrap="square" lIns="91425" tIns="45700" rIns="91425" bIns="45700" anchor="b" anchorCtr="0">
             <a:normAutofit/>
           </a:bodyPr>
           <a:lstStyle>
-            <a:lvl1pPr indent="-228600" lvl="0" marL="457200" algn="l">
+            <a:lvl1pPr marL="457200" lvl="0" indent="-228600" algn="l">
               <a:spcBef>
                 <a:spcPts val="400"/>
               </a:spcBef>
@@ -4831,7 +4981,7 @@
                 </a:solidFill>
               </a:defRPr>
             </a:lvl1pPr>
-            <a:lvl2pPr indent="-228600" lvl="1" marL="914400" algn="l">
+            <a:lvl2pPr marL="914400" lvl="1" indent="-228600" algn="l">
               <a:spcBef>
                 <a:spcPts val="360"/>
               </a:spcBef>
@@ -4849,7 +4999,7 @@
                 </a:solidFill>
               </a:defRPr>
             </a:lvl2pPr>
-            <a:lvl3pPr indent="-228600" lvl="2" marL="1371600" algn="l">
+            <a:lvl3pPr marL="1371600" lvl="2" indent="-228600" algn="l">
               <a:spcBef>
                 <a:spcPts val="320"/>
               </a:spcBef>
@@ -4867,7 +5017,7 @@
                 </a:solidFill>
               </a:defRPr>
             </a:lvl3pPr>
-            <a:lvl4pPr indent="-228600" lvl="3" marL="1828800" algn="l">
+            <a:lvl4pPr marL="1828800" lvl="3" indent="-228600" algn="l">
               <a:spcBef>
                 <a:spcPts val="280"/>
               </a:spcBef>
@@ -4885,7 +5035,7 @@
                 </a:solidFill>
               </a:defRPr>
             </a:lvl4pPr>
-            <a:lvl5pPr indent="-228600" lvl="4" marL="2286000" algn="l">
+            <a:lvl5pPr marL="2286000" lvl="4" indent="-228600" algn="l">
               <a:spcBef>
                 <a:spcPts val="280"/>
               </a:spcBef>
@@ -4903,7 +5053,7 @@
                 </a:solidFill>
               </a:defRPr>
             </a:lvl5pPr>
-            <a:lvl6pPr indent="-228600" lvl="5" marL="2743200" algn="l">
+            <a:lvl6pPr marL="2743200" lvl="5" indent="-228600" algn="l">
               <a:spcBef>
                 <a:spcPts val="280"/>
               </a:spcBef>
@@ -4921,7 +5071,7 @@
                 </a:solidFill>
               </a:defRPr>
             </a:lvl6pPr>
-            <a:lvl7pPr indent="-228600" lvl="6" marL="3200400" algn="l">
+            <a:lvl7pPr marL="3200400" lvl="6" indent="-228600" algn="l">
               <a:spcBef>
                 <a:spcPts val="280"/>
               </a:spcBef>
@@ -4939,7 +5089,7 @@
                 </a:solidFill>
               </a:defRPr>
             </a:lvl7pPr>
-            <a:lvl8pPr indent="-228600" lvl="7" marL="3657600" algn="l">
+            <a:lvl8pPr marL="3657600" lvl="7" indent="-228600" algn="l">
               <a:spcBef>
                 <a:spcPts val="280"/>
               </a:spcBef>
@@ -4957,7 +5107,7 @@
                 </a:solidFill>
               </a:defRPr>
             </a:lvl8pPr>
-            <a:lvl9pPr indent="-228600" lvl="8" marL="4114800" algn="l">
+            <a:lvl9pPr marL="4114800" lvl="8" indent="-228600" algn="l">
               <a:spcBef>
                 <a:spcPts val="280"/>
               </a:spcBef>
@@ -4976,15 +5126,19 @@
               </a:defRPr>
             </a:lvl9pPr>
           </a:lstStyle>
-          <a:p/>
+          <a:p>
+            <a:endParaRPr/>
+          </a:p>
         </p:txBody>
       </p:sp>
       <p:sp>
         <p:nvSpPr>
           <p:cNvPr id="30" name="Google Shape;30;p5"/>
-          <p:cNvSpPr txBox="1"/>
+          <p:cNvSpPr txBox="1">
+            <a:spLocks noGrp="1"/>
+          </p:cNvSpPr>
           <p:nvPr>
-            <p:ph idx="10" type="dt"/>
+            <p:ph type="dt" idx="10"/>
           </p:nvPr>
         </p:nvSpPr>
         <p:spPr>
@@ -5001,7 +5155,7 @@
           </a:ln>
         </p:spPr>
         <p:txBody>
-          <a:bodyPr anchorCtr="0" anchor="ctr" bIns="45700" lIns="91425" spcFirstLastPara="1" rIns="91425" wrap="square" tIns="45700">
+          <a:bodyPr spcFirstLastPara="1" wrap="square" lIns="91425" tIns="45700" rIns="91425" bIns="45700" anchor="ctr" anchorCtr="0">
             <a:noAutofit/>
           </a:bodyPr>
           <a:lstStyle>
@@ -5105,15 +5259,19 @@
               <a:defRPr/>
             </a:lvl9pPr>
           </a:lstStyle>
-          <a:p/>
+          <a:p>
+            <a:endParaRPr/>
+          </a:p>
         </p:txBody>
       </p:sp>
       <p:sp>
         <p:nvSpPr>
           <p:cNvPr id="31" name="Google Shape;31;p5"/>
-          <p:cNvSpPr txBox="1"/>
+          <p:cNvSpPr txBox="1">
+            <a:spLocks noGrp="1"/>
+          </p:cNvSpPr>
           <p:nvPr>
-            <p:ph idx="11" type="ftr"/>
+            <p:ph type="ftr" idx="11"/>
           </p:nvPr>
         </p:nvSpPr>
         <p:spPr>
@@ -5130,7 +5288,7 @@
           </a:ln>
         </p:spPr>
         <p:txBody>
-          <a:bodyPr anchorCtr="0" anchor="ctr" bIns="45700" lIns="91425" spcFirstLastPara="1" rIns="91425" wrap="square" tIns="45700">
+          <a:bodyPr spcFirstLastPara="1" wrap="square" lIns="91425" tIns="45700" rIns="91425" bIns="45700" anchor="ctr" anchorCtr="0">
             <a:noAutofit/>
           </a:bodyPr>
           <a:lstStyle>
@@ -5234,15 +5392,19 @@
               <a:defRPr/>
             </a:lvl9pPr>
           </a:lstStyle>
-          <a:p/>
+          <a:p>
+            <a:endParaRPr/>
+          </a:p>
         </p:txBody>
       </p:sp>
       <p:sp>
         <p:nvSpPr>
           <p:cNvPr id="32" name="Google Shape;32;p5"/>
-          <p:cNvSpPr txBox="1"/>
+          <p:cNvSpPr txBox="1">
+            <a:spLocks noGrp="1"/>
+          </p:cNvSpPr>
           <p:nvPr>
-            <p:ph idx="12" type="sldNum"/>
+            <p:ph type="sldNum" idx="12"/>
           </p:nvPr>
         </p:nvSpPr>
         <p:spPr>
@@ -5259,67 +5421,67 @@
           </a:ln>
         </p:spPr>
         <p:txBody>
-          <a:bodyPr anchorCtr="0" anchor="ctr" bIns="45700" lIns="91425" spcFirstLastPara="1" rIns="91425" wrap="square" tIns="45700">
+          <a:bodyPr spcFirstLastPara="1" wrap="square" lIns="91425" tIns="45700" rIns="91425" bIns="45700" anchor="ctr" anchorCtr="0">
             <a:noAutofit/>
           </a:bodyPr>
           <a:lstStyle>
-            <a:lvl1pPr indent="0" lvl="0" marL="0" algn="r">
+            <a:lvl1pPr marL="0" lvl="0" indent="0" algn="r">
               <a:spcBef>
                 <a:spcPts val="0"/>
               </a:spcBef>
               <a:buNone/>
               <a:defRPr/>
             </a:lvl1pPr>
-            <a:lvl2pPr indent="0" lvl="1" marL="0" algn="r">
+            <a:lvl2pPr marL="0" lvl="1" indent="0" algn="r">
               <a:spcBef>
                 <a:spcPts val="0"/>
               </a:spcBef>
               <a:buNone/>
               <a:defRPr/>
             </a:lvl2pPr>
-            <a:lvl3pPr indent="0" lvl="2" marL="0" algn="r">
+            <a:lvl3pPr marL="0" lvl="2" indent="0" algn="r">
               <a:spcBef>
                 <a:spcPts val="0"/>
               </a:spcBef>
               <a:buNone/>
               <a:defRPr/>
             </a:lvl3pPr>
-            <a:lvl4pPr indent="0" lvl="3" marL="0" algn="r">
+            <a:lvl4pPr marL="0" lvl="3" indent="0" algn="r">
               <a:spcBef>
                 <a:spcPts val="0"/>
               </a:spcBef>
               <a:buNone/>
               <a:defRPr/>
             </a:lvl4pPr>
-            <a:lvl5pPr indent="0" lvl="4" marL="0" algn="r">
+            <a:lvl5pPr marL="0" lvl="4" indent="0" algn="r">
               <a:spcBef>
                 <a:spcPts val="0"/>
               </a:spcBef>
               <a:buNone/>
               <a:defRPr/>
             </a:lvl5pPr>
-            <a:lvl6pPr indent="0" lvl="5" marL="0" algn="r">
+            <a:lvl6pPr marL="0" lvl="5" indent="0" algn="r">
               <a:spcBef>
                 <a:spcPts val="0"/>
               </a:spcBef>
               <a:buNone/>
               <a:defRPr/>
             </a:lvl6pPr>
-            <a:lvl7pPr indent="0" lvl="6" marL="0" algn="r">
+            <a:lvl7pPr marL="0" lvl="6" indent="0" algn="r">
               <a:spcBef>
                 <a:spcPts val="0"/>
               </a:spcBef>
               <a:buNone/>
               <a:defRPr/>
             </a:lvl7pPr>
-            <a:lvl8pPr indent="0" lvl="7" marL="0" algn="r">
+            <a:lvl8pPr marL="0" lvl="7" indent="0" algn="r">
               <a:spcBef>
                 <a:spcPts val="0"/>
               </a:spcBef>
               <a:buNone/>
               <a:defRPr/>
             </a:lvl8pPr>
-            <a:lvl9pPr indent="0" lvl="8" marL="0" algn="r">
+            <a:lvl9pPr marL="0" lvl="8" indent="0" algn="r">
               <a:spcBef>
                 <a:spcPts val="0"/>
               </a:spcBef>
@@ -5328,7 +5490,7 @@
             </a:lvl9pPr>
           </a:lstStyle>
           <a:p>
-            <a:pPr indent="0" lvl="0" marL="0" rtl="0" algn="r">
+            <a:pPr marL="0" lvl="0" indent="0" algn="r" rtl="0">
               <a:spcBef>
                 <a:spcPts val="0"/>
               </a:spcBef>
@@ -5339,7 +5501,7 @@
             </a:pPr>
             <a:fld id="{00000000-1234-1234-1234-123412341234}" type="slidenum">
               <a:rPr lang="en-US"/>
-              <a:t>‹#›</a:t>
+              <a:t>‹nº›</a:t>
             </a:fld>
             <a:endParaRPr/>
           </a:p>
@@ -5354,11 +5516,11 @@
 </file>
 
 <file path=ppt/slideLayouts/slideLayout5.xml><?xml version="1.0" encoding="utf-8"?>
-<p:sldLayout xmlns:a="http://schemas.openxmlformats.org/drawingml/2006/main" xmlns:r="http://schemas.openxmlformats.org/officeDocument/2006/relationships" xmlns:mc="http://schemas.openxmlformats.org/markup-compatibility/2006" xmlns:mv="urn:schemas-microsoft-com:mac:vml" xmlns:p="http://schemas.openxmlformats.org/presentationml/2006/main" xmlns:c="http://schemas.openxmlformats.org/drawingml/2006/chart" xmlns:dgm="http://schemas.openxmlformats.org/drawingml/2006/diagram" xmlns:o="urn:schemas-microsoft-com:office:office" xmlns:v="urn:schemas-microsoft-com:vml" xmlns:pvml="urn:schemas-microsoft-com:office:powerpoint" xmlns:com="http://schemas.openxmlformats.org/drawingml/2006/compatibility" xmlns:p14="http://schemas.microsoft.com/office/powerpoint/2010/main" xmlns:p15="http://schemas.microsoft.com/office/powerpoint/2012/main" xmlns:ahyp="http://schemas.microsoft.com/office/drawing/2018/hyperlinkcolor" matchingName="Two Content" type="twoObj">
+<p:sldLayout xmlns:a="http://schemas.openxmlformats.org/drawingml/2006/main" xmlns:r="http://schemas.openxmlformats.org/officeDocument/2006/relationships" xmlns:p="http://schemas.openxmlformats.org/presentationml/2006/main" matchingName="Two Content" type="twoObj">
   <p:cSld name="TWO_OBJECTS">
     <p:spTree>
       <p:nvGrpSpPr>
-        <p:cNvPr id="33" name="Shape 33"/>
+        <p:cNvPr id="1" name="Shape 33"/>
         <p:cNvGrpSpPr/>
         <p:nvPr/>
       </p:nvGrpSpPr>
@@ -5373,7 +5535,9 @@
       <p:sp>
         <p:nvSpPr>
           <p:cNvPr id="34" name="Google Shape;34;p6"/>
-          <p:cNvSpPr txBox="1"/>
+          <p:cNvSpPr txBox="1">
+            <a:spLocks noGrp="1"/>
+          </p:cNvSpPr>
           <p:nvPr>
             <p:ph type="title"/>
           </p:nvPr>
@@ -5392,7 +5556,7 @@
           </a:ln>
         </p:spPr>
         <p:txBody>
-          <a:bodyPr anchorCtr="0" anchor="ctr" bIns="45700" lIns="91425" spcFirstLastPara="1" rIns="91425" wrap="square" tIns="45700">
+          <a:bodyPr spcFirstLastPara="1" wrap="square" lIns="91425" tIns="45700" rIns="91425" bIns="45700" anchor="ctr" anchorCtr="0">
             <a:normAutofit/>
           </a:bodyPr>
           <a:lstStyle>
@@ -5499,15 +5663,19 @@
               <a:defRPr/>
             </a:lvl9pPr>
           </a:lstStyle>
-          <a:p/>
+          <a:p>
+            <a:endParaRPr/>
+          </a:p>
         </p:txBody>
       </p:sp>
       <p:sp>
         <p:nvSpPr>
           <p:cNvPr id="35" name="Google Shape;35;p6"/>
-          <p:cNvSpPr txBox="1"/>
+          <p:cNvSpPr txBox="1">
+            <a:spLocks noGrp="1"/>
+          </p:cNvSpPr>
           <p:nvPr>
-            <p:ph idx="1" type="body"/>
+            <p:ph type="body" idx="1"/>
           </p:nvPr>
         </p:nvSpPr>
         <p:spPr>
@@ -5524,11 +5692,11 @@
           </a:ln>
         </p:spPr>
         <p:txBody>
-          <a:bodyPr anchorCtr="0" anchor="t" bIns="45700" lIns="91425" spcFirstLastPara="1" rIns="91425" wrap="square" tIns="45700">
+          <a:bodyPr spcFirstLastPara="1" wrap="square" lIns="91425" tIns="45700" rIns="91425" bIns="45700" anchor="t" anchorCtr="0">
             <a:normAutofit/>
           </a:bodyPr>
           <a:lstStyle>
-            <a:lvl1pPr indent="-406400" lvl="0" marL="457200" algn="l">
+            <a:lvl1pPr marL="457200" lvl="0" indent="-406400" algn="l">
               <a:spcBef>
                 <a:spcPts val="560"/>
               </a:spcBef>
@@ -5542,7 +5710,7 @@
               <a:buChar char="•"/>
               <a:defRPr sz="2800"/>
             </a:lvl1pPr>
-            <a:lvl2pPr indent="-381000" lvl="1" marL="914400" algn="l">
+            <a:lvl2pPr marL="914400" lvl="1" indent="-381000" algn="l">
               <a:spcBef>
                 <a:spcPts val="480"/>
               </a:spcBef>
@@ -5556,7 +5724,7 @@
               <a:buChar char="–"/>
               <a:defRPr sz="2400"/>
             </a:lvl2pPr>
-            <a:lvl3pPr indent="-355600" lvl="2" marL="1371600" algn="l">
+            <a:lvl3pPr marL="1371600" lvl="2" indent="-355600" algn="l">
               <a:spcBef>
                 <a:spcPts val="400"/>
               </a:spcBef>
@@ -5570,7 +5738,7 @@
               <a:buChar char="•"/>
               <a:defRPr sz="2000"/>
             </a:lvl3pPr>
-            <a:lvl4pPr indent="-342900" lvl="3" marL="1828800" algn="l">
+            <a:lvl4pPr marL="1828800" lvl="3" indent="-342900" algn="l">
               <a:spcBef>
                 <a:spcPts val="360"/>
               </a:spcBef>
@@ -5584,7 +5752,7 @@
               <a:buChar char="–"/>
               <a:defRPr sz="1800"/>
             </a:lvl4pPr>
-            <a:lvl5pPr indent="-342900" lvl="4" marL="2286000" algn="l">
+            <a:lvl5pPr marL="2286000" lvl="4" indent="-342900" algn="l">
               <a:spcBef>
                 <a:spcPts val="360"/>
               </a:spcBef>
@@ -5598,7 +5766,7 @@
               <a:buChar char="»"/>
               <a:defRPr sz="1800"/>
             </a:lvl5pPr>
-            <a:lvl6pPr indent="-342900" lvl="5" marL="2743200" algn="l">
+            <a:lvl6pPr marL="2743200" lvl="5" indent="-342900" algn="l">
               <a:spcBef>
                 <a:spcPts val="360"/>
               </a:spcBef>
@@ -5612,7 +5780,7 @@
               <a:buChar char="•"/>
               <a:defRPr sz="1800"/>
             </a:lvl6pPr>
-            <a:lvl7pPr indent="-342900" lvl="6" marL="3200400" algn="l">
+            <a:lvl7pPr marL="3200400" lvl="6" indent="-342900" algn="l">
               <a:spcBef>
                 <a:spcPts val="360"/>
               </a:spcBef>
@@ -5626,7 +5794,7 @@
               <a:buChar char="•"/>
               <a:defRPr sz="1800"/>
             </a:lvl7pPr>
-            <a:lvl8pPr indent="-342900" lvl="7" marL="3657600" algn="l">
+            <a:lvl8pPr marL="3657600" lvl="7" indent="-342900" algn="l">
               <a:spcBef>
                 <a:spcPts val="360"/>
               </a:spcBef>
@@ -5640,7 +5808,7 @@
               <a:buChar char="•"/>
               <a:defRPr sz="1800"/>
             </a:lvl8pPr>
-            <a:lvl9pPr indent="-342900" lvl="8" marL="4114800" algn="l">
+            <a:lvl9pPr marL="4114800" lvl="8" indent="-342900" algn="l">
               <a:spcBef>
                 <a:spcPts val="360"/>
               </a:spcBef>
@@ -5655,15 +5823,19 @@
               <a:defRPr sz="1800"/>
             </a:lvl9pPr>
           </a:lstStyle>
-          <a:p/>
+          <a:p>
+            <a:endParaRPr/>
+          </a:p>
         </p:txBody>
       </p:sp>
       <p:sp>
         <p:nvSpPr>
           <p:cNvPr id="36" name="Google Shape;36;p6"/>
-          <p:cNvSpPr txBox="1"/>
+          <p:cNvSpPr txBox="1">
+            <a:spLocks noGrp="1"/>
+          </p:cNvSpPr>
           <p:nvPr>
-            <p:ph idx="2" type="body"/>
+            <p:ph type="body" idx="2"/>
           </p:nvPr>
         </p:nvSpPr>
         <p:spPr>
@@ -5680,11 +5852,11 @@
           </a:ln>
         </p:spPr>
         <p:txBody>
-          <a:bodyPr anchorCtr="0" anchor="t" bIns="45700" lIns="91425" spcFirstLastPara="1" rIns="91425" wrap="square" tIns="45700">
+          <a:bodyPr spcFirstLastPara="1" wrap="square" lIns="91425" tIns="45700" rIns="91425" bIns="45700" anchor="t" anchorCtr="0">
             <a:normAutofit/>
           </a:bodyPr>
           <a:lstStyle>
-            <a:lvl1pPr indent="-406400" lvl="0" marL="457200" algn="l">
+            <a:lvl1pPr marL="457200" lvl="0" indent="-406400" algn="l">
               <a:spcBef>
                 <a:spcPts val="560"/>
               </a:spcBef>
@@ -5698,7 +5870,7 @@
               <a:buChar char="•"/>
               <a:defRPr sz="2800"/>
             </a:lvl1pPr>
-            <a:lvl2pPr indent="-381000" lvl="1" marL="914400" algn="l">
+            <a:lvl2pPr marL="914400" lvl="1" indent="-381000" algn="l">
               <a:spcBef>
                 <a:spcPts val="480"/>
               </a:spcBef>
@@ -5712,7 +5884,7 @@
               <a:buChar char="–"/>
               <a:defRPr sz="2400"/>
             </a:lvl2pPr>
-            <a:lvl3pPr indent="-355600" lvl="2" marL="1371600" algn="l">
+            <a:lvl3pPr marL="1371600" lvl="2" indent="-355600" algn="l">
               <a:spcBef>
                 <a:spcPts val="400"/>
               </a:spcBef>
@@ -5726,7 +5898,7 @@
               <a:buChar char="•"/>
               <a:defRPr sz="2000"/>
             </a:lvl3pPr>
-            <a:lvl4pPr indent="-342900" lvl="3" marL="1828800" algn="l">
+            <a:lvl4pPr marL="1828800" lvl="3" indent="-342900" algn="l">
               <a:spcBef>
                 <a:spcPts val="360"/>
               </a:spcBef>
@@ -5740,7 +5912,7 @@
               <a:buChar char="–"/>
               <a:defRPr sz="1800"/>
             </a:lvl4pPr>
-            <a:lvl5pPr indent="-342900" lvl="4" marL="2286000" algn="l">
+            <a:lvl5pPr marL="2286000" lvl="4" indent="-342900" algn="l">
               <a:spcBef>
                 <a:spcPts val="360"/>
               </a:spcBef>
@@ -5754,7 +5926,7 @@
               <a:buChar char="»"/>
               <a:defRPr sz="1800"/>
             </a:lvl5pPr>
-            <a:lvl6pPr indent="-342900" lvl="5" marL="2743200" algn="l">
+            <a:lvl6pPr marL="2743200" lvl="5" indent="-342900" algn="l">
               <a:spcBef>
                 <a:spcPts val="360"/>
               </a:spcBef>
@@ -5768,7 +5940,7 @@
               <a:buChar char="•"/>
               <a:defRPr sz="1800"/>
             </a:lvl6pPr>
-            <a:lvl7pPr indent="-342900" lvl="6" marL="3200400" algn="l">
+            <a:lvl7pPr marL="3200400" lvl="6" indent="-342900" algn="l">
               <a:spcBef>
                 <a:spcPts val="360"/>
               </a:spcBef>
@@ -5782,7 +5954,7 @@
               <a:buChar char="•"/>
               <a:defRPr sz="1800"/>
             </a:lvl7pPr>
-            <a:lvl8pPr indent="-342900" lvl="7" marL="3657600" algn="l">
+            <a:lvl8pPr marL="3657600" lvl="7" indent="-342900" algn="l">
               <a:spcBef>
                 <a:spcPts val="360"/>
               </a:spcBef>
@@ -5796,7 +5968,7 @@
               <a:buChar char="•"/>
               <a:defRPr sz="1800"/>
             </a:lvl8pPr>
-            <a:lvl9pPr indent="-342900" lvl="8" marL="4114800" algn="l">
+            <a:lvl9pPr marL="4114800" lvl="8" indent="-342900" algn="l">
               <a:spcBef>
                 <a:spcPts val="360"/>
               </a:spcBef>
@@ -5811,15 +5983,19 @@
               <a:defRPr sz="1800"/>
             </a:lvl9pPr>
           </a:lstStyle>
-          <a:p/>
+          <a:p>
+            <a:endParaRPr/>
+          </a:p>
         </p:txBody>
       </p:sp>
       <p:sp>
         <p:nvSpPr>
           <p:cNvPr id="37" name="Google Shape;37;p6"/>
-          <p:cNvSpPr txBox="1"/>
+          <p:cNvSpPr txBox="1">
+            <a:spLocks noGrp="1"/>
+          </p:cNvSpPr>
           <p:nvPr>
-            <p:ph idx="10" type="dt"/>
+            <p:ph type="dt" idx="10"/>
           </p:nvPr>
         </p:nvSpPr>
         <p:spPr>
@@ -5836,7 +6012,7 @@
           </a:ln>
         </p:spPr>
         <p:txBody>
-          <a:bodyPr anchorCtr="0" anchor="ctr" bIns="45700" lIns="91425" spcFirstLastPara="1" rIns="91425" wrap="square" tIns="45700">
+          <a:bodyPr spcFirstLastPara="1" wrap="square" lIns="91425" tIns="45700" rIns="91425" bIns="45700" anchor="ctr" anchorCtr="0">
             <a:noAutofit/>
           </a:bodyPr>
           <a:lstStyle>
@@ -5940,15 +6116,19 @@
               <a:defRPr/>
             </a:lvl9pPr>
           </a:lstStyle>
-          <a:p/>
+          <a:p>
+            <a:endParaRPr/>
+          </a:p>
         </p:txBody>
       </p:sp>
       <p:sp>
         <p:nvSpPr>
           <p:cNvPr id="38" name="Google Shape;38;p6"/>
-          <p:cNvSpPr txBox="1"/>
+          <p:cNvSpPr txBox="1">
+            <a:spLocks noGrp="1"/>
+          </p:cNvSpPr>
           <p:nvPr>
-            <p:ph idx="11" type="ftr"/>
+            <p:ph type="ftr" idx="11"/>
           </p:nvPr>
         </p:nvSpPr>
         <p:spPr>
@@ -5965,7 +6145,7 @@
           </a:ln>
         </p:spPr>
         <p:txBody>
-          <a:bodyPr anchorCtr="0" anchor="ctr" bIns="45700" lIns="91425" spcFirstLastPara="1" rIns="91425" wrap="square" tIns="45700">
+          <a:bodyPr spcFirstLastPara="1" wrap="square" lIns="91425" tIns="45700" rIns="91425" bIns="45700" anchor="ctr" anchorCtr="0">
             <a:noAutofit/>
           </a:bodyPr>
           <a:lstStyle>
@@ -6069,15 +6249,19 @@
               <a:defRPr/>
             </a:lvl9pPr>
           </a:lstStyle>
-          <a:p/>
+          <a:p>
+            <a:endParaRPr/>
+          </a:p>
         </p:txBody>
       </p:sp>
       <p:sp>
         <p:nvSpPr>
           <p:cNvPr id="39" name="Google Shape;39;p6"/>
-          <p:cNvSpPr txBox="1"/>
+          <p:cNvSpPr txBox="1">
+            <a:spLocks noGrp="1"/>
+          </p:cNvSpPr>
           <p:nvPr>
-            <p:ph idx="12" type="sldNum"/>
+            <p:ph type="sldNum" idx="12"/>
           </p:nvPr>
         </p:nvSpPr>
         <p:spPr>
@@ -6094,67 +6278,67 @@
           </a:ln>
         </p:spPr>
         <p:txBody>
-          <a:bodyPr anchorCtr="0" anchor="ctr" bIns="45700" lIns="91425" spcFirstLastPara="1" rIns="91425" wrap="square" tIns="45700">
+          <a:bodyPr spcFirstLastPara="1" wrap="square" lIns="91425" tIns="45700" rIns="91425" bIns="45700" anchor="ctr" anchorCtr="0">
             <a:noAutofit/>
           </a:bodyPr>
           <a:lstStyle>
-            <a:lvl1pPr indent="0" lvl="0" marL="0" algn="r">
+            <a:lvl1pPr marL="0" lvl="0" indent="0" algn="r">
               <a:spcBef>
                 <a:spcPts val="0"/>
               </a:spcBef>
               <a:buNone/>
               <a:defRPr/>
             </a:lvl1pPr>
-            <a:lvl2pPr indent="0" lvl="1" marL="0" algn="r">
+            <a:lvl2pPr marL="0" lvl="1" indent="0" algn="r">
               <a:spcBef>
                 <a:spcPts val="0"/>
               </a:spcBef>
               <a:buNone/>
               <a:defRPr/>
             </a:lvl2pPr>
-            <a:lvl3pPr indent="0" lvl="2" marL="0" algn="r">
+            <a:lvl3pPr marL="0" lvl="2" indent="0" algn="r">
               <a:spcBef>
                 <a:spcPts val="0"/>
               </a:spcBef>
               <a:buNone/>
               <a:defRPr/>
             </a:lvl3pPr>
-            <a:lvl4pPr indent="0" lvl="3" marL="0" algn="r">
+            <a:lvl4pPr marL="0" lvl="3" indent="0" algn="r">
               <a:spcBef>
                 <a:spcPts val="0"/>
               </a:spcBef>
               <a:buNone/>
               <a:defRPr/>
             </a:lvl4pPr>
-            <a:lvl5pPr indent="0" lvl="4" marL="0" algn="r">
+            <a:lvl5pPr marL="0" lvl="4" indent="0" algn="r">
               <a:spcBef>
                 <a:spcPts val="0"/>
               </a:spcBef>
               <a:buNone/>
               <a:defRPr/>
             </a:lvl5pPr>
-            <a:lvl6pPr indent="0" lvl="5" marL="0" algn="r">
+            <a:lvl6pPr marL="0" lvl="5" indent="0" algn="r">
               <a:spcBef>
                 <a:spcPts val="0"/>
               </a:spcBef>
               <a:buNone/>
               <a:defRPr/>
             </a:lvl6pPr>
-            <a:lvl7pPr indent="0" lvl="6" marL="0" algn="r">
+            <a:lvl7pPr marL="0" lvl="6" indent="0" algn="r">
               <a:spcBef>
                 <a:spcPts val="0"/>
               </a:spcBef>
               <a:buNone/>
               <a:defRPr/>
             </a:lvl7pPr>
-            <a:lvl8pPr indent="0" lvl="7" marL="0" algn="r">
+            <a:lvl8pPr marL="0" lvl="7" indent="0" algn="r">
               <a:spcBef>
                 <a:spcPts val="0"/>
               </a:spcBef>
               <a:buNone/>
               <a:defRPr/>
             </a:lvl8pPr>
-            <a:lvl9pPr indent="0" lvl="8" marL="0" algn="r">
+            <a:lvl9pPr marL="0" lvl="8" indent="0" algn="r">
               <a:spcBef>
                 <a:spcPts val="0"/>
               </a:spcBef>
@@ -6163,7 +6347,7 @@
             </a:lvl9pPr>
           </a:lstStyle>
           <a:p>
-            <a:pPr indent="0" lvl="0" marL="0" rtl="0" algn="r">
+            <a:pPr marL="0" lvl="0" indent="0" algn="r" rtl="0">
               <a:spcBef>
                 <a:spcPts val="0"/>
               </a:spcBef>
@@ -6174,7 +6358,7 @@
             </a:pPr>
             <a:fld id="{00000000-1234-1234-1234-123412341234}" type="slidenum">
               <a:rPr lang="en-US"/>
-              <a:t>‹#›</a:t>
+              <a:t>‹nº›</a:t>
             </a:fld>
             <a:endParaRPr/>
           </a:p>
@@ -6189,11 +6373,11 @@
 </file>
 
 <file path=ppt/slideLayouts/slideLayout6.xml><?xml version="1.0" encoding="utf-8"?>
-<p:sldLayout xmlns:a="http://schemas.openxmlformats.org/drawingml/2006/main" xmlns:r="http://schemas.openxmlformats.org/officeDocument/2006/relationships" xmlns:mc="http://schemas.openxmlformats.org/markup-compatibility/2006" xmlns:mv="urn:schemas-microsoft-com:mac:vml" xmlns:p="http://schemas.openxmlformats.org/presentationml/2006/main" xmlns:c="http://schemas.openxmlformats.org/drawingml/2006/chart" xmlns:dgm="http://schemas.openxmlformats.org/drawingml/2006/diagram" xmlns:o="urn:schemas-microsoft-com:office:office" xmlns:v="urn:schemas-microsoft-com:vml" xmlns:pvml="urn:schemas-microsoft-com:office:powerpoint" xmlns:com="http://schemas.openxmlformats.org/drawingml/2006/compatibility" xmlns:p14="http://schemas.microsoft.com/office/powerpoint/2010/main" xmlns:p15="http://schemas.microsoft.com/office/powerpoint/2012/main" xmlns:ahyp="http://schemas.microsoft.com/office/drawing/2018/hyperlinkcolor" matchingName="Comparison" type="twoTxTwoObj">
+<p:sldLayout xmlns:a="http://schemas.openxmlformats.org/drawingml/2006/main" xmlns:r="http://schemas.openxmlformats.org/officeDocument/2006/relationships" xmlns:p="http://schemas.openxmlformats.org/presentationml/2006/main" matchingName="Comparison" type="twoTxTwoObj">
   <p:cSld name="TWO_OBJECTS_WITH_TEXT">
     <p:spTree>
       <p:nvGrpSpPr>
-        <p:cNvPr id="40" name="Shape 40"/>
+        <p:cNvPr id="1" name="Shape 40"/>
         <p:cNvGrpSpPr/>
         <p:nvPr/>
       </p:nvGrpSpPr>
@@ -6208,7 +6392,9 @@
       <p:sp>
         <p:nvSpPr>
           <p:cNvPr id="41" name="Google Shape;41;p7"/>
-          <p:cNvSpPr txBox="1"/>
+          <p:cNvSpPr txBox="1">
+            <a:spLocks noGrp="1"/>
+          </p:cNvSpPr>
           <p:nvPr>
             <p:ph type="title"/>
           </p:nvPr>
@@ -6227,7 +6413,7 @@
           </a:ln>
         </p:spPr>
         <p:txBody>
-          <a:bodyPr anchorCtr="0" anchor="ctr" bIns="45700" lIns="91425" spcFirstLastPara="1" rIns="91425" wrap="square" tIns="45700">
+          <a:bodyPr spcFirstLastPara="1" wrap="square" lIns="91425" tIns="45700" rIns="91425" bIns="45700" anchor="ctr" anchorCtr="0">
             <a:normAutofit/>
           </a:bodyPr>
           <a:lstStyle>
@@ -6335,15 +6521,19 @@
               <a:defRPr/>
             </a:lvl9pPr>
           </a:lstStyle>
-          <a:p/>
+          <a:p>
+            <a:endParaRPr/>
+          </a:p>
         </p:txBody>
       </p:sp>
       <p:sp>
         <p:nvSpPr>
           <p:cNvPr id="42" name="Google Shape;42;p7"/>
-          <p:cNvSpPr txBox="1"/>
+          <p:cNvSpPr txBox="1">
+            <a:spLocks noGrp="1"/>
+          </p:cNvSpPr>
           <p:nvPr>
-            <p:ph idx="1" type="body"/>
+            <p:ph type="body" idx="1"/>
           </p:nvPr>
         </p:nvSpPr>
         <p:spPr>
@@ -6360,11 +6550,11 @@
           </a:ln>
         </p:spPr>
         <p:txBody>
-          <a:bodyPr anchorCtr="0" anchor="b" bIns="45700" lIns="91425" spcFirstLastPara="1" rIns="91425" wrap="square" tIns="45700">
+          <a:bodyPr spcFirstLastPara="1" wrap="square" lIns="91425" tIns="45700" rIns="91425" bIns="45700" anchor="b" anchorCtr="0">
             <a:normAutofit/>
           </a:bodyPr>
           <a:lstStyle>
-            <a:lvl1pPr indent="-228600" lvl="0" marL="457200" algn="l">
+            <a:lvl1pPr marL="457200" lvl="0" indent="-228600" algn="l">
               <a:spcBef>
                 <a:spcPts val="480"/>
               </a:spcBef>
@@ -6376,9 +6566,9 @@
               </a:buClr>
               <a:buSzPts val="2400"/>
               <a:buNone/>
-              <a:defRPr b="1" sz="2400"/>
+              <a:defRPr sz="2400" b="1"/>
             </a:lvl1pPr>
-            <a:lvl2pPr indent="-228600" lvl="1" marL="914400" algn="l">
+            <a:lvl2pPr marL="914400" lvl="1" indent="-228600" algn="l">
               <a:spcBef>
                 <a:spcPts val="400"/>
               </a:spcBef>
@@ -6390,9 +6580,9 @@
               </a:buClr>
               <a:buSzPts val="2000"/>
               <a:buNone/>
-              <a:defRPr b="1" sz="2000"/>
+              <a:defRPr sz="2000" b="1"/>
             </a:lvl2pPr>
-            <a:lvl3pPr indent="-228600" lvl="2" marL="1371600" algn="l">
+            <a:lvl3pPr marL="1371600" lvl="2" indent="-228600" algn="l">
               <a:spcBef>
                 <a:spcPts val="360"/>
               </a:spcBef>
@@ -6404,9 +6594,9 @@
               </a:buClr>
               <a:buSzPts val="1800"/>
               <a:buNone/>
-              <a:defRPr b="1" sz="1800"/>
+              <a:defRPr sz="1800" b="1"/>
             </a:lvl3pPr>
-            <a:lvl4pPr indent="-228600" lvl="3" marL="1828800" algn="l">
+            <a:lvl4pPr marL="1828800" lvl="3" indent="-228600" algn="l">
               <a:spcBef>
                 <a:spcPts val="320"/>
               </a:spcBef>
@@ -6418,9 +6608,9 @@
               </a:buClr>
               <a:buSzPts val="1600"/>
               <a:buNone/>
-              <a:defRPr b="1" sz="1600"/>
+              <a:defRPr sz="1600" b="1"/>
             </a:lvl4pPr>
-            <a:lvl5pPr indent="-228600" lvl="4" marL="2286000" algn="l">
+            <a:lvl5pPr marL="2286000" lvl="4" indent="-228600" algn="l">
               <a:spcBef>
                 <a:spcPts val="320"/>
               </a:spcBef>
@@ -6432,9 +6622,9 @@
               </a:buClr>
               <a:buSzPts val="1600"/>
               <a:buNone/>
-              <a:defRPr b="1" sz="1600"/>
+              <a:defRPr sz="1600" b="1"/>
             </a:lvl5pPr>
-            <a:lvl6pPr indent="-228600" lvl="5" marL="2743200" algn="l">
+            <a:lvl6pPr marL="2743200" lvl="5" indent="-228600" algn="l">
               <a:spcBef>
                 <a:spcPts val="320"/>
               </a:spcBef>
@@ -6446,9 +6636,9 @@
               </a:buClr>
               <a:buSzPts val="1600"/>
               <a:buNone/>
-              <a:defRPr b="1" sz="1600"/>
+              <a:defRPr sz="1600" b="1"/>
             </a:lvl6pPr>
-            <a:lvl7pPr indent="-228600" lvl="6" marL="3200400" algn="l">
+            <a:lvl7pPr marL="3200400" lvl="6" indent="-228600" algn="l">
               <a:spcBef>
                 <a:spcPts val="320"/>
               </a:spcBef>
@@ -6460,9 +6650,9 @@
               </a:buClr>
               <a:buSzPts val="1600"/>
               <a:buNone/>
-              <a:defRPr b="1" sz="1600"/>
+              <a:defRPr sz="1600" b="1"/>
             </a:lvl7pPr>
-            <a:lvl8pPr indent="-228600" lvl="7" marL="3657600" algn="l">
+            <a:lvl8pPr marL="3657600" lvl="7" indent="-228600" algn="l">
               <a:spcBef>
                 <a:spcPts val="320"/>
               </a:spcBef>
@@ -6474,9 +6664,9 @@
               </a:buClr>
               <a:buSzPts val="1600"/>
               <a:buNone/>
-              <a:defRPr b="1" sz="1600"/>
+              <a:defRPr sz="1600" b="1"/>
             </a:lvl8pPr>
-            <a:lvl9pPr indent="-228600" lvl="8" marL="4114800" algn="l">
+            <a:lvl9pPr marL="4114800" lvl="8" indent="-228600" algn="l">
               <a:spcBef>
                 <a:spcPts val="320"/>
               </a:spcBef>
@@ -6488,18 +6678,22 @@
               </a:buClr>
               <a:buSzPts val="1600"/>
               <a:buNone/>
-              <a:defRPr b="1" sz="1600"/>
+              <a:defRPr sz="1600" b="1"/>
             </a:lvl9pPr>
           </a:lstStyle>
-          <a:p/>
+          <a:p>
+            <a:endParaRPr/>
+          </a:p>
         </p:txBody>
       </p:sp>
       <p:sp>
         <p:nvSpPr>
           <p:cNvPr id="43" name="Google Shape;43;p7"/>
-          <p:cNvSpPr txBox="1"/>
+          <p:cNvSpPr txBox="1">
+            <a:spLocks noGrp="1"/>
+          </p:cNvSpPr>
           <p:nvPr>
-            <p:ph idx="2" type="body"/>
+            <p:ph type="body" idx="2"/>
           </p:nvPr>
         </p:nvSpPr>
         <p:spPr>
@@ -6516,11 +6710,11 @@
           </a:ln>
         </p:spPr>
         <p:txBody>
-          <a:bodyPr anchorCtr="0" anchor="t" bIns="45700" lIns="91425" spcFirstLastPara="1" rIns="91425" wrap="square" tIns="45700">
+          <a:bodyPr spcFirstLastPara="1" wrap="square" lIns="91425" tIns="45700" rIns="91425" bIns="45700" anchor="t" anchorCtr="0">
             <a:normAutofit/>
           </a:bodyPr>
           <a:lstStyle>
-            <a:lvl1pPr indent="-381000" lvl="0" marL="457200" algn="l">
+            <a:lvl1pPr marL="457200" lvl="0" indent="-381000" algn="l">
               <a:spcBef>
                 <a:spcPts val="480"/>
               </a:spcBef>
@@ -6534,7 +6728,7 @@
               <a:buChar char="•"/>
               <a:defRPr sz="2400"/>
             </a:lvl1pPr>
-            <a:lvl2pPr indent="-355600" lvl="1" marL="914400" algn="l">
+            <a:lvl2pPr marL="914400" lvl="1" indent="-355600" algn="l">
               <a:spcBef>
                 <a:spcPts val="400"/>
               </a:spcBef>
@@ -6548,7 +6742,7 @@
               <a:buChar char="–"/>
               <a:defRPr sz="2000"/>
             </a:lvl2pPr>
-            <a:lvl3pPr indent="-342900" lvl="2" marL="1371600" algn="l">
+            <a:lvl3pPr marL="1371600" lvl="2" indent="-342900" algn="l">
               <a:spcBef>
                 <a:spcPts val="360"/>
               </a:spcBef>
@@ -6562,7 +6756,7 @@
               <a:buChar char="•"/>
               <a:defRPr sz="1800"/>
             </a:lvl3pPr>
-            <a:lvl4pPr indent="-330200" lvl="3" marL="1828800" algn="l">
+            <a:lvl4pPr marL="1828800" lvl="3" indent="-330200" algn="l">
               <a:spcBef>
                 <a:spcPts val="320"/>
               </a:spcBef>
@@ -6576,7 +6770,7 @@
               <a:buChar char="–"/>
               <a:defRPr sz="1600"/>
             </a:lvl4pPr>
-            <a:lvl5pPr indent="-330200" lvl="4" marL="2286000" algn="l">
+            <a:lvl5pPr marL="2286000" lvl="4" indent="-330200" algn="l">
               <a:spcBef>
                 <a:spcPts val="320"/>
               </a:spcBef>
@@ -6590,7 +6784,7 @@
               <a:buChar char="»"/>
               <a:defRPr sz="1600"/>
             </a:lvl5pPr>
-            <a:lvl6pPr indent="-330200" lvl="5" marL="2743200" algn="l">
+            <a:lvl6pPr marL="2743200" lvl="5" indent="-330200" algn="l">
               <a:spcBef>
                 <a:spcPts val="320"/>
               </a:spcBef>
@@ -6604,7 +6798,7 @@
               <a:buChar char="•"/>
               <a:defRPr sz="1600"/>
             </a:lvl6pPr>
-            <a:lvl7pPr indent="-330200" lvl="6" marL="3200400" algn="l">
+            <a:lvl7pPr marL="3200400" lvl="6" indent="-330200" algn="l">
               <a:spcBef>
                 <a:spcPts val="320"/>
               </a:spcBef>
@@ -6618,7 +6812,7 @@
               <a:buChar char="•"/>
               <a:defRPr sz="1600"/>
             </a:lvl7pPr>
-            <a:lvl8pPr indent="-330200" lvl="7" marL="3657600" algn="l">
+            <a:lvl8pPr marL="3657600" lvl="7" indent="-330200" algn="l">
               <a:spcBef>
                 <a:spcPts val="320"/>
               </a:spcBef>
@@ -6632,7 +6826,7 @@
               <a:buChar char="•"/>
               <a:defRPr sz="1600"/>
             </a:lvl8pPr>
-            <a:lvl9pPr indent="-330200" lvl="8" marL="4114800" algn="l">
+            <a:lvl9pPr marL="4114800" lvl="8" indent="-330200" algn="l">
               <a:spcBef>
                 <a:spcPts val="320"/>
               </a:spcBef>
@@ -6647,15 +6841,19 @@
               <a:defRPr sz="1600"/>
             </a:lvl9pPr>
           </a:lstStyle>
-          <a:p/>
+          <a:p>
+            <a:endParaRPr/>
+          </a:p>
         </p:txBody>
       </p:sp>
       <p:sp>
         <p:nvSpPr>
           <p:cNvPr id="44" name="Google Shape;44;p7"/>
-          <p:cNvSpPr txBox="1"/>
+          <p:cNvSpPr txBox="1">
+            <a:spLocks noGrp="1"/>
+          </p:cNvSpPr>
           <p:nvPr>
-            <p:ph idx="3" type="body"/>
+            <p:ph type="body" idx="3"/>
           </p:nvPr>
         </p:nvSpPr>
         <p:spPr>
@@ -6672,11 +6870,11 @@
           </a:ln>
         </p:spPr>
         <p:txBody>
-          <a:bodyPr anchorCtr="0" anchor="b" bIns="45700" lIns="91425" spcFirstLastPara="1" rIns="91425" wrap="square" tIns="45700">
+          <a:bodyPr spcFirstLastPara="1" wrap="square" lIns="91425" tIns="45700" rIns="91425" bIns="45700" anchor="b" anchorCtr="0">
             <a:normAutofit/>
           </a:bodyPr>
           <a:lstStyle>
-            <a:lvl1pPr indent="-228600" lvl="0" marL="457200" algn="l">
+            <a:lvl1pPr marL="457200" lvl="0" indent="-228600" algn="l">
               <a:spcBef>
                 <a:spcPts val="480"/>
               </a:spcBef>
@@ -6688,9 +6886,9 @@
               </a:buClr>
               <a:buSzPts val="2400"/>
               <a:buNone/>
-              <a:defRPr b="1" sz="2400"/>
+              <a:defRPr sz="2400" b="1"/>
             </a:lvl1pPr>
-            <a:lvl2pPr indent="-228600" lvl="1" marL="914400" algn="l">
+            <a:lvl2pPr marL="914400" lvl="1" indent="-228600" algn="l">
               <a:spcBef>
                 <a:spcPts val="400"/>
               </a:spcBef>
@@ -6702,9 +6900,9 @@
               </a:buClr>
               <a:buSzPts val="2000"/>
               <a:buNone/>
-              <a:defRPr b="1" sz="2000"/>
+              <a:defRPr sz="2000" b="1"/>
             </a:lvl2pPr>
-            <a:lvl3pPr indent="-228600" lvl="2" marL="1371600" algn="l">
+            <a:lvl3pPr marL="1371600" lvl="2" indent="-228600" algn="l">
               <a:spcBef>
                 <a:spcPts val="360"/>
               </a:spcBef>
@@ -6716,9 +6914,9 @@
               </a:buClr>
               <a:buSzPts val="1800"/>
               <a:buNone/>
-              <a:defRPr b="1" sz="1800"/>
+              <a:defRPr sz="1800" b="1"/>
             </a:lvl3pPr>
-            <a:lvl4pPr indent="-228600" lvl="3" marL="1828800" algn="l">
+            <a:lvl4pPr marL="1828800" lvl="3" indent="-228600" algn="l">
               <a:spcBef>
                 <a:spcPts val="320"/>
               </a:spcBef>
@@ -6730,9 +6928,9 @@
               </a:buClr>
               <a:buSzPts val="1600"/>
               <a:buNone/>
-              <a:defRPr b="1" sz="1600"/>
+              <a:defRPr sz="1600" b="1"/>
             </a:lvl4pPr>
-            <a:lvl5pPr indent="-228600" lvl="4" marL="2286000" algn="l">
+            <a:lvl5pPr marL="2286000" lvl="4" indent="-228600" algn="l">
               <a:spcBef>
                 <a:spcPts val="320"/>
               </a:spcBef>
@@ -6744,9 +6942,9 @@
               </a:buClr>
               <a:buSzPts val="1600"/>
               <a:buNone/>
-              <a:defRPr b="1" sz="1600"/>
+              <a:defRPr sz="1600" b="1"/>
             </a:lvl5pPr>
-            <a:lvl6pPr indent="-228600" lvl="5" marL="2743200" algn="l">
+            <a:lvl6pPr marL="2743200" lvl="5" indent="-228600" algn="l">
               <a:spcBef>
                 <a:spcPts val="320"/>
               </a:spcBef>
@@ -6758,9 +6956,9 @@
               </a:buClr>
               <a:buSzPts val="1600"/>
               <a:buNone/>
-              <a:defRPr b="1" sz="1600"/>
+              <a:defRPr sz="1600" b="1"/>
             </a:lvl6pPr>
-            <a:lvl7pPr indent="-228600" lvl="6" marL="3200400" algn="l">
+            <a:lvl7pPr marL="3200400" lvl="6" indent="-228600" algn="l">
               <a:spcBef>
                 <a:spcPts val="320"/>
               </a:spcBef>
@@ -6772,9 +6970,9 @@
               </a:buClr>
               <a:buSzPts val="1600"/>
               <a:buNone/>
-              <a:defRPr b="1" sz="1600"/>
+              <a:defRPr sz="1600" b="1"/>
             </a:lvl7pPr>
-            <a:lvl8pPr indent="-228600" lvl="7" marL="3657600" algn="l">
+            <a:lvl8pPr marL="3657600" lvl="7" indent="-228600" algn="l">
               <a:spcBef>
                 <a:spcPts val="320"/>
               </a:spcBef>
@@ -6786,9 +6984,9 @@
               </a:buClr>
               <a:buSzPts val="1600"/>
               <a:buNone/>
-              <a:defRPr b="1" sz="1600"/>
+              <a:defRPr sz="1600" b="1"/>
             </a:lvl8pPr>
-            <a:lvl9pPr indent="-228600" lvl="8" marL="4114800" algn="l">
+            <a:lvl9pPr marL="4114800" lvl="8" indent="-228600" algn="l">
               <a:spcBef>
                 <a:spcPts val="320"/>
               </a:spcBef>
@@ -6800,18 +6998,22 @@
               </a:buClr>
               <a:buSzPts val="1600"/>
               <a:buNone/>
-              <a:defRPr b="1" sz="1600"/>
+              <a:defRPr sz="1600" b="1"/>
             </a:lvl9pPr>
           </a:lstStyle>
-          <a:p/>
+          <a:p>
+            <a:endParaRPr/>
+          </a:p>
         </p:txBody>
       </p:sp>
       <p:sp>
         <p:nvSpPr>
           <p:cNvPr id="45" name="Google Shape;45;p7"/>
-          <p:cNvSpPr txBox="1"/>
+          <p:cNvSpPr txBox="1">
+            <a:spLocks noGrp="1"/>
+          </p:cNvSpPr>
           <p:nvPr>
-            <p:ph idx="4" type="body"/>
+            <p:ph type="body" idx="4"/>
           </p:nvPr>
         </p:nvSpPr>
         <p:spPr>
@@ -6828,11 +7030,11 @@
           </a:ln>
         </p:spPr>
         <p:txBody>
-          <a:bodyPr anchorCtr="0" anchor="t" bIns="45700" lIns="91425" spcFirstLastPara="1" rIns="91425" wrap="square" tIns="45700">
+          <a:bodyPr spcFirstLastPara="1" wrap="square" lIns="91425" tIns="45700" rIns="91425" bIns="45700" anchor="t" anchorCtr="0">
             <a:normAutofit/>
           </a:bodyPr>
           <a:lstStyle>
-            <a:lvl1pPr indent="-381000" lvl="0" marL="457200" algn="l">
+            <a:lvl1pPr marL="457200" lvl="0" indent="-381000" algn="l">
               <a:spcBef>
                 <a:spcPts val="480"/>
               </a:spcBef>
@@ -6846,7 +7048,7 @@
               <a:buChar char="•"/>
               <a:defRPr sz="2400"/>
             </a:lvl1pPr>
-            <a:lvl2pPr indent="-355600" lvl="1" marL="914400" algn="l">
+            <a:lvl2pPr marL="914400" lvl="1" indent="-355600" algn="l">
               <a:spcBef>
                 <a:spcPts val="400"/>
               </a:spcBef>
@@ -6860,7 +7062,7 @@
               <a:buChar char="–"/>
               <a:defRPr sz="2000"/>
             </a:lvl2pPr>
-            <a:lvl3pPr indent="-342900" lvl="2" marL="1371600" algn="l">
+            <a:lvl3pPr marL="1371600" lvl="2" indent="-342900" algn="l">
               <a:spcBef>
                 <a:spcPts val="360"/>
               </a:spcBef>
@@ -6874,7 +7076,7 @@
               <a:buChar char="•"/>
               <a:defRPr sz="1800"/>
             </a:lvl3pPr>
-            <a:lvl4pPr indent="-330200" lvl="3" marL="1828800" algn="l">
+            <a:lvl4pPr marL="1828800" lvl="3" indent="-330200" algn="l">
               <a:spcBef>
                 <a:spcPts val="320"/>
               </a:spcBef>
@@ -6888,7 +7090,7 @@
               <a:buChar char="–"/>
               <a:defRPr sz="1600"/>
             </a:lvl4pPr>
-            <a:lvl5pPr indent="-330200" lvl="4" marL="2286000" algn="l">
+            <a:lvl5pPr marL="2286000" lvl="4" indent="-330200" algn="l">
               <a:spcBef>
                 <a:spcPts val="320"/>
               </a:spcBef>
@@ -6902,7 +7104,7 @@
               <a:buChar char="»"/>
               <a:defRPr sz="1600"/>
             </a:lvl5pPr>
-            <a:lvl6pPr indent="-330200" lvl="5" marL="2743200" algn="l">
+            <a:lvl6pPr marL="2743200" lvl="5" indent="-330200" algn="l">
               <a:spcBef>
                 <a:spcPts val="320"/>
               </a:spcBef>
@@ -6916,7 +7118,7 @@
               <a:buChar char="•"/>
               <a:defRPr sz="1600"/>
             </a:lvl6pPr>
-            <a:lvl7pPr indent="-330200" lvl="6" marL="3200400" algn="l">
+            <a:lvl7pPr marL="3200400" lvl="6" indent="-330200" algn="l">
               <a:spcBef>
                 <a:spcPts val="320"/>
               </a:spcBef>
@@ -6930,7 +7132,7 @@
               <a:buChar char="•"/>
               <a:defRPr sz="1600"/>
             </a:lvl7pPr>
-            <a:lvl8pPr indent="-330200" lvl="7" marL="3657600" algn="l">
+            <a:lvl8pPr marL="3657600" lvl="7" indent="-330200" algn="l">
               <a:spcBef>
                 <a:spcPts val="320"/>
               </a:spcBef>
@@ -6944,7 +7146,7 @@
               <a:buChar char="•"/>
               <a:defRPr sz="1600"/>
             </a:lvl8pPr>
-            <a:lvl9pPr indent="-330200" lvl="8" marL="4114800" algn="l">
+            <a:lvl9pPr marL="4114800" lvl="8" indent="-330200" algn="l">
               <a:spcBef>
                 <a:spcPts val="320"/>
               </a:spcBef>
@@ -6959,15 +7161,19 @@
               <a:defRPr sz="1600"/>
             </a:lvl9pPr>
           </a:lstStyle>
-          <a:p/>
+          <a:p>
+            <a:endParaRPr/>
+          </a:p>
         </p:txBody>
       </p:sp>
       <p:sp>
         <p:nvSpPr>
           <p:cNvPr id="46" name="Google Shape;46;p7"/>
-          <p:cNvSpPr txBox="1"/>
+          <p:cNvSpPr txBox="1">
+            <a:spLocks noGrp="1"/>
+          </p:cNvSpPr>
           <p:nvPr>
-            <p:ph idx="10" type="dt"/>
+            <p:ph type="dt" idx="10"/>
           </p:nvPr>
         </p:nvSpPr>
         <p:spPr>
@@ -6984,7 +7190,7 @@
           </a:ln>
         </p:spPr>
         <p:txBody>
-          <a:bodyPr anchorCtr="0" anchor="ctr" bIns="45700" lIns="91425" spcFirstLastPara="1" rIns="91425" wrap="square" tIns="45700">
+          <a:bodyPr spcFirstLastPara="1" wrap="square" lIns="91425" tIns="45700" rIns="91425" bIns="45700" anchor="ctr" anchorCtr="0">
             <a:noAutofit/>
           </a:bodyPr>
           <a:lstStyle>
@@ -7088,15 +7294,19 @@
               <a:defRPr/>
             </a:lvl9pPr>
           </a:lstStyle>
-          <a:p/>
+          <a:p>
+            <a:endParaRPr/>
+          </a:p>
         </p:txBody>
       </p:sp>
       <p:sp>
         <p:nvSpPr>
           <p:cNvPr id="47" name="Google Shape;47;p7"/>
-          <p:cNvSpPr txBox="1"/>
+          <p:cNvSpPr txBox="1">
+            <a:spLocks noGrp="1"/>
+          </p:cNvSpPr>
           <p:nvPr>
-            <p:ph idx="11" type="ftr"/>
+            <p:ph type="ftr" idx="11"/>
           </p:nvPr>
         </p:nvSpPr>
         <p:spPr>
@@ -7113,7 +7323,7 @@
           </a:ln>
         </p:spPr>
         <p:txBody>
-          <a:bodyPr anchorCtr="0" anchor="ctr" bIns="45700" lIns="91425" spcFirstLastPara="1" rIns="91425" wrap="square" tIns="45700">
+          <a:bodyPr spcFirstLastPara="1" wrap="square" lIns="91425" tIns="45700" rIns="91425" bIns="45700" anchor="ctr" anchorCtr="0">
             <a:noAutofit/>
           </a:bodyPr>
           <a:lstStyle>
@@ -7217,15 +7427,19 @@
               <a:defRPr/>
             </a:lvl9pPr>
           </a:lstStyle>
-          <a:p/>
+          <a:p>
+            <a:endParaRPr/>
+          </a:p>
         </p:txBody>
       </p:sp>
       <p:sp>
         <p:nvSpPr>
           <p:cNvPr id="48" name="Google Shape;48;p7"/>
-          <p:cNvSpPr txBox="1"/>
+          <p:cNvSpPr txBox="1">
+            <a:spLocks noGrp="1"/>
+          </p:cNvSpPr>
           <p:nvPr>
-            <p:ph idx="12" type="sldNum"/>
+            <p:ph type="sldNum" idx="12"/>
           </p:nvPr>
         </p:nvSpPr>
         <p:spPr>
@@ -7242,67 +7456,67 @@
           </a:ln>
         </p:spPr>
         <p:txBody>
-          <a:bodyPr anchorCtr="0" anchor="ctr" bIns="45700" lIns="91425" spcFirstLastPara="1" rIns="91425" wrap="square" tIns="45700">
+          <a:bodyPr spcFirstLastPara="1" wrap="square" lIns="91425" tIns="45700" rIns="91425" bIns="45700" anchor="ctr" anchorCtr="0">
             <a:noAutofit/>
           </a:bodyPr>
           <a:lstStyle>
-            <a:lvl1pPr indent="0" lvl="0" marL="0" algn="r">
+            <a:lvl1pPr marL="0" lvl="0" indent="0" algn="r">
               <a:spcBef>
                 <a:spcPts val="0"/>
               </a:spcBef>
               <a:buNone/>
               <a:defRPr/>
             </a:lvl1pPr>
-            <a:lvl2pPr indent="0" lvl="1" marL="0" algn="r">
+            <a:lvl2pPr marL="0" lvl="1" indent="0" algn="r">
               <a:spcBef>
                 <a:spcPts val="0"/>
               </a:spcBef>
               <a:buNone/>
               <a:defRPr/>
             </a:lvl2pPr>
-            <a:lvl3pPr indent="0" lvl="2" marL="0" algn="r">
+            <a:lvl3pPr marL="0" lvl="2" indent="0" algn="r">
               <a:spcBef>
                 <a:spcPts val="0"/>
               </a:spcBef>
               <a:buNone/>
               <a:defRPr/>
             </a:lvl3pPr>
-            <a:lvl4pPr indent="0" lvl="3" marL="0" algn="r">
+            <a:lvl4pPr marL="0" lvl="3" indent="0" algn="r">
               <a:spcBef>
                 <a:spcPts val="0"/>
               </a:spcBef>
               <a:buNone/>
               <a:defRPr/>
             </a:lvl4pPr>
-            <a:lvl5pPr indent="0" lvl="4" marL="0" algn="r">
+            <a:lvl5pPr marL="0" lvl="4" indent="0" algn="r">
               <a:spcBef>
                 <a:spcPts val="0"/>
               </a:spcBef>
               <a:buNone/>
               <a:defRPr/>
             </a:lvl5pPr>
-            <a:lvl6pPr indent="0" lvl="5" marL="0" algn="r">
+            <a:lvl6pPr marL="0" lvl="5" indent="0" algn="r">
               <a:spcBef>
                 <a:spcPts val="0"/>
               </a:spcBef>
               <a:buNone/>
               <a:defRPr/>
             </a:lvl6pPr>
-            <a:lvl7pPr indent="0" lvl="6" marL="0" algn="r">
+            <a:lvl7pPr marL="0" lvl="6" indent="0" algn="r">
               <a:spcBef>
                 <a:spcPts val="0"/>
               </a:spcBef>
               <a:buNone/>
               <a:defRPr/>
             </a:lvl7pPr>
-            <a:lvl8pPr indent="0" lvl="7" marL="0" algn="r">
+            <a:lvl8pPr marL="0" lvl="7" indent="0" algn="r">
               <a:spcBef>
                 <a:spcPts val="0"/>
               </a:spcBef>
               <a:buNone/>
               <a:defRPr/>
             </a:lvl8pPr>
-            <a:lvl9pPr indent="0" lvl="8" marL="0" algn="r">
+            <a:lvl9pPr marL="0" lvl="8" indent="0" algn="r">
               <a:spcBef>
                 <a:spcPts val="0"/>
               </a:spcBef>
@@ -7311,7 +7525,7 @@
             </a:lvl9pPr>
           </a:lstStyle>
           <a:p>
-            <a:pPr indent="0" lvl="0" marL="0" rtl="0" algn="r">
+            <a:pPr marL="0" lvl="0" indent="0" algn="r" rtl="0">
               <a:spcBef>
                 <a:spcPts val="0"/>
               </a:spcBef>
@@ -7322,7 +7536,7 @@
             </a:pPr>
             <a:fld id="{00000000-1234-1234-1234-123412341234}" type="slidenum">
               <a:rPr lang="en-US"/>
-              <a:t>‹#›</a:t>
+              <a:t>‹nº›</a:t>
             </a:fld>
             <a:endParaRPr/>
           </a:p>
@@ -7337,11 +7551,11 @@
 </file>
 
 <file path=ppt/slideLayouts/slideLayout7.xml><?xml version="1.0" encoding="utf-8"?>
-<p:sldLayout xmlns:a="http://schemas.openxmlformats.org/drawingml/2006/main" xmlns:r="http://schemas.openxmlformats.org/officeDocument/2006/relationships" xmlns:mc="http://schemas.openxmlformats.org/markup-compatibility/2006" xmlns:mv="urn:schemas-microsoft-com:mac:vml" xmlns:p="http://schemas.openxmlformats.org/presentationml/2006/main" xmlns:c="http://schemas.openxmlformats.org/drawingml/2006/chart" xmlns:dgm="http://schemas.openxmlformats.org/drawingml/2006/diagram" xmlns:o="urn:schemas-microsoft-com:office:office" xmlns:v="urn:schemas-microsoft-com:vml" xmlns:pvml="urn:schemas-microsoft-com:office:powerpoint" xmlns:com="http://schemas.openxmlformats.org/drawingml/2006/compatibility" xmlns:p14="http://schemas.microsoft.com/office/powerpoint/2010/main" xmlns:p15="http://schemas.microsoft.com/office/powerpoint/2012/main" xmlns:ahyp="http://schemas.microsoft.com/office/drawing/2018/hyperlinkcolor" matchingName="Title Only" type="titleOnly">
+<p:sldLayout xmlns:a="http://schemas.openxmlformats.org/drawingml/2006/main" xmlns:r="http://schemas.openxmlformats.org/officeDocument/2006/relationships" xmlns:p="http://schemas.openxmlformats.org/presentationml/2006/main" matchingName="Title Only" type="titleOnly">
   <p:cSld name="TITLE_ONLY">
     <p:spTree>
       <p:nvGrpSpPr>
-        <p:cNvPr id="49" name="Shape 49"/>
+        <p:cNvPr id="1" name="Shape 49"/>
         <p:cNvGrpSpPr/>
         <p:nvPr/>
       </p:nvGrpSpPr>
@@ -7356,7 +7570,9 @@
       <p:sp>
         <p:nvSpPr>
           <p:cNvPr id="50" name="Google Shape;50;p8"/>
-          <p:cNvSpPr txBox="1"/>
+          <p:cNvSpPr txBox="1">
+            <a:spLocks noGrp="1"/>
+          </p:cNvSpPr>
           <p:nvPr>
             <p:ph type="title"/>
           </p:nvPr>
@@ -7375,7 +7591,7 @@
           </a:ln>
         </p:spPr>
         <p:txBody>
-          <a:bodyPr anchorCtr="0" anchor="ctr" bIns="45700" lIns="91425" spcFirstLastPara="1" rIns="91425" wrap="square" tIns="45700">
+          <a:bodyPr spcFirstLastPara="1" wrap="square" lIns="91425" tIns="45700" rIns="91425" bIns="45700" anchor="ctr" anchorCtr="0">
             <a:normAutofit/>
           </a:bodyPr>
           <a:lstStyle>
@@ -7482,15 +7698,19 @@
               <a:defRPr/>
             </a:lvl9pPr>
           </a:lstStyle>
-          <a:p/>
+          <a:p>
+            <a:endParaRPr/>
+          </a:p>
         </p:txBody>
       </p:sp>
       <p:sp>
         <p:nvSpPr>
           <p:cNvPr id="51" name="Google Shape;51;p8"/>
-          <p:cNvSpPr txBox="1"/>
+          <p:cNvSpPr txBox="1">
+            <a:spLocks noGrp="1"/>
+          </p:cNvSpPr>
           <p:nvPr>
-            <p:ph idx="10" type="dt"/>
+            <p:ph type="dt" idx="10"/>
           </p:nvPr>
         </p:nvSpPr>
         <p:spPr>
@@ -7507,7 +7727,7 @@
           </a:ln>
         </p:spPr>
         <p:txBody>
-          <a:bodyPr anchorCtr="0" anchor="ctr" bIns="45700" lIns="91425" spcFirstLastPara="1" rIns="91425" wrap="square" tIns="45700">
+          <a:bodyPr spcFirstLastPara="1" wrap="square" lIns="91425" tIns="45700" rIns="91425" bIns="45700" anchor="ctr" anchorCtr="0">
             <a:noAutofit/>
           </a:bodyPr>
           <a:lstStyle>
@@ -7611,15 +7831,19 @@
               <a:defRPr/>
             </a:lvl9pPr>
           </a:lstStyle>
-          <a:p/>
+          <a:p>
+            <a:endParaRPr/>
+          </a:p>
         </p:txBody>
       </p:sp>
       <p:sp>
         <p:nvSpPr>
           <p:cNvPr id="52" name="Google Shape;52;p8"/>
-          <p:cNvSpPr txBox="1"/>
+          <p:cNvSpPr txBox="1">
+            <a:spLocks noGrp="1"/>
+          </p:cNvSpPr>
           <p:nvPr>
-            <p:ph idx="11" type="ftr"/>
+            <p:ph type="ftr" idx="11"/>
           </p:nvPr>
         </p:nvSpPr>
         <p:spPr>
@@ -7636,7 +7860,7 @@
           </a:ln>
         </p:spPr>
         <p:txBody>
-          <a:bodyPr anchorCtr="0" anchor="ctr" bIns="45700" lIns="91425" spcFirstLastPara="1" rIns="91425" wrap="square" tIns="45700">
+          <a:bodyPr spcFirstLastPara="1" wrap="square" lIns="91425" tIns="45700" rIns="91425" bIns="45700" anchor="ctr" anchorCtr="0">
             <a:noAutofit/>
           </a:bodyPr>
           <a:lstStyle>
@@ -7740,15 +7964,19 @@
               <a:defRPr/>
             </a:lvl9pPr>
           </a:lstStyle>
-          <a:p/>
+          <a:p>
+            <a:endParaRPr/>
+          </a:p>
         </p:txBody>
       </p:sp>
       <p:sp>
         <p:nvSpPr>
           <p:cNvPr id="53" name="Google Shape;53;p8"/>
-          <p:cNvSpPr txBox="1"/>
+          <p:cNvSpPr txBox="1">
+            <a:spLocks noGrp="1"/>
+          </p:cNvSpPr>
           <p:nvPr>
-            <p:ph idx="12" type="sldNum"/>
+            <p:ph type="sldNum" idx="12"/>
           </p:nvPr>
         </p:nvSpPr>
         <p:spPr>
@@ -7765,67 +7993,67 @@
           </a:ln>
         </p:spPr>
         <p:txBody>
-          <a:bodyPr anchorCtr="0" anchor="ctr" bIns="45700" lIns="91425" spcFirstLastPara="1" rIns="91425" wrap="square" tIns="45700">
+          <a:bodyPr spcFirstLastPara="1" wrap="square" lIns="91425" tIns="45700" rIns="91425" bIns="45700" anchor="ctr" anchorCtr="0">
             <a:noAutofit/>
           </a:bodyPr>
           <a:lstStyle>
-            <a:lvl1pPr indent="0" lvl="0" marL="0" algn="r">
+            <a:lvl1pPr marL="0" lvl="0" indent="0" algn="r">
               <a:spcBef>
                 <a:spcPts val="0"/>
               </a:spcBef>
               <a:buNone/>
               <a:defRPr/>
             </a:lvl1pPr>
-            <a:lvl2pPr indent="0" lvl="1" marL="0" algn="r">
+            <a:lvl2pPr marL="0" lvl="1" indent="0" algn="r">
               <a:spcBef>
                 <a:spcPts val="0"/>
               </a:spcBef>
               <a:buNone/>
               <a:defRPr/>
             </a:lvl2pPr>
-            <a:lvl3pPr indent="0" lvl="2" marL="0" algn="r">
+            <a:lvl3pPr marL="0" lvl="2" indent="0" algn="r">
               <a:spcBef>
                 <a:spcPts val="0"/>
               </a:spcBef>
               <a:buNone/>
               <a:defRPr/>
             </a:lvl3pPr>
-            <a:lvl4pPr indent="0" lvl="3" marL="0" algn="r">
+            <a:lvl4pPr marL="0" lvl="3" indent="0" algn="r">
               <a:spcBef>
                 <a:spcPts val="0"/>
               </a:spcBef>
               <a:buNone/>
               <a:defRPr/>
             </a:lvl4pPr>
-            <a:lvl5pPr indent="0" lvl="4" marL="0" algn="r">
+            <a:lvl5pPr marL="0" lvl="4" indent="0" algn="r">
               <a:spcBef>
                 <a:spcPts val="0"/>
               </a:spcBef>
               <a:buNone/>
               <a:defRPr/>
             </a:lvl5pPr>
-            <a:lvl6pPr indent="0" lvl="5" marL="0" algn="r">
+            <a:lvl6pPr marL="0" lvl="5" indent="0" algn="r">
               <a:spcBef>
                 <a:spcPts val="0"/>
               </a:spcBef>
               <a:buNone/>
               <a:defRPr/>
             </a:lvl6pPr>
-            <a:lvl7pPr indent="0" lvl="6" marL="0" algn="r">
+            <a:lvl7pPr marL="0" lvl="6" indent="0" algn="r">
               <a:spcBef>
                 <a:spcPts val="0"/>
               </a:spcBef>
               <a:buNone/>
               <a:defRPr/>
             </a:lvl7pPr>
-            <a:lvl8pPr indent="0" lvl="7" marL="0" algn="r">
+            <a:lvl8pPr marL="0" lvl="7" indent="0" algn="r">
               <a:spcBef>
                 <a:spcPts val="0"/>
               </a:spcBef>
               <a:buNone/>
               <a:defRPr/>
             </a:lvl8pPr>
-            <a:lvl9pPr indent="0" lvl="8" marL="0" algn="r">
+            <a:lvl9pPr marL="0" lvl="8" indent="0" algn="r">
               <a:spcBef>
                 <a:spcPts val="0"/>
               </a:spcBef>
@@ -7834,7 +8062,7 @@
             </a:lvl9pPr>
           </a:lstStyle>
           <a:p>
-            <a:pPr indent="0" lvl="0" marL="0" rtl="0" algn="r">
+            <a:pPr marL="0" lvl="0" indent="0" algn="r" rtl="0">
               <a:spcBef>
                 <a:spcPts val="0"/>
               </a:spcBef>
@@ -7845,7 +8073,7 @@
             </a:pPr>
             <a:fld id="{00000000-1234-1234-1234-123412341234}" type="slidenum">
               <a:rPr lang="en-US"/>
-              <a:t>‹#›</a:t>
+              <a:t>‹nº›</a:t>
             </a:fld>
             <a:endParaRPr/>
           </a:p>
@@ -7860,11 +8088,11 @@
 </file>
 
 <file path=ppt/slideLayouts/slideLayout8.xml><?xml version="1.0" encoding="utf-8"?>
-<p:sldLayout xmlns:a="http://schemas.openxmlformats.org/drawingml/2006/main" xmlns:r="http://schemas.openxmlformats.org/officeDocument/2006/relationships" xmlns:mc="http://schemas.openxmlformats.org/markup-compatibility/2006" xmlns:mv="urn:schemas-microsoft-com:mac:vml" xmlns:p="http://schemas.openxmlformats.org/presentationml/2006/main" xmlns:c="http://schemas.openxmlformats.org/drawingml/2006/chart" xmlns:dgm="http://schemas.openxmlformats.org/drawingml/2006/diagram" xmlns:o="urn:schemas-microsoft-com:office:office" xmlns:v="urn:schemas-microsoft-com:vml" xmlns:pvml="urn:schemas-microsoft-com:office:powerpoint" xmlns:com="http://schemas.openxmlformats.org/drawingml/2006/compatibility" xmlns:p14="http://schemas.microsoft.com/office/powerpoint/2010/main" xmlns:p15="http://schemas.microsoft.com/office/powerpoint/2012/main" xmlns:ahyp="http://schemas.microsoft.com/office/drawing/2018/hyperlinkcolor" matchingName="Content with Caption" type="objTx">
+<p:sldLayout xmlns:a="http://schemas.openxmlformats.org/drawingml/2006/main" xmlns:r="http://schemas.openxmlformats.org/officeDocument/2006/relationships" xmlns:p="http://schemas.openxmlformats.org/presentationml/2006/main" matchingName="Content with Caption" type="objTx">
   <p:cSld name="OBJECT_WITH_CAPTION_TEXT">
     <p:spTree>
       <p:nvGrpSpPr>
-        <p:cNvPr id="54" name="Shape 54"/>
+        <p:cNvPr id="1" name="Shape 54"/>
         <p:cNvGrpSpPr/>
         <p:nvPr/>
       </p:nvGrpSpPr>
@@ -7879,7 +8107,9 @@
       <p:sp>
         <p:nvSpPr>
           <p:cNvPr id="55" name="Google Shape;55;p9"/>
-          <p:cNvSpPr txBox="1"/>
+          <p:cNvSpPr txBox="1">
+            <a:spLocks noGrp="1"/>
+          </p:cNvSpPr>
           <p:nvPr>
             <p:ph type="title"/>
           </p:nvPr>
@@ -7898,7 +8128,7 @@
           </a:ln>
         </p:spPr>
         <p:txBody>
-          <a:bodyPr anchorCtr="0" anchor="b" bIns="45700" lIns="91425" spcFirstLastPara="1" rIns="91425" wrap="square" tIns="45700">
+          <a:bodyPr spcFirstLastPara="1" wrap="square" lIns="91425" tIns="45700" rIns="91425" bIns="45700" anchor="b" anchorCtr="0">
             <a:normAutofit/>
           </a:bodyPr>
           <a:lstStyle>
@@ -7915,7 +8145,7 @@
               <a:buSzPts val="2000"/>
               <a:buFont typeface="Calibri"/>
               <a:buNone/>
-              <a:defRPr b="1" sz="2000"/>
+              <a:defRPr sz="2000" b="1"/>
             </a:lvl1pPr>
             <a:lvl2pPr lvl="1">
               <a:spcBef>
@@ -8006,15 +8236,19 @@
               <a:defRPr/>
             </a:lvl9pPr>
           </a:lstStyle>
-          <a:p/>
+          <a:p>
+            <a:endParaRPr/>
+          </a:p>
         </p:txBody>
       </p:sp>
       <p:sp>
         <p:nvSpPr>
           <p:cNvPr id="56" name="Google Shape;56;p9"/>
-          <p:cNvSpPr txBox="1"/>
+          <p:cNvSpPr txBox="1">
+            <a:spLocks noGrp="1"/>
+          </p:cNvSpPr>
           <p:nvPr>
-            <p:ph idx="1" type="body"/>
+            <p:ph type="body" idx="1"/>
           </p:nvPr>
         </p:nvSpPr>
         <p:spPr>
@@ -8031,11 +8265,11 @@
           </a:ln>
         </p:spPr>
         <p:txBody>
-          <a:bodyPr anchorCtr="0" anchor="t" bIns="45700" lIns="91425" spcFirstLastPara="1" rIns="91425" wrap="square" tIns="45700">
+          <a:bodyPr spcFirstLastPara="1" wrap="square" lIns="91425" tIns="45700" rIns="91425" bIns="45700" anchor="t" anchorCtr="0">
             <a:normAutofit/>
           </a:bodyPr>
           <a:lstStyle>
-            <a:lvl1pPr indent="-431800" lvl="0" marL="457200" algn="l">
+            <a:lvl1pPr marL="457200" lvl="0" indent="-431800" algn="l">
               <a:spcBef>
                 <a:spcPts val="640"/>
               </a:spcBef>
@@ -8049,7 +8283,7 @@
               <a:buChar char="•"/>
               <a:defRPr sz="3200"/>
             </a:lvl1pPr>
-            <a:lvl2pPr indent="-406400" lvl="1" marL="914400" algn="l">
+            <a:lvl2pPr marL="914400" lvl="1" indent="-406400" algn="l">
               <a:spcBef>
                 <a:spcPts val="560"/>
               </a:spcBef>
@@ -8063,7 +8297,7 @@
               <a:buChar char="–"/>
               <a:defRPr sz="2800"/>
             </a:lvl2pPr>
-            <a:lvl3pPr indent="-381000" lvl="2" marL="1371600" algn="l">
+            <a:lvl3pPr marL="1371600" lvl="2" indent="-381000" algn="l">
               <a:spcBef>
                 <a:spcPts val="480"/>
               </a:spcBef>
@@ -8077,7 +8311,7 @@
               <a:buChar char="•"/>
               <a:defRPr sz="2400"/>
             </a:lvl3pPr>
-            <a:lvl4pPr indent="-355600" lvl="3" marL="1828800" algn="l">
+            <a:lvl4pPr marL="1828800" lvl="3" indent="-355600" algn="l">
               <a:spcBef>
                 <a:spcPts val="400"/>
               </a:spcBef>
@@ -8091,7 +8325,7 @@
               <a:buChar char="–"/>
               <a:defRPr sz="2000"/>
             </a:lvl4pPr>
-            <a:lvl5pPr indent="-355600" lvl="4" marL="2286000" algn="l">
+            <a:lvl5pPr marL="2286000" lvl="4" indent="-355600" algn="l">
               <a:spcBef>
                 <a:spcPts val="400"/>
               </a:spcBef>
@@ -8105,7 +8339,7 @@
               <a:buChar char="»"/>
               <a:defRPr sz="2000"/>
             </a:lvl5pPr>
-            <a:lvl6pPr indent="-355600" lvl="5" marL="2743200" algn="l">
+            <a:lvl6pPr marL="2743200" lvl="5" indent="-355600" algn="l">
               <a:spcBef>
                 <a:spcPts val="400"/>
               </a:spcBef>
@@ -8119,7 +8353,7 @@
               <a:buChar char="•"/>
               <a:defRPr sz="2000"/>
             </a:lvl6pPr>
-            <a:lvl7pPr indent="-355600" lvl="6" marL="3200400" algn="l">
+            <a:lvl7pPr marL="3200400" lvl="6" indent="-355600" algn="l">
               <a:spcBef>
                 <a:spcPts val="400"/>
               </a:spcBef>
@@ -8133,7 +8367,7 @@
               <a:buChar char="•"/>
               <a:defRPr sz="2000"/>
             </a:lvl7pPr>
-            <a:lvl8pPr indent="-355600" lvl="7" marL="3657600" algn="l">
+            <a:lvl8pPr marL="3657600" lvl="7" indent="-355600" algn="l">
               <a:spcBef>
                 <a:spcPts val="400"/>
               </a:spcBef>
@@ -8147,7 +8381,7 @@
               <a:buChar char="•"/>
               <a:defRPr sz="2000"/>
             </a:lvl8pPr>
-            <a:lvl9pPr indent="-355600" lvl="8" marL="4114800" algn="l">
+            <a:lvl9pPr marL="4114800" lvl="8" indent="-355600" algn="l">
               <a:spcBef>
                 <a:spcPts val="400"/>
               </a:spcBef>
@@ -8162,15 +8396,19 @@
               <a:defRPr sz="2000"/>
             </a:lvl9pPr>
           </a:lstStyle>
-          <a:p/>
+          <a:p>
+            <a:endParaRPr/>
+          </a:p>
         </p:txBody>
       </p:sp>
       <p:sp>
         <p:nvSpPr>
           <p:cNvPr id="57" name="Google Shape;57;p9"/>
-          <p:cNvSpPr txBox="1"/>
+          <p:cNvSpPr txBox="1">
+            <a:spLocks noGrp="1"/>
+          </p:cNvSpPr>
           <p:nvPr>
-            <p:ph idx="2" type="body"/>
+            <p:ph type="body" idx="2"/>
           </p:nvPr>
         </p:nvSpPr>
         <p:spPr>
@@ -8187,11 +8425,11 @@
           </a:ln>
         </p:spPr>
         <p:txBody>
-          <a:bodyPr anchorCtr="0" anchor="t" bIns="45700" lIns="91425" spcFirstLastPara="1" rIns="91425" wrap="square" tIns="45700">
+          <a:bodyPr spcFirstLastPara="1" wrap="square" lIns="91425" tIns="45700" rIns="91425" bIns="45700" anchor="t" anchorCtr="0">
             <a:normAutofit/>
           </a:bodyPr>
           <a:lstStyle>
-            <a:lvl1pPr indent="-228600" lvl="0" marL="457200" algn="l">
+            <a:lvl1pPr marL="457200" lvl="0" indent="-228600" algn="l">
               <a:spcBef>
                 <a:spcPts val="280"/>
               </a:spcBef>
@@ -8205,7 +8443,7 @@
               <a:buNone/>
               <a:defRPr sz="1400"/>
             </a:lvl1pPr>
-            <a:lvl2pPr indent="-228600" lvl="1" marL="914400" algn="l">
+            <a:lvl2pPr marL="914400" lvl="1" indent="-228600" algn="l">
               <a:spcBef>
                 <a:spcPts val="240"/>
               </a:spcBef>
@@ -8219,7 +8457,7 @@
               <a:buNone/>
               <a:defRPr sz="1200"/>
             </a:lvl2pPr>
-            <a:lvl3pPr indent="-228600" lvl="2" marL="1371600" algn="l">
+            <a:lvl3pPr marL="1371600" lvl="2" indent="-228600" algn="l">
               <a:spcBef>
                 <a:spcPts val="200"/>
               </a:spcBef>
@@ -8233,7 +8471,7 @@
               <a:buNone/>
               <a:defRPr sz="1000"/>
             </a:lvl3pPr>
-            <a:lvl4pPr indent="-228600" lvl="3" marL="1828800" algn="l">
+            <a:lvl4pPr marL="1828800" lvl="3" indent="-228600" algn="l">
               <a:spcBef>
                 <a:spcPts val="180"/>
               </a:spcBef>
@@ -8247,7 +8485,7 @@
               <a:buNone/>
               <a:defRPr sz="900"/>
             </a:lvl4pPr>
-            <a:lvl5pPr indent="-228600" lvl="4" marL="2286000" algn="l">
+            <a:lvl5pPr marL="2286000" lvl="4" indent="-228600" algn="l">
               <a:spcBef>
                 <a:spcPts val="180"/>
               </a:spcBef>
@@ -8261,7 +8499,7 @@
               <a:buNone/>
               <a:defRPr sz="900"/>
             </a:lvl5pPr>
-            <a:lvl6pPr indent="-228600" lvl="5" marL="2743200" algn="l">
+            <a:lvl6pPr marL="2743200" lvl="5" indent="-228600" algn="l">
               <a:spcBef>
                 <a:spcPts val="180"/>
               </a:spcBef>
@@ -8275,7 +8513,7 @@
               <a:buNone/>
               <a:defRPr sz="900"/>
             </a:lvl6pPr>
-            <a:lvl7pPr indent="-228600" lvl="6" marL="3200400" algn="l">
+            <a:lvl7pPr marL="3200400" lvl="6" indent="-228600" algn="l">
               <a:spcBef>
                 <a:spcPts val="180"/>
               </a:spcBef>
@@ -8289,7 +8527,7 @@
               <a:buNone/>
               <a:defRPr sz="900"/>
             </a:lvl7pPr>
-            <a:lvl8pPr indent="-228600" lvl="7" marL="3657600" algn="l">
+            <a:lvl8pPr marL="3657600" lvl="7" indent="-228600" algn="l">
               <a:spcBef>
                 <a:spcPts val="180"/>
               </a:spcBef>
@@ -8303,7 +8541,7 @@
               <a:buNone/>
               <a:defRPr sz="900"/>
             </a:lvl8pPr>
-            <a:lvl9pPr indent="-228600" lvl="8" marL="4114800" algn="l">
+            <a:lvl9pPr marL="4114800" lvl="8" indent="-228600" algn="l">
               <a:spcBef>
                 <a:spcPts val="180"/>
               </a:spcBef>
@@ -8318,15 +8556,19 @@
               <a:defRPr sz="900"/>
             </a:lvl9pPr>
           </a:lstStyle>
-          <a:p/>
+          <a:p>
+            <a:endParaRPr/>
+          </a:p>
         </p:txBody>
       </p:sp>
       <p:sp>
         <p:nvSpPr>
           <p:cNvPr id="58" name="Google Shape;58;p9"/>
-          <p:cNvSpPr txBox="1"/>
+          <p:cNvSpPr txBox="1">
+            <a:spLocks noGrp="1"/>
+          </p:cNvSpPr>
           <p:nvPr>
-            <p:ph idx="10" type="dt"/>
+            <p:ph type="dt" idx="10"/>
           </p:nvPr>
         </p:nvSpPr>
         <p:spPr>
@@ -8343,7 +8585,7 @@
           </a:ln>
         </p:spPr>
         <p:txBody>
-          <a:bodyPr anchorCtr="0" anchor="ctr" bIns="45700" lIns="91425" spcFirstLastPara="1" rIns="91425" wrap="square" tIns="45700">
+          <a:bodyPr spcFirstLastPara="1" wrap="square" lIns="91425" tIns="45700" rIns="91425" bIns="45700" anchor="ctr" anchorCtr="0">
             <a:noAutofit/>
           </a:bodyPr>
           <a:lstStyle>
@@ -8447,15 +8689,19 @@
               <a:defRPr/>
             </a:lvl9pPr>
           </a:lstStyle>
-          <a:p/>
+          <a:p>
+            <a:endParaRPr/>
+          </a:p>
         </p:txBody>
       </p:sp>
       <p:sp>
         <p:nvSpPr>
           <p:cNvPr id="59" name="Google Shape;59;p9"/>
-          <p:cNvSpPr txBox="1"/>
+          <p:cNvSpPr txBox="1">
+            <a:spLocks noGrp="1"/>
+          </p:cNvSpPr>
           <p:nvPr>
-            <p:ph idx="11" type="ftr"/>
+            <p:ph type="ftr" idx="11"/>
           </p:nvPr>
         </p:nvSpPr>
         <p:spPr>
@@ -8472,7 +8718,7 @@
           </a:ln>
         </p:spPr>
         <p:txBody>
-          <a:bodyPr anchorCtr="0" anchor="ctr" bIns="45700" lIns="91425" spcFirstLastPara="1" rIns="91425" wrap="square" tIns="45700">
+          <a:bodyPr spcFirstLastPara="1" wrap="square" lIns="91425" tIns="45700" rIns="91425" bIns="45700" anchor="ctr" anchorCtr="0">
             <a:noAutofit/>
           </a:bodyPr>
           <a:lstStyle>
@@ -8576,15 +8822,19 @@
               <a:defRPr/>
             </a:lvl9pPr>
           </a:lstStyle>
-          <a:p/>
+          <a:p>
+            <a:endParaRPr/>
+          </a:p>
         </p:txBody>
       </p:sp>
       <p:sp>
         <p:nvSpPr>
           <p:cNvPr id="60" name="Google Shape;60;p9"/>
-          <p:cNvSpPr txBox="1"/>
+          <p:cNvSpPr txBox="1">
+            <a:spLocks noGrp="1"/>
+          </p:cNvSpPr>
           <p:nvPr>
-            <p:ph idx="12" type="sldNum"/>
+            <p:ph type="sldNum" idx="12"/>
           </p:nvPr>
         </p:nvSpPr>
         <p:spPr>
@@ -8601,67 +8851,67 @@
           </a:ln>
         </p:spPr>
         <p:txBody>
-          <a:bodyPr anchorCtr="0" anchor="ctr" bIns="45700" lIns="91425" spcFirstLastPara="1" rIns="91425" wrap="square" tIns="45700">
+          <a:bodyPr spcFirstLastPara="1" wrap="square" lIns="91425" tIns="45700" rIns="91425" bIns="45700" anchor="ctr" anchorCtr="0">
             <a:noAutofit/>
           </a:bodyPr>
           <a:lstStyle>
-            <a:lvl1pPr indent="0" lvl="0" marL="0" algn="r">
+            <a:lvl1pPr marL="0" lvl="0" indent="0" algn="r">
               <a:spcBef>
                 <a:spcPts val="0"/>
               </a:spcBef>
               <a:buNone/>
               <a:defRPr/>
             </a:lvl1pPr>
-            <a:lvl2pPr indent="0" lvl="1" marL="0" algn="r">
+            <a:lvl2pPr marL="0" lvl="1" indent="0" algn="r">
               <a:spcBef>
                 <a:spcPts val="0"/>
               </a:spcBef>
               <a:buNone/>
               <a:defRPr/>
             </a:lvl2pPr>
-            <a:lvl3pPr indent="0" lvl="2" marL="0" algn="r">
+            <a:lvl3pPr marL="0" lvl="2" indent="0" algn="r">
               <a:spcBef>
                 <a:spcPts val="0"/>
               </a:spcBef>
               <a:buNone/>
               <a:defRPr/>
             </a:lvl3pPr>
-            <a:lvl4pPr indent="0" lvl="3" marL="0" algn="r">
+            <a:lvl4pPr marL="0" lvl="3" indent="0" algn="r">
               <a:spcBef>
                 <a:spcPts val="0"/>
               </a:spcBef>
               <a:buNone/>
               <a:defRPr/>
             </a:lvl4pPr>
-            <a:lvl5pPr indent="0" lvl="4" marL="0" algn="r">
+            <a:lvl5pPr marL="0" lvl="4" indent="0" algn="r">
               <a:spcBef>
                 <a:spcPts val="0"/>
               </a:spcBef>
               <a:buNone/>
               <a:defRPr/>
             </a:lvl5pPr>
-            <a:lvl6pPr indent="0" lvl="5" marL="0" algn="r">
+            <a:lvl6pPr marL="0" lvl="5" indent="0" algn="r">
               <a:spcBef>
                 <a:spcPts val="0"/>
               </a:spcBef>
               <a:buNone/>
               <a:defRPr/>
             </a:lvl6pPr>
-            <a:lvl7pPr indent="0" lvl="6" marL="0" algn="r">
+            <a:lvl7pPr marL="0" lvl="6" indent="0" algn="r">
               <a:spcBef>
                 <a:spcPts val="0"/>
               </a:spcBef>
               <a:buNone/>
               <a:defRPr/>
             </a:lvl7pPr>
-            <a:lvl8pPr indent="0" lvl="7" marL="0" algn="r">
+            <a:lvl8pPr marL="0" lvl="7" indent="0" algn="r">
               <a:spcBef>
                 <a:spcPts val="0"/>
               </a:spcBef>
               <a:buNone/>
               <a:defRPr/>
             </a:lvl8pPr>
-            <a:lvl9pPr indent="0" lvl="8" marL="0" algn="r">
+            <a:lvl9pPr marL="0" lvl="8" indent="0" algn="r">
               <a:spcBef>
                 <a:spcPts val="0"/>
               </a:spcBef>
@@ -8670,7 +8920,7 @@
             </a:lvl9pPr>
           </a:lstStyle>
           <a:p>
-            <a:pPr indent="0" lvl="0" marL="0" rtl="0" algn="r">
+            <a:pPr marL="0" lvl="0" indent="0" algn="r" rtl="0">
               <a:spcBef>
                 <a:spcPts val="0"/>
               </a:spcBef>
@@ -8681,7 +8931,7 @@
             </a:pPr>
             <a:fld id="{00000000-1234-1234-1234-123412341234}" type="slidenum">
               <a:rPr lang="en-US"/>
-              <a:t>‹#›</a:t>
+              <a:t>‹nº›</a:t>
             </a:fld>
             <a:endParaRPr/>
           </a:p>
@@ -8696,11 +8946,11 @@
 </file>
 
 <file path=ppt/slideLayouts/slideLayout9.xml><?xml version="1.0" encoding="utf-8"?>
-<p:sldLayout xmlns:a="http://schemas.openxmlformats.org/drawingml/2006/main" xmlns:r="http://schemas.openxmlformats.org/officeDocument/2006/relationships" xmlns:mc="http://schemas.openxmlformats.org/markup-compatibility/2006" xmlns:mv="urn:schemas-microsoft-com:mac:vml" xmlns:p="http://schemas.openxmlformats.org/presentationml/2006/main" xmlns:c="http://schemas.openxmlformats.org/drawingml/2006/chart" xmlns:dgm="http://schemas.openxmlformats.org/drawingml/2006/diagram" xmlns:o="urn:schemas-microsoft-com:office:office" xmlns:v="urn:schemas-microsoft-com:vml" xmlns:pvml="urn:schemas-microsoft-com:office:powerpoint" xmlns:com="http://schemas.openxmlformats.org/drawingml/2006/compatibility" xmlns:p14="http://schemas.microsoft.com/office/powerpoint/2010/main" xmlns:p15="http://schemas.microsoft.com/office/powerpoint/2012/main" xmlns:ahyp="http://schemas.microsoft.com/office/drawing/2018/hyperlinkcolor" matchingName="Picture with Caption" type="picTx">
+<p:sldLayout xmlns:a="http://schemas.openxmlformats.org/drawingml/2006/main" xmlns:r="http://schemas.openxmlformats.org/officeDocument/2006/relationships" xmlns:p="http://schemas.openxmlformats.org/presentationml/2006/main" matchingName="Picture with Caption" type="picTx">
   <p:cSld name="PICTURE_WITH_CAPTION_TEXT">
     <p:spTree>
       <p:nvGrpSpPr>
-        <p:cNvPr id="61" name="Shape 61"/>
+        <p:cNvPr id="1" name="Shape 61"/>
         <p:cNvGrpSpPr/>
         <p:nvPr/>
       </p:nvGrpSpPr>
@@ -8715,7 +8965,9 @@
       <p:sp>
         <p:nvSpPr>
           <p:cNvPr id="62" name="Google Shape;62;p10"/>
-          <p:cNvSpPr txBox="1"/>
+          <p:cNvSpPr txBox="1">
+            <a:spLocks noGrp="1"/>
+          </p:cNvSpPr>
           <p:nvPr>
             <p:ph type="title"/>
           </p:nvPr>
@@ -8734,7 +8986,7 @@
           </a:ln>
         </p:spPr>
         <p:txBody>
-          <a:bodyPr anchorCtr="0" anchor="b" bIns="45700" lIns="91425" spcFirstLastPara="1" rIns="91425" wrap="square" tIns="45700">
+          <a:bodyPr spcFirstLastPara="1" wrap="square" lIns="91425" tIns="45700" rIns="91425" bIns="45700" anchor="b" anchorCtr="0">
             <a:normAutofit/>
           </a:bodyPr>
           <a:lstStyle>
@@ -8751,7 +9003,7 @@
               <a:buSzPts val="2000"/>
               <a:buFont typeface="Calibri"/>
               <a:buNone/>
-              <a:defRPr b="1" sz="2000"/>
+              <a:defRPr sz="2000" b="1"/>
             </a:lvl1pPr>
             <a:lvl2pPr lvl="1">
               <a:spcBef>
@@ -8842,15 +9094,19 @@
               <a:defRPr/>
             </a:lvl9pPr>
           </a:lstStyle>
-          <a:p/>
+          <a:p>
+            <a:endParaRPr/>
+          </a:p>
         </p:txBody>
       </p:sp>
       <p:sp>
         <p:nvSpPr>
           <p:cNvPr id="63" name="Google Shape;63;p10"/>
-          <p:cNvSpPr/>
+          <p:cNvSpPr>
+            <a:spLocks noGrp="1"/>
+          </p:cNvSpPr>
           <p:nvPr>
-            <p:ph idx="2" type="pic"/>
+            <p:ph type="pic" idx="2"/>
           </p:nvPr>
         </p:nvSpPr>
         <p:spPr>
@@ -8870,9 +9126,11 @@
       <p:sp>
         <p:nvSpPr>
           <p:cNvPr id="64" name="Google Shape;64;p10"/>
-          <p:cNvSpPr txBox="1"/>
+          <p:cNvSpPr txBox="1">
+            <a:spLocks noGrp="1"/>
+          </p:cNvSpPr>
           <p:nvPr>
-            <p:ph idx="1" type="body"/>
+            <p:ph type="body" idx="1"/>
           </p:nvPr>
         </p:nvSpPr>
         <p:spPr>
@@ -8889,11 +9147,11 @@
           </a:ln>
         </p:spPr>
         <p:txBody>
-          <a:bodyPr anchorCtr="0" anchor="t" bIns="45700" lIns="91425" spcFirstLastPara="1" rIns="91425" wrap="square" tIns="45700">
+          <a:bodyPr spcFirstLastPara="1" wrap="square" lIns="91425" tIns="45700" rIns="91425" bIns="45700" anchor="t" anchorCtr="0">
             <a:normAutofit/>
           </a:bodyPr>
           <a:lstStyle>
-            <a:lvl1pPr indent="-228600" lvl="0" marL="457200" algn="l">
+            <a:lvl1pPr marL="457200" lvl="0" indent="-228600" algn="l">
               <a:spcBef>
                 <a:spcPts val="280"/>
               </a:spcBef>
@@ -8907,7 +9165,7 @@
               <a:buNone/>
               <a:defRPr sz="1400"/>
             </a:lvl1pPr>
-            <a:lvl2pPr indent="-228600" lvl="1" marL="914400" algn="l">
+            <a:lvl2pPr marL="914400" lvl="1" indent="-228600" algn="l">
               <a:spcBef>
                 <a:spcPts val="240"/>
               </a:spcBef>
@@ -8921,7 +9179,7 @@
               <a:buNone/>
               <a:defRPr sz="1200"/>
             </a:lvl2pPr>
-            <a:lvl3pPr indent="-228600" lvl="2" marL="1371600" algn="l">
+            <a:lvl3pPr marL="1371600" lvl="2" indent="-228600" algn="l">
               <a:spcBef>
                 <a:spcPts val="200"/>
               </a:spcBef>
@@ -8935,7 +9193,7 @@
               <a:buNone/>
               <a:defRPr sz="1000"/>
             </a:lvl3pPr>
-            <a:lvl4pPr indent="-228600" lvl="3" marL="1828800" algn="l">
+            <a:lvl4pPr marL="1828800" lvl="3" indent="-228600" algn="l">
               <a:spcBef>
                 <a:spcPts val="180"/>
               </a:spcBef>
@@ -8949,7 +9207,7 @@
               <a:buNone/>
               <a:defRPr sz="900"/>
             </a:lvl4pPr>
-            <a:lvl5pPr indent="-228600" lvl="4" marL="2286000" algn="l">
+            <a:lvl5pPr marL="2286000" lvl="4" indent="-228600" algn="l">
               <a:spcBef>
                 <a:spcPts val="180"/>
               </a:spcBef>
@@ -8963,7 +9221,7 @@
               <a:buNone/>
               <a:defRPr sz="900"/>
             </a:lvl5pPr>
-            <a:lvl6pPr indent="-228600" lvl="5" marL="2743200" algn="l">
+            <a:lvl6pPr marL="2743200" lvl="5" indent="-228600" algn="l">
               <a:spcBef>
                 <a:spcPts val="180"/>
               </a:spcBef>
@@ -8977,7 +9235,7 @@
               <a:buNone/>
               <a:defRPr sz="900"/>
             </a:lvl6pPr>
-            <a:lvl7pPr indent="-228600" lvl="6" marL="3200400" algn="l">
+            <a:lvl7pPr marL="3200400" lvl="6" indent="-228600" algn="l">
               <a:spcBef>
                 <a:spcPts val="180"/>
               </a:spcBef>
@@ -8991,7 +9249,7 @@
               <a:buNone/>
               <a:defRPr sz="900"/>
             </a:lvl7pPr>
-            <a:lvl8pPr indent="-228600" lvl="7" marL="3657600" algn="l">
+            <a:lvl8pPr marL="3657600" lvl="7" indent="-228600" algn="l">
               <a:spcBef>
                 <a:spcPts val="180"/>
               </a:spcBef>
@@ -9005,7 +9263,7 @@
               <a:buNone/>
               <a:defRPr sz="900"/>
             </a:lvl8pPr>
-            <a:lvl9pPr indent="-228600" lvl="8" marL="4114800" algn="l">
+            <a:lvl9pPr marL="4114800" lvl="8" indent="-228600" algn="l">
               <a:spcBef>
                 <a:spcPts val="180"/>
               </a:spcBef>
@@ -9020,15 +9278,19 @@
               <a:defRPr sz="900"/>
             </a:lvl9pPr>
           </a:lstStyle>
-          <a:p/>
+          <a:p>
+            <a:endParaRPr/>
+          </a:p>
         </p:txBody>
       </p:sp>
       <p:sp>
         <p:nvSpPr>
           <p:cNvPr id="65" name="Google Shape;65;p10"/>
-          <p:cNvSpPr txBox="1"/>
+          <p:cNvSpPr txBox="1">
+            <a:spLocks noGrp="1"/>
+          </p:cNvSpPr>
           <p:nvPr>
-            <p:ph idx="10" type="dt"/>
+            <p:ph type="dt" idx="10"/>
           </p:nvPr>
         </p:nvSpPr>
         <p:spPr>
@@ -9045,7 +9307,7 @@
           </a:ln>
         </p:spPr>
         <p:txBody>
-          <a:bodyPr anchorCtr="0" anchor="ctr" bIns="45700" lIns="91425" spcFirstLastPara="1" rIns="91425" wrap="square" tIns="45700">
+          <a:bodyPr spcFirstLastPara="1" wrap="square" lIns="91425" tIns="45700" rIns="91425" bIns="45700" anchor="ctr" anchorCtr="0">
             <a:noAutofit/>
           </a:bodyPr>
           <a:lstStyle>
@@ -9149,15 +9411,19 @@
               <a:defRPr/>
             </a:lvl9pPr>
           </a:lstStyle>
-          <a:p/>
+          <a:p>
+            <a:endParaRPr/>
+          </a:p>
         </p:txBody>
       </p:sp>
       <p:sp>
         <p:nvSpPr>
           <p:cNvPr id="66" name="Google Shape;66;p10"/>
-          <p:cNvSpPr txBox="1"/>
+          <p:cNvSpPr txBox="1">
+            <a:spLocks noGrp="1"/>
+          </p:cNvSpPr>
           <p:nvPr>
-            <p:ph idx="11" type="ftr"/>
+            <p:ph type="ftr" idx="11"/>
           </p:nvPr>
         </p:nvSpPr>
         <p:spPr>
@@ -9174,7 +9440,7 @@
           </a:ln>
         </p:spPr>
         <p:txBody>
-          <a:bodyPr anchorCtr="0" anchor="ctr" bIns="45700" lIns="91425" spcFirstLastPara="1" rIns="91425" wrap="square" tIns="45700">
+          <a:bodyPr spcFirstLastPara="1" wrap="square" lIns="91425" tIns="45700" rIns="91425" bIns="45700" anchor="ctr" anchorCtr="0">
             <a:noAutofit/>
           </a:bodyPr>
           <a:lstStyle>
@@ -9278,15 +9544,19 @@
               <a:defRPr/>
             </a:lvl9pPr>
           </a:lstStyle>
-          <a:p/>
+          <a:p>
+            <a:endParaRPr/>
+          </a:p>
         </p:txBody>
       </p:sp>
       <p:sp>
         <p:nvSpPr>
           <p:cNvPr id="67" name="Google Shape;67;p10"/>
-          <p:cNvSpPr txBox="1"/>
+          <p:cNvSpPr txBox="1">
+            <a:spLocks noGrp="1"/>
+          </p:cNvSpPr>
           <p:nvPr>
-            <p:ph idx="12" type="sldNum"/>
+            <p:ph type="sldNum" idx="12"/>
           </p:nvPr>
         </p:nvSpPr>
         <p:spPr>
@@ -9303,67 +9573,67 @@
           </a:ln>
         </p:spPr>
         <p:txBody>
-          <a:bodyPr anchorCtr="0" anchor="ctr" bIns="45700" lIns="91425" spcFirstLastPara="1" rIns="91425" wrap="square" tIns="45700">
+          <a:bodyPr spcFirstLastPara="1" wrap="square" lIns="91425" tIns="45700" rIns="91425" bIns="45700" anchor="ctr" anchorCtr="0">
             <a:noAutofit/>
           </a:bodyPr>
           <a:lstStyle>
-            <a:lvl1pPr indent="0" lvl="0" marL="0" algn="r">
+            <a:lvl1pPr marL="0" lvl="0" indent="0" algn="r">
               <a:spcBef>
                 <a:spcPts val="0"/>
               </a:spcBef>
               <a:buNone/>
               <a:defRPr/>
             </a:lvl1pPr>
-            <a:lvl2pPr indent="0" lvl="1" marL="0" algn="r">
+            <a:lvl2pPr marL="0" lvl="1" indent="0" algn="r">
               <a:spcBef>
                 <a:spcPts val="0"/>
               </a:spcBef>
               <a:buNone/>
               <a:defRPr/>
             </a:lvl2pPr>
-            <a:lvl3pPr indent="0" lvl="2" marL="0" algn="r">
+            <a:lvl3pPr marL="0" lvl="2" indent="0" algn="r">
               <a:spcBef>
                 <a:spcPts val="0"/>
               </a:spcBef>
               <a:buNone/>
               <a:defRPr/>
             </a:lvl3pPr>
-            <a:lvl4pPr indent="0" lvl="3" marL="0" algn="r">
+            <a:lvl4pPr marL="0" lvl="3" indent="0" algn="r">
               <a:spcBef>
                 <a:spcPts val="0"/>
               </a:spcBef>
               <a:buNone/>
               <a:defRPr/>
             </a:lvl4pPr>
-            <a:lvl5pPr indent="0" lvl="4" marL="0" algn="r">
+            <a:lvl5pPr marL="0" lvl="4" indent="0" algn="r">
               <a:spcBef>
                 <a:spcPts val="0"/>
               </a:spcBef>
               <a:buNone/>
               <a:defRPr/>
             </a:lvl5pPr>
-            <a:lvl6pPr indent="0" lvl="5" marL="0" algn="r">
+            <a:lvl6pPr marL="0" lvl="5" indent="0" algn="r">
               <a:spcBef>
                 <a:spcPts val="0"/>
               </a:spcBef>
               <a:buNone/>
               <a:defRPr/>
             </a:lvl6pPr>
-            <a:lvl7pPr indent="0" lvl="6" marL="0" algn="r">
+            <a:lvl7pPr marL="0" lvl="6" indent="0" algn="r">
               <a:spcBef>
                 <a:spcPts val="0"/>
               </a:spcBef>
               <a:buNone/>
               <a:defRPr/>
             </a:lvl7pPr>
-            <a:lvl8pPr indent="0" lvl="7" marL="0" algn="r">
+            <a:lvl8pPr marL="0" lvl="7" indent="0" algn="r">
               <a:spcBef>
                 <a:spcPts val="0"/>
               </a:spcBef>
               <a:buNone/>
               <a:defRPr/>
             </a:lvl8pPr>
-            <a:lvl9pPr indent="0" lvl="8" marL="0" algn="r">
+            <a:lvl9pPr marL="0" lvl="8" indent="0" algn="r">
               <a:spcBef>
                 <a:spcPts val="0"/>
               </a:spcBef>
@@ -9372,7 +9642,7 @@
             </a:lvl9pPr>
           </a:lstStyle>
           <a:p>
-            <a:pPr indent="0" lvl="0" marL="0" rtl="0" algn="r">
+            <a:pPr marL="0" lvl="0" indent="0" algn="r" rtl="0">
               <a:spcBef>
                 <a:spcPts val="0"/>
               </a:spcBef>
@@ -9383,7 +9653,7 @@
             </a:pPr>
             <a:fld id="{00000000-1234-1234-1234-123412341234}" type="slidenum">
               <a:rPr lang="en-US"/>
-              <a:t>‹#›</a:t>
+              <a:t>‹nº›</a:t>
             </a:fld>
             <a:endParaRPr/>
           </a:p>
@@ -9398,18 +9668,19 @@
 </file>
 
 <file path=ppt/slideMasters/slideMaster1.xml><?xml version="1.0" encoding="utf-8"?>
-<p:sldMaster xmlns:a="http://schemas.openxmlformats.org/drawingml/2006/main" xmlns:r="http://schemas.openxmlformats.org/officeDocument/2006/relationships" xmlns:mc="http://schemas.openxmlformats.org/markup-compatibility/2006" xmlns:mv="urn:schemas-microsoft-com:mac:vml" xmlns:p="http://schemas.openxmlformats.org/presentationml/2006/main" xmlns:c="http://schemas.openxmlformats.org/drawingml/2006/chart" xmlns:dgm="http://schemas.openxmlformats.org/drawingml/2006/diagram" xmlns:o="urn:schemas-microsoft-com:office:office" xmlns:v="urn:schemas-microsoft-com:vml" xmlns:pvml="urn:schemas-microsoft-com:office:powerpoint" xmlns:com="http://schemas.openxmlformats.org/drawingml/2006/compatibility" xmlns:p14="http://schemas.microsoft.com/office/powerpoint/2010/main" xmlns:p15="http://schemas.microsoft.com/office/powerpoint/2012/main" xmlns:ahyp="http://schemas.microsoft.com/office/drawing/2018/hyperlinkcolor">
+<p:sldMaster xmlns:a="http://schemas.openxmlformats.org/drawingml/2006/main" xmlns:r="http://schemas.openxmlformats.org/officeDocument/2006/relationships" xmlns:p="http://schemas.openxmlformats.org/presentationml/2006/main">
   <p:cSld>
     <p:bg>
       <p:bgPr>
         <a:solidFill>
           <a:schemeClr val="lt1"/>
         </a:solidFill>
+        <a:effectLst/>
       </p:bgPr>
     </p:bg>
     <p:spTree>
       <p:nvGrpSpPr>
-        <p:cNvPr id="5" name="Shape 5"/>
+        <p:cNvPr id="1" name="Shape 5"/>
         <p:cNvGrpSpPr/>
         <p:nvPr/>
       </p:nvGrpSpPr>
@@ -9424,7 +9695,9 @@
       <p:sp>
         <p:nvSpPr>
           <p:cNvPr id="6" name="Google Shape;6;p1"/>
-          <p:cNvSpPr txBox="1"/>
+          <p:cNvSpPr txBox="1">
+            <a:spLocks noGrp="1"/>
+          </p:cNvSpPr>
           <p:nvPr>
             <p:ph type="title"/>
           </p:nvPr>
@@ -9443,11 +9716,11 @@
           </a:ln>
         </p:spPr>
         <p:txBody>
-          <a:bodyPr anchorCtr="0" anchor="ctr" bIns="45700" lIns="91425" spcFirstLastPara="1" rIns="91425" wrap="square" tIns="45700">
+          <a:bodyPr spcFirstLastPara="1" wrap="square" lIns="91425" tIns="45700" rIns="91425" bIns="45700" anchor="ctr" anchorCtr="0">
             <a:normAutofit/>
           </a:bodyPr>
           <a:lstStyle>
-            <a:lvl1pPr lvl="0" marR="0" rtl="0" algn="ctr">
+            <a:lvl1pPr marR="0" lvl="0" algn="ctr" rtl="0">
               <a:spcBef>
                 <a:spcPts val="0"/>
               </a:spcBef>
@@ -9460,7 +9733,7 @@
               <a:buSzPts val="4400"/>
               <a:buFont typeface="Calibri"/>
               <a:buNone/>
-              <a:defRPr b="0" i="0" sz="4400" u="none" cap="none" strike="noStrike">
+              <a:defRPr sz="4400" b="0" i="0" u="none" strike="noStrike" cap="none">
                 <a:solidFill>
                   <a:schemeClr val="dk1"/>
                 </a:solidFill>
@@ -9559,15 +9832,19 @@
               <a:defRPr sz="1800"/>
             </a:lvl9pPr>
           </a:lstStyle>
-          <a:p/>
+          <a:p>
+            <a:endParaRPr/>
+          </a:p>
         </p:txBody>
       </p:sp>
       <p:sp>
         <p:nvSpPr>
           <p:cNvPr id="7" name="Google Shape;7;p1"/>
-          <p:cNvSpPr txBox="1"/>
+          <p:cNvSpPr txBox="1">
+            <a:spLocks noGrp="1"/>
+          </p:cNvSpPr>
           <p:nvPr>
-            <p:ph idx="1" type="body"/>
+            <p:ph type="body" idx="1"/>
           </p:nvPr>
         </p:nvSpPr>
         <p:spPr>
@@ -9584,11 +9861,11 @@
           </a:ln>
         </p:spPr>
         <p:txBody>
-          <a:bodyPr anchorCtr="0" anchor="t" bIns="45700" lIns="91425" spcFirstLastPara="1" rIns="91425" wrap="square" tIns="45700">
+          <a:bodyPr spcFirstLastPara="1" wrap="square" lIns="91425" tIns="45700" rIns="91425" bIns="45700" anchor="t" anchorCtr="0">
             <a:normAutofit/>
           </a:bodyPr>
           <a:lstStyle>
-            <a:lvl1pPr indent="-431800" lvl="0" marL="457200" marR="0" rtl="0" algn="l">
+            <a:lvl1pPr marL="457200" marR="0" lvl="0" indent="-431800" algn="l" rtl="0">
               <a:spcBef>
                 <a:spcPts val="640"/>
               </a:spcBef>
@@ -9601,7 +9878,7 @@
               <a:buSzPts val="3200"/>
               <a:buFont typeface="Arial"/>
               <a:buChar char="•"/>
-              <a:defRPr b="0" i="0" sz="3200" u="none" cap="none" strike="noStrike">
+              <a:defRPr sz="3200" b="0" i="0" u="none" strike="noStrike" cap="none">
                 <a:solidFill>
                   <a:schemeClr val="dk1"/>
                 </a:solidFill>
@@ -9611,7 +9888,7 @@
                 <a:sym typeface="Calibri"/>
               </a:defRPr>
             </a:lvl1pPr>
-            <a:lvl2pPr indent="-406400" lvl="1" marL="914400" marR="0" rtl="0" algn="l">
+            <a:lvl2pPr marL="914400" marR="0" lvl="1" indent="-406400" algn="l" rtl="0">
               <a:spcBef>
                 <a:spcPts val="560"/>
               </a:spcBef>
@@ -9624,7 +9901,7 @@
               <a:buSzPts val="2800"/>
               <a:buFont typeface="Arial"/>
               <a:buChar char="–"/>
-              <a:defRPr b="0" i="0" sz="2800" u="none" cap="none" strike="noStrike">
+              <a:defRPr sz="2800" b="0" i="0" u="none" strike="noStrike" cap="none">
                 <a:solidFill>
                   <a:schemeClr val="dk1"/>
                 </a:solidFill>
@@ -9634,7 +9911,7 @@
                 <a:sym typeface="Calibri"/>
               </a:defRPr>
             </a:lvl2pPr>
-            <a:lvl3pPr indent="-381000" lvl="2" marL="1371600" marR="0" rtl="0" algn="l">
+            <a:lvl3pPr marL="1371600" marR="0" lvl="2" indent="-381000" algn="l" rtl="0">
               <a:spcBef>
                 <a:spcPts val="480"/>
               </a:spcBef>
@@ -9647,7 +9924,7 @@
               <a:buSzPts val="2400"/>
               <a:buFont typeface="Arial"/>
               <a:buChar char="•"/>
-              <a:defRPr b="0" i="0" sz="2400" u="none" cap="none" strike="noStrike">
+              <a:defRPr sz="2400" b="0" i="0" u="none" strike="noStrike" cap="none">
                 <a:solidFill>
                   <a:schemeClr val="dk1"/>
                 </a:solidFill>
@@ -9657,7 +9934,7 @@
                 <a:sym typeface="Calibri"/>
               </a:defRPr>
             </a:lvl3pPr>
-            <a:lvl4pPr indent="-355600" lvl="3" marL="1828800" marR="0" rtl="0" algn="l">
+            <a:lvl4pPr marL="1828800" marR="0" lvl="3" indent="-355600" algn="l" rtl="0">
               <a:spcBef>
                 <a:spcPts val="400"/>
               </a:spcBef>
@@ -9670,7 +9947,7 @@
               <a:buSzPts val="2000"/>
               <a:buFont typeface="Arial"/>
               <a:buChar char="–"/>
-              <a:defRPr b="0" i="0" sz="2000" u="none" cap="none" strike="noStrike">
+              <a:defRPr sz="2000" b="0" i="0" u="none" strike="noStrike" cap="none">
                 <a:solidFill>
                   <a:schemeClr val="dk1"/>
                 </a:solidFill>
@@ -9680,7 +9957,7 @@
                 <a:sym typeface="Calibri"/>
               </a:defRPr>
             </a:lvl4pPr>
-            <a:lvl5pPr indent="-355600" lvl="4" marL="2286000" marR="0" rtl="0" algn="l">
+            <a:lvl5pPr marL="2286000" marR="0" lvl="4" indent="-355600" algn="l" rtl="0">
               <a:spcBef>
                 <a:spcPts val="400"/>
               </a:spcBef>
@@ -9693,7 +9970,7 @@
               <a:buSzPts val="2000"/>
               <a:buFont typeface="Arial"/>
               <a:buChar char="»"/>
-              <a:defRPr b="0" i="0" sz="2000" u="none" cap="none" strike="noStrike">
+              <a:defRPr sz="2000" b="0" i="0" u="none" strike="noStrike" cap="none">
                 <a:solidFill>
                   <a:schemeClr val="dk1"/>
                 </a:solidFill>
@@ -9703,7 +9980,7 @@
                 <a:sym typeface="Calibri"/>
               </a:defRPr>
             </a:lvl5pPr>
-            <a:lvl6pPr indent="-355600" lvl="5" marL="2743200" marR="0" rtl="0" algn="l">
+            <a:lvl6pPr marL="2743200" marR="0" lvl="5" indent="-355600" algn="l" rtl="0">
               <a:spcBef>
                 <a:spcPts val="400"/>
               </a:spcBef>
@@ -9716,7 +9993,7 @@
               <a:buSzPts val="2000"/>
               <a:buFont typeface="Arial"/>
               <a:buChar char="•"/>
-              <a:defRPr b="0" i="0" sz="2000" u="none" cap="none" strike="noStrike">
+              <a:defRPr sz="2000" b="0" i="0" u="none" strike="noStrike" cap="none">
                 <a:solidFill>
                   <a:schemeClr val="dk1"/>
                 </a:solidFill>
@@ -9726,7 +10003,7 @@
                 <a:sym typeface="Calibri"/>
               </a:defRPr>
             </a:lvl6pPr>
-            <a:lvl7pPr indent="-355600" lvl="6" marL="3200400" marR="0" rtl="0" algn="l">
+            <a:lvl7pPr marL="3200400" marR="0" lvl="6" indent="-355600" algn="l" rtl="0">
               <a:spcBef>
                 <a:spcPts val="400"/>
               </a:spcBef>
@@ -9739,7 +10016,7 @@
               <a:buSzPts val="2000"/>
               <a:buFont typeface="Arial"/>
               <a:buChar char="•"/>
-              <a:defRPr b="0" i="0" sz="2000" u="none" cap="none" strike="noStrike">
+              <a:defRPr sz="2000" b="0" i="0" u="none" strike="noStrike" cap="none">
                 <a:solidFill>
                   <a:schemeClr val="dk1"/>
                 </a:solidFill>
@@ -9749,7 +10026,7 @@
                 <a:sym typeface="Calibri"/>
               </a:defRPr>
             </a:lvl7pPr>
-            <a:lvl8pPr indent="-355600" lvl="7" marL="3657600" marR="0" rtl="0" algn="l">
+            <a:lvl8pPr marL="3657600" marR="0" lvl="7" indent="-355600" algn="l" rtl="0">
               <a:spcBef>
                 <a:spcPts val="400"/>
               </a:spcBef>
@@ -9762,7 +10039,7 @@
               <a:buSzPts val="2000"/>
               <a:buFont typeface="Arial"/>
               <a:buChar char="•"/>
-              <a:defRPr b="0" i="0" sz="2000" u="none" cap="none" strike="noStrike">
+              <a:defRPr sz="2000" b="0" i="0" u="none" strike="noStrike" cap="none">
                 <a:solidFill>
                   <a:schemeClr val="dk1"/>
                 </a:solidFill>
@@ -9772,7 +10049,7 @@
                 <a:sym typeface="Calibri"/>
               </a:defRPr>
             </a:lvl8pPr>
-            <a:lvl9pPr indent="-355600" lvl="8" marL="4114800" marR="0" rtl="0" algn="l">
+            <a:lvl9pPr marL="4114800" marR="0" lvl="8" indent="-355600" algn="l" rtl="0">
               <a:spcBef>
                 <a:spcPts val="400"/>
               </a:spcBef>
@@ -9785,7 +10062,7 @@
               <a:buSzPts val="2000"/>
               <a:buFont typeface="Arial"/>
               <a:buChar char="•"/>
-              <a:defRPr b="0" i="0" sz="2000" u="none" cap="none" strike="noStrike">
+              <a:defRPr sz="2000" b="0" i="0" u="none" strike="noStrike" cap="none">
                 <a:solidFill>
                   <a:schemeClr val="dk1"/>
                 </a:solidFill>
@@ -9796,15 +10073,19 @@
               </a:defRPr>
             </a:lvl9pPr>
           </a:lstStyle>
-          <a:p/>
+          <a:p>
+            <a:endParaRPr/>
+          </a:p>
         </p:txBody>
       </p:sp>
       <p:sp>
         <p:nvSpPr>
           <p:cNvPr id="8" name="Google Shape;8;p1"/>
-          <p:cNvSpPr txBox="1"/>
+          <p:cNvSpPr txBox="1">
+            <a:spLocks noGrp="1"/>
+          </p:cNvSpPr>
           <p:nvPr>
-            <p:ph idx="10" type="dt"/>
+            <p:ph type="dt" idx="10"/>
           </p:nvPr>
         </p:nvSpPr>
         <p:spPr>
@@ -9821,20 +10102,20 @@
           </a:ln>
         </p:spPr>
         <p:txBody>
-          <a:bodyPr anchorCtr="0" anchor="ctr" bIns="45700" lIns="91425" spcFirstLastPara="1" rIns="91425" wrap="square" tIns="45700">
+          <a:bodyPr spcFirstLastPara="1" wrap="square" lIns="91425" tIns="45700" rIns="91425" bIns="45700" anchor="ctr" anchorCtr="0">
             <a:noAutofit/>
           </a:bodyPr>
           <a:lstStyle>
-            <a:lvl1pPr lvl="0" marR="0" rtl="0" algn="l">
-              <a:spcBef>
-                <a:spcPts val="0"/>
-              </a:spcBef>
-              <a:spcAft>
-                <a:spcPts val="0"/>
-              </a:spcAft>
-              <a:buSzPts val="1400"/>
-              <a:buNone/>
-              <a:defRPr b="0" i="0" sz="1200" u="none" cap="none" strike="noStrike">
+            <a:lvl1pPr marR="0" lvl="0" algn="l" rtl="0">
+              <a:spcBef>
+                <a:spcPts val="0"/>
+              </a:spcBef>
+              <a:spcAft>
+                <a:spcPts val="0"/>
+              </a:spcAft>
+              <a:buSzPts val="1400"/>
+              <a:buNone/>
+              <a:defRPr sz="1200" b="0" i="0" u="none" strike="noStrike" cap="none">
                 <a:solidFill>
                   <a:srgbClr val="888888"/>
                 </a:solidFill>
@@ -9844,16 +10125,16 @@
                 <a:sym typeface="Calibri"/>
               </a:defRPr>
             </a:lvl1pPr>
-            <a:lvl2pPr lvl="1" marR="0" rtl="0" algn="l">
-              <a:spcBef>
-                <a:spcPts val="0"/>
-              </a:spcBef>
-              <a:spcAft>
-                <a:spcPts val="0"/>
-              </a:spcAft>
-              <a:buSzPts val="1400"/>
-              <a:buNone/>
-              <a:defRPr b="0" i="0" sz="1800" u="none" cap="none" strike="noStrike">
+            <a:lvl2pPr marR="0" lvl="1" algn="l" rtl="0">
+              <a:spcBef>
+                <a:spcPts val="0"/>
+              </a:spcBef>
+              <a:spcAft>
+                <a:spcPts val="0"/>
+              </a:spcAft>
+              <a:buSzPts val="1400"/>
+              <a:buNone/>
+              <a:defRPr sz="1800" b="0" i="0" u="none" strike="noStrike" cap="none">
                 <a:solidFill>
                   <a:schemeClr val="dk1"/>
                 </a:solidFill>
@@ -9863,16 +10144,16 @@
                 <a:sym typeface="Calibri"/>
               </a:defRPr>
             </a:lvl2pPr>
-            <a:lvl3pPr lvl="2" marR="0" rtl="0" algn="l">
-              <a:spcBef>
-                <a:spcPts val="0"/>
-              </a:spcBef>
-              <a:spcAft>
-                <a:spcPts val="0"/>
-              </a:spcAft>
-              <a:buSzPts val="1400"/>
-              <a:buNone/>
-              <a:defRPr b="0" i="0" sz="1800" u="none" cap="none" strike="noStrike">
+            <a:lvl3pPr marR="0" lvl="2" algn="l" rtl="0">
+              <a:spcBef>
+                <a:spcPts val="0"/>
+              </a:spcBef>
+              <a:spcAft>
+                <a:spcPts val="0"/>
+              </a:spcAft>
+              <a:buSzPts val="1400"/>
+              <a:buNone/>
+              <a:defRPr sz="1800" b="0" i="0" u="none" strike="noStrike" cap="none">
                 <a:solidFill>
                   <a:schemeClr val="dk1"/>
                 </a:solidFill>
@@ -9882,16 +10163,16 @@
                 <a:sym typeface="Calibri"/>
               </a:defRPr>
             </a:lvl3pPr>
-            <a:lvl4pPr lvl="3" marR="0" rtl="0" algn="l">
-              <a:spcBef>
-                <a:spcPts val="0"/>
-              </a:spcBef>
-              <a:spcAft>
-                <a:spcPts val="0"/>
-              </a:spcAft>
-              <a:buSzPts val="1400"/>
-              <a:buNone/>
-              <a:defRPr b="0" i="0" sz="1800" u="none" cap="none" strike="noStrike">
+            <a:lvl4pPr marR="0" lvl="3" algn="l" rtl="0">
+              <a:spcBef>
+                <a:spcPts val="0"/>
+              </a:spcBef>
+              <a:spcAft>
+                <a:spcPts val="0"/>
+              </a:spcAft>
+              <a:buSzPts val="1400"/>
+              <a:buNone/>
+              <a:defRPr sz="1800" b="0" i="0" u="none" strike="noStrike" cap="none">
                 <a:solidFill>
                   <a:schemeClr val="dk1"/>
                 </a:solidFill>
@@ -9901,16 +10182,16 @@
                 <a:sym typeface="Calibri"/>
               </a:defRPr>
             </a:lvl4pPr>
-            <a:lvl5pPr lvl="4" marR="0" rtl="0" algn="l">
-              <a:spcBef>
-                <a:spcPts val="0"/>
-              </a:spcBef>
-              <a:spcAft>
-                <a:spcPts val="0"/>
-              </a:spcAft>
-              <a:buSzPts val="1400"/>
-              <a:buNone/>
-              <a:defRPr b="0" i="0" sz="1800" u="none" cap="none" strike="noStrike">
+            <a:lvl5pPr marR="0" lvl="4" algn="l" rtl="0">
+              <a:spcBef>
+                <a:spcPts val="0"/>
+              </a:spcBef>
+              <a:spcAft>
+                <a:spcPts val="0"/>
+              </a:spcAft>
+              <a:buSzPts val="1400"/>
+              <a:buNone/>
+              <a:defRPr sz="1800" b="0" i="0" u="none" strike="noStrike" cap="none">
                 <a:solidFill>
                   <a:schemeClr val="dk1"/>
                 </a:solidFill>
@@ -9920,16 +10201,16 @@
                 <a:sym typeface="Calibri"/>
               </a:defRPr>
             </a:lvl5pPr>
-            <a:lvl6pPr lvl="5" marR="0" rtl="0" algn="l">
-              <a:spcBef>
-                <a:spcPts val="0"/>
-              </a:spcBef>
-              <a:spcAft>
-                <a:spcPts val="0"/>
-              </a:spcAft>
-              <a:buSzPts val="1400"/>
-              <a:buNone/>
-              <a:defRPr b="0" i="0" sz="1800" u="none" cap="none" strike="noStrike">
+            <a:lvl6pPr marR="0" lvl="5" algn="l" rtl="0">
+              <a:spcBef>
+                <a:spcPts val="0"/>
+              </a:spcBef>
+              <a:spcAft>
+                <a:spcPts val="0"/>
+              </a:spcAft>
+              <a:buSzPts val="1400"/>
+              <a:buNone/>
+              <a:defRPr sz="1800" b="0" i="0" u="none" strike="noStrike" cap="none">
                 <a:solidFill>
                   <a:schemeClr val="dk1"/>
                 </a:solidFill>
@@ -9939,16 +10220,16 @@
                 <a:sym typeface="Calibri"/>
               </a:defRPr>
             </a:lvl6pPr>
-            <a:lvl7pPr lvl="6" marR="0" rtl="0" algn="l">
-              <a:spcBef>
-                <a:spcPts val="0"/>
-              </a:spcBef>
-              <a:spcAft>
-                <a:spcPts val="0"/>
-              </a:spcAft>
-              <a:buSzPts val="1400"/>
-              <a:buNone/>
-              <a:defRPr b="0" i="0" sz="1800" u="none" cap="none" strike="noStrike">
+            <a:lvl7pPr marR="0" lvl="6" algn="l" rtl="0">
+              <a:spcBef>
+                <a:spcPts val="0"/>
+              </a:spcBef>
+              <a:spcAft>
+                <a:spcPts val="0"/>
+              </a:spcAft>
+              <a:buSzPts val="1400"/>
+              <a:buNone/>
+              <a:defRPr sz="1800" b="0" i="0" u="none" strike="noStrike" cap="none">
                 <a:solidFill>
                   <a:schemeClr val="dk1"/>
                 </a:solidFill>
@@ -9958,16 +10239,16 @@
                 <a:sym typeface="Calibri"/>
               </a:defRPr>
             </a:lvl7pPr>
-            <a:lvl8pPr lvl="7" marR="0" rtl="0" algn="l">
-              <a:spcBef>
-                <a:spcPts val="0"/>
-              </a:spcBef>
-              <a:spcAft>
-                <a:spcPts val="0"/>
-              </a:spcAft>
-              <a:buSzPts val="1400"/>
-              <a:buNone/>
-              <a:defRPr b="0" i="0" sz="1800" u="none" cap="none" strike="noStrike">
+            <a:lvl8pPr marR="0" lvl="7" algn="l" rtl="0">
+              <a:spcBef>
+                <a:spcPts val="0"/>
+              </a:spcBef>
+              <a:spcAft>
+                <a:spcPts val="0"/>
+              </a:spcAft>
+              <a:buSzPts val="1400"/>
+              <a:buNone/>
+              <a:defRPr sz="1800" b="0" i="0" u="none" strike="noStrike" cap="none">
                 <a:solidFill>
                   <a:schemeClr val="dk1"/>
                 </a:solidFill>
@@ -9977,16 +10258,16 @@
                 <a:sym typeface="Calibri"/>
               </a:defRPr>
             </a:lvl8pPr>
-            <a:lvl9pPr lvl="8" marR="0" rtl="0" algn="l">
-              <a:spcBef>
-                <a:spcPts val="0"/>
-              </a:spcBef>
-              <a:spcAft>
-                <a:spcPts val="0"/>
-              </a:spcAft>
-              <a:buSzPts val="1400"/>
-              <a:buNone/>
-              <a:defRPr b="0" i="0" sz="1800" u="none" cap="none" strike="noStrike">
+            <a:lvl9pPr marR="0" lvl="8" algn="l" rtl="0">
+              <a:spcBef>
+                <a:spcPts val="0"/>
+              </a:spcBef>
+              <a:spcAft>
+                <a:spcPts val="0"/>
+              </a:spcAft>
+              <a:buSzPts val="1400"/>
+              <a:buNone/>
+              <a:defRPr sz="1800" b="0" i="0" u="none" strike="noStrike" cap="none">
                 <a:solidFill>
                   <a:schemeClr val="dk1"/>
                 </a:solidFill>
@@ -9997,15 +10278,19 @@
               </a:defRPr>
             </a:lvl9pPr>
           </a:lstStyle>
-          <a:p/>
+          <a:p>
+            <a:endParaRPr/>
+          </a:p>
         </p:txBody>
       </p:sp>
       <p:sp>
         <p:nvSpPr>
           <p:cNvPr id="9" name="Google Shape;9;p1"/>
-          <p:cNvSpPr txBox="1"/>
+          <p:cNvSpPr txBox="1">
+            <a:spLocks noGrp="1"/>
+          </p:cNvSpPr>
           <p:nvPr>
-            <p:ph idx="11" type="ftr"/>
+            <p:ph type="ftr" idx="11"/>
           </p:nvPr>
         </p:nvSpPr>
         <p:spPr>
@@ -10022,20 +10307,20 @@
           </a:ln>
         </p:spPr>
         <p:txBody>
-          <a:bodyPr anchorCtr="0" anchor="ctr" bIns="45700" lIns="91425" spcFirstLastPara="1" rIns="91425" wrap="square" tIns="45700">
+          <a:bodyPr spcFirstLastPara="1" wrap="square" lIns="91425" tIns="45700" rIns="91425" bIns="45700" anchor="ctr" anchorCtr="0">
             <a:noAutofit/>
           </a:bodyPr>
           <a:lstStyle>
-            <a:lvl1pPr lvl="0" marR="0" rtl="0" algn="ctr">
-              <a:spcBef>
-                <a:spcPts val="0"/>
-              </a:spcBef>
-              <a:spcAft>
-                <a:spcPts val="0"/>
-              </a:spcAft>
-              <a:buSzPts val="1400"/>
-              <a:buNone/>
-              <a:defRPr b="0" i="0" sz="1200" u="none" cap="none" strike="noStrike">
+            <a:lvl1pPr marR="0" lvl="0" algn="ctr" rtl="0">
+              <a:spcBef>
+                <a:spcPts val="0"/>
+              </a:spcBef>
+              <a:spcAft>
+                <a:spcPts val="0"/>
+              </a:spcAft>
+              <a:buSzPts val="1400"/>
+              <a:buNone/>
+              <a:defRPr sz="1200" b="0" i="0" u="none" strike="noStrike" cap="none">
                 <a:solidFill>
                   <a:srgbClr val="888888"/>
                 </a:solidFill>
@@ -10045,16 +10330,16 @@
                 <a:sym typeface="Calibri"/>
               </a:defRPr>
             </a:lvl1pPr>
-            <a:lvl2pPr lvl="1" marR="0" rtl="0" algn="l">
-              <a:spcBef>
-                <a:spcPts val="0"/>
-              </a:spcBef>
-              <a:spcAft>
-                <a:spcPts val="0"/>
-              </a:spcAft>
-              <a:buSzPts val="1400"/>
-              <a:buNone/>
-              <a:defRPr b="0" i="0" sz="1800" u="none" cap="none" strike="noStrike">
+            <a:lvl2pPr marR="0" lvl="1" algn="l" rtl="0">
+              <a:spcBef>
+                <a:spcPts val="0"/>
+              </a:spcBef>
+              <a:spcAft>
+                <a:spcPts val="0"/>
+              </a:spcAft>
+              <a:buSzPts val="1400"/>
+              <a:buNone/>
+              <a:defRPr sz="1800" b="0" i="0" u="none" strike="noStrike" cap="none">
                 <a:solidFill>
                   <a:schemeClr val="dk1"/>
                 </a:solidFill>
@@ -10064,16 +10349,16 @@
                 <a:sym typeface="Calibri"/>
               </a:defRPr>
             </a:lvl2pPr>
-            <a:lvl3pPr lvl="2" marR="0" rtl="0" algn="l">
-              <a:spcBef>
-                <a:spcPts val="0"/>
-              </a:spcBef>
-              <a:spcAft>
-                <a:spcPts val="0"/>
-              </a:spcAft>
-              <a:buSzPts val="1400"/>
-              <a:buNone/>
-              <a:defRPr b="0" i="0" sz="1800" u="none" cap="none" strike="noStrike">
+            <a:lvl3pPr marR="0" lvl="2" algn="l" rtl="0">
+              <a:spcBef>
+                <a:spcPts val="0"/>
+              </a:spcBef>
+              <a:spcAft>
+                <a:spcPts val="0"/>
+              </a:spcAft>
+              <a:buSzPts val="1400"/>
+              <a:buNone/>
+              <a:defRPr sz="1800" b="0" i="0" u="none" strike="noStrike" cap="none">
                 <a:solidFill>
                   <a:schemeClr val="dk1"/>
                 </a:solidFill>
@@ -10083,16 +10368,16 @@
                 <a:sym typeface="Calibri"/>
               </a:defRPr>
             </a:lvl3pPr>
-            <a:lvl4pPr lvl="3" marR="0" rtl="0" algn="l">
-              <a:spcBef>
-                <a:spcPts val="0"/>
-              </a:spcBef>
-              <a:spcAft>
-                <a:spcPts val="0"/>
-              </a:spcAft>
-              <a:buSzPts val="1400"/>
-              <a:buNone/>
-              <a:defRPr b="0" i="0" sz="1800" u="none" cap="none" strike="noStrike">
+            <a:lvl4pPr marR="0" lvl="3" algn="l" rtl="0">
+              <a:spcBef>
+                <a:spcPts val="0"/>
+              </a:spcBef>
+              <a:spcAft>
+                <a:spcPts val="0"/>
+              </a:spcAft>
+              <a:buSzPts val="1400"/>
+              <a:buNone/>
+              <a:defRPr sz="1800" b="0" i="0" u="none" strike="noStrike" cap="none">
                 <a:solidFill>
                   <a:schemeClr val="dk1"/>
                 </a:solidFill>
@@ -10102,16 +10387,16 @@
                 <a:sym typeface="Calibri"/>
               </a:defRPr>
             </a:lvl4pPr>
-            <a:lvl5pPr lvl="4" marR="0" rtl="0" algn="l">
-              <a:spcBef>
-                <a:spcPts val="0"/>
-              </a:spcBef>
-              <a:spcAft>
-                <a:spcPts val="0"/>
-              </a:spcAft>
-              <a:buSzPts val="1400"/>
-              <a:buNone/>
-              <a:defRPr b="0" i="0" sz="1800" u="none" cap="none" strike="noStrike">
+            <a:lvl5pPr marR="0" lvl="4" algn="l" rtl="0">
+              <a:spcBef>
+                <a:spcPts val="0"/>
+              </a:spcBef>
+              <a:spcAft>
+                <a:spcPts val="0"/>
+              </a:spcAft>
+              <a:buSzPts val="1400"/>
+              <a:buNone/>
+              <a:defRPr sz="1800" b="0" i="0" u="none" strike="noStrike" cap="none">
                 <a:solidFill>
                   <a:schemeClr val="dk1"/>
                 </a:solidFill>
@@ -10121,16 +10406,16 @@
                 <a:sym typeface="Calibri"/>
               </a:defRPr>
             </a:lvl5pPr>
-            <a:lvl6pPr lvl="5" marR="0" rtl="0" algn="l">
-              <a:spcBef>
-                <a:spcPts val="0"/>
-              </a:spcBef>
-              <a:spcAft>
-                <a:spcPts val="0"/>
-              </a:spcAft>
-              <a:buSzPts val="1400"/>
-              <a:buNone/>
-              <a:defRPr b="0" i="0" sz="1800" u="none" cap="none" strike="noStrike">
+            <a:lvl6pPr marR="0" lvl="5" algn="l" rtl="0">
+              <a:spcBef>
+                <a:spcPts val="0"/>
+              </a:spcBef>
+              <a:spcAft>
+                <a:spcPts val="0"/>
+              </a:spcAft>
+              <a:buSzPts val="1400"/>
+              <a:buNone/>
+              <a:defRPr sz="1800" b="0" i="0" u="none" strike="noStrike" cap="none">
                 <a:solidFill>
                   <a:schemeClr val="dk1"/>
                 </a:solidFill>
@@ -10140,16 +10425,16 @@
                 <a:sym typeface="Calibri"/>
               </a:defRPr>
             </a:lvl6pPr>
-            <a:lvl7pPr lvl="6" marR="0" rtl="0" algn="l">
-              <a:spcBef>
-                <a:spcPts val="0"/>
-              </a:spcBef>
-              <a:spcAft>
-                <a:spcPts val="0"/>
-              </a:spcAft>
-              <a:buSzPts val="1400"/>
-              <a:buNone/>
-              <a:defRPr b="0" i="0" sz="1800" u="none" cap="none" strike="noStrike">
+            <a:lvl7pPr marR="0" lvl="6" algn="l" rtl="0">
+              <a:spcBef>
+                <a:spcPts val="0"/>
+              </a:spcBef>
+              <a:spcAft>
+                <a:spcPts val="0"/>
+              </a:spcAft>
+              <a:buSzPts val="1400"/>
+              <a:buNone/>
+              <a:defRPr sz="1800" b="0" i="0" u="none" strike="noStrike" cap="none">
                 <a:solidFill>
                   <a:schemeClr val="dk1"/>
                 </a:solidFill>
@@ -10159,16 +10444,16 @@
                 <a:sym typeface="Calibri"/>
               </a:defRPr>
             </a:lvl7pPr>
-            <a:lvl8pPr lvl="7" marR="0" rtl="0" algn="l">
-              <a:spcBef>
-                <a:spcPts val="0"/>
-              </a:spcBef>
-              <a:spcAft>
-                <a:spcPts val="0"/>
-              </a:spcAft>
-              <a:buSzPts val="1400"/>
-              <a:buNone/>
-              <a:defRPr b="0" i="0" sz="1800" u="none" cap="none" strike="noStrike">
+            <a:lvl8pPr marR="0" lvl="7" algn="l" rtl="0">
+              <a:spcBef>
+                <a:spcPts val="0"/>
+              </a:spcBef>
+              <a:spcAft>
+                <a:spcPts val="0"/>
+              </a:spcAft>
+              <a:buSzPts val="1400"/>
+              <a:buNone/>
+              <a:defRPr sz="1800" b="0" i="0" u="none" strike="noStrike" cap="none">
                 <a:solidFill>
                   <a:schemeClr val="dk1"/>
                 </a:solidFill>
@@ -10178,16 +10463,16 @@
                 <a:sym typeface="Calibri"/>
               </a:defRPr>
             </a:lvl8pPr>
-            <a:lvl9pPr lvl="8" marR="0" rtl="0" algn="l">
-              <a:spcBef>
-                <a:spcPts val="0"/>
-              </a:spcBef>
-              <a:spcAft>
-                <a:spcPts val="0"/>
-              </a:spcAft>
-              <a:buSzPts val="1400"/>
-              <a:buNone/>
-              <a:defRPr b="0" i="0" sz="1800" u="none" cap="none" strike="noStrike">
+            <a:lvl9pPr marR="0" lvl="8" algn="l" rtl="0">
+              <a:spcBef>
+                <a:spcPts val="0"/>
+              </a:spcBef>
+              <a:spcAft>
+                <a:spcPts val="0"/>
+              </a:spcAft>
+              <a:buSzPts val="1400"/>
+              <a:buNone/>
+              <a:defRPr sz="1800" b="0" i="0" u="none" strike="noStrike" cap="none">
                 <a:solidFill>
                   <a:schemeClr val="dk1"/>
                 </a:solidFill>
@@ -10198,15 +10483,19 @@
               </a:defRPr>
             </a:lvl9pPr>
           </a:lstStyle>
-          <a:p/>
+          <a:p>
+            <a:endParaRPr/>
+          </a:p>
         </p:txBody>
       </p:sp>
       <p:sp>
         <p:nvSpPr>
           <p:cNvPr id="10" name="Google Shape;10;p1"/>
-          <p:cNvSpPr txBox="1"/>
+          <p:cNvSpPr txBox="1">
+            <a:spLocks noGrp="1"/>
+          </p:cNvSpPr>
           <p:nvPr>
-            <p:ph idx="12" type="sldNum"/>
+            <p:ph type="sldNum" idx="12"/>
           </p:nvPr>
         </p:nvSpPr>
         <p:spPr>
@@ -10223,16 +10512,16 @@
           </a:ln>
         </p:spPr>
         <p:txBody>
-          <a:bodyPr anchorCtr="0" anchor="ctr" bIns="45700" lIns="91425" spcFirstLastPara="1" rIns="91425" wrap="square" tIns="45700">
+          <a:bodyPr spcFirstLastPara="1" wrap="square" lIns="91425" tIns="45700" rIns="91425" bIns="45700" anchor="ctr" anchorCtr="0">
             <a:noAutofit/>
           </a:bodyPr>
           <a:lstStyle>
-            <a:lvl1pPr indent="0" lvl="0" marL="0" marR="0" rtl="0" algn="r">
-              <a:spcBef>
-                <a:spcPts val="0"/>
-              </a:spcBef>
-              <a:buNone/>
-              <a:defRPr b="0" i="0" sz="1200" u="none" cap="none" strike="noStrike">
+            <a:lvl1pPr marL="0" marR="0" lvl="0" indent="0" algn="r" rtl="0">
+              <a:spcBef>
+                <a:spcPts val="0"/>
+              </a:spcBef>
+              <a:buNone/>
+              <a:defRPr sz="1200" b="0" i="0" u="none" strike="noStrike" cap="none">
                 <a:solidFill>
                   <a:srgbClr val="888888"/>
                 </a:solidFill>
@@ -10242,12 +10531,12 @@
                 <a:sym typeface="Calibri"/>
               </a:defRPr>
             </a:lvl1pPr>
-            <a:lvl2pPr indent="0" lvl="1" marL="0" marR="0" rtl="0" algn="r">
-              <a:spcBef>
-                <a:spcPts val="0"/>
-              </a:spcBef>
-              <a:buNone/>
-              <a:defRPr b="0" i="0" sz="1200" u="none" cap="none" strike="noStrike">
+            <a:lvl2pPr marL="0" marR="0" lvl="1" indent="0" algn="r" rtl="0">
+              <a:spcBef>
+                <a:spcPts val="0"/>
+              </a:spcBef>
+              <a:buNone/>
+              <a:defRPr sz="1200" b="0" i="0" u="none" strike="noStrike" cap="none">
                 <a:solidFill>
                   <a:srgbClr val="888888"/>
                 </a:solidFill>
@@ -10257,12 +10546,12 @@
                 <a:sym typeface="Calibri"/>
               </a:defRPr>
             </a:lvl2pPr>
-            <a:lvl3pPr indent="0" lvl="2" marL="0" marR="0" rtl="0" algn="r">
-              <a:spcBef>
-                <a:spcPts val="0"/>
-              </a:spcBef>
-              <a:buNone/>
-              <a:defRPr b="0" i="0" sz="1200" u="none" cap="none" strike="noStrike">
+            <a:lvl3pPr marL="0" marR="0" lvl="2" indent="0" algn="r" rtl="0">
+              <a:spcBef>
+                <a:spcPts val="0"/>
+              </a:spcBef>
+              <a:buNone/>
+              <a:defRPr sz="1200" b="0" i="0" u="none" strike="noStrike" cap="none">
                 <a:solidFill>
                   <a:srgbClr val="888888"/>
                 </a:solidFill>
@@ -10272,12 +10561,12 @@
                 <a:sym typeface="Calibri"/>
               </a:defRPr>
             </a:lvl3pPr>
-            <a:lvl4pPr indent="0" lvl="3" marL="0" marR="0" rtl="0" algn="r">
-              <a:spcBef>
-                <a:spcPts val="0"/>
-              </a:spcBef>
-              <a:buNone/>
-              <a:defRPr b="0" i="0" sz="1200" u="none" cap="none" strike="noStrike">
+            <a:lvl4pPr marL="0" marR="0" lvl="3" indent="0" algn="r" rtl="0">
+              <a:spcBef>
+                <a:spcPts val="0"/>
+              </a:spcBef>
+              <a:buNone/>
+              <a:defRPr sz="1200" b="0" i="0" u="none" strike="noStrike" cap="none">
                 <a:solidFill>
                   <a:srgbClr val="888888"/>
                 </a:solidFill>
@@ -10287,12 +10576,12 @@
                 <a:sym typeface="Calibri"/>
               </a:defRPr>
             </a:lvl4pPr>
-            <a:lvl5pPr indent="0" lvl="4" marL="0" marR="0" rtl="0" algn="r">
-              <a:spcBef>
-                <a:spcPts val="0"/>
-              </a:spcBef>
-              <a:buNone/>
-              <a:defRPr b="0" i="0" sz="1200" u="none" cap="none" strike="noStrike">
+            <a:lvl5pPr marL="0" marR="0" lvl="4" indent="0" algn="r" rtl="0">
+              <a:spcBef>
+                <a:spcPts val="0"/>
+              </a:spcBef>
+              <a:buNone/>
+              <a:defRPr sz="1200" b="0" i="0" u="none" strike="noStrike" cap="none">
                 <a:solidFill>
                   <a:srgbClr val="888888"/>
                 </a:solidFill>
@@ -10302,12 +10591,12 @@
                 <a:sym typeface="Calibri"/>
               </a:defRPr>
             </a:lvl5pPr>
-            <a:lvl6pPr indent="0" lvl="5" marL="0" marR="0" rtl="0" algn="r">
-              <a:spcBef>
-                <a:spcPts val="0"/>
-              </a:spcBef>
-              <a:buNone/>
-              <a:defRPr b="0" i="0" sz="1200" u="none" cap="none" strike="noStrike">
+            <a:lvl6pPr marL="0" marR="0" lvl="5" indent="0" algn="r" rtl="0">
+              <a:spcBef>
+                <a:spcPts val="0"/>
+              </a:spcBef>
+              <a:buNone/>
+              <a:defRPr sz="1200" b="0" i="0" u="none" strike="noStrike" cap="none">
                 <a:solidFill>
                   <a:srgbClr val="888888"/>
                 </a:solidFill>
@@ -10317,12 +10606,12 @@
                 <a:sym typeface="Calibri"/>
               </a:defRPr>
             </a:lvl6pPr>
-            <a:lvl7pPr indent="0" lvl="6" marL="0" marR="0" rtl="0" algn="r">
-              <a:spcBef>
-                <a:spcPts val="0"/>
-              </a:spcBef>
-              <a:buNone/>
-              <a:defRPr b="0" i="0" sz="1200" u="none" cap="none" strike="noStrike">
+            <a:lvl7pPr marL="0" marR="0" lvl="6" indent="0" algn="r" rtl="0">
+              <a:spcBef>
+                <a:spcPts val="0"/>
+              </a:spcBef>
+              <a:buNone/>
+              <a:defRPr sz="1200" b="0" i="0" u="none" strike="noStrike" cap="none">
                 <a:solidFill>
                   <a:srgbClr val="888888"/>
                 </a:solidFill>
@@ -10332,12 +10621,12 @@
                 <a:sym typeface="Calibri"/>
               </a:defRPr>
             </a:lvl7pPr>
-            <a:lvl8pPr indent="0" lvl="7" marL="0" marR="0" rtl="0" algn="r">
-              <a:spcBef>
-                <a:spcPts val="0"/>
-              </a:spcBef>
-              <a:buNone/>
-              <a:defRPr b="0" i="0" sz="1200" u="none" cap="none" strike="noStrike">
+            <a:lvl8pPr marL="0" marR="0" lvl="7" indent="0" algn="r" rtl="0">
+              <a:spcBef>
+                <a:spcPts val="0"/>
+              </a:spcBef>
+              <a:buNone/>
+              <a:defRPr sz="1200" b="0" i="0" u="none" strike="noStrike" cap="none">
                 <a:solidFill>
                   <a:srgbClr val="888888"/>
                 </a:solidFill>
@@ -10347,12 +10636,12 @@
                 <a:sym typeface="Calibri"/>
               </a:defRPr>
             </a:lvl8pPr>
-            <a:lvl9pPr indent="0" lvl="8" marL="0" marR="0" rtl="0" algn="r">
-              <a:spcBef>
-                <a:spcPts val="0"/>
-              </a:spcBef>
-              <a:buNone/>
-              <a:defRPr b="0" i="0" sz="1200" u="none" cap="none" strike="noStrike">
+            <a:lvl9pPr marL="0" marR="0" lvl="8" indent="0" algn="r" rtl="0">
+              <a:spcBef>
+                <a:spcPts val="0"/>
+              </a:spcBef>
+              <a:buNone/>
+              <a:defRPr sz="1200" b="0" i="0" u="none" strike="noStrike" cap="none">
                 <a:solidFill>
                   <a:srgbClr val="888888"/>
                 </a:solidFill>
@@ -10364,7 +10653,7 @@
             </a:lvl9pPr>
           </a:lstStyle>
           <a:p>
-            <a:pPr indent="0" lvl="0" marL="0" rtl="0" algn="r">
+            <a:pPr marL="0" lvl="0" indent="0" algn="r" rtl="0">
               <a:spcBef>
                 <a:spcPts val="0"/>
               </a:spcBef>
@@ -10375,7 +10664,7 @@
             </a:pPr>
             <a:fld id="{00000000-1234-1234-1234-123412341234}" type="slidenum">
               <a:rPr lang="en-US"/>
-              <a:t>‹#›</a:t>
+              <a:t>‹nº›</a:t>
             </a:fld>
             <a:endParaRPr/>
           </a:p>
@@ -10383,7 +10672,7 @@
       </p:sp>
     </p:spTree>
   </p:cSld>
-  <p:clrMap accent1="accent1" accent2="accent2" accent3="accent3" accent4="accent4" accent5="accent5" accent6="accent6" bg1="lt1" bg2="dk2" tx1="dk1" tx2="lt2" folHlink="folHlink" hlink="hlink"/>
+  <p:clrMap bg1="lt1" tx1="dk1" bg2="dk2" tx2="lt2" accent1="accent1" accent2="accent2" accent3="accent3" accent4="accent4" accent5="accent5" accent6="accent6" hlink="hlink" folHlink="folHlink"/>
   <p:sldLayoutIdLst>
     <p:sldLayoutId id="2147483648" r:id="rId1"/>
     <p:sldLayoutId id="2147483649" r:id="rId2"/>
@@ -10397,10 +10686,10 @@
     <p:sldLayoutId id="2147483657" r:id="rId10"/>
     <p:sldLayoutId id="2147483658" r:id="rId11"/>
   </p:sldLayoutIdLst>
-  <p:hf dt="0" ftr="0" hdr="0" sldNum="0"/>
+  <p:hf sldNum="0" hdr="0" ftr="0" dt="0"/>
   <p:txStyles>
     <p:titleStyle>
-      <a:defPPr lvl="0" marR="0" rtl="0" algn="l">
+      <a:defPPr marR="0" lvl="0" algn="l" rtl="0">
         <a:lnSpc>
           <a:spcPct val="100000"/>
         </a:lnSpc>
@@ -10411,7 +10700,7 @@
           <a:spcPts val="0"/>
         </a:spcAft>
       </a:defPPr>
-      <a:lvl1pPr lvl="0" marR="0" rtl="0" algn="l">
+      <a:lvl1pPr marR="0" lvl="0" algn="l" rtl="0">
         <a:lnSpc>
           <a:spcPct val="100000"/>
         </a:lnSpc>
@@ -10425,7 +10714,7 @@
           <a:srgbClr val="000000"/>
         </a:buClr>
         <a:buFont typeface="Arial"/>
-        <a:defRPr b="0" i="0" sz="1400" u="none" cap="none" strike="noStrike">
+        <a:defRPr sz="1400" b="0" i="0" u="none" strike="noStrike" cap="none">
           <a:solidFill>
             <a:srgbClr val="000000"/>
           </a:solidFill>
@@ -10435,7 +10724,7 @@
           <a:sym typeface="Arial"/>
         </a:defRPr>
       </a:lvl1pPr>
-      <a:lvl2pPr lvl="1" marR="0" rtl="0" algn="l">
+      <a:lvl2pPr marR="0" lvl="1" algn="l" rtl="0">
         <a:lnSpc>
           <a:spcPct val="100000"/>
         </a:lnSpc>
@@ -10449,7 +10738,7 @@
           <a:srgbClr val="000000"/>
         </a:buClr>
         <a:buFont typeface="Arial"/>
-        <a:defRPr b="0" i="0" sz="1400" u="none" cap="none" strike="noStrike">
+        <a:defRPr sz="1400" b="0" i="0" u="none" strike="noStrike" cap="none">
           <a:solidFill>
             <a:srgbClr val="000000"/>
           </a:solidFill>
@@ -10459,7 +10748,7 @@
           <a:sym typeface="Arial"/>
         </a:defRPr>
       </a:lvl2pPr>
-      <a:lvl3pPr lvl="2" marR="0" rtl="0" algn="l">
+      <a:lvl3pPr marR="0" lvl="2" algn="l" rtl="0">
         <a:lnSpc>
           <a:spcPct val="100000"/>
         </a:lnSpc>
@@ -10473,7 +10762,7 @@
           <a:srgbClr val="000000"/>
         </a:buClr>
         <a:buFont typeface="Arial"/>
-        <a:defRPr b="0" i="0" sz="1400" u="none" cap="none" strike="noStrike">
+        <a:defRPr sz="1400" b="0" i="0" u="none" strike="noStrike" cap="none">
           <a:solidFill>
             <a:srgbClr val="000000"/>
           </a:solidFill>
@@ -10483,7 +10772,7 @@
           <a:sym typeface="Arial"/>
         </a:defRPr>
       </a:lvl3pPr>
-      <a:lvl4pPr lvl="3" marR="0" rtl="0" algn="l">
+      <a:lvl4pPr marR="0" lvl="3" algn="l" rtl="0">
         <a:lnSpc>
           <a:spcPct val="100000"/>
         </a:lnSpc>
@@ -10497,7 +10786,7 @@
           <a:srgbClr val="000000"/>
         </a:buClr>
         <a:buFont typeface="Arial"/>
-        <a:defRPr b="0" i="0" sz="1400" u="none" cap="none" strike="noStrike">
+        <a:defRPr sz="1400" b="0" i="0" u="none" strike="noStrike" cap="none">
           <a:solidFill>
             <a:srgbClr val="000000"/>
           </a:solidFill>
@@ -10507,7 +10796,7 @@
           <a:sym typeface="Arial"/>
         </a:defRPr>
       </a:lvl4pPr>
-      <a:lvl5pPr lvl="4" marR="0" rtl="0" algn="l">
+      <a:lvl5pPr marR="0" lvl="4" algn="l" rtl="0">
         <a:lnSpc>
           <a:spcPct val="100000"/>
         </a:lnSpc>
@@ -10521,7 +10810,7 @@
           <a:srgbClr val="000000"/>
         </a:buClr>
         <a:buFont typeface="Arial"/>
-        <a:defRPr b="0" i="0" sz="1400" u="none" cap="none" strike="noStrike">
+        <a:defRPr sz="1400" b="0" i="0" u="none" strike="noStrike" cap="none">
           <a:solidFill>
             <a:srgbClr val="000000"/>
           </a:solidFill>
@@ -10531,7 +10820,7 @@
           <a:sym typeface="Arial"/>
         </a:defRPr>
       </a:lvl5pPr>
-      <a:lvl6pPr lvl="5" marR="0" rtl="0" algn="l">
+      <a:lvl6pPr marR="0" lvl="5" algn="l" rtl="0">
         <a:lnSpc>
           <a:spcPct val="100000"/>
         </a:lnSpc>
@@ -10545,7 +10834,7 @@
           <a:srgbClr val="000000"/>
         </a:buClr>
         <a:buFont typeface="Arial"/>
-        <a:defRPr b="0" i="0" sz="1400" u="none" cap="none" strike="noStrike">
+        <a:defRPr sz="1400" b="0" i="0" u="none" strike="noStrike" cap="none">
           <a:solidFill>
             <a:srgbClr val="000000"/>
           </a:solidFill>
@@ -10555,7 +10844,7 @@
           <a:sym typeface="Arial"/>
         </a:defRPr>
       </a:lvl6pPr>
-      <a:lvl7pPr lvl="6" marR="0" rtl="0" algn="l">
+      <a:lvl7pPr marR="0" lvl="6" algn="l" rtl="0">
         <a:lnSpc>
           <a:spcPct val="100000"/>
         </a:lnSpc>
@@ -10569,7 +10858,7 @@
           <a:srgbClr val="000000"/>
         </a:buClr>
         <a:buFont typeface="Arial"/>
-        <a:defRPr b="0" i="0" sz="1400" u="none" cap="none" strike="noStrike">
+        <a:defRPr sz="1400" b="0" i="0" u="none" strike="noStrike" cap="none">
           <a:solidFill>
             <a:srgbClr val="000000"/>
           </a:solidFill>
@@ -10579,7 +10868,7 @@
           <a:sym typeface="Arial"/>
         </a:defRPr>
       </a:lvl7pPr>
-      <a:lvl8pPr lvl="7" marR="0" rtl="0" algn="l">
+      <a:lvl8pPr marR="0" lvl="7" algn="l" rtl="0">
         <a:lnSpc>
           <a:spcPct val="100000"/>
         </a:lnSpc>
@@ -10593,7 +10882,7 @@
           <a:srgbClr val="000000"/>
         </a:buClr>
         <a:buFont typeface="Arial"/>
-        <a:defRPr b="0" i="0" sz="1400" u="none" cap="none" strike="noStrike">
+        <a:defRPr sz="1400" b="0" i="0" u="none" strike="noStrike" cap="none">
           <a:solidFill>
             <a:srgbClr val="000000"/>
           </a:solidFill>
@@ -10603,7 +10892,7 @@
           <a:sym typeface="Arial"/>
         </a:defRPr>
       </a:lvl8pPr>
-      <a:lvl9pPr lvl="8" marR="0" rtl="0" algn="l">
+      <a:lvl9pPr marR="0" lvl="8" algn="l" rtl="0">
         <a:lnSpc>
           <a:spcPct val="100000"/>
         </a:lnSpc>
@@ -10617,7 +10906,7 @@
           <a:srgbClr val="000000"/>
         </a:buClr>
         <a:buFont typeface="Arial"/>
-        <a:defRPr b="0" i="0" sz="1400" u="none" cap="none" strike="noStrike">
+        <a:defRPr sz="1400" b="0" i="0" u="none" strike="noStrike" cap="none">
           <a:solidFill>
             <a:srgbClr val="000000"/>
           </a:solidFill>
@@ -10629,7 +10918,7 @@
       </a:lvl9pPr>
     </p:titleStyle>
     <p:bodyStyle>
-      <a:defPPr lvl="0" marR="0" rtl="0" algn="l">
+      <a:defPPr marR="0" lvl="0" algn="l" rtl="0">
         <a:lnSpc>
           <a:spcPct val="100000"/>
         </a:lnSpc>
@@ -10640,7 +10929,7 @@
           <a:spcPts val="0"/>
         </a:spcAft>
       </a:defPPr>
-      <a:lvl1pPr lvl="0" marR="0" rtl="0" algn="l">
+      <a:lvl1pPr marR="0" lvl="0" algn="l" rtl="0">
         <a:lnSpc>
           <a:spcPct val="100000"/>
         </a:lnSpc>
@@ -10654,7 +10943,7 @@
           <a:srgbClr val="000000"/>
         </a:buClr>
         <a:buFont typeface="Arial"/>
-        <a:defRPr b="0" i="0" sz="1400" u="none" cap="none" strike="noStrike">
+        <a:defRPr sz="1400" b="0" i="0" u="none" strike="noStrike" cap="none">
           <a:solidFill>
             <a:srgbClr val="000000"/>
           </a:solidFill>
@@ -10664,7 +10953,7 @@
           <a:sym typeface="Arial"/>
         </a:defRPr>
       </a:lvl1pPr>
-      <a:lvl2pPr lvl="1" marR="0" rtl="0" algn="l">
+      <a:lvl2pPr marR="0" lvl="1" algn="l" rtl="0">
         <a:lnSpc>
           <a:spcPct val="100000"/>
         </a:lnSpc>
@@ -10678,7 +10967,7 @@
           <a:srgbClr val="000000"/>
         </a:buClr>
         <a:buFont typeface="Arial"/>
-        <a:defRPr b="0" i="0" sz="1400" u="none" cap="none" strike="noStrike">
+        <a:defRPr sz="1400" b="0" i="0" u="none" strike="noStrike" cap="none">
           <a:solidFill>
             <a:srgbClr val="000000"/>
           </a:solidFill>
@@ -10688,7 +10977,7 @@
           <a:sym typeface="Arial"/>
         </a:defRPr>
       </a:lvl2pPr>
-      <a:lvl3pPr lvl="2" marR="0" rtl="0" algn="l">
+      <a:lvl3pPr marR="0" lvl="2" algn="l" rtl="0">
         <a:lnSpc>
           <a:spcPct val="100000"/>
         </a:lnSpc>
@@ -10702,7 +10991,7 @@
           <a:srgbClr val="000000"/>
         </a:buClr>
         <a:buFont typeface="Arial"/>
-        <a:defRPr b="0" i="0" sz="1400" u="none" cap="none" strike="noStrike">
+        <a:defRPr sz="1400" b="0" i="0" u="none" strike="noStrike" cap="none">
           <a:solidFill>
             <a:srgbClr val="000000"/>
           </a:solidFill>
@@ -10712,7 +11001,7 @@
           <a:sym typeface="Arial"/>
         </a:defRPr>
       </a:lvl3pPr>
-      <a:lvl4pPr lvl="3" marR="0" rtl="0" algn="l">
+      <a:lvl4pPr marR="0" lvl="3" algn="l" rtl="0">
         <a:lnSpc>
           <a:spcPct val="100000"/>
         </a:lnSpc>
@@ -10726,7 +11015,7 @@
           <a:srgbClr val="000000"/>
         </a:buClr>
         <a:buFont typeface="Arial"/>
-        <a:defRPr b="0" i="0" sz="1400" u="none" cap="none" strike="noStrike">
+        <a:defRPr sz="1400" b="0" i="0" u="none" strike="noStrike" cap="none">
           <a:solidFill>
             <a:srgbClr val="000000"/>
           </a:solidFill>
@@ -10736,7 +11025,7 @@
           <a:sym typeface="Arial"/>
         </a:defRPr>
       </a:lvl4pPr>
-      <a:lvl5pPr lvl="4" marR="0" rtl="0" algn="l">
+      <a:lvl5pPr marR="0" lvl="4" algn="l" rtl="0">
         <a:lnSpc>
           <a:spcPct val="100000"/>
         </a:lnSpc>
@@ -10750,7 +11039,7 @@
           <a:srgbClr val="000000"/>
         </a:buClr>
         <a:buFont typeface="Arial"/>
-        <a:defRPr b="0" i="0" sz="1400" u="none" cap="none" strike="noStrike">
+        <a:defRPr sz="1400" b="0" i="0" u="none" strike="noStrike" cap="none">
           <a:solidFill>
             <a:srgbClr val="000000"/>
           </a:solidFill>
@@ -10760,7 +11049,7 @@
           <a:sym typeface="Arial"/>
         </a:defRPr>
       </a:lvl5pPr>
-      <a:lvl6pPr lvl="5" marR="0" rtl="0" algn="l">
+      <a:lvl6pPr marR="0" lvl="5" algn="l" rtl="0">
         <a:lnSpc>
           <a:spcPct val="100000"/>
         </a:lnSpc>
@@ -10774,7 +11063,7 @@
           <a:srgbClr val="000000"/>
         </a:buClr>
         <a:buFont typeface="Arial"/>
-        <a:defRPr b="0" i="0" sz="1400" u="none" cap="none" strike="noStrike">
+        <a:defRPr sz="1400" b="0" i="0" u="none" strike="noStrike" cap="none">
           <a:solidFill>
             <a:srgbClr val="000000"/>
           </a:solidFill>
@@ -10784,7 +11073,7 @@
           <a:sym typeface="Arial"/>
         </a:defRPr>
       </a:lvl6pPr>
-      <a:lvl7pPr lvl="6" marR="0" rtl="0" algn="l">
+      <a:lvl7pPr marR="0" lvl="6" algn="l" rtl="0">
         <a:lnSpc>
           <a:spcPct val="100000"/>
         </a:lnSpc>
@@ -10798,7 +11087,7 @@
           <a:srgbClr val="000000"/>
         </a:buClr>
         <a:buFont typeface="Arial"/>
-        <a:defRPr b="0" i="0" sz="1400" u="none" cap="none" strike="noStrike">
+        <a:defRPr sz="1400" b="0" i="0" u="none" strike="noStrike" cap="none">
           <a:solidFill>
             <a:srgbClr val="000000"/>
           </a:solidFill>
@@ -10808,7 +11097,7 @@
           <a:sym typeface="Arial"/>
         </a:defRPr>
       </a:lvl7pPr>
-      <a:lvl8pPr lvl="7" marR="0" rtl="0" algn="l">
+      <a:lvl8pPr marR="0" lvl="7" algn="l" rtl="0">
         <a:lnSpc>
           <a:spcPct val="100000"/>
         </a:lnSpc>
@@ -10822,7 +11111,7 @@
           <a:srgbClr val="000000"/>
         </a:buClr>
         <a:buFont typeface="Arial"/>
-        <a:defRPr b="0" i="0" sz="1400" u="none" cap="none" strike="noStrike">
+        <a:defRPr sz="1400" b="0" i="0" u="none" strike="noStrike" cap="none">
           <a:solidFill>
             <a:srgbClr val="000000"/>
           </a:solidFill>
@@ -10832,7 +11121,7 @@
           <a:sym typeface="Arial"/>
         </a:defRPr>
       </a:lvl8pPr>
-      <a:lvl9pPr lvl="8" marR="0" rtl="0" algn="l">
+      <a:lvl9pPr marR="0" lvl="8" algn="l" rtl="0">
         <a:lnSpc>
           <a:spcPct val="100000"/>
         </a:lnSpc>
@@ -10846,7 +11135,7 @@
           <a:srgbClr val="000000"/>
         </a:buClr>
         <a:buFont typeface="Arial"/>
-        <a:defRPr b="0" i="0" sz="1400" u="none" cap="none" strike="noStrike">
+        <a:defRPr sz="1400" b="0" i="0" u="none" strike="noStrike" cap="none">
           <a:solidFill>
             <a:srgbClr val="000000"/>
           </a:solidFill>
@@ -10858,7 +11147,7 @@
       </a:lvl9pPr>
     </p:bodyStyle>
     <p:otherStyle>
-      <a:defPPr lvl="0" marR="0" rtl="0" algn="l">
+      <a:defPPr marR="0" lvl="0" algn="l" rtl="0">
         <a:lnSpc>
           <a:spcPct val="100000"/>
         </a:lnSpc>
@@ -10869,7 +11158,7 @@
           <a:spcPts val="0"/>
         </a:spcAft>
       </a:defPPr>
-      <a:lvl1pPr lvl="0" marR="0" rtl="0" algn="l">
+      <a:lvl1pPr marR="0" lvl="0" algn="l" rtl="0">
         <a:lnSpc>
           <a:spcPct val="100000"/>
         </a:lnSpc>
@@ -10883,7 +11172,7 @@
           <a:srgbClr val="000000"/>
         </a:buClr>
         <a:buFont typeface="Arial"/>
-        <a:defRPr b="0" i="0" sz="1400" u="none" cap="none" strike="noStrike">
+        <a:defRPr sz="1400" b="0" i="0" u="none" strike="noStrike" cap="none">
           <a:solidFill>
             <a:srgbClr val="000000"/>
           </a:solidFill>
@@ -10893,7 +11182,7 @@
           <a:sym typeface="Arial"/>
         </a:defRPr>
       </a:lvl1pPr>
-      <a:lvl2pPr lvl="1" marR="0" rtl="0" algn="l">
+      <a:lvl2pPr marR="0" lvl="1" algn="l" rtl="0">
         <a:lnSpc>
           <a:spcPct val="100000"/>
         </a:lnSpc>
@@ -10907,7 +11196,7 @@
           <a:srgbClr val="000000"/>
         </a:buClr>
         <a:buFont typeface="Arial"/>
-        <a:defRPr b="0" i="0" sz="1400" u="none" cap="none" strike="noStrike">
+        <a:defRPr sz="1400" b="0" i="0" u="none" strike="noStrike" cap="none">
           <a:solidFill>
             <a:srgbClr val="000000"/>
           </a:solidFill>
@@ -10917,7 +11206,7 @@
           <a:sym typeface="Arial"/>
         </a:defRPr>
       </a:lvl2pPr>
-      <a:lvl3pPr lvl="2" marR="0" rtl="0" algn="l">
+      <a:lvl3pPr marR="0" lvl="2" algn="l" rtl="0">
         <a:lnSpc>
           <a:spcPct val="100000"/>
         </a:lnSpc>
@@ -10931,7 +11220,7 @@
           <a:srgbClr val="000000"/>
         </a:buClr>
         <a:buFont typeface="Arial"/>
-        <a:defRPr b="0" i="0" sz="1400" u="none" cap="none" strike="noStrike">
+        <a:defRPr sz="1400" b="0" i="0" u="none" strike="noStrike" cap="none">
           <a:solidFill>
             <a:srgbClr val="000000"/>
           </a:solidFill>
@@ -10941,7 +11230,7 @@
           <a:sym typeface="Arial"/>
         </a:defRPr>
       </a:lvl3pPr>
-      <a:lvl4pPr lvl="3" marR="0" rtl="0" algn="l">
+      <a:lvl4pPr marR="0" lvl="3" algn="l" rtl="0">
         <a:lnSpc>
           <a:spcPct val="100000"/>
         </a:lnSpc>
@@ -10955,7 +11244,7 @@
           <a:srgbClr val="000000"/>
         </a:buClr>
         <a:buFont typeface="Arial"/>
-        <a:defRPr b="0" i="0" sz="1400" u="none" cap="none" strike="noStrike">
+        <a:defRPr sz="1400" b="0" i="0" u="none" strike="noStrike" cap="none">
           <a:solidFill>
             <a:srgbClr val="000000"/>
           </a:solidFill>
@@ -10965,7 +11254,7 @@
           <a:sym typeface="Arial"/>
         </a:defRPr>
       </a:lvl4pPr>
-      <a:lvl5pPr lvl="4" marR="0" rtl="0" algn="l">
+      <a:lvl5pPr marR="0" lvl="4" algn="l" rtl="0">
         <a:lnSpc>
           <a:spcPct val="100000"/>
         </a:lnSpc>
@@ -10979,7 +11268,7 @@
           <a:srgbClr val="000000"/>
         </a:buClr>
         <a:buFont typeface="Arial"/>
-        <a:defRPr b="0" i="0" sz="1400" u="none" cap="none" strike="noStrike">
+        <a:defRPr sz="1400" b="0" i="0" u="none" strike="noStrike" cap="none">
           <a:solidFill>
             <a:srgbClr val="000000"/>
           </a:solidFill>
@@ -10989,7 +11278,7 @@
           <a:sym typeface="Arial"/>
         </a:defRPr>
       </a:lvl5pPr>
-      <a:lvl6pPr lvl="5" marR="0" rtl="0" algn="l">
+      <a:lvl6pPr marR="0" lvl="5" algn="l" rtl="0">
         <a:lnSpc>
           <a:spcPct val="100000"/>
         </a:lnSpc>
@@ -11003,7 +11292,7 @@
           <a:srgbClr val="000000"/>
         </a:buClr>
         <a:buFont typeface="Arial"/>
-        <a:defRPr b="0" i="0" sz="1400" u="none" cap="none" strike="noStrike">
+        <a:defRPr sz="1400" b="0" i="0" u="none" strike="noStrike" cap="none">
           <a:solidFill>
             <a:srgbClr val="000000"/>
           </a:solidFill>
@@ -11013,7 +11302,7 @@
           <a:sym typeface="Arial"/>
         </a:defRPr>
       </a:lvl6pPr>
-      <a:lvl7pPr lvl="6" marR="0" rtl="0" algn="l">
+      <a:lvl7pPr marR="0" lvl="6" algn="l" rtl="0">
         <a:lnSpc>
           <a:spcPct val="100000"/>
         </a:lnSpc>
@@ -11027,7 +11316,7 @@
           <a:srgbClr val="000000"/>
         </a:buClr>
         <a:buFont typeface="Arial"/>
-        <a:defRPr b="0" i="0" sz="1400" u="none" cap="none" strike="noStrike">
+        <a:defRPr sz="1400" b="0" i="0" u="none" strike="noStrike" cap="none">
           <a:solidFill>
             <a:srgbClr val="000000"/>
           </a:solidFill>
@@ -11037,7 +11326,7 @@
           <a:sym typeface="Arial"/>
         </a:defRPr>
       </a:lvl7pPr>
-      <a:lvl8pPr lvl="7" marR="0" rtl="0" algn="l">
+      <a:lvl8pPr marR="0" lvl="7" algn="l" rtl="0">
         <a:lnSpc>
           <a:spcPct val="100000"/>
         </a:lnSpc>
@@ -11051,7 +11340,7 @@
           <a:srgbClr val="000000"/>
         </a:buClr>
         <a:buFont typeface="Arial"/>
-        <a:defRPr b="0" i="0" sz="1400" u="none" cap="none" strike="noStrike">
+        <a:defRPr sz="1400" b="0" i="0" u="none" strike="noStrike" cap="none">
           <a:solidFill>
             <a:srgbClr val="000000"/>
           </a:solidFill>
@@ -11061,7 +11350,7 @@
           <a:sym typeface="Arial"/>
         </a:defRPr>
       </a:lvl8pPr>
-      <a:lvl9pPr lvl="8" marR="0" rtl="0" algn="l">
+      <a:lvl9pPr marR="0" lvl="8" algn="l" rtl="0">
         <a:lnSpc>
           <a:spcPct val="100000"/>
         </a:lnSpc>
@@ -11075,7 +11364,7 @@
           <a:srgbClr val="000000"/>
         </a:buClr>
         <a:buFont typeface="Arial"/>
-        <a:defRPr b="0" i="0" sz="1400" u="none" cap="none" strike="noStrike">
+        <a:defRPr sz="1400" b="0" i="0" u="none" strike="noStrike" cap="none">
           <a:solidFill>
             <a:srgbClr val="000000"/>
           </a:solidFill>
@@ -11091,18 +11380,19 @@
 </file>
 
 <file path=ppt/slides/slide1.xml><?xml version="1.0" encoding="utf-8"?>
-<p:sld xmlns:a="http://schemas.openxmlformats.org/drawingml/2006/main" xmlns:r="http://schemas.openxmlformats.org/officeDocument/2006/relationships" xmlns:mc="http://schemas.openxmlformats.org/markup-compatibility/2006" xmlns:mv="urn:schemas-microsoft-com:mac:vml" xmlns:p="http://schemas.openxmlformats.org/presentationml/2006/main" xmlns:c="http://schemas.openxmlformats.org/drawingml/2006/chart" xmlns:dgm="http://schemas.openxmlformats.org/drawingml/2006/diagram" xmlns:o="urn:schemas-microsoft-com:office:office" xmlns:v="urn:schemas-microsoft-com:vml" xmlns:pvml="urn:schemas-microsoft-com:office:powerpoint" xmlns:com="http://schemas.openxmlformats.org/drawingml/2006/compatibility" xmlns:p14="http://schemas.microsoft.com/office/powerpoint/2010/main" xmlns:p15="http://schemas.microsoft.com/office/powerpoint/2012/main" xmlns:ahyp="http://schemas.microsoft.com/office/drawing/2018/hyperlinkcolor">
+<p:sld xmlns:a="http://schemas.openxmlformats.org/drawingml/2006/main" xmlns:r="http://schemas.openxmlformats.org/officeDocument/2006/relationships" xmlns:p="http://schemas.openxmlformats.org/presentationml/2006/main">
   <p:cSld>
     <p:bg>
       <p:bgPr>
         <a:solidFill>
           <a:srgbClr val="1E293B"/>
         </a:solidFill>
+        <a:effectLst/>
       </p:bgPr>
     </p:bg>
     <p:spTree>
       <p:nvGrpSpPr>
-        <p:cNvPr id="83" name="Shape 83"/>
+        <p:cNvPr id="1" name="Shape 83"/>
         <p:cNvGrpSpPr/>
         <p:nvPr/>
       </p:nvGrpSpPr>
@@ -11116,7 +11406,7 @@
       </p:grpSpPr>
       <p:pic>
         <p:nvPicPr>
-          <p:cNvPr descr="image.png" id="84" name="Google Shape;84;p13"/>
+          <p:cNvPr id="84" name="Google Shape;84;p13" descr="image.png"/>
           <p:cNvPicPr preferRelativeResize="0"/>
           <p:nvPr/>
         </p:nvPicPr>
@@ -11124,7 +11414,7 @@
           <a:blip r:embed="rId3">
             <a:alphaModFix/>
           </a:blip>
-          <a:srcRect b="0" l="0" r="0" t="0"/>
+          <a:srcRect/>
           <a:stretch/>
         </p:blipFill>
         <p:spPr>
@@ -11143,7 +11433,7 @@
       </p:pic>
       <p:pic>
         <p:nvPicPr>
-          <p:cNvPr descr="image.png" id="85" name="Google Shape;85;p13"/>
+          <p:cNvPr id="85" name="Google Shape;85;p13" descr="image.png"/>
           <p:cNvPicPr preferRelativeResize="0"/>
           <p:nvPr/>
         </p:nvPicPr>
@@ -11151,7 +11441,7 @@
           <a:blip r:embed="rId4">
             <a:alphaModFix/>
           </a:blip>
-          <a:srcRect b="0" l="0" r="0" t="0"/>
+          <a:srcRect/>
           <a:stretch/>
         </p:blipFill>
         <p:spPr>
@@ -11188,12 +11478,12 @@
           </a:ln>
         </p:spPr>
         <p:txBody>
-          <a:bodyPr anchorCtr="0" anchor="t" bIns="0" lIns="0" spcFirstLastPara="1" rIns="0" wrap="square" tIns="0">
+          <a:bodyPr spcFirstLastPara="1" wrap="square" lIns="0" tIns="0" rIns="0" bIns="0" anchor="t" anchorCtr="0">
             <a:spAutoFit/>
           </a:bodyPr>
           <a:lstStyle/>
           <a:p>
-            <a:pPr indent="0" lvl="0" marL="0" marR="0" rtl="0" algn="ctr">
+            <a:pPr marL="0" marR="0" lvl="0" indent="0" algn="ctr" rtl="0">
               <a:spcBef>
                 <a:spcPts val="0"/>
               </a:spcBef>
@@ -11203,7 +11493,7 @@
               <a:buNone/>
             </a:pPr>
             <a:r>
-              <a:rPr b="1" i="0" lang="en-US" sz="6750" u="none" cap="none" strike="noStrike">
+              <a:rPr lang="en-US" sz="6750" b="1" i="0" u="none" strike="noStrike" cap="none">
                 <a:solidFill>
                   <a:srgbClr val="F8FAFC"/>
                 </a:solidFill>
@@ -11215,7 +11505,7 @@
               <a:t>Bem-vindos ao </a:t>
             </a:r>
             <a:r>
-              <a:rPr b="1" i="0" lang="en-US" sz="6750" u="none" cap="none" strike="noStrike">
+              <a:rPr lang="en-US" sz="6750" b="1" i="0" u="none" strike="noStrike" cap="none">
                 <a:solidFill>
                   <a:srgbClr val="22D3EE"/>
                 </a:solidFill>
@@ -11227,7 +11517,7 @@
               <a:t>PHP!</a:t>
             </a:r>
             <a:r>
-              <a:rPr b="1" i="0" lang="en-US" sz="6750" u="none" cap="none" strike="noStrike">
+              <a:rPr lang="en-US" sz="6750" b="1" i="0" u="none" strike="noStrike" cap="none">
                 <a:solidFill>
                   <a:srgbClr val="F8FAFC"/>
                 </a:solidFill>
@@ -11262,12 +11552,12 @@
           </a:ln>
         </p:spPr>
         <p:txBody>
-          <a:bodyPr anchorCtr="0" anchor="t" bIns="0" lIns="0" spcFirstLastPara="1" rIns="0" wrap="square" tIns="0">
+          <a:bodyPr spcFirstLastPara="1" wrap="square" lIns="0" tIns="0" rIns="0" bIns="0" anchor="t" anchorCtr="0">
             <a:spAutoFit/>
           </a:bodyPr>
           <a:lstStyle/>
           <a:p>
-            <a:pPr indent="0" lvl="0" marL="0" marR="0" rtl="0" algn="ctr">
+            <a:pPr marL="0" marR="0" lvl="0" indent="0" algn="ctr" rtl="0">
               <a:lnSpc>
                 <a:spcPct val="150000"/>
               </a:lnSpc>
@@ -11280,7 +11570,7 @@
               <a:buNone/>
             </a:pPr>
             <a:r>
-              <a:rPr b="0" i="0" lang="en-US" sz="2100" u="none" cap="none" strike="noStrike">
+              <a:rPr lang="en-US" sz="2100" b="0" i="0" u="none" strike="noStrike" cap="none">
                 <a:solidFill>
                   <a:srgbClr val="94A3B8"/>
                 </a:solidFill>
@@ -11297,7 +11587,7 @@
       </p:sp>
       <p:pic>
         <p:nvPicPr>
-          <p:cNvPr descr="image.png" id="88" name="Google Shape;88;p13"/>
+          <p:cNvPr id="88" name="Google Shape;88;p13" descr="image.png"/>
           <p:cNvPicPr preferRelativeResize="0"/>
           <p:nvPr/>
         </p:nvPicPr>
@@ -11305,7 +11595,7 @@
           <a:blip r:embed="rId5">
             <a:alphaModFix/>
           </a:blip>
-          <a:srcRect b="0" l="0" r="0" t="0"/>
+          <a:srcRect/>
           <a:stretch/>
         </p:blipFill>
         <p:spPr>
@@ -11342,12 +11632,12 @@
           </a:ln>
         </p:spPr>
         <p:txBody>
-          <a:bodyPr anchorCtr="0" anchor="t" bIns="0" lIns="0" spcFirstLastPara="1" rIns="0" wrap="square" tIns="0">
+          <a:bodyPr spcFirstLastPara="1" wrap="square" lIns="0" tIns="0" rIns="0" bIns="0" anchor="t" anchorCtr="0">
             <a:spAutoFit/>
           </a:bodyPr>
           <a:lstStyle/>
           <a:p>
-            <a:pPr indent="0" lvl="0" marL="0" marR="0" rtl="0" algn="ctr">
+            <a:pPr marL="0" marR="0" lvl="0" indent="0" algn="ctr" rtl="0">
               <a:spcBef>
                 <a:spcPts val="0"/>
               </a:spcBef>
@@ -11357,7 +11647,7 @@
               <a:buNone/>
             </a:pPr>
             <a:r>
-              <a:rPr b="0" i="0" lang="en-US" sz="1350" u="none" cap="none" strike="noStrike">
+              <a:rPr lang="en-US" sz="1350" b="0" i="0" u="none" strike="noStrike" cap="none">
                 <a:solidFill>
                   <a:srgbClr val="64748B"/>
                 </a:solidFill>
@@ -11377,22 +11667,30 @@
   <p:clrMapOvr>
     <a:masterClrMapping/>
   </p:clrMapOvr>
+  <p:timing>
+    <p:tnLst>
+      <p:par>
+        <p:cTn id="1" dur="indefinite" restart="never" nodeType="tmRoot"/>
+      </p:par>
+    </p:tnLst>
+  </p:timing>
 </p:sld>
 </file>
 
 <file path=ppt/slides/slide2.xml><?xml version="1.0" encoding="utf-8"?>
-<p:sld xmlns:a="http://schemas.openxmlformats.org/drawingml/2006/main" xmlns:r="http://schemas.openxmlformats.org/officeDocument/2006/relationships" xmlns:mc="http://schemas.openxmlformats.org/markup-compatibility/2006" xmlns:mv="urn:schemas-microsoft-com:mac:vml" xmlns:p="http://schemas.openxmlformats.org/presentationml/2006/main" xmlns:c="http://schemas.openxmlformats.org/drawingml/2006/chart" xmlns:dgm="http://schemas.openxmlformats.org/drawingml/2006/diagram" xmlns:o="urn:schemas-microsoft-com:office:office" xmlns:v="urn:schemas-microsoft-com:vml" xmlns:pvml="urn:schemas-microsoft-com:office:powerpoint" xmlns:com="http://schemas.openxmlformats.org/drawingml/2006/compatibility" xmlns:p14="http://schemas.microsoft.com/office/powerpoint/2010/main" xmlns:p15="http://schemas.microsoft.com/office/powerpoint/2012/main" xmlns:ahyp="http://schemas.microsoft.com/office/drawing/2018/hyperlinkcolor">
+<p:sld xmlns:a="http://schemas.openxmlformats.org/drawingml/2006/main" xmlns:r="http://schemas.openxmlformats.org/officeDocument/2006/relationships" xmlns:p="http://schemas.openxmlformats.org/presentationml/2006/main">
   <p:cSld>
     <p:bg>
       <p:bgPr>
         <a:solidFill>
           <a:srgbClr val="1E293B"/>
         </a:solidFill>
+        <a:effectLst/>
       </p:bgPr>
     </p:bg>
     <p:spTree>
       <p:nvGrpSpPr>
-        <p:cNvPr id="93" name="Shape 93"/>
+        <p:cNvPr id="1" name="Shape 93"/>
         <p:cNvGrpSpPr/>
         <p:nvPr/>
       </p:nvGrpSpPr>
@@ -11406,7 +11704,7 @@
       </p:grpSpPr>
       <p:pic>
         <p:nvPicPr>
-          <p:cNvPr descr="image.png" id="94" name="Google Shape;94;p14"/>
+          <p:cNvPr id="94" name="Google Shape;94;p14" descr="image.png"/>
           <p:cNvPicPr preferRelativeResize="0"/>
           <p:nvPr/>
         </p:nvPicPr>
@@ -11414,7 +11712,7 @@
           <a:blip r:embed="rId3">
             <a:alphaModFix/>
           </a:blip>
-          <a:srcRect b="0" l="0" r="0" t="0"/>
+          <a:srcRect/>
           <a:stretch/>
         </p:blipFill>
         <p:spPr>
@@ -11433,7 +11731,7 @@
       </p:pic>
       <p:pic>
         <p:nvPicPr>
-          <p:cNvPr descr="image.png" id="95" name="Google Shape;95;p14"/>
+          <p:cNvPr id="95" name="Google Shape;95;p14" descr="image.png"/>
           <p:cNvPicPr preferRelativeResize="0"/>
           <p:nvPr/>
         </p:nvPicPr>
@@ -11441,7 +11739,7 @@
           <a:blip r:embed="rId4">
             <a:alphaModFix/>
           </a:blip>
-          <a:srcRect b="0" l="0" r="0" t="0"/>
+          <a:srcRect/>
           <a:stretch/>
         </p:blipFill>
         <p:spPr>
@@ -11460,7 +11758,7 @@
       </p:pic>
       <p:pic>
         <p:nvPicPr>
-          <p:cNvPr descr="image.png" id="96" name="Google Shape;96;p14"/>
+          <p:cNvPr id="96" name="Google Shape;96;p14" descr="image.png"/>
           <p:cNvPicPr preferRelativeResize="0"/>
           <p:nvPr/>
         </p:nvPicPr>
@@ -11468,7 +11766,7 @@
           <a:blip r:embed="rId5">
             <a:alphaModFix/>
           </a:blip>
-          <a:srcRect b="0" l="0" r="0" t="0"/>
+          <a:srcRect/>
           <a:stretch/>
         </p:blipFill>
         <p:spPr>
@@ -11505,12 +11803,12 @@
           </a:ln>
         </p:spPr>
         <p:txBody>
-          <a:bodyPr anchorCtr="0" anchor="t" bIns="0" lIns="0" spcFirstLastPara="1" rIns="0" wrap="square" tIns="0">
+          <a:bodyPr spcFirstLastPara="1" wrap="square" lIns="0" tIns="0" rIns="0" bIns="0" anchor="t" anchorCtr="0">
             <a:spAutoFit/>
           </a:bodyPr>
           <a:lstStyle/>
           <a:p>
-            <a:pPr indent="0" lvl="0" marL="0" marR="0" rtl="0" algn="ctr">
+            <a:pPr marL="0" marR="0" lvl="0" indent="0" algn="ctr" rtl="0">
               <a:lnSpc>
                 <a:spcPct val="150000"/>
               </a:lnSpc>
@@ -11523,7 +11821,7 @@
               <a:buNone/>
             </a:pPr>
             <a:r>
-              <a:rPr b="1" i="0" lang="en-US" sz="1500" u="none" cap="none" strike="noStrike">
+              <a:rPr lang="en-US" sz="1500" b="1" i="0" u="none" strike="noStrike" cap="none">
                 <a:solidFill>
                   <a:srgbClr val="EF4444"/>
                 </a:solidFill>
@@ -11558,12 +11856,12 @@
           </a:ln>
         </p:spPr>
         <p:txBody>
-          <a:bodyPr anchorCtr="0" anchor="t" bIns="0" lIns="152400" spcFirstLastPara="1" rIns="0" wrap="square" tIns="0">
+          <a:bodyPr spcFirstLastPara="1" wrap="square" lIns="152400" tIns="0" rIns="0" bIns="0" anchor="t" anchorCtr="0">
             <a:spAutoFit/>
           </a:bodyPr>
           <a:lstStyle/>
           <a:p>
-            <a:pPr indent="0" lvl="0" marL="0" marR="0" rtl="0" algn="l">
+            <a:pPr marL="0" marR="0" lvl="0" indent="0" algn="l" rtl="0">
               <a:spcBef>
                 <a:spcPts val="0"/>
               </a:spcBef>
@@ -11573,7 +11871,7 @@
               <a:buNone/>
             </a:pPr>
             <a:r>
-              <a:rPr b="1" i="0" lang="en-US" sz="1404" u="none" cap="none" strike="noStrike">
+              <a:rPr lang="en-US" sz="1404" b="1" i="0" u="none" strike="noStrike" cap="none">
                 <a:solidFill>
                   <a:srgbClr val="22D3EE"/>
                 </a:solidFill>
@@ -11608,12 +11906,12 @@
           </a:ln>
         </p:spPr>
         <p:txBody>
-          <a:bodyPr anchorCtr="0" anchor="t" bIns="0" lIns="0" spcFirstLastPara="1" rIns="0" wrap="square" tIns="0">
+          <a:bodyPr spcFirstLastPara="1" wrap="square" lIns="0" tIns="0" rIns="0" bIns="0" anchor="t" anchorCtr="0">
             <a:spAutoFit/>
           </a:bodyPr>
           <a:lstStyle/>
           <a:p>
-            <a:pPr indent="0" lvl="0" marL="0" marR="0" rtl="0" algn="l">
+            <a:pPr marL="0" marR="0" lvl="0" indent="0" algn="l" rtl="0">
               <a:lnSpc>
                 <a:spcPct val="150000"/>
               </a:lnSpc>
@@ -11626,7 +11924,7 @@
               <a:buNone/>
             </a:pPr>
             <a:r>
-              <a:rPr b="0" i="0" lang="en-US" sz="1500" u="none" cap="none" strike="noStrike">
+              <a:rPr lang="en-US" sz="1500" b="0" i="0" u="none" strike="noStrike" cap="none">
                 <a:solidFill>
                   <a:srgbClr val="94A3B8"/>
                 </a:solidFill>
@@ -11638,7 +11936,7 @@
               <a:t>Indentação é </a:t>
             </a:r>
             <a:r>
-              <a:rPr b="1" i="0" lang="en-US" sz="1500" u="none" cap="none" strike="noStrike">
+              <a:rPr lang="en-US" sz="1500" b="1" i="0" u="none" strike="noStrike" cap="none">
                 <a:solidFill>
                   <a:srgbClr val="F8FAFC"/>
                 </a:solidFill>
@@ -11650,7 +11948,7 @@
               <a:t>obrigatória</a:t>
             </a:r>
             <a:r>
-              <a:rPr b="0" i="0" lang="en-US" sz="1500" u="none" cap="none" strike="noStrike">
+              <a:rPr lang="en-US" sz="1500" b="0" i="0" u="none" strike="noStrike" cap="none">
                 <a:solidFill>
                   <a:srgbClr val="94A3B8"/>
                 </a:solidFill>
@@ -11685,12 +11983,12 @@
           </a:ln>
         </p:spPr>
         <p:txBody>
-          <a:bodyPr anchorCtr="0" anchor="t" bIns="0" lIns="0" spcFirstLastPara="1" rIns="0" wrap="square" tIns="0">
+          <a:bodyPr spcFirstLastPara="1" wrap="square" lIns="0" tIns="0" rIns="0" bIns="0" anchor="t" anchorCtr="0">
             <a:spAutoFit/>
           </a:bodyPr>
           <a:lstStyle/>
           <a:p>
-            <a:pPr indent="0" lvl="0" marL="0" marR="0" rtl="0" algn="l">
+            <a:pPr marL="0" marR="0" lvl="0" indent="0" algn="l" rtl="0">
               <a:lnSpc>
                 <a:spcPct val="150000"/>
               </a:lnSpc>
@@ -11703,7 +12001,7 @@
               <a:buNone/>
             </a:pPr>
             <a:r>
-              <a:rPr b="0" i="0" lang="en-US" sz="1500" u="none" cap="none" strike="noStrike">
+              <a:rPr lang="en-US" sz="1500" b="0" i="0" u="none" strike="noStrike" cap="none">
                 <a:solidFill>
                   <a:srgbClr val="94A3B8"/>
                 </a:solidFill>
@@ -11738,12 +12036,12 @@
           </a:ln>
         </p:spPr>
         <p:txBody>
-          <a:bodyPr anchorCtr="0" anchor="t" bIns="0" lIns="0" spcFirstLastPara="1" rIns="0" wrap="square" tIns="0">
+          <a:bodyPr spcFirstLastPara="1" wrap="square" lIns="0" tIns="0" rIns="0" bIns="0" anchor="t" anchorCtr="0">
             <a:spAutoFit/>
           </a:bodyPr>
           <a:lstStyle/>
           <a:p>
-            <a:pPr indent="0" lvl="0" marL="0" marR="0" rtl="0" algn="l">
+            <a:pPr marL="0" marR="0" lvl="0" indent="0" algn="l" rtl="0">
               <a:lnSpc>
                 <a:spcPct val="150000"/>
               </a:lnSpc>
@@ -11756,7 +12054,7 @@
               <a:buNone/>
             </a:pPr>
             <a:r>
-              <a:rPr b="0" i="0" lang="en-US" sz="1500" u="none" cap="none" strike="noStrike">
+              <a:rPr lang="en-US" sz="1500" b="0" i="0" u="none" strike="noStrike" cap="none">
                 <a:solidFill>
                   <a:srgbClr val="94A3B8"/>
                 </a:solidFill>
@@ -11791,12 +12089,12 @@
           </a:ln>
         </p:spPr>
         <p:txBody>
-          <a:bodyPr anchorCtr="0" anchor="t" bIns="0" lIns="219075" spcFirstLastPara="1" rIns="0" wrap="square" tIns="0">
+          <a:bodyPr spcFirstLastPara="1" wrap="square" lIns="219075" tIns="0" rIns="0" bIns="0" anchor="t" anchorCtr="0">
             <a:spAutoFit/>
           </a:bodyPr>
           <a:lstStyle/>
           <a:p>
-            <a:pPr indent="0" lvl="0" marL="0" marR="0" rtl="0" algn="l">
+            <a:pPr marL="0" marR="0" lvl="0" indent="0" algn="l" rtl="0">
               <a:spcBef>
                 <a:spcPts val="0"/>
               </a:spcBef>
@@ -11806,7 +12104,7 @@
               <a:buNone/>
             </a:pPr>
             <a:r>
-              <a:rPr b="1" i="0" lang="en-US" sz="1404" u="none" cap="none" strike="noStrike">
+              <a:rPr lang="en-US" sz="1404" b="1" i="0" u="none" strike="noStrike" cap="none">
                 <a:solidFill>
                   <a:srgbClr val="22D3EE"/>
                 </a:solidFill>
@@ -11841,12 +12139,12 @@
           </a:ln>
         </p:spPr>
         <p:txBody>
-          <a:bodyPr anchorCtr="0" anchor="t" bIns="0" lIns="0" spcFirstLastPara="1" rIns="0" wrap="square" tIns="0">
+          <a:bodyPr spcFirstLastPara="1" wrap="square" lIns="0" tIns="0" rIns="0" bIns="0" anchor="t" anchorCtr="0">
             <a:spAutoFit/>
           </a:bodyPr>
           <a:lstStyle/>
           <a:p>
-            <a:pPr indent="0" lvl="0" marL="0" marR="0" rtl="0" algn="l">
+            <a:pPr marL="0" marR="0" lvl="0" indent="0" algn="l" rtl="0">
               <a:lnSpc>
                 <a:spcPct val="150000"/>
               </a:lnSpc>
@@ -11859,7 +12157,7 @@
               <a:buNone/>
             </a:pPr>
             <a:r>
-              <a:rPr b="0" i="0" lang="en-US" sz="1500" u="none" cap="none" strike="noStrike">
+              <a:rPr lang="en-US" sz="1500" b="0" i="0" u="none" strike="noStrike" cap="none">
                 <a:solidFill>
                   <a:srgbClr val="94A3B8"/>
                 </a:solidFill>
@@ -11871,7 +12169,7 @@
               <a:t>Usamos </a:t>
             </a:r>
             <a:r>
-              <a:rPr b="1" i="0" lang="en-US" sz="1500" u="none" cap="none" strike="noStrike">
+              <a:rPr lang="en-US" sz="1500" b="1" i="0" u="none" strike="noStrike" cap="none">
                 <a:solidFill>
                   <a:srgbClr val="F8FAFC"/>
                 </a:solidFill>
@@ -11883,7 +12181,7 @@
               <a:t>chaves { }</a:t>
             </a:r>
             <a:r>
-              <a:rPr b="0" i="0" lang="en-US" sz="1500" u="none" cap="none" strike="noStrike">
+              <a:rPr lang="en-US" sz="1500" b="0" i="0" u="none" strike="noStrike" cap="none">
                 <a:solidFill>
                   <a:srgbClr val="94A3B8"/>
                 </a:solidFill>
@@ -11918,12 +12216,12 @@
           </a:ln>
         </p:spPr>
         <p:txBody>
-          <a:bodyPr anchorCtr="0" anchor="t" bIns="0" lIns="0" spcFirstLastPara="1" rIns="0" wrap="square" tIns="0">
+          <a:bodyPr spcFirstLastPara="1" wrap="square" lIns="0" tIns="0" rIns="0" bIns="0" anchor="t" anchorCtr="0">
             <a:spAutoFit/>
           </a:bodyPr>
           <a:lstStyle/>
           <a:p>
-            <a:pPr indent="0" lvl="0" marL="0" marR="0" rtl="0" algn="l">
+            <a:pPr marL="0" marR="0" lvl="0" indent="0" algn="l" rtl="0">
               <a:lnSpc>
                 <a:spcPct val="150000"/>
               </a:lnSpc>
@@ -11936,7 +12234,7 @@
               <a:buNone/>
             </a:pPr>
             <a:r>
-              <a:rPr b="0" i="0" lang="en-US" sz="1500" u="none" cap="none" strike="noStrike">
+              <a:rPr lang="en-US" sz="1500" b="0" i="0" u="none" strike="noStrike" cap="none">
                 <a:solidFill>
                   <a:srgbClr val="94A3B8"/>
                 </a:solidFill>
@@ -11948,7 +12246,7 @@
               <a:t>Ponto e vírgula </a:t>
             </a:r>
             <a:r>
-              <a:rPr b="1" i="0" lang="en-US" sz="1500" u="none" cap="none" strike="noStrike">
+              <a:rPr lang="en-US" sz="1500" b="1" i="0" u="none" strike="noStrike" cap="none">
                 <a:solidFill>
                   <a:srgbClr val="F8FAFC"/>
                 </a:solidFill>
@@ -11960,7 +12258,7 @@
               <a:t>;</a:t>
             </a:r>
             <a:r>
-              <a:rPr b="0" i="0" lang="en-US" sz="1500" u="none" cap="none" strike="noStrike">
+              <a:rPr lang="en-US" sz="1500" b="0" i="0" u="none" strike="noStrike" cap="none">
                 <a:solidFill>
                   <a:srgbClr val="94A3B8"/>
                 </a:solidFill>
@@ -11995,12 +12293,12 @@
           </a:ln>
         </p:spPr>
         <p:txBody>
-          <a:bodyPr anchorCtr="0" anchor="t" bIns="0" lIns="0" spcFirstLastPara="1" rIns="0" wrap="square" tIns="0">
+          <a:bodyPr spcFirstLastPara="1" wrap="square" lIns="0" tIns="0" rIns="0" bIns="0" anchor="t" anchorCtr="0">
             <a:spAutoFit/>
           </a:bodyPr>
           <a:lstStyle/>
           <a:p>
-            <a:pPr indent="0" lvl="0" marL="0" marR="0" rtl="0" algn="l">
+            <a:pPr marL="0" marR="0" lvl="0" indent="0" algn="l" rtl="0">
               <a:lnSpc>
                 <a:spcPct val="150000"/>
               </a:lnSpc>
@@ -12013,7 +12311,7 @@
               <a:buNone/>
             </a:pPr>
             <a:r>
-              <a:rPr b="0" i="0" lang="en-US" sz="1500" u="none" cap="none" strike="noStrike">
+              <a:rPr lang="en-US" sz="1500" b="0" i="0" u="none" strike="noStrike" cap="none">
                 <a:solidFill>
                   <a:srgbClr val="94A3B8"/>
                 </a:solidFill>
@@ -12030,7 +12328,7 @@
       </p:sp>
       <p:pic>
         <p:nvPicPr>
-          <p:cNvPr descr="image.png" id="106" name="Google Shape;106;p14"/>
+          <p:cNvPr id="106" name="Google Shape;106;p14" descr="image.png"/>
           <p:cNvPicPr preferRelativeResize="0"/>
           <p:nvPr/>
         </p:nvPicPr>
@@ -12038,7 +12336,7 @@
           <a:blip r:embed="rId6">
             <a:alphaModFix/>
           </a:blip>
-          <a:srcRect b="0" l="0" r="0" t="0"/>
+          <a:srcRect/>
           <a:stretch/>
         </p:blipFill>
         <p:spPr>
@@ -12057,7 +12355,7 @@
       </p:pic>
       <p:pic>
         <p:nvPicPr>
-          <p:cNvPr descr="image.png" id="107" name="Google Shape;107;p14"/>
+          <p:cNvPr id="107" name="Google Shape;107;p14" descr="image.png"/>
           <p:cNvPicPr preferRelativeResize="0"/>
           <p:nvPr/>
         </p:nvPicPr>
@@ -12065,7 +12363,7 @@
           <a:blip r:embed="rId7">
             <a:alphaModFix/>
           </a:blip>
-          <a:srcRect b="0" l="0" r="0" t="0"/>
+          <a:srcRect/>
           <a:stretch/>
         </p:blipFill>
         <p:spPr>
@@ -12102,12 +12400,12 @@
           </a:ln>
         </p:spPr>
         <p:txBody>
-          <a:bodyPr anchorCtr="0" anchor="t" bIns="0" lIns="0" spcFirstLastPara="1" rIns="0" wrap="square" tIns="0">
+          <a:bodyPr spcFirstLastPara="1" wrap="square" lIns="0" tIns="0" rIns="0" bIns="0" anchor="t" anchorCtr="0">
             <a:spAutoFit/>
           </a:bodyPr>
           <a:lstStyle/>
           <a:p>
-            <a:pPr indent="0" lvl="0" marL="0" marR="0" rtl="0" algn="l">
+            <a:pPr marL="0" marR="0" lvl="0" indent="0" algn="l" rtl="0">
               <a:spcBef>
                 <a:spcPts val="0"/>
               </a:spcBef>
@@ -12117,7 +12415,7 @@
               <a:buNone/>
             </a:pPr>
             <a:r>
-              <a:rPr b="1" i="0" lang="en-US" sz="3150" u="none" cap="none" strike="noStrike">
+              <a:rPr lang="en-US" sz="3150" b="1" i="0" u="none" strike="noStrike" cap="none">
                 <a:solidFill>
                   <a:srgbClr val="F8FAFC"/>
                 </a:solidFill>
@@ -12154,12 +12452,12 @@
           </a:ln>
         </p:spPr>
         <p:txBody>
-          <a:bodyPr anchorCtr="0" anchor="ctr" bIns="45700" lIns="91425" spcFirstLastPara="1" rIns="91425" wrap="square" tIns="45700">
+          <a:bodyPr spcFirstLastPara="1" wrap="square" lIns="91425" tIns="45700" rIns="91425" bIns="45700" anchor="ctr" anchorCtr="0">
             <a:noAutofit/>
           </a:bodyPr>
           <a:lstStyle/>
           <a:p>
-            <a:pPr indent="0" lvl="0" marL="0" marR="0" rtl="0" algn="ctr">
+            <a:pPr marL="0" marR="0" lvl="0" indent="0" algn="ctr" rtl="0">
               <a:spcBef>
                 <a:spcPts val="0"/>
               </a:spcBef>
@@ -12168,10 +12466,7 @@
               </a:spcAft>
               <a:buNone/>
             </a:pPr>
-            <a:r>
-              <a:t/>
-            </a:r>
-            <a:endParaRPr b="0" i="0" sz="1800" u="none" cap="none" strike="noStrike">
+            <a:endParaRPr sz="1800" b="0" i="0" u="none" strike="noStrike" cap="none">
               <a:solidFill>
                 <a:schemeClr val="dk1"/>
               </a:solidFill>
@@ -12188,22 +12483,30 @@
   <p:clrMapOvr>
     <a:masterClrMapping/>
   </p:clrMapOvr>
+  <p:timing>
+    <p:tnLst>
+      <p:par>
+        <p:cTn id="1" dur="indefinite" restart="never" nodeType="tmRoot"/>
+      </p:par>
+    </p:tnLst>
+  </p:timing>
 </p:sld>
 </file>
 
 <file path=ppt/slides/slide3.xml><?xml version="1.0" encoding="utf-8"?>
-<p:sld xmlns:a="http://schemas.openxmlformats.org/drawingml/2006/main" xmlns:r="http://schemas.openxmlformats.org/officeDocument/2006/relationships" xmlns:mc="http://schemas.openxmlformats.org/markup-compatibility/2006" xmlns:mv="urn:schemas-microsoft-com:mac:vml" xmlns:p="http://schemas.openxmlformats.org/presentationml/2006/main" xmlns:c="http://schemas.openxmlformats.org/drawingml/2006/chart" xmlns:dgm="http://schemas.openxmlformats.org/drawingml/2006/diagram" xmlns:o="urn:schemas-microsoft-com:office:office" xmlns:v="urn:schemas-microsoft-com:vml" xmlns:pvml="urn:schemas-microsoft-com:office:powerpoint" xmlns:com="http://schemas.openxmlformats.org/drawingml/2006/compatibility" xmlns:p14="http://schemas.microsoft.com/office/powerpoint/2010/main" xmlns:p15="http://schemas.microsoft.com/office/powerpoint/2012/main" xmlns:ahyp="http://schemas.microsoft.com/office/drawing/2018/hyperlinkcolor">
+<p:sld xmlns:a="http://schemas.openxmlformats.org/drawingml/2006/main" xmlns:r="http://schemas.openxmlformats.org/officeDocument/2006/relationships" xmlns:p="http://schemas.openxmlformats.org/presentationml/2006/main">
   <p:cSld>
     <p:bg>
       <p:bgPr>
         <a:solidFill>
           <a:srgbClr val="1E293B"/>
         </a:solidFill>
+        <a:effectLst/>
       </p:bgPr>
     </p:bg>
     <p:spTree>
       <p:nvGrpSpPr>
-        <p:cNvPr id="113" name="Shape 113"/>
+        <p:cNvPr id="1" name="Shape 113"/>
         <p:cNvGrpSpPr/>
         <p:nvPr/>
       </p:nvGrpSpPr>
@@ -12217,7 +12520,7 @@
       </p:grpSpPr>
       <p:pic>
         <p:nvPicPr>
-          <p:cNvPr descr="image.png" id="114" name="Google Shape;114;p15"/>
+          <p:cNvPr id="114" name="Google Shape;114;p15" descr="image.png"/>
           <p:cNvPicPr preferRelativeResize="0"/>
           <p:nvPr/>
         </p:nvPicPr>
@@ -12225,7 +12528,7 @@
           <a:blip r:embed="rId3">
             <a:alphaModFix/>
           </a:blip>
-          <a:srcRect b="0" l="0" r="0" t="0"/>
+          <a:srcRect/>
           <a:stretch/>
         </p:blipFill>
         <p:spPr>
@@ -12244,7 +12547,7 @@
       </p:pic>
       <p:pic>
         <p:nvPicPr>
-          <p:cNvPr descr="image.png" id="115" name="Google Shape;115;p15"/>
+          <p:cNvPr id="115" name="Google Shape;115;p15" descr="image.png"/>
           <p:cNvPicPr preferRelativeResize="0"/>
           <p:nvPr/>
         </p:nvPicPr>
@@ -12252,7 +12555,7 @@
           <a:blip r:embed="rId4">
             <a:alphaModFix/>
           </a:blip>
-          <a:srcRect b="0" l="0" r="0" t="0"/>
+          <a:srcRect/>
           <a:stretch/>
         </p:blipFill>
         <p:spPr>
@@ -12271,7 +12574,7 @@
       </p:pic>
       <p:pic>
         <p:nvPicPr>
-          <p:cNvPr descr="image.png" id="116" name="Google Shape;116;p15"/>
+          <p:cNvPr id="116" name="Google Shape;116;p15" descr="image.png"/>
           <p:cNvPicPr preferRelativeResize="0"/>
           <p:nvPr/>
         </p:nvPicPr>
@@ -12279,7 +12582,7 @@
           <a:blip r:embed="rId5">
             <a:alphaModFix/>
           </a:blip>
-          <a:srcRect b="0" l="0" r="0" t="0"/>
+          <a:srcRect/>
           <a:stretch/>
         </p:blipFill>
         <p:spPr>
@@ -12316,12 +12619,12 @@
           </a:ln>
         </p:spPr>
         <p:txBody>
-          <a:bodyPr anchorCtr="0" anchor="t" bIns="0" lIns="0" spcFirstLastPara="1" rIns="0" wrap="square" tIns="0">
+          <a:bodyPr spcFirstLastPara="1" wrap="square" lIns="0" tIns="0" rIns="0" bIns="0" anchor="t" anchorCtr="0">
             <a:spAutoFit/>
           </a:bodyPr>
           <a:lstStyle/>
           <a:p>
-            <a:pPr indent="0" lvl="0" marL="190500" rtl="0" algn="l">
+            <a:pPr marL="190500" lvl="0" indent="0" algn="l" rtl="0">
               <a:lnSpc>
                 <a:spcPct val="115000"/>
               </a:lnSpc>
@@ -12335,7 +12638,7 @@
               <a:buNone/>
             </a:pPr>
             <a:r>
-              <a:rPr b="1" lang="en-US" sz="3150">
+              <a:rPr lang="en-US" sz="3150" b="1">
                 <a:solidFill>
                   <a:srgbClr val="F8FAFC"/>
                 </a:solidFill>
@@ -12346,7 +12649,7 @@
               </a:rPr>
               <a:t>O Container PHP</a:t>
             </a:r>
-            <a:endParaRPr b="1" sz="3150">
+            <a:endParaRPr sz="3150" b="1">
               <a:solidFill>
                 <a:srgbClr val="F8FAFC"/>
               </a:solidFill>
@@ -12380,12 +12683,12 @@
           </a:ln>
         </p:spPr>
         <p:txBody>
-          <a:bodyPr anchorCtr="0" anchor="ctr" bIns="45700" lIns="91425" spcFirstLastPara="1" rIns="91425" wrap="square" tIns="45700">
+          <a:bodyPr spcFirstLastPara="1" wrap="square" lIns="91425" tIns="45700" rIns="91425" bIns="45700" anchor="ctr" anchorCtr="0">
             <a:noAutofit/>
           </a:bodyPr>
           <a:lstStyle/>
           <a:p>
-            <a:pPr indent="0" lvl="0" marL="0" marR="0" rtl="0" algn="ctr">
+            <a:pPr marL="0" marR="0" lvl="0" indent="0" algn="ctr" rtl="0">
               <a:spcBef>
                 <a:spcPts val="0"/>
               </a:spcBef>
@@ -12394,10 +12697,7 @@
               </a:spcAft>
               <a:buNone/>
             </a:pPr>
-            <a:r>
-              <a:t/>
-            </a:r>
-            <a:endParaRPr b="0" i="0" sz="1800" u="none" cap="none" strike="noStrike">
+            <a:endParaRPr sz="1800" b="0" i="0" u="none" strike="noStrike" cap="none">
               <a:solidFill>
                 <a:schemeClr val="dk1"/>
               </a:solidFill>
@@ -12429,12 +12729,12 @@
           </a:ln>
         </p:spPr>
         <p:txBody>
-          <a:bodyPr anchorCtr="0" anchor="t" bIns="91425" lIns="91425" spcFirstLastPara="1" rIns="91425" wrap="square" tIns="91425">
+          <a:bodyPr spcFirstLastPara="1" wrap="square" lIns="91425" tIns="91425" rIns="91425" bIns="91425" anchor="t" anchorCtr="0">
             <a:spAutoFit/>
           </a:bodyPr>
           <a:lstStyle/>
           <a:p>
-            <a:pPr indent="0" lvl="0" marL="0" rtl="0" algn="l">
+            <a:pPr marL="0" lvl="0" indent="0" algn="l" rtl="0">
               <a:spcBef>
                 <a:spcPts val="0"/>
               </a:spcBef>
@@ -12482,12 +12782,12 @@
           </a:ln>
         </p:spPr>
         <p:txBody>
-          <a:bodyPr anchorCtr="0" anchor="t" bIns="91425" lIns="91425" spcFirstLastPara="1" rIns="91425" wrap="square" tIns="91425">
+          <a:bodyPr spcFirstLastPara="1" wrap="square" lIns="91425" tIns="91425" rIns="91425" bIns="91425" anchor="t" anchorCtr="0">
             <a:spAutoFit/>
           </a:bodyPr>
           <a:lstStyle/>
           <a:p>
-            <a:pPr indent="0" lvl="0" marL="0" rtl="0" algn="ctr">
+            <a:pPr marL="0" lvl="0" indent="0" algn="ctr" rtl="0">
               <a:lnSpc>
                 <a:spcPct val="115000"/>
               </a:lnSpc>
@@ -12500,21 +12800,21 @@
               <a:buNone/>
             </a:pPr>
             <a:r>
-              <a:rPr b="1" lang="en-US" sz="3000">
+              <a:rPr lang="en-US" sz="3000" b="1">
                 <a:solidFill>
                   <a:srgbClr val="F8FAFC"/>
                 </a:solidFill>
               </a:rPr>
               <a:t>&lt;?php</a:t>
             </a:r>
-            <a:endParaRPr b="1" sz="3000">
+            <a:endParaRPr sz="3000" b="1">
               <a:solidFill>
                 <a:srgbClr val="F8FAFC"/>
               </a:solidFill>
             </a:endParaRPr>
           </a:p>
           <a:p>
-            <a:pPr indent="0" lvl="0" marL="0" rtl="0" algn="l">
+            <a:pPr marL="0" lvl="0" indent="0" algn="l" rtl="0">
               <a:lnSpc>
                 <a:spcPct val="115000"/>
               </a:lnSpc>
@@ -12526,9 +12826,6 @@
               </a:spcAft>
               <a:buNone/>
             </a:pPr>
-            <a:r>
-              <a:t/>
-            </a:r>
             <a:endParaRPr sz="1100">
               <a:solidFill>
                 <a:schemeClr val="dk1"/>
@@ -12557,12 +12854,12 @@
           </a:ln>
         </p:spPr>
         <p:txBody>
-          <a:bodyPr anchorCtr="0" anchor="t" bIns="91425" lIns="91425" spcFirstLastPara="1" rIns="91425" wrap="square" tIns="91425">
+          <a:bodyPr spcFirstLastPara="1" wrap="square" lIns="91425" tIns="91425" rIns="91425" bIns="91425" anchor="t" anchorCtr="0">
             <a:spAutoFit/>
           </a:bodyPr>
           <a:lstStyle/>
           <a:p>
-            <a:pPr indent="0" lvl="0" marL="0" rtl="0" algn="l">
+            <a:pPr marL="0" lvl="0" indent="0" algn="l" rtl="0">
               <a:spcBef>
                 <a:spcPts val="0"/>
               </a:spcBef>
@@ -12572,7 +12869,7 @@
               <a:buNone/>
             </a:pPr>
             <a:r>
-              <a:rPr b="1" lang="en-US" sz="1500">
+              <a:rPr lang="en-US" sz="1500" b="1">
                 <a:solidFill>
                   <a:srgbClr val="F8FAFC"/>
                 </a:solidFill>
@@ -12607,12 +12904,12 @@
           </a:ln>
         </p:spPr>
         <p:txBody>
-          <a:bodyPr anchorCtr="0" anchor="t" bIns="91425" lIns="91425" spcFirstLastPara="1" rIns="91425" wrap="square" tIns="91425">
+          <a:bodyPr spcFirstLastPara="1" wrap="square" lIns="91425" tIns="91425" rIns="91425" bIns="91425" anchor="t" anchorCtr="0">
             <a:spAutoFit/>
           </a:bodyPr>
           <a:lstStyle/>
           <a:p>
-            <a:pPr indent="0" lvl="0" marL="0" rtl="0" algn="ctr">
+            <a:pPr marL="0" lvl="0" indent="0" algn="ctr" rtl="0">
               <a:spcBef>
                 <a:spcPts val="0"/>
               </a:spcBef>
@@ -12657,12 +12954,12 @@
           </a:ln>
         </p:spPr>
         <p:txBody>
-          <a:bodyPr anchorCtr="0" anchor="t" bIns="91425" lIns="91425" spcFirstLastPara="1" rIns="91425" wrap="square" tIns="91425">
+          <a:bodyPr spcFirstLastPara="1" wrap="square" lIns="91425" tIns="91425" rIns="91425" bIns="91425" anchor="t" anchorCtr="0">
             <a:spAutoFit/>
           </a:bodyPr>
           <a:lstStyle/>
           <a:p>
-            <a:pPr indent="0" lvl="0" marL="0" rtl="0" algn="ctr">
+            <a:pPr marL="0" lvl="0" indent="0" algn="ctr" rtl="0">
               <a:lnSpc>
                 <a:spcPct val="115000"/>
               </a:lnSpc>
@@ -12675,14 +12972,14 @@
               <a:buNone/>
             </a:pPr>
             <a:r>
-              <a:rPr b="1" lang="en-US" sz="3000">
+              <a:rPr lang="en-US" sz="3000" b="1">
                 <a:solidFill>
                   <a:srgbClr val="F8FAFC"/>
                 </a:solidFill>
               </a:rPr>
               <a:t>?&gt;</a:t>
             </a:r>
-            <a:endParaRPr b="1" sz="3000">
+            <a:endParaRPr sz="3000" b="1">
               <a:solidFill>
                 <a:srgbClr val="F8FAFC"/>
               </a:solidFill>
@@ -12710,12 +13007,12 @@
           </a:ln>
         </p:spPr>
         <p:txBody>
-          <a:bodyPr anchorCtr="0" anchor="t" bIns="91425" lIns="91425" spcFirstLastPara="1" rIns="91425" wrap="square" tIns="91425">
+          <a:bodyPr spcFirstLastPara="1" wrap="square" lIns="91425" tIns="91425" rIns="91425" bIns="91425" anchor="t" anchorCtr="0">
             <a:spAutoFit/>
           </a:bodyPr>
           <a:lstStyle/>
           <a:p>
-            <a:pPr indent="0" lvl="0" marL="0" rtl="0" algn="l">
+            <a:pPr marL="0" lvl="0" indent="0" algn="l" rtl="0">
               <a:spcBef>
                 <a:spcPts val="0"/>
               </a:spcBef>
@@ -12725,7 +13022,7 @@
               <a:buNone/>
             </a:pPr>
             <a:r>
-              <a:rPr b="1" lang="en-US" sz="1500">
+              <a:rPr lang="en-US" sz="1500" b="1">
                 <a:solidFill>
                   <a:srgbClr val="F8FAFC"/>
                 </a:solidFill>
@@ -12760,12 +13057,12 @@
           </a:ln>
         </p:spPr>
         <p:txBody>
-          <a:bodyPr anchorCtr="0" anchor="t" bIns="91425" lIns="91425" spcFirstLastPara="1" rIns="91425" wrap="square" tIns="91425">
+          <a:bodyPr spcFirstLastPara="1" wrap="square" lIns="91425" tIns="91425" rIns="91425" bIns="91425" anchor="t" anchorCtr="0">
             <a:spAutoFit/>
           </a:bodyPr>
           <a:lstStyle/>
           <a:p>
-            <a:pPr indent="0" lvl="0" marL="0" rtl="0" algn="ctr">
+            <a:pPr marL="0" lvl="0" indent="0" algn="ctr" rtl="0">
               <a:spcBef>
                 <a:spcPts val="0"/>
               </a:spcBef>
@@ -12810,12 +13107,12 @@
           </a:ln>
         </p:spPr>
         <p:txBody>
-          <a:bodyPr anchorCtr="0" anchor="t" bIns="91425" lIns="91425" spcFirstLastPara="1" rIns="91425" wrap="square" tIns="91425">
+          <a:bodyPr spcFirstLastPara="1" wrap="square" lIns="91425" tIns="91425" rIns="91425" bIns="91425" anchor="t" anchorCtr="0">
             <a:spAutoFit/>
           </a:bodyPr>
           <a:lstStyle/>
           <a:p>
-            <a:pPr indent="0" lvl="0" marL="0" rtl="0" algn="ctr">
+            <a:pPr marL="0" lvl="0" indent="0" algn="ctr" rtl="0">
               <a:spcBef>
                 <a:spcPts val="0"/>
               </a:spcBef>
@@ -12825,7 +13122,7 @@
               <a:buNone/>
             </a:pPr>
             <a:r>
-              <a:rPr b="1" lang="en-US" sz="1350">
+              <a:rPr lang="en-US" sz="1350" b="1">
                 <a:solidFill>
                   <a:srgbClr val="FFFFFF"/>
                 </a:solidFill>
@@ -12849,7 +13146,7 @@
               <a:t> Se o seu arquivo tiver apenas código PHP, a tag de fechamento </a:t>
             </a:r>
             <a:r>
-              <a:rPr b="1" lang="en-US" sz="1350">
+              <a:rPr lang="en-US" sz="1350" b="1">
                 <a:solidFill>
                   <a:srgbClr val="F8FAFC"/>
                 </a:solidFill>
@@ -12881,22 +13178,30 @@
   <p:clrMapOvr>
     <a:masterClrMapping/>
   </p:clrMapOvr>
+  <p:timing>
+    <p:tnLst>
+      <p:par>
+        <p:cTn id="1" dur="indefinite" restart="never" nodeType="tmRoot"/>
+      </p:par>
+    </p:tnLst>
+  </p:timing>
 </p:sld>
 </file>
 
 <file path=ppt/slides/slide4.xml><?xml version="1.0" encoding="utf-8"?>
-<p:sld xmlns:a="http://schemas.openxmlformats.org/drawingml/2006/main" xmlns:r="http://schemas.openxmlformats.org/officeDocument/2006/relationships" xmlns:mc="http://schemas.openxmlformats.org/markup-compatibility/2006" xmlns:mv="urn:schemas-microsoft-com:mac:vml" xmlns:p="http://schemas.openxmlformats.org/presentationml/2006/main" xmlns:c="http://schemas.openxmlformats.org/drawingml/2006/chart" xmlns:dgm="http://schemas.openxmlformats.org/drawingml/2006/diagram" xmlns:o="urn:schemas-microsoft-com:office:office" xmlns:v="urn:schemas-microsoft-com:vml" xmlns:pvml="urn:schemas-microsoft-com:office:powerpoint" xmlns:com="http://schemas.openxmlformats.org/drawingml/2006/compatibility" xmlns:p14="http://schemas.microsoft.com/office/powerpoint/2010/main" xmlns:p15="http://schemas.microsoft.com/office/powerpoint/2012/main" xmlns:ahyp="http://schemas.microsoft.com/office/drawing/2018/hyperlinkcolor">
+<p:sld xmlns:a="http://schemas.openxmlformats.org/drawingml/2006/main" xmlns:r="http://schemas.openxmlformats.org/officeDocument/2006/relationships" xmlns:p="http://schemas.openxmlformats.org/presentationml/2006/main">
   <p:cSld>
     <p:bg>
       <p:bgPr>
         <a:solidFill>
           <a:srgbClr val="1E293B"/>
         </a:solidFill>
+        <a:effectLst/>
       </p:bgPr>
     </p:bg>
     <p:spTree>
       <p:nvGrpSpPr>
-        <p:cNvPr id="130" name="Shape 130"/>
+        <p:cNvPr id="1" name="Shape 130"/>
         <p:cNvGrpSpPr/>
         <p:nvPr/>
       </p:nvGrpSpPr>
@@ -12910,7 +13215,7 @@
       </p:grpSpPr>
       <p:pic>
         <p:nvPicPr>
-          <p:cNvPr descr="image.png" id="131" name="Google Shape;131;p16"/>
+          <p:cNvPr id="131" name="Google Shape;131;p16" descr="image.png"/>
           <p:cNvPicPr preferRelativeResize="0"/>
           <p:nvPr/>
         </p:nvPicPr>
@@ -12918,7 +13223,7 @@
           <a:blip r:embed="rId3">
             <a:alphaModFix/>
           </a:blip>
-          <a:srcRect b="0" l="0" r="0" t="0"/>
+          <a:srcRect/>
           <a:stretch/>
         </p:blipFill>
         <p:spPr>
@@ -12937,7 +13242,7 @@
       </p:pic>
       <p:pic>
         <p:nvPicPr>
-          <p:cNvPr descr="image.png" id="132" name="Google Shape;132;p16"/>
+          <p:cNvPr id="132" name="Google Shape;132;p16" descr="image.png"/>
           <p:cNvPicPr preferRelativeResize="0"/>
           <p:nvPr/>
         </p:nvPicPr>
@@ -12945,7 +13250,7 @@
           <a:blip r:embed="rId4">
             <a:alphaModFix/>
           </a:blip>
-          <a:srcRect b="0" l="0" r="0" t="0"/>
+          <a:srcRect/>
           <a:stretch/>
         </p:blipFill>
         <p:spPr>
@@ -12982,12 +13287,12 @@
           </a:ln>
         </p:spPr>
         <p:txBody>
-          <a:bodyPr anchorCtr="0" anchor="t" bIns="0" lIns="0" spcFirstLastPara="1" rIns="0" wrap="square" tIns="0">
+          <a:bodyPr spcFirstLastPara="1" wrap="square" lIns="0" tIns="0" rIns="0" bIns="0" anchor="t" anchorCtr="0">
             <a:spAutoFit/>
           </a:bodyPr>
           <a:lstStyle/>
           <a:p>
-            <a:pPr indent="0" lvl="0" marL="0" marR="0" rtl="0" algn="l">
+            <a:pPr marL="0" marR="0" lvl="0" indent="0" algn="l" rtl="0">
               <a:lnSpc>
                 <a:spcPct val="150000"/>
               </a:lnSpc>
@@ -13000,7 +13305,7 @@
               <a:buNone/>
             </a:pPr>
             <a:r>
-              <a:rPr b="1" i="0" lang="en-US" sz="1500" u="none" cap="none" strike="noStrike">
+              <a:rPr lang="en-US" sz="1500" b="1" i="0" u="none" strike="noStrike" cap="none">
                 <a:solidFill>
                   <a:srgbClr val="F8FAFC"/>
                 </a:solidFill>
@@ -13035,12 +13340,12 @@
           </a:ln>
         </p:spPr>
         <p:txBody>
-          <a:bodyPr anchorCtr="0" anchor="t" bIns="0" lIns="0" spcFirstLastPara="1" rIns="0" wrap="square" tIns="0">
+          <a:bodyPr spcFirstLastPara="1" wrap="square" lIns="0" tIns="0" rIns="0" bIns="0" anchor="t" anchorCtr="0">
             <a:spAutoFit/>
           </a:bodyPr>
           <a:lstStyle/>
           <a:p>
-            <a:pPr indent="0" lvl="0" marL="0" marR="0" rtl="0" algn="l">
+            <a:pPr marL="0" marR="0" lvl="0" indent="0" algn="l" rtl="0">
               <a:lnSpc>
                 <a:spcPct val="150000"/>
               </a:lnSpc>
@@ -13053,7 +13358,7 @@
               <a:buNone/>
             </a:pPr>
             <a:r>
-              <a:rPr b="0" i="0" lang="en-US" sz="1500" u="none" cap="none" strike="noStrike">
+              <a:rPr lang="en-US" sz="1500" b="0" i="0" u="none" strike="noStrike" cap="none">
                 <a:solidFill>
                   <a:srgbClr val="94A3B8"/>
                 </a:solidFill>
@@ -13065,7 +13370,7 @@
               <a:t>Toda variável começa com cifrão </a:t>
             </a:r>
             <a:r>
-              <a:rPr b="1" i="0" lang="en-US" sz="1500" u="none" cap="none" strike="noStrike">
+              <a:rPr lang="en-US" sz="1500" b="1" i="0" u="none" strike="noStrike" cap="none">
                 <a:solidFill>
                   <a:srgbClr val="F8FAFC"/>
                 </a:solidFill>
@@ -13077,7 +13382,7 @@
               <a:t>$</a:t>
             </a:r>
             <a:r>
-              <a:rPr b="0" i="0" lang="en-US" sz="1500" u="none" cap="none" strike="noStrike">
+              <a:rPr lang="en-US" sz="1500" b="0" i="0" u="none" strike="noStrike" cap="none">
                 <a:solidFill>
                   <a:srgbClr val="94A3B8"/>
                 </a:solidFill>
@@ -13112,12 +13417,12 @@
           </a:ln>
         </p:spPr>
         <p:txBody>
-          <a:bodyPr anchorCtr="0" anchor="t" bIns="0" lIns="0" spcFirstLastPara="1" rIns="0" wrap="square" tIns="0">
+          <a:bodyPr spcFirstLastPara="1" wrap="square" lIns="0" tIns="0" rIns="0" bIns="0" anchor="t" anchorCtr="0">
             <a:spAutoFit/>
           </a:bodyPr>
           <a:lstStyle/>
           <a:p>
-            <a:pPr indent="0" lvl="0" marL="0" marR="0" rtl="0" algn="l">
+            <a:pPr marL="0" marR="0" lvl="0" indent="0" algn="l" rtl="0">
               <a:spcBef>
                 <a:spcPts val="0"/>
               </a:spcBef>
@@ -13127,7 +13432,7 @@
               <a:buNone/>
             </a:pPr>
             <a:r>
-              <a:rPr b="0" i="0" lang="en-US" sz="1050" u="none" cap="none" strike="noStrike">
+              <a:rPr lang="en-US" sz="1050" b="0" i="0" u="none" strike="noStrike" cap="none">
                 <a:solidFill>
                   <a:srgbClr val="475569"/>
                 </a:solidFill>
@@ -13162,12 +13467,12 @@
           </a:ln>
         </p:spPr>
         <p:txBody>
-          <a:bodyPr anchorCtr="0" anchor="t" bIns="0" lIns="0" spcFirstLastPara="1" rIns="0" wrap="square" tIns="0">
+          <a:bodyPr spcFirstLastPara="1" wrap="square" lIns="0" tIns="0" rIns="0" bIns="0" anchor="t" anchorCtr="0">
             <a:spAutoFit/>
           </a:bodyPr>
           <a:lstStyle/>
           <a:p>
-            <a:pPr indent="0" lvl="0" marL="0" marR="0" rtl="0" algn="l">
+            <a:pPr marL="0" marR="0" lvl="0" indent="0" algn="l" rtl="0">
               <a:spcBef>
                 <a:spcPts val="0"/>
               </a:spcBef>
@@ -13177,7 +13482,7 @@
               <a:buNone/>
             </a:pPr>
             <a:r>
-              <a:rPr b="0" i="0" lang="en-US" sz="1050" u="none" cap="none" strike="noStrike">
+              <a:rPr lang="en-US" sz="1050" b="0" i="0" u="none" strike="noStrike" cap="none">
                 <a:solidFill>
                   <a:srgbClr val="475569"/>
                 </a:solidFill>
@@ -13212,12 +13517,12 @@
           </a:ln>
         </p:spPr>
         <p:txBody>
-          <a:bodyPr anchorCtr="0" anchor="t" bIns="0" lIns="0" spcFirstLastPara="1" rIns="0" wrap="square" tIns="0">
+          <a:bodyPr spcFirstLastPara="1" wrap="square" lIns="0" tIns="0" rIns="0" bIns="0" anchor="t" anchorCtr="0">
             <a:spAutoFit/>
           </a:bodyPr>
           <a:lstStyle/>
           <a:p>
-            <a:pPr indent="0" lvl="0" marL="0" marR="0" rtl="0" algn="l">
+            <a:pPr marL="0" marR="0" lvl="0" indent="0" algn="l" rtl="0">
               <a:spcBef>
                 <a:spcPts val="0"/>
               </a:spcBef>
@@ -13227,7 +13532,7 @@
               <a:buNone/>
             </a:pPr>
             <a:r>
-              <a:rPr b="1" i="0" lang="en-US" sz="1404" u="none" cap="none" strike="noStrike">
+              <a:rPr lang="en-US" sz="1404" b="1" i="0" u="none" strike="noStrike" cap="none">
                 <a:solidFill>
                   <a:srgbClr val="F8FAFC"/>
                 </a:solidFill>
@@ -13262,12 +13567,12 @@
           </a:ln>
         </p:spPr>
         <p:txBody>
-          <a:bodyPr anchorCtr="0" anchor="t" bIns="0" lIns="0" spcFirstLastPara="1" rIns="0" wrap="square" tIns="0">
+          <a:bodyPr spcFirstLastPara="1" wrap="square" lIns="0" tIns="0" rIns="0" bIns="0" anchor="t" anchorCtr="0">
             <a:spAutoFit/>
           </a:bodyPr>
           <a:lstStyle/>
           <a:p>
-            <a:pPr indent="0" lvl="0" marL="0" marR="0" rtl="0" algn="l">
+            <a:pPr marL="0" marR="0" lvl="0" indent="0" algn="l" rtl="0">
               <a:lnSpc>
                 <a:spcPct val="150000"/>
               </a:lnSpc>
@@ -13280,7 +13585,7 @@
               <a:buNone/>
             </a:pPr>
             <a:r>
-              <a:rPr b="0" i="0" lang="en-US" sz="1500" u="none" cap="none" strike="noStrike">
+              <a:rPr lang="en-US" sz="1500" b="0" i="0" u="none" strike="noStrike" cap="none">
                 <a:solidFill>
                   <a:srgbClr val="94A3B8"/>
                 </a:solidFill>
@@ -13292,7 +13597,7 @@
               <a:t>Usamos o </a:t>
             </a:r>
             <a:r>
-              <a:rPr b="1" i="0" lang="en-US" sz="1500" u="none" cap="none" strike="noStrike">
+              <a:rPr lang="en-US" sz="1500" b="1" i="0" u="none" strike="noStrike" cap="none">
                 <a:solidFill>
                   <a:srgbClr val="F8FAFC"/>
                 </a:solidFill>
@@ -13304,7 +13609,7 @@
               <a:t>ponto .</a:t>
             </a:r>
             <a:r>
-              <a:rPr b="0" i="0" lang="en-US" sz="1500" u="none" cap="none" strike="noStrike">
+              <a:rPr lang="en-US" sz="1500" b="0" i="0" u="none" strike="noStrike" cap="none">
                 <a:solidFill>
                   <a:srgbClr val="94A3B8"/>
                 </a:solidFill>
@@ -13339,12 +13644,12 @@
           </a:ln>
         </p:spPr>
         <p:txBody>
-          <a:bodyPr anchorCtr="0" anchor="t" bIns="0" lIns="0" spcFirstLastPara="1" rIns="0" wrap="square" tIns="0">
+          <a:bodyPr spcFirstLastPara="1" wrap="square" lIns="0" tIns="0" rIns="0" bIns="0" anchor="t" anchorCtr="0">
             <a:spAutoFit/>
           </a:bodyPr>
           <a:lstStyle/>
           <a:p>
-            <a:pPr indent="0" lvl="0" marL="0" marR="0" rtl="0" algn="l">
+            <a:pPr marL="0" marR="0" lvl="0" indent="0" algn="l" rtl="0">
               <a:spcBef>
                 <a:spcPts val="0"/>
               </a:spcBef>
@@ -13354,7 +13659,7 @@
               <a:buNone/>
             </a:pPr>
             <a:r>
-              <a:rPr b="1" i="0" lang="en-US" sz="3150" u="none" cap="none" strike="noStrike">
+              <a:rPr lang="en-US" sz="3150" b="1" i="0" u="none" strike="noStrike" cap="none">
                 <a:solidFill>
                   <a:srgbClr val="F8FAFC"/>
                 </a:solidFill>
@@ -13391,12 +13696,12 @@
           </a:ln>
         </p:spPr>
         <p:txBody>
-          <a:bodyPr anchorCtr="0" anchor="ctr" bIns="45700" lIns="91425" spcFirstLastPara="1" rIns="91425" wrap="square" tIns="45700">
+          <a:bodyPr spcFirstLastPara="1" wrap="square" lIns="91425" tIns="45700" rIns="91425" bIns="45700" anchor="ctr" anchorCtr="0">
             <a:noAutofit/>
           </a:bodyPr>
           <a:lstStyle/>
           <a:p>
-            <a:pPr indent="0" lvl="0" marL="0" marR="0" rtl="0" algn="ctr">
+            <a:pPr marL="0" marR="0" lvl="0" indent="0" algn="ctr" rtl="0">
               <a:spcBef>
                 <a:spcPts val="0"/>
               </a:spcBef>
@@ -13405,10 +13710,7 @@
               </a:spcAft>
               <a:buNone/>
             </a:pPr>
-            <a:r>
-              <a:t/>
-            </a:r>
-            <a:endParaRPr b="0" i="0" sz="1800" u="none" cap="none" strike="noStrike">
+            <a:endParaRPr sz="1800" b="0" i="0" u="none" strike="noStrike" cap="none">
               <a:solidFill>
                 <a:schemeClr val="dk1"/>
               </a:solidFill>
@@ -13453,22 +13755,30 @@
   <p:clrMapOvr>
     <a:masterClrMapping/>
   </p:clrMapOvr>
+  <p:timing>
+    <p:tnLst>
+      <p:par>
+        <p:cTn id="1" dur="indefinite" restart="never" nodeType="tmRoot"/>
+      </p:par>
+    </p:tnLst>
+  </p:timing>
 </p:sld>
 </file>
 
 <file path=ppt/slides/slide5.xml><?xml version="1.0" encoding="utf-8"?>
-<p:sld xmlns:a="http://schemas.openxmlformats.org/drawingml/2006/main" xmlns:r="http://schemas.openxmlformats.org/officeDocument/2006/relationships" xmlns:mc="http://schemas.openxmlformats.org/markup-compatibility/2006" xmlns:mv="urn:schemas-microsoft-com:mac:vml" xmlns:p="http://schemas.openxmlformats.org/presentationml/2006/main" xmlns:c="http://schemas.openxmlformats.org/drawingml/2006/chart" xmlns:dgm="http://schemas.openxmlformats.org/drawingml/2006/diagram" xmlns:o="urn:schemas-microsoft-com:office:office" xmlns:v="urn:schemas-microsoft-com:vml" xmlns:pvml="urn:schemas-microsoft-com:office:powerpoint" xmlns:com="http://schemas.openxmlformats.org/drawingml/2006/compatibility" xmlns:p14="http://schemas.microsoft.com/office/powerpoint/2010/main" xmlns:p15="http://schemas.microsoft.com/office/powerpoint/2012/main" xmlns:ahyp="http://schemas.microsoft.com/office/drawing/2018/hyperlinkcolor">
+<p:sld xmlns:a="http://schemas.openxmlformats.org/drawingml/2006/main" xmlns:r="http://schemas.openxmlformats.org/officeDocument/2006/relationships" xmlns:p="http://schemas.openxmlformats.org/presentationml/2006/main">
   <p:cSld>
     <p:bg>
       <p:bgPr>
         <a:solidFill>
           <a:srgbClr val="1E293B"/>
         </a:solidFill>
+        <a:effectLst/>
       </p:bgPr>
     </p:bg>
     <p:spTree>
       <p:nvGrpSpPr>
-        <p:cNvPr id="145" name="Shape 145"/>
+        <p:cNvPr id="1" name="Shape 145"/>
         <p:cNvGrpSpPr/>
         <p:nvPr/>
       </p:nvGrpSpPr>
@@ -13482,7 +13792,7 @@
       </p:grpSpPr>
       <p:pic>
         <p:nvPicPr>
-          <p:cNvPr descr="image.png" id="146" name="Google Shape;146;p17"/>
+          <p:cNvPr id="146" name="Google Shape;146;p17" descr="image.png"/>
           <p:cNvPicPr preferRelativeResize="0"/>
           <p:nvPr/>
         </p:nvPicPr>
@@ -13490,7 +13800,7 @@
           <a:blip r:embed="rId3">
             <a:alphaModFix/>
           </a:blip>
-          <a:srcRect b="0" l="0" r="0" t="0"/>
+          <a:srcRect/>
           <a:stretch/>
         </p:blipFill>
         <p:spPr>
@@ -13527,12 +13837,12 @@
           </a:ln>
         </p:spPr>
         <p:txBody>
-          <a:bodyPr anchorCtr="0" anchor="t" bIns="0" lIns="0" spcFirstLastPara="1" rIns="0" wrap="square" tIns="0">
+          <a:bodyPr spcFirstLastPara="1" wrap="square" lIns="0" tIns="0" rIns="0" bIns="0" anchor="t" anchorCtr="0">
             <a:spAutoFit/>
           </a:bodyPr>
           <a:lstStyle/>
           <a:p>
-            <a:pPr indent="0" lvl="0" marL="0" marR="0" rtl="0" algn="l">
+            <a:pPr marL="0" marR="0" lvl="0" indent="0" algn="l" rtl="0">
               <a:lnSpc>
                 <a:spcPct val="150000"/>
               </a:lnSpc>
@@ -13545,7 +13855,7 @@
               <a:buNone/>
             </a:pPr>
             <a:r>
-              <a:rPr b="0" i="0" lang="en-US" sz="1500" u="none" cap="none" strike="noStrike">
+              <a:rPr lang="en-US" sz="1500" b="0" i="0" u="none" strike="noStrike" cap="none">
                 <a:solidFill>
                   <a:srgbClr val="94A3B8"/>
                 </a:solidFill>
@@ -13557,7 +13867,7 @@
               <a:t>A lógica é idêntica, mas a "roupagem" muda. Os dois pontos (:) do Python viram </a:t>
             </a:r>
             <a:r>
-              <a:rPr b="1" i="0" lang="en-US" sz="1500" u="none" cap="none" strike="noStrike">
+              <a:rPr lang="en-US" sz="1500" b="1" i="0" u="none" strike="noStrike" cap="none">
                 <a:solidFill>
                   <a:srgbClr val="F8FAFC"/>
                 </a:solidFill>
@@ -13569,7 +13879,7 @@
               <a:t>chaves { }</a:t>
             </a:r>
             <a:r>
-              <a:rPr b="0" i="0" lang="en-US" sz="1500" u="none" cap="none" strike="noStrike">
+              <a:rPr lang="en-US" sz="1500" b="0" i="0" u="none" strike="noStrike" cap="none">
                 <a:solidFill>
                   <a:srgbClr val="94A3B8"/>
                 </a:solidFill>
@@ -13604,12 +13914,12 @@
           </a:ln>
         </p:spPr>
         <p:txBody>
-          <a:bodyPr anchorCtr="0" anchor="t" bIns="0" lIns="0" spcFirstLastPara="1" rIns="0" wrap="square" tIns="0">
+          <a:bodyPr spcFirstLastPara="1" wrap="square" lIns="0" tIns="0" rIns="0" bIns="0" anchor="t" anchorCtr="0">
             <a:spAutoFit/>
           </a:bodyPr>
           <a:lstStyle/>
           <a:p>
-            <a:pPr indent="0" lvl="0" marL="0" marR="0" rtl="0" algn="l">
+            <a:pPr marL="0" marR="0" lvl="0" indent="0" algn="l" rtl="0">
               <a:spcBef>
                 <a:spcPts val="0"/>
               </a:spcBef>
@@ -13619,7 +13929,7 @@
               <a:buNone/>
             </a:pPr>
             <a:r>
-              <a:rPr b="0" i="0" lang="en-US" sz="1050" u="none" cap="none" strike="noStrike">
+              <a:rPr lang="en-US" sz="1050" b="0" i="0" u="none" strike="noStrike" cap="none">
                 <a:solidFill>
                   <a:srgbClr val="475569"/>
                 </a:solidFill>
@@ -13654,12 +13964,12 @@
           </a:ln>
         </p:spPr>
         <p:txBody>
-          <a:bodyPr anchorCtr="0" anchor="t" bIns="0" lIns="0" spcFirstLastPara="1" rIns="0" wrap="square" tIns="0">
+          <a:bodyPr spcFirstLastPara="1" wrap="square" lIns="0" tIns="0" rIns="0" bIns="0" anchor="t" anchorCtr="0">
             <a:spAutoFit/>
           </a:bodyPr>
           <a:lstStyle/>
           <a:p>
-            <a:pPr indent="0" lvl="0" marL="0" marR="0" rtl="0" algn="l">
+            <a:pPr marL="0" marR="0" lvl="0" indent="0" algn="l" rtl="0">
               <a:spcBef>
                 <a:spcPts val="0"/>
               </a:spcBef>
@@ -13669,7 +13979,7 @@
               <a:buNone/>
             </a:pPr>
             <a:r>
-              <a:rPr b="0" i="0" lang="en-US" sz="1050" u="none" cap="none" strike="noStrike">
+              <a:rPr lang="en-US" sz="1050" b="0" i="0" u="none" strike="noStrike" cap="none">
                 <a:solidFill>
                   <a:srgbClr val="475569"/>
                 </a:solidFill>
@@ -13704,12 +14014,12 @@
           </a:ln>
         </p:spPr>
         <p:txBody>
-          <a:bodyPr anchorCtr="0" anchor="t" bIns="0" lIns="0" spcFirstLastPara="1" rIns="0" wrap="square" tIns="0">
+          <a:bodyPr spcFirstLastPara="1" wrap="square" lIns="0" tIns="0" rIns="0" bIns="0" anchor="t" anchorCtr="0">
             <a:spAutoFit/>
           </a:bodyPr>
           <a:lstStyle/>
           <a:p>
-            <a:pPr indent="0" lvl="0" marL="0" marR="0" rtl="0" algn="l">
+            <a:pPr marL="0" marR="0" lvl="0" indent="0" algn="l" rtl="0">
               <a:spcBef>
                 <a:spcPts val="0"/>
               </a:spcBef>
@@ -13719,7 +14029,7 @@
               <a:buNone/>
             </a:pPr>
             <a:r>
-              <a:rPr b="1" i="0" lang="en-US" sz="3150" u="none" cap="none" strike="noStrike">
+              <a:rPr lang="en-US" sz="3150" b="1" i="0" u="none" strike="noStrike" cap="none">
                 <a:solidFill>
                   <a:srgbClr val="F8FAFC"/>
                 </a:solidFill>
@@ -13756,12 +14066,12 @@
           </a:ln>
         </p:spPr>
         <p:txBody>
-          <a:bodyPr anchorCtr="0" anchor="ctr" bIns="45700" lIns="91425" spcFirstLastPara="1" rIns="91425" wrap="square" tIns="45700">
+          <a:bodyPr spcFirstLastPara="1" wrap="square" lIns="91425" tIns="45700" rIns="91425" bIns="45700" anchor="ctr" anchorCtr="0">
             <a:noAutofit/>
           </a:bodyPr>
           <a:lstStyle/>
           <a:p>
-            <a:pPr indent="0" lvl="0" marL="0" marR="0" rtl="0" algn="ctr">
+            <a:pPr marL="0" marR="0" lvl="0" indent="0" algn="ctr" rtl="0">
               <a:spcBef>
                 <a:spcPts val="0"/>
               </a:spcBef>
@@ -13770,10 +14080,7 @@
               </a:spcAft>
               <a:buNone/>
             </a:pPr>
-            <a:r>
-              <a:t/>
-            </a:r>
-            <a:endParaRPr b="0" i="0" sz="1800" u="none" cap="none" strike="noStrike">
+            <a:endParaRPr sz="1800" b="0" i="0" u="none" strike="noStrike" cap="none">
               <a:solidFill>
                 <a:schemeClr val="dk1"/>
               </a:solidFill>
@@ -13818,22 +14125,30 @@
   <p:clrMapOvr>
     <a:masterClrMapping/>
   </p:clrMapOvr>
+  <p:timing>
+    <p:tnLst>
+      <p:par>
+        <p:cTn id="1" dur="indefinite" restart="never" nodeType="tmRoot"/>
+      </p:par>
+    </p:tnLst>
+  </p:timing>
 </p:sld>
 </file>
 
 <file path=ppt/slides/slide6.xml><?xml version="1.0" encoding="utf-8"?>
-<p:sld xmlns:a="http://schemas.openxmlformats.org/drawingml/2006/main" xmlns:r="http://schemas.openxmlformats.org/officeDocument/2006/relationships" xmlns:mc="http://schemas.openxmlformats.org/markup-compatibility/2006" xmlns:mv="urn:schemas-microsoft-com:mac:vml" xmlns:p="http://schemas.openxmlformats.org/presentationml/2006/main" xmlns:c="http://schemas.openxmlformats.org/drawingml/2006/chart" xmlns:dgm="http://schemas.openxmlformats.org/drawingml/2006/diagram" xmlns:o="urn:schemas-microsoft-com:office:office" xmlns:v="urn:schemas-microsoft-com:vml" xmlns:pvml="urn:schemas-microsoft-com:office:powerpoint" xmlns:com="http://schemas.openxmlformats.org/drawingml/2006/compatibility" xmlns:p14="http://schemas.microsoft.com/office/powerpoint/2010/main" xmlns:p15="http://schemas.microsoft.com/office/powerpoint/2012/main" xmlns:ahyp="http://schemas.microsoft.com/office/drawing/2018/hyperlinkcolor">
+<p:sld xmlns:a="http://schemas.openxmlformats.org/drawingml/2006/main" xmlns:r="http://schemas.openxmlformats.org/officeDocument/2006/relationships" xmlns:p="http://schemas.openxmlformats.org/presentationml/2006/main">
   <p:cSld>
     <p:bg>
       <p:bgPr>
         <a:solidFill>
           <a:srgbClr val="1E293B"/>
         </a:solidFill>
+        <a:effectLst/>
       </p:bgPr>
     </p:bg>
     <p:spTree>
       <p:nvGrpSpPr>
-        <p:cNvPr id="156" name="Shape 156"/>
+        <p:cNvPr id="1" name="Shape 156"/>
         <p:cNvGrpSpPr/>
         <p:nvPr/>
       </p:nvGrpSpPr>
@@ -13847,7 +14162,7 @@
       </p:grpSpPr>
       <p:pic>
         <p:nvPicPr>
-          <p:cNvPr descr="image.png" id="157" name="Google Shape;157;p18"/>
+          <p:cNvPr id="157" name="Google Shape;157;p18" descr="image.png"/>
           <p:cNvPicPr preferRelativeResize="0"/>
           <p:nvPr/>
         </p:nvPicPr>
@@ -13855,7 +14170,7 @@
           <a:blip r:embed="rId3">
             <a:alphaModFix/>
           </a:blip>
-          <a:srcRect b="0" l="0" r="0" t="0"/>
+          <a:srcRect/>
           <a:stretch/>
         </p:blipFill>
         <p:spPr>
@@ -13892,12 +14207,12 @@
           </a:ln>
         </p:spPr>
         <p:txBody>
-          <a:bodyPr anchorCtr="0" anchor="t" bIns="0" lIns="0" spcFirstLastPara="1" rIns="0" wrap="square" tIns="0">
+          <a:bodyPr spcFirstLastPara="1" wrap="square" lIns="0" tIns="0" rIns="0" bIns="0" anchor="t" anchorCtr="0">
             <a:spAutoFit/>
           </a:bodyPr>
           <a:lstStyle/>
           <a:p>
-            <a:pPr indent="0" lvl="0" marL="0" marR="0" rtl="0" algn="l">
+            <a:pPr marL="0" marR="0" lvl="0" indent="0" algn="l" rtl="0">
               <a:lnSpc>
                 <a:spcPct val="150000"/>
               </a:lnSpc>
@@ -13910,7 +14225,7 @@
               <a:buNone/>
             </a:pPr>
             <a:r>
-              <a:rPr b="0" i="0" lang="en-US" sz="1500" u="none" cap="none" strike="noStrike">
+              <a:rPr lang="en-US" sz="1500" b="0" i="0" u="none" strike="noStrike" cap="none">
                 <a:solidFill>
                   <a:srgbClr val="94A3B8"/>
                 </a:solidFill>
@@ -13927,7 +14242,7 @@
       </p:sp>
       <p:pic>
         <p:nvPicPr>
-          <p:cNvPr descr="image.png" id="159" name="Google Shape;159;p18"/>
+          <p:cNvPr id="159" name="Google Shape;159;p18" descr="image.png"/>
           <p:cNvPicPr preferRelativeResize="0"/>
           <p:nvPr/>
         </p:nvPicPr>
@@ -13935,7 +14250,7 @@
           <a:blip r:embed="rId4">
             <a:alphaModFix/>
           </a:blip>
-          <a:srcRect b="0" l="0" r="0" t="0"/>
+          <a:srcRect/>
           <a:stretch/>
         </p:blipFill>
         <p:spPr>
@@ -13972,12 +14287,12 @@
           </a:ln>
         </p:spPr>
         <p:txBody>
-          <a:bodyPr anchorCtr="0" anchor="t" bIns="0" lIns="0" spcFirstLastPara="1" rIns="0" wrap="square" tIns="0">
+          <a:bodyPr spcFirstLastPara="1" wrap="square" lIns="0" tIns="0" rIns="0" bIns="0" anchor="t" anchorCtr="0">
             <a:spAutoFit/>
           </a:bodyPr>
           <a:lstStyle/>
           <a:p>
-            <a:pPr indent="0" lvl="0" marL="0" marR="0" rtl="0" algn="ctr">
+            <a:pPr marL="0" marR="0" lvl="0" indent="0" algn="ctr" rtl="0">
               <a:lnSpc>
                 <a:spcPct val="150000"/>
               </a:lnSpc>
@@ -13990,7 +14305,7 @@
               <a:buNone/>
             </a:pPr>
             <a:r>
-              <a:rPr b="0" i="0" lang="en-US" sz="1500" u="none" cap="none" strike="noStrike">
+              <a:rPr lang="en-US" sz="1500" b="0" i="0" u="none" strike="noStrike" cap="none">
                 <a:solidFill>
                   <a:srgbClr val="94A3B8"/>
                 </a:solidFill>
@@ -14007,7 +14322,7 @@
       </p:sp>
       <p:pic>
         <p:nvPicPr>
-          <p:cNvPr descr="image.png" id="161" name="Google Shape;161;p18"/>
+          <p:cNvPr id="161" name="Google Shape;161;p18" descr="image.png"/>
           <p:cNvPicPr preferRelativeResize="0"/>
           <p:nvPr/>
         </p:nvPicPr>
@@ -14015,7 +14330,7 @@
           <a:blip r:embed="rId5">
             <a:alphaModFix/>
           </a:blip>
-          <a:srcRect b="0" l="0" r="0" t="0"/>
+          <a:srcRect/>
           <a:stretch/>
         </p:blipFill>
         <p:spPr>
@@ -14052,12 +14367,12 @@
           </a:ln>
         </p:spPr>
         <p:txBody>
-          <a:bodyPr anchorCtr="0" anchor="t" bIns="0" lIns="0" spcFirstLastPara="1" rIns="0" wrap="square" tIns="0">
+          <a:bodyPr spcFirstLastPara="1" wrap="square" lIns="0" tIns="0" rIns="0" bIns="0" anchor="t" anchorCtr="0">
             <a:spAutoFit/>
           </a:bodyPr>
           <a:lstStyle/>
           <a:p>
-            <a:pPr indent="0" lvl="0" marL="0" marR="0" rtl="0" algn="ctr">
+            <a:pPr marL="0" marR="0" lvl="0" indent="0" algn="ctr" rtl="0">
               <a:lnSpc>
                 <a:spcPct val="125000"/>
               </a:lnSpc>
@@ -14070,7 +14385,7 @@
               <a:buNone/>
             </a:pPr>
             <a:r>
-              <a:rPr b="1" i="0" lang="en-US" sz="1500" u="none" cap="none" strike="noStrike">
+              <a:rPr lang="en-US" sz="1500" b="1" i="0" u="none" strike="noStrike" cap="none">
                 <a:solidFill>
                   <a:srgbClr val="F8FAFC"/>
                 </a:solidFill>
@@ -14082,7 +14397,7 @@
               <a:t>$contador++</a:t>
             </a:r>
             <a:r>
-              <a:rPr b="0" i="0" lang="en-US" sz="1500" u="none" cap="none" strike="noStrike">
+              <a:rPr lang="en-US" sz="1500" b="0" i="0" u="none" strike="noStrike" cap="none">
                 <a:solidFill>
                   <a:srgbClr val="94A3B8"/>
                 </a:solidFill>
@@ -14093,8 +14408,20 @@
               </a:rPr>
               <a:t> é igual a</a:t>
             </a:r>
+            <a:r>
+              <a:rPr lang="en-US" sz="1800" b="0" i="0" u="none" strike="noStrike" cap="none">
+                <a:solidFill>
+                  <a:schemeClr val="dk1"/>
+                </a:solidFill>
+                <a:latin typeface="Calibri"/>
+                <a:ea typeface="Calibri"/>
+                <a:cs typeface="Calibri"/>
+                <a:sym typeface="Calibri"/>
+              </a:rPr>
+              <a:t/>
+            </a:r>
             <a:br>
-              <a:rPr b="0" i="0" lang="en-US" sz="1800" u="none" cap="none" strike="noStrike">
+              <a:rPr lang="en-US" sz="1800" b="0" i="0" u="none" strike="noStrike" cap="none">
                 <a:solidFill>
                   <a:schemeClr val="dk1"/>
                 </a:solidFill>
@@ -14105,7 +14432,7 @@
               </a:rPr>
             </a:br>
             <a:r>
-              <a:rPr b="0" i="0" lang="en-US" sz="1500" u="none" cap="none" strike="noStrike">
+              <a:rPr lang="en-US" sz="1500" b="0" i="0" u="none" strike="noStrike" cap="none">
                 <a:solidFill>
                   <a:srgbClr val="94A3B8"/>
                 </a:solidFill>
@@ -14140,12 +14467,12 @@
           </a:ln>
         </p:spPr>
         <p:txBody>
-          <a:bodyPr anchorCtr="0" anchor="t" bIns="0" lIns="0" spcFirstLastPara="1" rIns="0" wrap="square" tIns="0">
+          <a:bodyPr spcFirstLastPara="1" wrap="square" lIns="0" tIns="0" rIns="0" bIns="0" anchor="t" anchorCtr="0">
             <a:spAutoFit/>
           </a:bodyPr>
           <a:lstStyle/>
           <a:p>
-            <a:pPr indent="0" lvl="0" marL="0" marR="0" rtl="0" algn="l">
+            <a:pPr marL="0" marR="0" lvl="0" indent="0" algn="l" rtl="0">
               <a:spcBef>
                 <a:spcPts val="0"/>
               </a:spcBef>
@@ -14155,7 +14482,7 @@
               <a:buNone/>
             </a:pPr>
             <a:r>
-              <a:rPr b="1" i="0" lang="en-US" sz="3150" u="none" cap="none" strike="noStrike">
+              <a:rPr lang="en-US" sz="3150" b="1" i="0" u="none" strike="noStrike" cap="none">
                 <a:solidFill>
                   <a:srgbClr val="F8FAFC"/>
                 </a:solidFill>
@@ -14192,12 +14519,12 @@
           </a:ln>
         </p:spPr>
         <p:txBody>
-          <a:bodyPr anchorCtr="0" anchor="ctr" bIns="45700" lIns="91425" spcFirstLastPara="1" rIns="91425" wrap="square" tIns="45700">
+          <a:bodyPr spcFirstLastPara="1" wrap="square" lIns="91425" tIns="45700" rIns="91425" bIns="45700" anchor="ctr" anchorCtr="0">
             <a:noAutofit/>
           </a:bodyPr>
           <a:lstStyle/>
           <a:p>
-            <a:pPr indent="0" lvl="0" marL="0" marR="0" rtl="0" algn="ctr">
+            <a:pPr marL="0" marR="0" lvl="0" indent="0" algn="ctr" rtl="0">
               <a:spcBef>
                 <a:spcPts val="0"/>
               </a:spcBef>
@@ -14206,10 +14533,7 @@
               </a:spcAft>
               <a:buNone/>
             </a:pPr>
-            <a:r>
-              <a:t/>
-            </a:r>
-            <a:endParaRPr b="0" i="0" sz="1800" u="none" cap="none" strike="noStrike">
+            <a:endParaRPr sz="1800" b="0" i="0" u="none" strike="noStrike" cap="none">
               <a:solidFill>
                 <a:schemeClr val="dk1"/>
               </a:solidFill>
@@ -14254,22 +14578,30 @@
   <p:clrMapOvr>
     <a:masterClrMapping/>
   </p:clrMapOvr>
+  <p:timing>
+    <p:tnLst>
+      <p:par>
+        <p:cTn id="1" dur="indefinite" restart="never" nodeType="tmRoot"/>
+      </p:par>
+    </p:tnLst>
+  </p:timing>
 </p:sld>
 </file>
 
 <file path=ppt/slides/slide7.xml><?xml version="1.0" encoding="utf-8"?>
-<p:sld xmlns:a="http://schemas.openxmlformats.org/drawingml/2006/main" xmlns:r="http://schemas.openxmlformats.org/officeDocument/2006/relationships" xmlns:mc="http://schemas.openxmlformats.org/markup-compatibility/2006" xmlns:mv="urn:schemas-microsoft-com:mac:vml" xmlns:p="http://schemas.openxmlformats.org/presentationml/2006/main" xmlns:c="http://schemas.openxmlformats.org/drawingml/2006/chart" xmlns:dgm="http://schemas.openxmlformats.org/drawingml/2006/diagram" xmlns:o="urn:schemas-microsoft-com:office:office" xmlns:v="urn:schemas-microsoft-com:vml" xmlns:pvml="urn:schemas-microsoft-com:office:powerpoint" xmlns:com="http://schemas.openxmlformats.org/drawingml/2006/compatibility" xmlns:p14="http://schemas.microsoft.com/office/powerpoint/2010/main" xmlns:p15="http://schemas.microsoft.com/office/powerpoint/2012/main" xmlns:ahyp="http://schemas.microsoft.com/office/drawing/2018/hyperlinkcolor">
+<p:sld xmlns:a="http://schemas.openxmlformats.org/drawingml/2006/main" xmlns:r="http://schemas.openxmlformats.org/officeDocument/2006/relationships" xmlns:p="http://schemas.openxmlformats.org/presentationml/2006/main">
   <p:cSld>
     <p:bg>
       <p:bgPr>
         <a:solidFill>
           <a:srgbClr val="1E293B"/>
         </a:solidFill>
+        <a:effectLst/>
       </p:bgPr>
     </p:bg>
     <p:spTree>
       <p:nvGrpSpPr>
-        <p:cNvPr id="169" name="Shape 169"/>
+        <p:cNvPr id="1" name="Shape 169"/>
         <p:cNvGrpSpPr/>
         <p:nvPr/>
       </p:nvGrpSpPr>
@@ -14283,7 +14615,7 @@
       </p:grpSpPr>
       <p:pic>
         <p:nvPicPr>
-          <p:cNvPr descr="image.png" id="170" name="Google Shape;170;p19"/>
+          <p:cNvPr id="170" name="Google Shape;170;p19" descr="image.png"/>
           <p:cNvPicPr preferRelativeResize="0"/>
           <p:nvPr/>
         </p:nvPicPr>
@@ -14291,7 +14623,7 @@
           <a:blip r:embed="rId3">
             <a:alphaModFix/>
           </a:blip>
-          <a:srcRect b="0" l="0" r="0" t="0"/>
+          <a:srcRect/>
           <a:stretch/>
         </p:blipFill>
         <p:spPr>
@@ -14310,7 +14642,7 @@
       </p:pic>
       <p:pic>
         <p:nvPicPr>
-          <p:cNvPr descr="image.png" id="171" name="Google Shape;171;p19"/>
+          <p:cNvPr id="171" name="Google Shape;171;p19" descr="image.png"/>
           <p:cNvPicPr preferRelativeResize="0"/>
           <p:nvPr/>
         </p:nvPicPr>
@@ -14318,7 +14650,7 @@
           <a:blip r:embed="rId4">
             <a:alphaModFix/>
           </a:blip>
-          <a:srcRect b="0" l="0" r="0" t="0"/>
+          <a:srcRect/>
           <a:stretch/>
         </p:blipFill>
         <p:spPr>
@@ -14337,7 +14669,7 @@
       </p:pic>
       <p:pic>
         <p:nvPicPr>
-          <p:cNvPr descr="image.png" id="172" name="Google Shape;172;p19"/>
+          <p:cNvPr id="172" name="Google Shape;172;p19" descr="image.png"/>
           <p:cNvPicPr preferRelativeResize="0"/>
           <p:nvPr/>
         </p:nvPicPr>
@@ -14345,7 +14677,7 @@
           <a:blip r:embed="rId5">
             <a:alphaModFix/>
           </a:blip>
-          <a:srcRect b="0" l="0" r="0" t="0"/>
+          <a:srcRect/>
           <a:stretch/>
         </p:blipFill>
         <p:spPr>
@@ -14364,7 +14696,7 @@
       </p:pic>
       <p:pic>
         <p:nvPicPr>
-          <p:cNvPr descr="image.png" id="173" name="Google Shape;173;p19"/>
+          <p:cNvPr id="173" name="Google Shape;173;p19" descr="image.png"/>
           <p:cNvPicPr preferRelativeResize="0"/>
           <p:nvPr/>
         </p:nvPicPr>
@@ -14372,7 +14704,7 @@
           <a:blip r:embed="rId6">
             <a:alphaModFix/>
           </a:blip>
-          <a:srcRect b="0" l="0" r="0" t="0"/>
+          <a:srcRect/>
           <a:stretch/>
         </p:blipFill>
         <p:spPr>
@@ -14391,7 +14723,7 @@
       </p:pic>
       <p:pic>
         <p:nvPicPr>
-          <p:cNvPr descr="image.png" id="174" name="Google Shape;174;p19"/>
+          <p:cNvPr id="174" name="Google Shape;174;p19" descr="image.png"/>
           <p:cNvPicPr preferRelativeResize="0"/>
           <p:nvPr/>
         </p:nvPicPr>
@@ -14399,7 +14731,7 @@
           <a:blip r:embed="rId7">
             <a:alphaModFix/>
           </a:blip>
-          <a:srcRect b="0" l="0" r="0" t="0"/>
+          <a:srcRect/>
           <a:stretch/>
         </p:blipFill>
         <p:spPr>
@@ -14436,12 +14768,12 @@
           </a:ln>
         </p:spPr>
         <p:txBody>
-          <a:bodyPr anchorCtr="0" anchor="t" bIns="0" lIns="0" spcFirstLastPara="1" rIns="0" wrap="square" tIns="0">
+          <a:bodyPr spcFirstLastPara="1" wrap="square" lIns="0" tIns="0" rIns="0" bIns="0" anchor="t" anchorCtr="0">
             <a:spAutoFit/>
           </a:bodyPr>
           <a:lstStyle/>
           <a:p>
-            <a:pPr indent="0" lvl="0" marL="0" marR="0" rtl="0" algn="l">
+            <a:pPr marL="0" marR="0" lvl="0" indent="0" algn="l" rtl="0">
               <a:lnSpc>
                 <a:spcPct val="150000"/>
               </a:lnSpc>
@@ -14454,7 +14786,7 @@
               <a:buNone/>
             </a:pPr>
             <a:r>
-              <a:rPr b="0" i="0" lang="en-US" sz="1500" u="none" cap="none" strike="noStrike">
+              <a:rPr lang="en-US" sz="1500" b="0" i="0" u="none" strike="noStrike" cap="none">
                 <a:solidFill>
                   <a:srgbClr val="94A3B8"/>
                 </a:solidFill>
@@ -14471,7 +14803,7 @@
       </p:sp>
       <p:pic>
         <p:nvPicPr>
-          <p:cNvPr descr="image.png" id="176" name="Google Shape;176;p19"/>
+          <p:cNvPr id="176" name="Google Shape;176;p19" descr="image.png"/>
           <p:cNvPicPr preferRelativeResize="0"/>
           <p:nvPr/>
         </p:nvPicPr>
@@ -14479,7 +14811,7 @@
           <a:blip r:embed="rId8">
             <a:alphaModFix/>
           </a:blip>
-          <a:srcRect b="0" l="0" r="0" t="0"/>
+          <a:srcRect/>
           <a:stretch/>
         </p:blipFill>
         <p:spPr>
@@ -14516,12 +14848,12 @@
           </a:ln>
         </p:spPr>
         <p:txBody>
-          <a:bodyPr anchorCtr="0" anchor="t" bIns="0" lIns="0" spcFirstLastPara="1" rIns="0" wrap="square" tIns="0">
+          <a:bodyPr spcFirstLastPara="1" wrap="square" lIns="0" tIns="0" rIns="0" bIns="0" anchor="t" anchorCtr="0">
             <a:spAutoFit/>
           </a:bodyPr>
           <a:lstStyle/>
           <a:p>
-            <a:pPr indent="0" lvl="0" marL="0" marR="0" rtl="0" algn="ctr">
+            <a:pPr marL="0" marR="0" lvl="0" indent="0" algn="ctr" rtl="0">
               <a:spcBef>
                 <a:spcPts val="0"/>
               </a:spcBef>
@@ -14531,7 +14863,7 @@
               <a:buNone/>
             </a:pPr>
             <a:r>
-              <a:rPr b="1" i="0" lang="en-US" sz="1200" u="none" cap="none" strike="noStrike">
+              <a:rPr lang="en-US" sz="1200" b="1" i="0" u="none" strike="noStrike" cap="none">
                 <a:solidFill>
                   <a:srgbClr val="F8FAFC"/>
                 </a:solidFill>
@@ -14566,12 +14898,12 @@
           </a:ln>
         </p:spPr>
         <p:txBody>
-          <a:bodyPr anchorCtr="0" anchor="t" bIns="0" lIns="0" spcFirstLastPara="1" rIns="0" wrap="square" tIns="0">
+          <a:bodyPr spcFirstLastPara="1" wrap="square" lIns="0" tIns="0" rIns="0" bIns="0" anchor="t" anchorCtr="0">
             <a:spAutoFit/>
           </a:bodyPr>
           <a:lstStyle/>
           <a:p>
-            <a:pPr indent="0" lvl="0" marL="0" marR="0" rtl="0" algn="ctr">
+            <a:pPr marL="0" marR="0" lvl="0" indent="0" algn="ctr" rtl="0">
               <a:lnSpc>
                 <a:spcPct val="150000"/>
               </a:lnSpc>
@@ -14584,7 +14916,7 @@
               <a:buNone/>
             </a:pPr>
             <a:r>
-              <a:rPr b="0" i="0" lang="en-US" sz="1500" u="none" cap="none" strike="noStrike">
+              <a:rPr lang="en-US" sz="1500" b="0" i="0" u="none" strike="noStrike" cap="none">
                 <a:solidFill>
                   <a:srgbClr val="94A3B8"/>
                 </a:solidFill>
@@ -14619,12 +14951,12 @@
           </a:ln>
         </p:spPr>
         <p:txBody>
-          <a:bodyPr anchorCtr="0" anchor="t" bIns="0" lIns="0" spcFirstLastPara="1" rIns="0" wrap="square" tIns="0">
+          <a:bodyPr spcFirstLastPara="1" wrap="square" lIns="0" tIns="0" rIns="0" bIns="0" anchor="t" anchorCtr="0">
             <a:spAutoFit/>
           </a:bodyPr>
           <a:lstStyle/>
           <a:p>
-            <a:pPr indent="0" lvl="0" marL="0" marR="0" rtl="0" algn="ctr">
+            <a:pPr marL="0" marR="0" lvl="0" indent="0" algn="ctr" rtl="0">
               <a:spcBef>
                 <a:spcPts val="0"/>
               </a:spcBef>
@@ -14634,7 +14966,7 @@
               <a:buNone/>
             </a:pPr>
             <a:r>
-              <a:rPr b="1" i="0" lang="en-US" sz="1200" u="none" cap="none" strike="noStrike">
+              <a:rPr lang="en-US" sz="1200" b="1" i="0" u="none" strike="noStrike" cap="none">
                 <a:solidFill>
                   <a:srgbClr val="F8FAFC"/>
                 </a:solidFill>
@@ -14669,12 +15001,12 @@
           </a:ln>
         </p:spPr>
         <p:txBody>
-          <a:bodyPr anchorCtr="0" anchor="t" bIns="0" lIns="0" spcFirstLastPara="1" rIns="0" wrap="square" tIns="0">
+          <a:bodyPr spcFirstLastPara="1" wrap="square" lIns="0" tIns="0" rIns="0" bIns="0" anchor="t" anchorCtr="0">
             <a:spAutoFit/>
           </a:bodyPr>
           <a:lstStyle/>
           <a:p>
-            <a:pPr indent="0" lvl="0" marL="0" marR="0" rtl="0" algn="ctr">
+            <a:pPr marL="0" marR="0" lvl="0" indent="0" algn="ctr" rtl="0">
               <a:lnSpc>
                 <a:spcPct val="150000"/>
               </a:lnSpc>
@@ -14687,7 +15019,7 @@
               <a:buNone/>
             </a:pPr>
             <a:r>
-              <a:rPr b="0" i="0" lang="en-US" sz="1500" u="none" cap="none" strike="noStrike">
+              <a:rPr lang="en-US" sz="1500" b="0" i="0" u="none" strike="noStrike" cap="none">
                 <a:solidFill>
                   <a:srgbClr val="94A3B8"/>
                 </a:solidFill>
@@ -14722,12 +15054,12 @@
           </a:ln>
         </p:spPr>
         <p:txBody>
-          <a:bodyPr anchorCtr="0" anchor="t" bIns="0" lIns="0" spcFirstLastPara="1" rIns="0" wrap="square" tIns="0">
+          <a:bodyPr spcFirstLastPara="1" wrap="square" lIns="0" tIns="0" rIns="0" bIns="0" anchor="t" anchorCtr="0">
             <a:spAutoFit/>
           </a:bodyPr>
           <a:lstStyle/>
           <a:p>
-            <a:pPr indent="0" lvl="0" marL="0" marR="0" rtl="0" algn="ctr">
+            <a:pPr marL="0" marR="0" lvl="0" indent="0" algn="ctr" rtl="0">
               <a:spcBef>
                 <a:spcPts val="0"/>
               </a:spcBef>
@@ -14737,7 +15069,7 @@
               <a:buNone/>
             </a:pPr>
             <a:r>
-              <a:rPr b="1" i="0" lang="en-US" sz="1200" u="none" cap="none" strike="noStrike">
+              <a:rPr lang="en-US" sz="1200" b="1" i="0" u="none" strike="noStrike" cap="none">
                 <a:solidFill>
                   <a:srgbClr val="F8FAFC"/>
                 </a:solidFill>
@@ -14772,12 +15104,12 @@
           </a:ln>
         </p:spPr>
         <p:txBody>
-          <a:bodyPr anchorCtr="0" anchor="t" bIns="0" lIns="0" spcFirstLastPara="1" rIns="0" wrap="square" tIns="0">
+          <a:bodyPr spcFirstLastPara="1" wrap="square" lIns="0" tIns="0" rIns="0" bIns="0" anchor="t" anchorCtr="0">
             <a:spAutoFit/>
           </a:bodyPr>
           <a:lstStyle/>
           <a:p>
-            <a:pPr indent="0" lvl="0" marL="0" marR="0" rtl="0" algn="ctr">
+            <a:pPr marL="0" marR="0" lvl="0" indent="0" algn="ctr" rtl="0">
               <a:lnSpc>
                 <a:spcPct val="150000"/>
               </a:lnSpc>
@@ -14790,7 +15122,7 @@
               <a:buNone/>
             </a:pPr>
             <a:r>
-              <a:rPr b="0" i="0" lang="en-US" sz="1500" u="none" cap="none" strike="noStrike">
+              <a:rPr lang="en-US" sz="1500" b="0" i="0" u="none" strike="noStrike" cap="none">
                 <a:solidFill>
                   <a:srgbClr val="94A3B8"/>
                 </a:solidFill>
@@ -14825,12 +15157,12 @@
           </a:ln>
         </p:spPr>
         <p:txBody>
-          <a:bodyPr anchorCtr="0" anchor="t" bIns="0" lIns="0" spcFirstLastPara="1" rIns="0" wrap="square" tIns="0">
+          <a:bodyPr spcFirstLastPara="1" wrap="square" lIns="0" tIns="0" rIns="0" bIns="0" anchor="t" anchorCtr="0">
             <a:spAutoFit/>
           </a:bodyPr>
           <a:lstStyle/>
           <a:p>
-            <a:pPr indent="0" lvl="0" marL="0" marR="0" rtl="0" algn="l">
+            <a:pPr marL="0" marR="0" lvl="0" indent="0" algn="l" rtl="0">
               <a:spcBef>
                 <a:spcPts val="0"/>
               </a:spcBef>
@@ -14840,7 +15172,7 @@
               <a:buNone/>
             </a:pPr>
             <a:r>
-              <a:rPr b="1" i="0" lang="en-US" sz="3150" u="none" cap="none" strike="noStrike">
+              <a:rPr lang="en-US" sz="3150" b="1" i="0" u="none" strike="noStrike" cap="none">
                 <a:solidFill>
                   <a:srgbClr val="F8FAFC"/>
                 </a:solidFill>
@@ -14877,12 +15209,12 @@
           </a:ln>
         </p:spPr>
         <p:txBody>
-          <a:bodyPr anchorCtr="0" anchor="ctr" bIns="45700" lIns="91425" spcFirstLastPara="1" rIns="91425" wrap="square" tIns="45700">
+          <a:bodyPr spcFirstLastPara="1" wrap="square" lIns="91425" tIns="45700" rIns="91425" bIns="45700" anchor="ctr" anchorCtr="0">
             <a:noAutofit/>
           </a:bodyPr>
           <a:lstStyle/>
           <a:p>
-            <a:pPr indent="0" lvl="0" marL="0" marR="0" rtl="0" algn="ctr">
+            <a:pPr marL="0" marR="0" lvl="0" indent="0" algn="ctr" rtl="0">
               <a:spcBef>
                 <a:spcPts val="0"/>
               </a:spcBef>
@@ -14891,10 +15223,7 @@
               </a:spcAft>
               <a:buNone/>
             </a:pPr>
-            <a:r>
-              <a:t/>
-            </a:r>
-            <a:endParaRPr b="0" i="0" sz="1800" u="none" cap="none" strike="noStrike">
+            <a:endParaRPr sz="1800" b="0" i="0" u="none" strike="noStrike" cap="none">
               <a:solidFill>
                 <a:schemeClr val="dk1"/>
               </a:solidFill>
@@ -14939,22 +15268,30 @@
   <p:clrMapOvr>
     <a:masterClrMapping/>
   </p:clrMapOvr>
+  <p:timing>
+    <p:tnLst>
+      <p:par>
+        <p:cTn id="1" dur="indefinite" restart="never" nodeType="tmRoot"/>
+      </p:par>
+    </p:tnLst>
+  </p:timing>
 </p:sld>
 </file>
 
 <file path=ppt/slides/slide8.xml><?xml version="1.0" encoding="utf-8"?>
-<p:sld xmlns:a="http://schemas.openxmlformats.org/drawingml/2006/main" xmlns:r="http://schemas.openxmlformats.org/officeDocument/2006/relationships" xmlns:mc="http://schemas.openxmlformats.org/markup-compatibility/2006" xmlns:mv="urn:schemas-microsoft-com:mac:vml" xmlns:p="http://schemas.openxmlformats.org/presentationml/2006/main" xmlns:c="http://schemas.openxmlformats.org/drawingml/2006/chart" xmlns:dgm="http://schemas.openxmlformats.org/drawingml/2006/diagram" xmlns:o="urn:schemas-microsoft-com:office:office" xmlns:v="urn:schemas-microsoft-com:vml" xmlns:pvml="urn:schemas-microsoft-com:office:powerpoint" xmlns:com="http://schemas.openxmlformats.org/drawingml/2006/compatibility" xmlns:p14="http://schemas.microsoft.com/office/powerpoint/2010/main" xmlns:p15="http://schemas.microsoft.com/office/powerpoint/2012/main" xmlns:ahyp="http://schemas.microsoft.com/office/drawing/2018/hyperlinkcolor">
+<p:sld xmlns:a="http://schemas.openxmlformats.org/drawingml/2006/main" xmlns:r="http://schemas.openxmlformats.org/officeDocument/2006/relationships" xmlns:p="http://schemas.openxmlformats.org/presentationml/2006/main">
   <p:cSld>
     <p:bg>
       <p:bgPr>
         <a:solidFill>
           <a:srgbClr val="1E293B"/>
         </a:solidFill>
+        <a:effectLst/>
       </p:bgPr>
     </p:bg>
     <p:spTree>
       <p:nvGrpSpPr>
-        <p:cNvPr id="189" name="Shape 189"/>
+        <p:cNvPr id="1" name="Shape 189"/>
         <p:cNvGrpSpPr/>
         <p:nvPr/>
       </p:nvGrpSpPr>
@@ -14968,7 +15305,7 @@
       </p:grpSpPr>
       <p:pic>
         <p:nvPicPr>
-          <p:cNvPr descr="image.png" id="190" name="Google Shape;190;p20"/>
+          <p:cNvPr id="190" name="Google Shape;190;p20" descr="image.png"/>
           <p:cNvPicPr preferRelativeResize="0"/>
           <p:nvPr/>
         </p:nvPicPr>
@@ -14976,7 +15313,7 @@
           <a:blip r:embed="rId3">
             <a:alphaModFix/>
           </a:blip>
-          <a:srcRect b="0" l="0" r="0" t="0"/>
+          <a:srcRect/>
           <a:stretch/>
         </p:blipFill>
         <p:spPr>
@@ -15013,12 +15350,12 @@
           </a:ln>
         </p:spPr>
         <p:txBody>
-          <a:bodyPr anchorCtr="0" anchor="t" bIns="0" lIns="0" spcFirstLastPara="1" rIns="0" wrap="square" tIns="0">
+          <a:bodyPr spcFirstLastPara="1" wrap="square" lIns="0" tIns="0" rIns="0" bIns="0" anchor="t" anchorCtr="0">
             <a:spAutoFit/>
           </a:bodyPr>
           <a:lstStyle/>
           <a:p>
-            <a:pPr indent="0" lvl="0" marL="0" marR="0" rtl="0" algn="l">
+            <a:pPr marL="0" marR="0" lvl="0" indent="0" algn="l" rtl="0">
               <a:lnSpc>
                 <a:spcPct val="137500"/>
               </a:lnSpc>
@@ -15031,7 +15368,7 @@
               <a:buNone/>
             </a:pPr>
             <a:r>
-              <a:rPr b="1" i="0" lang="en-US" sz="1650" u="none" cap="none" strike="noStrike">
+              <a:rPr lang="en-US" sz="1650" b="1" i="0" u="none" strike="noStrike" cap="none">
                 <a:solidFill>
                   <a:srgbClr val="F8FAFC"/>
                 </a:solidFill>
@@ -15042,8 +15379,20 @@
               </a:rPr>
               <a:t>Desafio 1: Par ou Ímpar</a:t>
             </a:r>
+            <a:r>
+              <a:rPr lang="en-US" sz="1800" b="0" i="0" u="none" strike="noStrike" cap="none">
+                <a:solidFill>
+                  <a:schemeClr val="dk1"/>
+                </a:solidFill>
+                <a:latin typeface="Calibri"/>
+                <a:ea typeface="Calibri"/>
+                <a:cs typeface="Calibri"/>
+                <a:sym typeface="Calibri"/>
+              </a:rPr>
+              <a:t/>
+            </a:r>
             <a:br>
-              <a:rPr b="0" i="0" lang="en-US" sz="1800" u="none" cap="none" strike="noStrike">
+              <a:rPr lang="en-US" sz="1800" b="0" i="0" u="none" strike="noStrike" cap="none">
                 <a:solidFill>
                   <a:schemeClr val="dk1"/>
                 </a:solidFill>
@@ -15054,7 +15403,7 @@
               </a:rPr>
             </a:br>
             <a:r>
-              <a:rPr b="0" i="0" lang="en-US" sz="1650" u="none" cap="none" strike="noStrike">
+              <a:rPr lang="en-US" sz="1650" b="0" i="0" u="none" strike="noStrike" cap="none">
                 <a:solidFill>
                   <a:srgbClr val="94A3B8"/>
                 </a:solidFill>
@@ -15089,12 +15438,12 @@
           </a:ln>
         </p:spPr>
         <p:txBody>
-          <a:bodyPr anchorCtr="0" anchor="t" bIns="0" lIns="0" spcFirstLastPara="1" rIns="0" wrap="square" tIns="0">
+          <a:bodyPr spcFirstLastPara="1" wrap="square" lIns="0" tIns="0" rIns="0" bIns="0" anchor="t" anchorCtr="0">
             <a:spAutoFit/>
           </a:bodyPr>
           <a:lstStyle/>
           <a:p>
-            <a:pPr indent="0" lvl="0" marL="0" marR="0" rtl="0" algn="l">
+            <a:pPr marL="0" marR="0" lvl="0" indent="0" algn="l" rtl="0">
               <a:lnSpc>
                 <a:spcPct val="137500"/>
               </a:lnSpc>
@@ -15107,7 +15456,7 @@
               <a:buNone/>
             </a:pPr>
             <a:r>
-              <a:rPr b="1" i="0" lang="en-US" sz="1650" u="none" cap="none" strike="noStrike">
+              <a:rPr lang="en-US" sz="1650" b="1" i="0" u="none" strike="noStrike" cap="none">
                 <a:solidFill>
                   <a:srgbClr val="F8FAFC"/>
                 </a:solidFill>
@@ -15118,8 +15467,20 @@
               </a:rPr>
               <a:t>Desafio 2: Tabuada do 7</a:t>
             </a:r>
+            <a:r>
+              <a:rPr lang="en-US" sz="1800" b="0" i="0" u="none" strike="noStrike" cap="none">
+                <a:solidFill>
+                  <a:schemeClr val="dk1"/>
+                </a:solidFill>
+                <a:latin typeface="Calibri"/>
+                <a:ea typeface="Calibri"/>
+                <a:cs typeface="Calibri"/>
+                <a:sym typeface="Calibri"/>
+              </a:rPr>
+              <a:t/>
+            </a:r>
             <a:br>
-              <a:rPr b="0" i="0" lang="en-US" sz="1800" u="none" cap="none" strike="noStrike">
+              <a:rPr lang="en-US" sz="1800" b="0" i="0" u="none" strike="noStrike" cap="none">
                 <a:solidFill>
                   <a:schemeClr val="dk1"/>
                 </a:solidFill>
@@ -15130,7 +15491,7 @@
               </a:rPr>
             </a:br>
             <a:r>
-              <a:rPr b="0" i="0" lang="en-US" sz="1650" u="none" cap="none" strike="noStrike">
+              <a:rPr lang="en-US" sz="1650" b="0" i="0" u="none" strike="noStrike" cap="none">
                 <a:solidFill>
                   <a:srgbClr val="94A3B8"/>
                 </a:solidFill>
@@ -15165,12 +15526,12 @@
           </a:ln>
         </p:spPr>
         <p:txBody>
-          <a:bodyPr anchorCtr="0" anchor="t" bIns="0" lIns="0" spcFirstLastPara="1" rIns="0" wrap="square" tIns="0">
+          <a:bodyPr spcFirstLastPara="1" wrap="square" lIns="0" tIns="0" rIns="0" bIns="0" anchor="t" anchorCtr="0">
             <a:spAutoFit/>
           </a:bodyPr>
           <a:lstStyle/>
           <a:p>
-            <a:pPr indent="0" lvl="0" marL="0" marR="0" rtl="0" algn="l">
+            <a:pPr marL="0" marR="0" lvl="0" indent="0" algn="l" rtl="0">
               <a:lnSpc>
                 <a:spcPct val="137500"/>
               </a:lnSpc>
@@ -15183,7 +15544,7 @@
               <a:buNone/>
             </a:pPr>
             <a:r>
-              <a:rPr b="1" i="0" lang="en-US" sz="1650" u="none" cap="none" strike="noStrike">
+              <a:rPr lang="en-US" sz="1650" b="1" i="0" u="none" strike="noStrike" cap="none">
                 <a:solidFill>
                   <a:srgbClr val="F8FAFC"/>
                 </a:solidFill>
@@ -15194,8 +15555,20 @@
               </a:rPr>
               <a:t>Desafio 3: Ano Novo</a:t>
             </a:r>
+            <a:r>
+              <a:rPr lang="en-US" sz="1800" b="0" i="0" u="none" strike="noStrike" cap="none">
+                <a:solidFill>
+                  <a:schemeClr val="dk1"/>
+                </a:solidFill>
+                <a:latin typeface="Calibri"/>
+                <a:ea typeface="Calibri"/>
+                <a:cs typeface="Calibri"/>
+                <a:sym typeface="Calibri"/>
+              </a:rPr>
+              <a:t/>
+            </a:r>
             <a:br>
-              <a:rPr b="0" i="0" lang="en-US" sz="1800" u="none" cap="none" strike="noStrike">
+              <a:rPr lang="en-US" sz="1800" b="0" i="0" u="none" strike="noStrike" cap="none">
                 <a:solidFill>
                   <a:schemeClr val="dk1"/>
                 </a:solidFill>
@@ -15206,7 +15579,7 @@
               </a:rPr>
             </a:br>
             <a:r>
-              <a:rPr b="0" i="0" lang="en-US" sz="1650" u="none" cap="none" strike="noStrike">
+              <a:rPr lang="en-US" sz="1650" b="0" i="0" u="none" strike="noStrike" cap="none">
                 <a:solidFill>
                   <a:srgbClr val="94A3B8"/>
                 </a:solidFill>
@@ -15223,7 +15596,7 @@
       </p:sp>
       <p:pic>
         <p:nvPicPr>
-          <p:cNvPr descr="image.png" id="194" name="Google Shape;194;p20"/>
+          <p:cNvPr id="194" name="Google Shape;194;p20" descr="image.png"/>
           <p:cNvPicPr preferRelativeResize="0"/>
           <p:nvPr/>
         </p:nvPicPr>
@@ -15231,7 +15604,7 @@
           <a:blip r:embed="rId4">
             <a:alphaModFix/>
           </a:blip>
-          <a:srcRect b="0" l="0" r="0" t="0"/>
+          <a:srcRect/>
           <a:stretch/>
         </p:blipFill>
         <p:spPr>
@@ -15250,7 +15623,7 @@
       </p:pic>
       <p:pic>
         <p:nvPicPr>
-          <p:cNvPr descr="image.png" id="195" name="Google Shape;195;p20"/>
+          <p:cNvPr id="195" name="Google Shape;195;p20" descr="image.png"/>
           <p:cNvPicPr preferRelativeResize="0"/>
           <p:nvPr/>
         </p:nvPicPr>
@@ -15258,7 +15631,7 @@
           <a:blip r:embed="rId5">
             <a:alphaModFix/>
           </a:blip>
-          <a:srcRect b="0" l="0" r="0" t="0"/>
+          <a:srcRect/>
           <a:stretch/>
         </p:blipFill>
         <p:spPr>
@@ -15277,7 +15650,7 @@
       </p:pic>
       <p:pic>
         <p:nvPicPr>
-          <p:cNvPr descr="image.png" id="196" name="Google Shape;196;p20"/>
+          <p:cNvPr id="196" name="Google Shape;196;p20" descr="image.png"/>
           <p:cNvPicPr preferRelativeResize="0"/>
           <p:nvPr/>
         </p:nvPicPr>
@@ -15285,7 +15658,7 @@
           <a:blip r:embed="rId6">
             <a:alphaModFix/>
           </a:blip>
-          <a:srcRect b="0" l="0" r="0" t="0"/>
+          <a:srcRect/>
           <a:stretch/>
         </p:blipFill>
         <p:spPr>
@@ -15304,7 +15677,7 @@
       </p:pic>
       <p:pic>
         <p:nvPicPr>
-          <p:cNvPr descr="image.png" id="197" name="Google Shape;197;p20"/>
+          <p:cNvPr id="197" name="Google Shape;197;p20" descr="image.png"/>
           <p:cNvPicPr preferRelativeResize="0"/>
           <p:nvPr/>
         </p:nvPicPr>
@@ -15312,7 +15685,7 @@
           <a:blip r:embed="rId7">
             <a:alphaModFix/>
           </a:blip>
-          <a:srcRect b="0" l="0" r="0" t="0"/>
+          <a:srcRect/>
           <a:stretch/>
         </p:blipFill>
         <p:spPr>
@@ -15349,12 +15722,12 @@
           </a:ln>
         </p:spPr>
         <p:txBody>
-          <a:bodyPr anchorCtr="0" anchor="t" bIns="0" lIns="0" spcFirstLastPara="1" rIns="0" wrap="square" tIns="0">
+          <a:bodyPr spcFirstLastPara="1" wrap="square" lIns="0" tIns="0" rIns="0" bIns="0" anchor="t" anchorCtr="0">
             <a:spAutoFit/>
           </a:bodyPr>
           <a:lstStyle/>
           <a:p>
-            <a:pPr indent="0" lvl="0" marL="0" marR="0" rtl="0" algn="l">
+            <a:pPr marL="0" marR="0" lvl="0" indent="0" algn="l" rtl="0">
               <a:spcBef>
                 <a:spcPts val="0"/>
               </a:spcBef>
@@ -15364,7 +15737,7 @@
               <a:buNone/>
             </a:pPr>
             <a:r>
-              <a:rPr b="1" i="0" lang="en-US" sz="3150" u="none" cap="none" strike="noStrike">
+              <a:rPr lang="en-US" sz="3150" b="1" i="0" u="none" strike="noStrike" cap="none">
                 <a:solidFill>
                   <a:srgbClr val="F8FAFC"/>
                 </a:solidFill>
@@ -15401,12 +15774,12 @@
           </a:ln>
         </p:spPr>
         <p:txBody>
-          <a:bodyPr anchorCtr="0" anchor="ctr" bIns="45700" lIns="91425" spcFirstLastPara="1" rIns="91425" wrap="square" tIns="45700">
+          <a:bodyPr spcFirstLastPara="1" wrap="square" lIns="91425" tIns="45700" rIns="91425" bIns="45700" anchor="ctr" anchorCtr="0">
             <a:noAutofit/>
           </a:bodyPr>
           <a:lstStyle/>
           <a:p>
-            <a:pPr indent="0" lvl="0" marL="0" marR="0" rtl="0" algn="ctr">
+            <a:pPr marL="0" marR="0" lvl="0" indent="0" algn="ctr" rtl="0">
               <a:spcBef>
                 <a:spcPts val="0"/>
               </a:spcBef>
@@ -15415,10 +15788,7 @@
               </a:spcAft>
               <a:buNone/>
             </a:pPr>
-            <a:r>
-              <a:t/>
-            </a:r>
-            <a:endParaRPr b="0" i="0" sz="1800" u="none" cap="none" strike="noStrike">
+            <a:endParaRPr sz="1800" b="0" i="0" u="none" strike="noStrike" cap="none">
               <a:solidFill>
                 <a:schemeClr val="dk1"/>
               </a:solidFill>
@@ -15430,16 +15800,336 @@
           </a:p>
         </p:txBody>
       </p:sp>
+      <p:sp>
+        <p:nvSpPr>
+          <p:cNvPr id="2" name="CaixaDeTexto 1"/>
+          <p:cNvSpPr txBox="1"/>
+          <p:nvPr/>
+        </p:nvSpPr>
+        <p:spPr>
+          <a:xfrm>
+            <a:off x="1417450" y="5723036"/>
+            <a:ext cx="3233578" cy="307777"/>
+          </a:xfrm>
+          <a:prstGeom prst="rect">
+            <a:avLst/>
+          </a:prstGeom>
+          <a:noFill/>
+        </p:spPr>
+        <p:txBody>
+          <a:bodyPr wrap="none" rtlCol="0">
+            <a:spAutoFit/>
+          </a:bodyPr>
+          <a:lstStyle/>
+          <a:p>
+            <a:r>
+              <a:rPr lang="pt-BR">
+                <a:hlinkClick r:id="rId8"/>
+              </a:rPr>
+              <a:t>https://forms.gle/ETRkRkpt9EKoiSnJA</a:t>
+            </a:r>
+            <a:endParaRPr lang="pt-BR"/>
+          </a:p>
+        </p:txBody>
+      </p:sp>
     </p:spTree>
   </p:cSld>
   <p:clrMapOvr>
     <a:masterClrMapping/>
   </p:clrMapOvr>
+  <p:timing>
+    <p:tnLst>
+      <p:par>
+        <p:cTn id="1" dur="indefinite" restart="never" nodeType="tmRoot"/>
+      </p:par>
+    </p:tnLst>
+  </p:timing>
 </p:sld>
 </file>
 
 <file path=ppt/theme/theme1.xml><?xml version="1.0" encoding="utf-8"?>
-<a:theme xmlns:a="http://schemas.openxmlformats.org/drawingml/2006/main" xmlns:r="http://schemas.openxmlformats.org/officeDocument/2006/relationships">
+<a:theme xmlns:a="http://schemas.openxmlformats.org/drawingml/2006/main" name="Office Theme">
+  <a:themeElements>
+    <a:clrScheme name="Office">
+      <a:dk1>
+        <a:srgbClr val="000000"/>
+      </a:dk1>
+      <a:lt1>
+        <a:srgbClr val="FFFFFF"/>
+      </a:lt1>
+      <a:dk2>
+        <a:srgbClr val="1F497D"/>
+      </a:dk2>
+      <a:lt2>
+        <a:srgbClr val="EEECE1"/>
+      </a:lt2>
+      <a:accent1>
+        <a:srgbClr val="4F81BD"/>
+      </a:accent1>
+      <a:accent2>
+        <a:srgbClr val="C0504D"/>
+      </a:accent2>
+      <a:accent3>
+        <a:srgbClr val="9BBB59"/>
+      </a:accent3>
+      <a:accent4>
+        <a:srgbClr val="8064A2"/>
+      </a:accent4>
+      <a:accent5>
+        <a:srgbClr val="4BACC6"/>
+      </a:accent5>
+      <a:accent6>
+        <a:srgbClr val="F79646"/>
+      </a:accent6>
+      <a:hlink>
+        <a:srgbClr val="0000FF"/>
+      </a:hlink>
+      <a:folHlink>
+        <a:srgbClr val="800080"/>
+      </a:folHlink>
+    </a:clrScheme>
+    <a:fontScheme name="Office">
+      <a:majorFont>
+        <a:latin typeface="Arial"/>
+        <a:ea typeface=""/>
+        <a:cs typeface=""/>
+        <a:font script="Jpan" typeface="ＭＳ Ｐゴシック"/>
+        <a:font script="Hang" typeface="맑은 고딕"/>
+        <a:font script="Hans" typeface="宋体"/>
+        <a:font script="Hant" typeface="新細明體"/>
+        <a:font script="Arab" typeface="Times New Roman"/>
+        <a:font script="Hebr" typeface="Times New Roman"/>
+        <a:font script="Thai" typeface="Angsana New"/>
+        <a:font script="Ethi" typeface="Nyala"/>
+        <a:font script="Beng" typeface="Vrinda"/>
+        <a:font script="Gujr" typeface="Shruti"/>
+        <a:font script="Khmr" typeface="MoolBoran"/>
+        <a:font script="Knda" typeface="Tunga"/>
+        <a:font script="Guru" typeface="Raavi"/>
+        <a:font script="Cans" typeface="Euphemia"/>
+        <a:font script="Cher" typeface="Plantagenet Cherokee"/>
+        <a:font script="Yiii" typeface="Microsoft Yi Baiti"/>
+        <a:font script="Tibt" typeface="Microsoft Himalaya"/>
+        <a:font script="Thaa" typeface="MV Boli"/>
+        <a:font script="Deva" typeface="Mangal"/>
+        <a:font script="Telu" typeface="Gautami"/>
+        <a:font script="Taml" typeface="Latha"/>
+        <a:font script="Syrc" typeface="Estrangelo Edessa"/>
+        <a:font script="Orya" typeface="Kalinga"/>
+        <a:font script="Mlym" typeface="Kartika"/>
+        <a:font script="Laoo" typeface="DokChampa"/>
+        <a:font script="Sinh" typeface="Iskoola Pota"/>
+        <a:font script="Mong" typeface="Mongolian Baiti"/>
+        <a:font script="Viet" typeface="Times New Roman"/>
+        <a:font script="Uigh" typeface="Microsoft Uighur"/>
+        <a:font script="Geor" typeface="Sylfaen"/>
+      </a:majorFont>
+      <a:minorFont>
+        <a:latin typeface="Arial"/>
+        <a:ea typeface=""/>
+        <a:cs typeface=""/>
+        <a:font script="Jpan" typeface="ＭＳ Ｐゴシック"/>
+        <a:font script="Hang" typeface="맑은 고딕"/>
+        <a:font script="Hans" typeface="宋体"/>
+        <a:font script="Hant" typeface="新細明體"/>
+        <a:font script="Arab" typeface="Arial"/>
+        <a:font script="Hebr" typeface="Arial"/>
+        <a:font script="Thai" typeface="Cordia New"/>
+        <a:font script="Ethi" typeface="Nyala"/>
+        <a:font script="Beng" typeface="Vrinda"/>
+        <a:font script="Gujr" typeface="Shruti"/>
+        <a:font script="Khmr" typeface="DaunPenh"/>
+        <a:font script="Knda" typeface="Tunga"/>
+        <a:font script="Guru" typeface="Raavi"/>
+        <a:font script="Cans" typeface="Euphemia"/>
+        <a:font script="Cher" typeface="Plantagenet Cherokee"/>
+        <a:font script="Yiii" typeface="Microsoft Yi Baiti"/>
+        <a:font script="Tibt" typeface="Microsoft Himalaya"/>
+        <a:font script="Thaa" typeface="MV Boli"/>
+        <a:font script="Deva" typeface="Mangal"/>
+        <a:font script="Telu" typeface="Gautami"/>
+        <a:font script="Taml" typeface="Latha"/>
+        <a:font script="Syrc" typeface="Estrangelo Edessa"/>
+        <a:font script="Orya" typeface="Kalinga"/>
+        <a:font script="Mlym" typeface="Kartika"/>
+        <a:font script="Laoo" typeface="DokChampa"/>
+        <a:font script="Sinh" typeface="Iskoola Pota"/>
+        <a:font script="Mong" typeface="Mongolian Baiti"/>
+        <a:font script="Viet" typeface="Arial"/>
+        <a:font script="Uigh" typeface="Microsoft Uighur"/>
+        <a:font script="Geor" typeface="Sylfaen"/>
+      </a:minorFont>
+    </a:fontScheme>
+    <a:fmtScheme name="Office">
+      <a:fillStyleLst>
+        <a:solidFill>
+          <a:schemeClr val="phClr"/>
+        </a:solidFill>
+        <a:gradFill rotWithShape="1">
+          <a:gsLst>
+            <a:gs pos="0">
+              <a:schemeClr val="phClr">
+                <a:tint val="50000"/>
+                <a:satMod val="300000"/>
+              </a:schemeClr>
+            </a:gs>
+            <a:gs pos="35000">
+              <a:schemeClr val="phClr">
+                <a:tint val="37000"/>
+                <a:satMod val="300000"/>
+              </a:schemeClr>
+            </a:gs>
+            <a:gs pos="100000">
+              <a:schemeClr val="phClr">
+                <a:tint val="15000"/>
+                <a:satMod val="350000"/>
+              </a:schemeClr>
+            </a:gs>
+          </a:gsLst>
+          <a:lin ang="16200000" scaled="1"/>
+        </a:gradFill>
+        <a:gradFill rotWithShape="1">
+          <a:gsLst>
+            <a:gs pos="0">
+              <a:schemeClr val="phClr">
+                <a:tint val="100000"/>
+                <a:shade val="100000"/>
+                <a:satMod val="130000"/>
+              </a:schemeClr>
+            </a:gs>
+            <a:gs pos="100000">
+              <a:schemeClr val="phClr">
+                <a:tint val="50000"/>
+                <a:shade val="100000"/>
+                <a:satMod val="350000"/>
+              </a:schemeClr>
+            </a:gs>
+          </a:gsLst>
+          <a:lin ang="16200000" scaled="0"/>
+        </a:gradFill>
+      </a:fillStyleLst>
+      <a:lnStyleLst>
+        <a:ln w="9525" cap="flat" cmpd="sng" algn="ctr">
+          <a:solidFill>
+            <a:schemeClr val="phClr">
+              <a:shade val="95000"/>
+              <a:satMod val="105000"/>
+            </a:schemeClr>
+          </a:solidFill>
+          <a:prstDash val="solid"/>
+        </a:ln>
+        <a:ln w="25400" cap="flat" cmpd="sng" algn="ctr">
+          <a:solidFill>
+            <a:schemeClr val="phClr"/>
+          </a:solidFill>
+          <a:prstDash val="solid"/>
+        </a:ln>
+        <a:ln w="38100" cap="flat" cmpd="sng" algn="ctr">
+          <a:solidFill>
+            <a:schemeClr val="phClr"/>
+          </a:solidFill>
+          <a:prstDash val="solid"/>
+        </a:ln>
+      </a:lnStyleLst>
+      <a:effectStyleLst>
+        <a:effectStyle>
+          <a:effectLst>
+            <a:outerShdw blurRad="40000" dist="20000" dir="5400000" rotWithShape="0">
+              <a:srgbClr val="000000">
+                <a:alpha val="38000"/>
+              </a:srgbClr>
+            </a:outerShdw>
+          </a:effectLst>
+        </a:effectStyle>
+        <a:effectStyle>
+          <a:effectLst>
+            <a:outerShdw blurRad="40000" dist="23000" dir="5400000" rotWithShape="0">
+              <a:srgbClr val="000000">
+                <a:alpha val="35000"/>
+              </a:srgbClr>
+            </a:outerShdw>
+          </a:effectLst>
+        </a:effectStyle>
+        <a:effectStyle>
+          <a:effectLst>
+            <a:outerShdw blurRad="40000" dist="23000" dir="5400000" rotWithShape="0">
+              <a:srgbClr val="000000">
+                <a:alpha val="35000"/>
+              </a:srgbClr>
+            </a:outerShdw>
+          </a:effectLst>
+          <a:scene3d>
+            <a:camera prst="orthographicFront">
+              <a:rot lat="0" lon="0" rev="0"/>
+            </a:camera>
+            <a:lightRig rig="threePt" dir="t">
+              <a:rot lat="0" lon="0" rev="1200000"/>
+            </a:lightRig>
+          </a:scene3d>
+          <a:sp3d>
+            <a:bevelT w="63500" h="25400"/>
+          </a:sp3d>
+        </a:effectStyle>
+      </a:effectStyleLst>
+      <a:bgFillStyleLst>
+        <a:solidFill>
+          <a:schemeClr val="phClr"/>
+        </a:solidFill>
+        <a:gradFill rotWithShape="1">
+          <a:gsLst>
+            <a:gs pos="0">
+              <a:schemeClr val="phClr">
+                <a:tint val="40000"/>
+                <a:satMod val="350000"/>
+              </a:schemeClr>
+            </a:gs>
+            <a:gs pos="40000">
+              <a:schemeClr val="phClr">
+                <a:tint val="45000"/>
+                <a:shade val="99000"/>
+                <a:satMod val="350000"/>
+              </a:schemeClr>
+            </a:gs>
+            <a:gs pos="100000">
+              <a:schemeClr val="phClr">
+                <a:shade val="20000"/>
+                <a:satMod val="255000"/>
+              </a:schemeClr>
+            </a:gs>
+          </a:gsLst>
+          <a:path path="circle">
+            <a:fillToRect l="50000" t="-80000" r="50000" b="180000"/>
+          </a:path>
+        </a:gradFill>
+        <a:gradFill rotWithShape="1">
+          <a:gsLst>
+            <a:gs pos="0">
+              <a:schemeClr val="phClr">
+                <a:tint val="80000"/>
+                <a:satMod val="300000"/>
+              </a:schemeClr>
+            </a:gs>
+            <a:gs pos="100000">
+              <a:schemeClr val="phClr">
+                <a:shade val="30000"/>
+                <a:satMod val="200000"/>
+              </a:schemeClr>
+            </a:gs>
+          </a:gsLst>
+          <a:path path="circle">
+            <a:fillToRect l="50000" t="50000" r="50000" b="50000"/>
+          </a:path>
+        </a:gradFill>
+      </a:bgFillStyleLst>
+    </a:fmtScheme>
+  </a:themeElements>
+  <a:objectDefaults/>
+  <a:extraClrSchemeLst/>
+</a:theme>
+</file>
+
+<file path=ppt/theme/theme2.xml><?xml version="1.0" encoding="utf-8"?>
+<a:theme xmlns:a="http://schemas.openxmlformats.org/drawingml/2006/main">
   <a:themeElements>
     <a:clrScheme name="Default">
       <a:dk1>
@@ -15714,284 +16404,7 @@
       </a:bgFillStyleLst>
     </a:fmtScheme>
   </a:themeElements>
-</a:theme>
-</file>
-
-<file path=ppt/theme/theme2.xml><?xml version="1.0" encoding="utf-8"?>
-<a:theme xmlns:a="http://schemas.openxmlformats.org/drawingml/2006/main" xmlns:r="http://schemas.openxmlformats.org/officeDocument/2006/relationships" name="Office Theme">
-  <a:themeElements>
-    <a:clrScheme name="Office">
-      <a:dk1>
-        <a:srgbClr val="000000"/>
-      </a:dk1>
-      <a:lt1>
-        <a:srgbClr val="FFFFFF"/>
-      </a:lt1>
-      <a:dk2>
-        <a:srgbClr val="1F497D"/>
-      </a:dk2>
-      <a:lt2>
-        <a:srgbClr val="EEECE1"/>
-      </a:lt2>
-      <a:accent1>
-        <a:srgbClr val="4F81BD"/>
-      </a:accent1>
-      <a:accent2>
-        <a:srgbClr val="C0504D"/>
-      </a:accent2>
-      <a:accent3>
-        <a:srgbClr val="9BBB59"/>
-      </a:accent3>
-      <a:accent4>
-        <a:srgbClr val="8064A2"/>
-      </a:accent4>
-      <a:accent5>
-        <a:srgbClr val="4BACC6"/>
-      </a:accent5>
-      <a:accent6>
-        <a:srgbClr val="F79646"/>
-      </a:accent6>
-      <a:hlink>
-        <a:srgbClr val="0000FF"/>
-      </a:hlink>
-      <a:folHlink>
-        <a:srgbClr val="800080"/>
-      </a:folHlink>
-    </a:clrScheme>
-    <a:fontScheme name="Office">
-      <a:majorFont>
-        <a:latin typeface="Arial"/>
-        <a:ea typeface=""/>
-        <a:cs typeface=""/>
-        <a:font script="Jpan" typeface="ＭＳ Ｐゴシック"/>
-        <a:font script="Hang" typeface="맑은 고딕"/>
-        <a:font script="Hans" typeface="宋体"/>
-        <a:font script="Hant" typeface="新細明體"/>
-        <a:font script="Arab" typeface="Times New Roman"/>
-        <a:font script="Hebr" typeface="Times New Roman"/>
-        <a:font script="Thai" typeface="Angsana New"/>
-        <a:font script="Ethi" typeface="Nyala"/>
-        <a:font script="Beng" typeface="Vrinda"/>
-        <a:font script="Gujr" typeface="Shruti"/>
-        <a:font script="Khmr" typeface="MoolBoran"/>
-        <a:font script="Knda" typeface="Tunga"/>
-        <a:font script="Guru" typeface="Raavi"/>
-        <a:font script="Cans" typeface="Euphemia"/>
-        <a:font script="Cher" typeface="Plantagenet Cherokee"/>
-        <a:font script="Yiii" typeface="Microsoft Yi Baiti"/>
-        <a:font script="Tibt" typeface="Microsoft Himalaya"/>
-        <a:font script="Thaa" typeface="MV Boli"/>
-        <a:font script="Deva" typeface="Mangal"/>
-        <a:font script="Telu" typeface="Gautami"/>
-        <a:font script="Taml" typeface="Latha"/>
-        <a:font script="Syrc" typeface="Estrangelo Edessa"/>
-        <a:font script="Orya" typeface="Kalinga"/>
-        <a:font script="Mlym" typeface="Kartika"/>
-        <a:font script="Laoo" typeface="DokChampa"/>
-        <a:font script="Sinh" typeface="Iskoola Pota"/>
-        <a:font script="Mong" typeface="Mongolian Baiti"/>
-        <a:font script="Viet" typeface="Times New Roman"/>
-        <a:font script="Uigh" typeface="Microsoft Uighur"/>
-        <a:font script="Geor" typeface="Sylfaen"/>
-      </a:majorFont>
-      <a:minorFont>
-        <a:latin typeface="Arial"/>
-        <a:ea typeface=""/>
-        <a:cs typeface=""/>
-        <a:font script="Jpan" typeface="ＭＳ Ｐゴシック"/>
-        <a:font script="Hang" typeface="맑은 고딕"/>
-        <a:font script="Hans" typeface="宋体"/>
-        <a:font script="Hant" typeface="新細明體"/>
-        <a:font script="Arab" typeface="Arial"/>
-        <a:font script="Hebr" typeface="Arial"/>
-        <a:font script="Thai" typeface="Cordia New"/>
-        <a:font script="Ethi" typeface="Nyala"/>
-        <a:font script="Beng" typeface="Vrinda"/>
-        <a:font script="Gujr" typeface="Shruti"/>
-        <a:font script="Khmr" typeface="DaunPenh"/>
-        <a:font script="Knda" typeface="Tunga"/>
-        <a:font script="Guru" typeface="Raavi"/>
-        <a:font script="Cans" typeface="Euphemia"/>
-        <a:font script="Cher" typeface="Plantagenet Cherokee"/>
-        <a:font script="Yiii" typeface="Microsoft Yi Baiti"/>
-        <a:font script="Tibt" typeface="Microsoft Himalaya"/>
-        <a:font script="Thaa" typeface="MV Boli"/>
-        <a:font script="Deva" typeface="Mangal"/>
-        <a:font script="Telu" typeface="Gautami"/>
-        <a:font script="Taml" typeface="Latha"/>
-        <a:font script="Syrc" typeface="Estrangelo Edessa"/>
-        <a:font script="Orya" typeface="Kalinga"/>
-        <a:font script="Mlym" typeface="Kartika"/>
-        <a:font script="Laoo" typeface="DokChampa"/>
-        <a:font script="Sinh" typeface="Iskoola Pota"/>
-        <a:font script="Mong" typeface="Mongolian Baiti"/>
-        <a:font script="Viet" typeface="Arial"/>
-        <a:font script="Uigh" typeface="Microsoft Uighur"/>
-        <a:font script="Geor" typeface="Sylfaen"/>
-      </a:minorFont>
-    </a:fontScheme>
-    <a:fmtScheme name="Office">
-      <a:fillStyleLst>
-        <a:solidFill>
-          <a:schemeClr val="phClr"/>
-        </a:solidFill>
-        <a:gradFill rotWithShape="1">
-          <a:gsLst>
-            <a:gs pos="0">
-              <a:schemeClr val="phClr">
-                <a:tint val="50000"/>
-                <a:satMod val="300000"/>
-              </a:schemeClr>
-            </a:gs>
-            <a:gs pos="35000">
-              <a:schemeClr val="phClr">
-                <a:tint val="37000"/>
-                <a:satMod val="300000"/>
-              </a:schemeClr>
-            </a:gs>
-            <a:gs pos="100000">
-              <a:schemeClr val="phClr">
-                <a:tint val="15000"/>
-                <a:satMod val="350000"/>
-              </a:schemeClr>
-            </a:gs>
-          </a:gsLst>
-          <a:lin ang="16200000" scaled="1"/>
-        </a:gradFill>
-        <a:gradFill rotWithShape="1">
-          <a:gsLst>
-            <a:gs pos="0">
-              <a:schemeClr val="phClr">
-                <a:tint val="100000"/>
-                <a:shade val="100000"/>
-                <a:satMod val="130000"/>
-              </a:schemeClr>
-            </a:gs>
-            <a:gs pos="100000">
-              <a:schemeClr val="phClr">
-                <a:tint val="50000"/>
-                <a:shade val="100000"/>
-                <a:satMod val="350000"/>
-              </a:schemeClr>
-            </a:gs>
-          </a:gsLst>
-          <a:lin ang="16200000" scaled="0"/>
-        </a:gradFill>
-      </a:fillStyleLst>
-      <a:lnStyleLst>
-        <a:ln w="9525" cap="flat" cmpd="sng" algn="ctr">
-          <a:solidFill>
-            <a:schemeClr val="phClr">
-              <a:shade val="95000"/>
-              <a:satMod val="105000"/>
-            </a:schemeClr>
-          </a:solidFill>
-          <a:prstDash val="solid"/>
-        </a:ln>
-        <a:ln w="25400" cap="flat" cmpd="sng" algn="ctr">
-          <a:solidFill>
-            <a:schemeClr val="phClr"/>
-          </a:solidFill>
-          <a:prstDash val="solid"/>
-        </a:ln>
-        <a:ln w="38100" cap="flat" cmpd="sng" algn="ctr">
-          <a:solidFill>
-            <a:schemeClr val="phClr"/>
-          </a:solidFill>
-          <a:prstDash val="solid"/>
-        </a:ln>
-      </a:lnStyleLst>
-      <a:effectStyleLst>
-        <a:effectStyle>
-          <a:effectLst>
-            <a:outerShdw blurRad="40000" dist="20000" dir="5400000" rotWithShape="0">
-              <a:srgbClr val="000000">
-                <a:alpha val="38000"/>
-              </a:srgbClr>
-            </a:outerShdw>
-          </a:effectLst>
-        </a:effectStyle>
-        <a:effectStyle>
-          <a:effectLst>
-            <a:outerShdw blurRad="40000" dist="23000" dir="5400000" rotWithShape="0">
-              <a:srgbClr val="000000">
-                <a:alpha val="35000"/>
-              </a:srgbClr>
-            </a:outerShdw>
-          </a:effectLst>
-        </a:effectStyle>
-        <a:effectStyle>
-          <a:effectLst>
-            <a:outerShdw blurRad="40000" dist="23000" dir="5400000" rotWithShape="0">
-              <a:srgbClr val="000000">
-                <a:alpha val="35000"/>
-              </a:srgbClr>
-            </a:outerShdw>
-          </a:effectLst>
-          <a:scene3d>
-            <a:camera prst="orthographicFront">
-              <a:rot lat="0" lon="0" rev="0"/>
-            </a:camera>
-            <a:lightRig rig="threePt" dir="t">
-              <a:rot lat="0" lon="0" rev="1200000"/>
-            </a:lightRig>
-          </a:scene3d>
-          <a:sp3d>
-            <a:bevelT w="63500" h="25400"/>
-          </a:sp3d>
-        </a:effectStyle>
-      </a:effectStyleLst>
-      <a:bgFillStyleLst>
-        <a:solidFill>
-          <a:schemeClr val="phClr"/>
-        </a:solidFill>
-        <a:gradFill rotWithShape="1">
-          <a:gsLst>
-            <a:gs pos="0">
-              <a:schemeClr val="phClr">
-                <a:tint val="40000"/>
-                <a:satMod val="350000"/>
-              </a:schemeClr>
-            </a:gs>
-            <a:gs pos="40000">
-              <a:schemeClr val="phClr">
-                <a:tint val="45000"/>
-                <a:shade val="99000"/>
-                <a:satMod val="350000"/>
-              </a:schemeClr>
-            </a:gs>
-            <a:gs pos="100000">
-              <a:schemeClr val="phClr">
-                <a:shade val="20000"/>
-                <a:satMod val="255000"/>
-              </a:schemeClr>
-            </a:gs>
-          </a:gsLst>
-          <a:path path="circle">
-            <a:fillToRect l="50000" t="-80000" r="50000" b="180000"/>
-          </a:path>
-        </a:gradFill>
-        <a:gradFill rotWithShape="1">
-          <a:gsLst>
-            <a:gs pos="0">
-              <a:schemeClr val="phClr">
-                <a:tint val="80000"/>
-                <a:satMod val="300000"/>
-              </a:schemeClr>
-            </a:gs>
-            <a:gs pos="100000">
-              <a:schemeClr val="phClr">
-                <a:shade val="30000"/>
-                <a:satMod val="200000"/>
-              </a:schemeClr>
-            </a:gs>
-          </a:gsLst>
-          <a:path path="circle">
-            <a:fillToRect l="50000" t="50000" r="50000" b="50000"/>
-          </a:path>
-        </a:gradFill>
-      </a:bgFillStyleLst>
-    </a:fmtScheme>
-  </a:themeElements>
+  <a:objectDefaults/>
+  <a:extraClrSchemeLst/>
 </a:theme>
 </file>